--- a/public/assets/induction/Mentorship & Knowledge Transfer - Preserving The Standard of The Inner Bar.pptx
+++ b/public/assets/induction/Mentorship & Knowledge Transfer - Preserving The Standard of The Inner Bar.pptx
@@ -5,7 +5,7 @@
     <p:sldMasterId id="2147483648" r:id="rId1"/>
   </p:sldMasterIdLst>
   <p:notesMasterIdLst>
-    <p:notesMasterId r:id="rId22"/>
+    <p:notesMasterId r:id="rId23"/>
   </p:notesMasterIdLst>
   <p:sldIdLst>
     <p:sldId id="256" r:id="rId2"/>
@@ -28,6 +28,7 @@
     <p:sldId id="312" r:id="rId19"/>
     <p:sldId id="321" r:id="rId20"/>
     <p:sldId id="313" r:id="rId21"/>
+    <p:sldId id="334" r:id="rId22"/>
   </p:sldIdLst>
   <p:sldSz cx="12188825" cy="6858000"/>
   <p:notesSz cx="6858000" cy="9144000"/>
@@ -228,7 +229,7 @@
             <a:fld id="{7AB488F7-1FAC-40D2-BB7E-BA3CE28D8950}" type="datetimeFigureOut">
               <a:rPr lang="en-US" smtClean="0"/>
               <a:pPr/>
-              <a:t>9/21/2025</a:t>
+              <a:t>9/22/2025</a:t>
             </a:fld>
             <a:endParaRPr lang="en-US"/>
           </a:p>
@@ -540,10 +541,7 @@
           <a:bodyPr/>
           <a:lstStyle/>
           <a:p>
-            <a:r>
-              <a:rPr lang="en-US" dirty="0"/>
-              <a:t>Photo Source: https://pixabay.com/en/coins-pennies-money-currency-cash-912719/</a:t>
-            </a:r>
+            <a:endParaRPr lang="en-US" dirty="0"/>
           </a:p>
         </p:txBody>
       </p:sp>
@@ -1149,7 +1147,7 @@
         <p:cNvPr id="1" name="">
           <a:extLst>
             <a:ext uri="{FF2B5EF4-FFF2-40B4-BE49-F238E27FC236}">
-              <a16:creationId xmlns:a16="http://schemas.microsoft.com/office/drawing/2014/main" id="{5882498B-3730-02A6-0B2D-90F1D8206859}"/>
+              <a16:creationId xmlns:a16="http://schemas.microsoft.com/office/drawing/2014/main" xmlns="" id="{5882498B-3730-02A6-0B2D-90F1D8206859}"/>
             </a:ext>
           </a:extLst>
         </p:cNvPr>
@@ -1169,7 +1167,7 @@
           <p:cNvPr id="2" name="Slide Image Placeholder 1">
             <a:extLst>
               <a:ext uri="{FF2B5EF4-FFF2-40B4-BE49-F238E27FC236}">
-                <a16:creationId xmlns:a16="http://schemas.microsoft.com/office/drawing/2014/main" id="{BD91A01C-5B1F-7A6F-8F2E-BCA3E50A2E5C}"/>
+                <a16:creationId xmlns:a16="http://schemas.microsoft.com/office/drawing/2014/main" xmlns="" id="{BD91A01C-5B1F-7A6F-8F2E-BCA3E50A2E5C}"/>
               </a:ext>
             </a:extLst>
           </p:cNvPr>
@@ -1187,7 +1185,7 @@
           <p:cNvPr id="3" name="Notes Placeholder 2">
             <a:extLst>
               <a:ext uri="{FF2B5EF4-FFF2-40B4-BE49-F238E27FC236}">
-                <a16:creationId xmlns:a16="http://schemas.microsoft.com/office/drawing/2014/main" id="{0BC671D2-A377-B8BF-608F-6447F976BE34}"/>
+                <a16:creationId xmlns:a16="http://schemas.microsoft.com/office/drawing/2014/main" xmlns="" id="{0BC671D2-A377-B8BF-608F-6447F976BE34}"/>
               </a:ext>
             </a:extLst>
           </p:cNvPr>
@@ -1212,7 +1210,7 @@
           <p:cNvPr id="4" name="Slide Number Placeholder 3">
             <a:extLst>
               <a:ext uri="{FF2B5EF4-FFF2-40B4-BE49-F238E27FC236}">
-                <a16:creationId xmlns:a16="http://schemas.microsoft.com/office/drawing/2014/main" id="{514EFF8D-274C-C908-4DCC-573305A65BC2}"/>
+                <a16:creationId xmlns:a16="http://schemas.microsoft.com/office/drawing/2014/main" xmlns="" id="{514EFF8D-274C-C908-4DCC-573305A65BC2}"/>
               </a:ext>
             </a:extLst>
           </p:cNvPr>
@@ -1351,6 +1349,99 @@
 </p:notes>
 </file>
 
+<file path=ppt/notesSlides/notesSlide18.xml><?xml version="1.0" encoding="utf-8"?>
+<p:notes xmlns:a="http://schemas.openxmlformats.org/drawingml/2006/main" xmlns:r="http://schemas.openxmlformats.org/officeDocument/2006/relationships" xmlns:p="http://schemas.openxmlformats.org/presentationml/2006/main">
+  <p:cSld>
+    <p:spTree>
+      <p:nvGrpSpPr>
+        <p:cNvPr id="1" name=""/>
+        <p:cNvGrpSpPr/>
+        <p:nvPr/>
+      </p:nvGrpSpPr>
+      <p:grpSpPr>
+        <a:xfrm>
+          <a:off x="0" y="0"/>
+          <a:ext cx="0" cy="0"/>
+          <a:chOff x="0" y="0"/>
+          <a:chExt cx="0" cy="0"/>
+        </a:xfrm>
+      </p:grpSpPr>
+      <p:sp>
+        <p:nvSpPr>
+          <p:cNvPr id="2" name="Slide Image Placeholder 1"/>
+          <p:cNvSpPr>
+            <a:spLocks noGrp="1" noRot="1" noChangeAspect="1"/>
+          </p:cNvSpPr>
+          <p:nvPr>
+            <p:ph type="sldImg"/>
+          </p:nvPr>
+        </p:nvSpPr>
+        <p:spPr/>
+      </p:sp>
+      <p:sp>
+        <p:nvSpPr>
+          <p:cNvPr id="3" name="Notes Placeholder 2"/>
+          <p:cNvSpPr>
+            <a:spLocks noGrp="1"/>
+          </p:cNvSpPr>
+          <p:nvPr>
+            <p:ph type="body" idx="1"/>
+          </p:nvPr>
+        </p:nvSpPr>
+        <p:spPr/>
+        <p:txBody>
+          <a:bodyPr/>
+          <a:lstStyle/>
+          <a:p>
+            <a:endParaRPr lang="en-US" dirty="0"/>
+          </a:p>
+        </p:txBody>
+      </p:sp>
+      <p:sp>
+        <p:nvSpPr>
+          <p:cNvPr id="4" name="Slide Number Placeholder 3"/>
+          <p:cNvSpPr>
+            <a:spLocks noGrp="1"/>
+          </p:cNvSpPr>
+          <p:nvPr>
+            <p:ph type="sldNum" sz="quarter" idx="5"/>
+          </p:nvPr>
+        </p:nvSpPr>
+        <p:spPr/>
+        <p:txBody>
+          <a:bodyPr/>
+          <a:lstStyle/>
+          <a:p>
+            <a:fld id="{CA2D21D1-52E2-420B-B491-CFF6D7BB79FB}" type="slidenum">
+              <a:rPr lang="en-US" smtClean="0">
+                <a:solidFill>
+                  <a:prstClr val="black"/>
+                </a:solidFill>
+              </a:rPr>
+              <a:pPr/>
+              <a:t>21</a:t>
+            </a:fld>
+            <a:endParaRPr lang="en-US">
+              <a:solidFill>
+                <a:prstClr val="black"/>
+              </a:solidFill>
+            </a:endParaRPr>
+          </a:p>
+        </p:txBody>
+      </p:sp>
+    </p:spTree>
+    <p:extLst>
+      <p:ext uri="{BB962C8B-B14F-4D97-AF65-F5344CB8AC3E}">
+        <p14:creationId xmlns:p14="http://schemas.microsoft.com/office/powerpoint/2010/main" val="3739080152"/>
+      </p:ext>
+    </p:extLst>
+  </p:cSld>
+  <p:clrMapOvr>
+    <a:masterClrMapping/>
+  </p:clrMapOvr>
+</p:notes>
+</file>
+
 <file path=ppt/notesSlides/notesSlide2.xml><?xml version="1.0" encoding="utf-8"?>
 <p:notes xmlns:a="http://schemas.openxmlformats.org/drawingml/2006/main" xmlns:r="http://schemas.openxmlformats.org/officeDocument/2006/relationships" xmlns:p="http://schemas.openxmlformats.org/presentationml/2006/main">
   <p:cSld>
@@ -1537,7 +1628,7 @@
         <p:cNvPr id="1" name="">
           <a:extLst>
             <a:ext uri="{FF2B5EF4-FFF2-40B4-BE49-F238E27FC236}">
-              <a16:creationId xmlns:a16="http://schemas.microsoft.com/office/drawing/2014/main" id="{5882498B-3730-02A6-0B2D-90F1D8206859}"/>
+              <a16:creationId xmlns:a16="http://schemas.microsoft.com/office/drawing/2014/main" xmlns="" id="{5882498B-3730-02A6-0B2D-90F1D8206859}"/>
             </a:ext>
           </a:extLst>
         </p:cNvPr>
@@ -1557,7 +1648,7 @@
           <p:cNvPr id="2" name="Slide Image Placeholder 1">
             <a:extLst>
               <a:ext uri="{FF2B5EF4-FFF2-40B4-BE49-F238E27FC236}">
-                <a16:creationId xmlns:a16="http://schemas.microsoft.com/office/drawing/2014/main" id="{BD91A01C-5B1F-7A6F-8F2E-BCA3E50A2E5C}"/>
+                <a16:creationId xmlns:a16="http://schemas.microsoft.com/office/drawing/2014/main" xmlns="" id="{BD91A01C-5B1F-7A6F-8F2E-BCA3E50A2E5C}"/>
               </a:ext>
             </a:extLst>
           </p:cNvPr>
@@ -1575,7 +1666,7 @@
           <p:cNvPr id="3" name="Notes Placeholder 2">
             <a:extLst>
               <a:ext uri="{FF2B5EF4-FFF2-40B4-BE49-F238E27FC236}">
-                <a16:creationId xmlns:a16="http://schemas.microsoft.com/office/drawing/2014/main" id="{0BC671D2-A377-B8BF-608F-6447F976BE34}"/>
+                <a16:creationId xmlns:a16="http://schemas.microsoft.com/office/drawing/2014/main" xmlns="" id="{0BC671D2-A377-B8BF-608F-6447F976BE34}"/>
               </a:ext>
             </a:extLst>
           </p:cNvPr>
@@ -1600,7 +1691,7 @@
           <p:cNvPr id="4" name="Slide Number Placeholder 3">
             <a:extLst>
               <a:ext uri="{FF2B5EF4-FFF2-40B4-BE49-F238E27FC236}">
-                <a16:creationId xmlns:a16="http://schemas.microsoft.com/office/drawing/2014/main" id="{514EFF8D-274C-C908-4DCC-573305A65BC2}"/>
+                <a16:creationId xmlns:a16="http://schemas.microsoft.com/office/drawing/2014/main" xmlns="" id="{514EFF8D-274C-C908-4DCC-573305A65BC2}"/>
               </a:ext>
             </a:extLst>
           </p:cNvPr>
@@ -1832,7 +1923,7 @@
         <p:cNvPr id="1" name="">
           <a:extLst>
             <a:ext uri="{FF2B5EF4-FFF2-40B4-BE49-F238E27FC236}">
-              <a16:creationId xmlns:a16="http://schemas.microsoft.com/office/drawing/2014/main" id="{5882498B-3730-02A6-0B2D-90F1D8206859}"/>
+              <a16:creationId xmlns:a16="http://schemas.microsoft.com/office/drawing/2014/main" xmlns="" id="{5882498B-3730-02A6-0B2D-90F1D8206859}"/>
             </a:ext>
           </a:extLst>
         </p:cNvPr>
@@ -1852,7 +1943,7 @@
           <p:cNvPr id="2" name="Slide Image Placeholder 1">
             <a:extLst>
               <a:ext uri="{FF2B5EF4-FFF2-40B4-BE49-F238E27FC236}">
-                <a16:creationId xmlns:a16="http://schemas.microsoft.com/office/drawing/2014/main" id="{BD91A01C-5B1F-7A6F-8F2E-BCA3E50A2E5C}"/>
+                <a16:creationId xmlns:a16="http://schemas.microsoft.com/office/drawing/2014/main" xmlns="" id="{BD91A01C-5B1F-7A6F-8F2E-BCA3E50A2E5C}"/>
               </a:ext>
             </a:extLst>
           </p:cNvPr>
@@ -1870,7 +1961,7 @@
           <p:cNvPr id="3" name="Notes Placeholder 2">
             <a:extLst>
               <a:ext uri="{FF2B5EF4-FFF2-40B4-BE49-F238E27FC236}">
-                <a16:creationId xmlns:a16="http://schemas.microsoft.com/office/drawing/2014/main" id="{0BC671D2-A377-B8BF-608F-6447F976BE34}"/>
+                <a16:creationId xmlns:a16="http://schemas.microsoft.com/office/drawing/2014/main" xmlns="" id="{0BC671D2-A377-B8BF-608F-6447F976BE34}"/>
               </a:ext>
             </a:extLst>
           </p:cNvPr>
@@ -1895,7 +1986,7 @@
           <p:cNvPr id="4" name="Slide Number Placeholder 3">
             <a:extLst>
               <a:ext uri="{FF2B5EF4-FFF2-40B4-BE49-F238E27FC236}">
-                <a16:creationId xmlns:a16="http://schemas.microsoft.com/office/drawing/2014/main" id="{514EFF8D-274C-C908-4DCC-573305A65BC2}"/>
+                <a16:creationId xmlns:a16="http://schemas.microsoft.com/office/drawing/2014/main" xmlns="" id="{514EFF8D-274C-C908-4DCC-573305A65BC2}"/>
               </a:ext>
             </a:extLst>
           </p:cNvPr>
@@ -2283,7 +2374,7 @@
             <a:fld id="{9578D6DB-6798-42D2-B9AD-FC6F1C72FC30}" type="datetimeFigureOut">
               <a:rPr lang="en-US" smtClean="0"/>
               <a:pPr/>
-              <a:t>9/21/2025</a:t>
+              <a:t>9/22/2025</a:t>
             </a:fld>
             <a:endParaRPr lang="en-US"/>
           </a:p>
@@ -2337,7 +2428,7 @@
           <p:cNvPr id="13" name="Title 1">
             <a:extLst>
               <a:ext uri="{FF2B5EF4-FFF2-40B4-BE49-F238E27FC236}">
-                <a16:creationId xmlns:a16="http://schemas.microsoft.com/office/drawing/2014/main" id="{5C532430-68DD-E050-CF5E-A3C1209424A0}"/>
+                <a16:creationId xmlns:a16="http://schemas.microsoft.com/office/drawing/2014/main" xmlns="" id="{5C532430-68DD-E050-CF5E-A3C1209424A0}"/>
               </a:ext>
             </a:extLst>
           </p:cNvPr>
@@ -2465,7 +2556,7 @@
             <a:fld id="{425404F2-BE9A-4460-8815-8F645183555F}" type="datetimeFigureOut">
               <a:rPr lang="en-US" smtClean="0"/>
               <a:pPr/>
-              <a:t>9/21/2025</a:t>
+              <a:t>9/22/2025</a:t>
             </a:fld>
             <a:endParaRPr lang="en-US"/>
           </a:p>
@@ -2519,7 +2610,7 @@
           <p:cNvPr id="14" name="Text Placeholder 13">
             <a:extLst>
               <a:ext uri="{FF2B5EF4-FFF2-40B4-BE49-F238E27FC236}">
-                <a16:creationId xmlns:a16="http://schemas.microsoft.com/office/drawing/2014/main" id="{3E0F98F1-58B1-71B5-CED7-25043889BE72}"/>
+                <a16:creationId xmlns:a16="http://schemas.microsoft.com/office/drawing/2014/main" xmlns="" id="{3E0F98F1-58B1-71B5-CED7-25043889BE72}"/>
               </a:ext>
             </a:extLst>
           </p:cNvPr>
@@ -2612,7 +2703,7 @@
             <a:fld id="{425404F2-BE9A-4460-8815-8F645183555F}" type="datetimeFigureOut">
               <a:rPr lang="en-US" smtClean="0"/>
               <a:pPr/>
-              <a:t>9/21/2025</a:t>
+              <a:t>9/22/2025</a:t>
             </a:fld>
             <a:endParaRPr lang="en-US"/>
           </a:p>
@@ -2696,7 +2787,7 @@
           <p:cNvPr id="8" name="Picture Placeholder 7">
             <a:extLst>
               <a:ext uri="{FF2B5EF4-FFF2-40B4-BE49-F238E27FC236}">
-                <a16:creationId xmlns:a16="http://schemas.microsoft.com/office/drawing/2014/main" id="{F723EA47-8A13-5580-E668-11C9EAA9C4EC}"/>
+                <a16:creationId xmlns:a16="http://schemas.microsoft.com/office/drawing/2014/main" xmlns="" id="{F723EA47-8A13-5580-E668-11C9EAA9C4EC}"/>
               </a:ext>
             </a:extLst>
           </p:cNvPr>
@@ -2793,7 +2884,7 @@
             <a:fld id="{425404F2-BE9A-4460-8815-8F645183555F}" type="datetimeFigureOut">
               <a:rPr lang="en-US" smtClean="0"/>
               <a:pPr/>
-              <a:t>9/21/2025</a:t>
+              <a:t>9/22/2025</a:t>
             </a:fld>
             <a:endParaRPr lang="en-US"/>
           </a:p>
@@ -2890,7 +2981,7 @@
             <a:fld id="{425404F2-BE9A-4460-8815-8F645183555F}" type="datetimeFigureOut">
               <a:rPr lang="en-US" smtClean="0"/>
               <a:pPr/>
-              <a:t>9/21/2025</a:t>
+              <a:t>9/22/2025</a:t>
             </a:fld>
             <a:endParaRPr lang="en-US"/>
           </a:p>
@@ -2944,7 +3035,7 @@
           <p:cNvPr id="9" name="Picture Placeholder 8">
             <a:extLst>
               <a:ext uri="{FF2B5EF4-FFF2-40B4-BE49-F238E27FC236}">
-                <a16:creationId xmlns:a16="http://schemas.microsoft.com/office/drawing/2014/main" id="{AF6F8577-4E31-9E00-CB4D-B9ADB3FA3EF3}"/>
+                <a16:creationId xmlns:a16="http://schemas.microsoft.com/office/drawing/2014/main" xmlns="" id="{AF6F8577-4E31-9E00-CB4D-B9ADB3FA3EF3}"/>
               </a:ext>
             </a:extLst>
           </p:cNvPr>
@@ -3099,7 +3190,7 @@
             <a:fld id="{425404F2-BE9A-4460-8815-8F645183555F}" type="datetimeFigureOut">
               <a:rPr lang="en-US" smtClean="0"/>
               <a:pPr/>
-              <a:t>9/21/2025</a:t>
+              <a:t>9/22/2025</a:t>
             </a:fld>
             <a:endParaRPr lang="en-US"/>
           </a:p>
@@ -3153,7 +3244,7 @@
           <p:cNvPr id="16" name="Picture Placeholder 15">
             <a:extLst>
               <a:ext uri="{FF2B5EF4-FFF2-40B4-BE49-F238E27FC236}">
-                <a16:creationId xmlns:a16="http://schemas.microsoft.com/office/drawing/2014/main" id="{5754AEE8-08A7-1D3D-4CBC-A3538CD579C2}"/>
+                <a16:creationId xmlns:a16="http://schemas.microsoft.com/office/drawing/2014/main" xmlns="" id="{5754AEE8-08A7-1D3D-4CBC-A3538CD579C2}"/>
               </a:ext>
             </a:extLst>
           </p:cNvPr>
@@ -3328,7 +3419,7 @@
             <a:fld id="{425404F2-BE9A-4460-8815-8F645183555F}" type="datetimeFigureOut">
               <a:rPr lang="en-US" smtClean="0"/>
               <a:pPr/>
-              <a:t>9/21/2025</a:t>
+              <a:t>9/22/2025</a:t>
             </a:fld>
             <a:endParaRPr lang="en-US"/>
           </a:p>
@@ -3544,7 +3635,7 @@
             <a:fld id="{425404F2-BE9A-4460-8815-8F645183555F}" type="datetimeFigureOut">
               <a:rPr lang="en-US" smtClean="0"/>
               <a:pPr/>
-              <a:t>9/21/2025</a:t>
+              <a:t>9/22/2025</a:t>
             </a:fld>
             <a:endParaRPr lang="en-US"/>
           </a:p>
@@ -3924,7 +4015,7 @@
         </p:nvSpPr>
         <p:spPr>
           <a:xfrm>
-            <a:off x="-1" y="894"/>
+            <a:off x="0" y="-92013"/>
             <a:ext cx="12188825" cy="4570810"/>
           </a:xfrm>
           <a:prstGeom prst="rect">
@@ -4017,14 +4108,14 @@
       </p:sp>
       <p:sp>
         <p:nvSpPr>
-          <p:cNvPr id="6" name="TextBox 5"/>
+          <p:cNvPr id="8" name="TextBox 7"/>
           <p:cNvSpPr txBox="1"/>
           <p:nvPr/>
         </p:nvSpPr>
         <p:spPr>
           <a:xfrm>
-            <a:off x="550701" y="4690284"/>
-            <a:ext cx="4535599" cy="461665"/>
+            <a:off x="405780" y="5420886"/>
+            <a:ext cx="8194414" cy="1569660"/>
           </a:xfrm>
           <a:prstGeom prst="rect">
             <a:avLst/>
@@ -4038,77 +4129,98 @@
           <a:lstStyle/>
           <a:p>
             <a:r>
-              <a:rPr lang="en-US" dirty="0">
-                <a:latin typeface="Swis721 Ex BT" panose="020B0605020202020204" pitchFamily="34" charset="0"/>
-              </a:rPr>
-              <a:t>A presentation  </a:t>
-            </a:r>
-            <a:r>
-              <a:rPr lang="en-US" dirty="0">
-                <a:latin typeface="Trebuchet MS" panose="020B0603020202020204" pitchFamily="34" charset="0"/>
+              <a:rPr lang="en-US" sz="2800" dirty="0" smtClean="0">
+                <a:latin typeface="Swis721 Hv BT" panose="020B0804020202020204" pitchFamily="34" charset="0"/>
+              </a:rPr>
+              <a:t>                                </a:t>
+            </a:r>
+            <a:r>
+              <a:rPr lang="en-US" dirty="0" smtClean="0">
+                <a:latin typeface="Swis721 Hv BT" panose="020B0804020202020204" pitchFamily="34" charset="0"/>
               </a:rPr>
               <a:t>by</a:t>
             </a:r>
-            <a:endParaRPr lang="en-US" spc="-150" dirty="0">
-              <a:solidFill>
-                <a:schemeClr val="accent6"/>
-              </a:solidFill>
-              <a:latin typeface="Arial" panose="020B0604020202020204" pitchFamily="34" charset="0"/>
+          </a:p>
+          <a:p>
+            <a:r>
+              <a:rPr lang="en-US" sz="2800" dirty="0" smtClean="0">
+                <a:latin typeface="Swis721 Hv BT" panose="020B0804020202020204" pitchFamily="34" charset="0"/>
+              </a:rPr>
+              <a:t>Mrs</a:t>
+            </a:r>
+            <a:r>
+              <a:rPr lang="en-US" sz="2800" dirty="0">
+                <a:latin typeface="Swis721 Hv BT" panose="020B0804020202020204" pitchFamily="34" charset="0"/>
+              </a:rPr>
+              <a:t>. </a:t>
+            </a:r>
+            <a:r>
+              <a:rPr lang="en-US" sz="2800" dirty="0" err="1" smtClean="0">
+                <a:latin typeface="Swis721 Hv BT" panose="020B0804020202020204" pitchFamily="34" charset="0"/>
+              </a:rPr>
+              <a:t>Nella</a:t>
+            </a:r>
+            <a:r>
+              <a:rPr lang="en-US" sz="2800" dirty="0" smtClean="0">
+                <a:latin typeface="Swis721 Hv BT" panose="020B0804020202020204" pitchFamily="34" charset="0"/>
+              </a:rPr>
+              <a:t> </a:t>
+            </a:r>
+            <a:r>
+              <a:rPr lang="en-US" sz="2800" dirty="0" err="1" smtClean="0">
+                <a:latin typeface="Swis721 Hv BT" panose="020B0804020202020204" pitchFamily="34" charset="0"/>
+              </a:rPr>
+              <a:t>Andem-Ewa</a:t>
+            </a:r>
+            <a:r>
+              <a:rPr lang="en-US" sz="2800" dirty="0" smtClean="0">
+                <a:latin typeface="Swis721 Hv BT" panose="020B0804020202020204" pitchFamily="34" charset="0"/>
+              </a:rPr>
+              <a:t> SAN, FCI </a:t>
+            </a:r>
+            <a:r>
+              <a:rPr lang="en-US" sz="2800" dirty="0" err="1" smtClean="0">
+                <a:latin typeface="Swis721 Hv BT" panose="020B0804020202020204" pitchFamily="34" charset="0"/>
+              </a:rPr>
+              <a:t>Arb</a:t>
+            </a:r>
+            <a:r>
+              <a:rPr lang="en-US" sz="2800" dirty="0" smtClean="0">
+                <a:latin typeface="Swis721 Hv BT" panose="020B0804020202020204" pitchFamily="34" charset="0"/>
+              </a:rPr>
+              <a:t>, FNIPR </a:t>
+            </a:r>
+            <a:endParaRPr lang="en-US" sz="2800" dirty="0" smtClean="0">
+              <a:latin typeface="Swis721 Hv BT" panose="020B0804020202020204"/>
+            </a:endParaRPr>
+          </a:p>
+          <a:p>
+            <a:endParaRPr lang="en-US" sz="2000" spc="-150" dirty="0" smtClean="0">
+              <a:latin typeface="Swis721 Hv BT" panose="020B0804020202020204"/>
               <a:cs typeface="Arial" panose="020B0604020202020204" pitchFamily="34" charset="0"/>
             </a:endParaRPr>
           </a:p>
-        </p:txBody>
-      </p:sp>
-      <p:sp>
-        <p:nvSpPr>
-          <p:cNvPr id="8" name="TextBox 7"/>
-          <p:cNvSpPr txBox="1"/>
-          <p:nvPr/>
-        </p:nvSpPr>
-        <p:spPr>
-          <a:xfrm>
-            <a:off x="550700" y="5288958"/>
-            <a:ext cx="8194414" cy="830997"/>
-          </a:xfrm>
-          <a:prstGeom prst="rect">
-            <a:avLst/>
-          </a:prstGeom>
-          <a:noFill/>
-        </p:spPr>
-        <p:txBody>
-          <a:bodyPr wrap="square" rtlCol="0">
-            <a:spAutoFit/>
-          </a:bodyPr>
-          <a:lstStyle/>
-          <a:p>
-            <a:r>
-              <a:rPr lang="en-US" sz="2800" dirty="0">
-                <a:latin typeface="Swis721 Hv BT" panose="020B0804020202020204" pitchFamily="34" charset="0"/>
-              </a:rPr>
-              <a:t>Mrs. Nella </a:t>
-            </a:r>
-            <a:r>
-              <a:rPr lang="en-US" sz="2800" dirty="0" err="1">
-                <a:latin typeface="Swis721 Hv BT" panose="020B0804020202020204" pitchFamily="34" charset="0"/>
-              </a:rPr>
-              <a:t>Andem</a:t>
-            </a:r>
-            <a:r>
-              <a:rPr lang="en-US" sz="2800" dirty="0">
-                <a:latin typeface="Swis721 Hv BT" panose="020B0804020202020204" pitchFamily="34" charset="0"/>
-              </a:rPr>
-              <a:t>-Ewa SAN </a:t>
-            </a:r>
-            <a:br>
-              <a:rPr lang="en-US" sz="2800" dirty="0">
-                <a:latin typeface="Swis721 Hv BT" panose="020B0804020202020204" pitchFamily="34" charset="0"/>
-              </a:rPr>
-            </a:br>
-            <a:r>
-              <a:rPr lang="en-US" sz="2000" dirty="0">
+          <a:p>
+            <a:r>
+              <a:rPr lang="en-US" sz="2000" spc="-150" dirty="0" smtClean="0">
                 <a:latin typeface="Swis721 Hv BT" panose="020B0804020202020204"/>
-              </a:rPr>
-              <a:t>FCI Arb, FNIPR</a:t>
+                <a:cs typeface="Arial" panose="020B0604020202020204" pitchFamily="34" charset="0"/>
+              </a:rPr>
+              <a:t>                                          Tuesday 23</a:t>
+            </a:r>
+            <a:r>
+              <a:rPr lang="en-US" sz="2000" spc="-150" baseline="30000" dirty="0" smtClean="0">
+                <a:latin typeface="Swis721 Hv BT" panose="020B0804020202020204"/>
+                <a:cs typeface="Arial" panose="020B0604020202020204" pitchFamily="34" charset="0"/>
+              </a:rPr>
+              <a:t>rd</a:t>
+            </a:r>
+            <a:r>
+              <a:rPr lang="en-US" sz="2000" spc="-150" dirty="0" smtClean="0">
+                <a:latin typeface="Swis721 Hv BT" panose="020B0804020202020204"/>
+                <a:cs typeface="Arial" panose="020B0604020202020204" pitchFamily="34" charset="0"/>
+              </a:rPr>
+              <a:t> September, 2025</a:t>
             </a:r>
             <a:endParaRPr lang="en-US" sz="2799" spc="-150" dirty="0">
               <a:latin typeface="Arial" panose="020B0604020202020204" pitchFamily="34" charset="0"/>
@@ -4494,7 +4606,7 @@
         </p:blipFill>
         <p:spPr>
           <a:xfrm>
-            <a:off x="7170827" y="2633016"/>
+            <a:off x="7170827" y="2637628"/>
             <a:ext cx="4380854" cy="219616"/>
           </a:xfrm>
           <a:prstGeom prst="rect">
@@ -4567,7 +4679,7 @@
           <p:cNvPr id="2" name="TextBox 1">
             <a:extLst>
               <a:ext uri="{FF2B5EF4-FFF2-40B4-BE49-F238E27FC236}">
-                <a16:creationId xmlns:a16="http://schemas.microsoft.com/office/drawing/2014/main" id="{0AE9902C-D499-950C-7EDA-4CFAD5520259}"/>
+                <a16:creationId xmlns:a16="http://schemas.microsoft.com/office/drawing/2014/main" xmlns="" id="{0AE9902C-D499-950C-7EDA-4CFAD5520259}"/>
               </a:ext>
             </a:extLst>
           </p:cNvPr>
@@ -4576,8 +4688,8 @@
         </p:nvSpPr>
         <p:spPr>
           <a:xfrm>
-            <a:off x="781469" y="3446941"/>
-            <a:ext cx="9494067" cy="523220"/>
+            <a:off x="-1178395" y="1481753"/>
+            <a:ext cx="10539650" cy="523220"/>
           </a:xfrm>
           <a:prstGeom prst="rect">
             <a:avLst/>
@@ -4617,8 +4729,8 @@
         </p:nvSpPr>
         <p:spPr>
           <a:xfrm>
-            <a:off x="-25671" y="1777097"/>
-            <a:ext cx="9494067" cy="1200329"/>
+            <a:off x="-1034380" y="711033"/>
+            <a:ext cx="10528447" cy="646331"/>
           </a:xfrm>
           <a:prstGeom prst="rect">
             <a:avLst/>
@@ -4646,6 +4758,128 @@
                 <a:schemeClr val="bg1"/>
               </a:solidFill>
               <a:latin typeface="Swis721 Hv BT" panose="020B0804020202020204" pitchFamily="34" charset="0"/>
+            </a:endParaRPr>
+          </a:p>
+        </p:txBody>
+      </p:sp>
+      <p:sp>
+        <p:nvSpPr>
+          <p:cNvPr id="3" name="TextBox 2"/>
+          <p:cNvSpPr txBox="1"/>
+          <p:nvPr/>
+        </p:nvSpPr>
+        <p:spPr>
+          <a:xfrm>
+            <a:off x="405780" y="2704216"/>
+            <a:ext cx="7560840" cy="646331"/>
+          </a:xfrm>
+          <a:prstGeom prst="rect">
+            <a:avLst/>
+          </a:prstGeom>
+          <a:noFill/>
+        </p:spPr>
+        <p:txBody>
+          <a:bodyPr wrap="square" rtlCol="0">
+            <a:spAutoFit/>
+          </a:bodyPr>
+          <a:lstStyle/>
+          <a:p>
+            <a:r>
+              <a:rPr lang="en-US" sz="1800" dirty="0" smtClean="0">
+                <a:solidFill>
+                  <a:schemeClr val="bg1"/>
+                </a:solidFill>
+                <a:latin typeface="Swis721 Hv BT" panose="020B0804020202020204"/>
+              </a:rPr>
+              <a:t>A presentations at the 8</a:t>
+            </a:r>
+            <a:r>
+              <a:rPr lang="en-US" sz="1800" baseline="30000" dirty="0" smtClean="0">
+                <a:solidFill>
+                  <a:schemeClr val="bg1"/>
+                </a:solidFill>
+                <a:latin typeface="Swis721 Hv BT" panose="020B0804020202020204"/>
+              </a:rPr>
+              <a:t>th</a:t>
+            </a:r>
+            <a:r>
+              <a:rPr lang="en-US" sz="1800" dirty="0" smtClean="0">
+                <a:solidFill>
+                  <a:schemeClr val="bg1"/>
+                </a:solidFill>
+                <a:latin typeface="Swis721 Hv BT" panose="020B0804020202020204"/>
+              </a:rPr>
+              <a:t> Annual Induction </a:t>
+            </a:r>
+            <a:r>
+              <a:rPr lang="en-US" sz="1800" dirty="0" err="1" smtClean="0">
+                <a:solidFill>
+                  <a:schemeClr val="bg1"/>
+                </a:solidFill>
+                <a:latin typeface="Swis721 Hv BT" panose="020B0804020202020204"/>
+              </a:rPr>
+              <a:t>Programme</a:t>
+            </a:r>
+            <a:r>
+              <a:rPr lang="en-US" sz="1800" dirty="0" smtClean="0">
+                <a:solidFill>
+                  <a:schemeClr val="bg1"/>
+                </a:solidFill>
+                <a:latin typeface="Swis721 Hv BT" panose="020B0804020202020204"/>
+              </a:rPr>
+              <a:t> for the New Senior Advocate   	             of Nigeria (SAN), 2025</a:t>
+            </a:r>
+            <a:endParaRPr lang="en-US" sz="1800" dirty="0">
+              <a:solidFill>
+                <a:schemeClr val="bg1"/>
+              </a:solidFill>
+              <a:latin typeface="Swis721 Hv BT" panose="020B0804020202020204"/>
+            </a:endParaRPr>
+          </a:p>
+        </p:txBody>
+      </p:sp>
+      <p:sp>
+        <p:nvSpPr>
+          <p:cNvPr id="7" name="TextBox 6"/>
+          <p:cNvSpPr txBox="1"/>
+          <p:nvPr/>
+        </p:nvSpPr>
+        <p:spPr>
+          <a:xfrm>
+            <a:off x="405780" y="4058482"/>
+            <a:ext cx="6048672" cy="830997"/>
+          </a:xfrm>
+          <a:prstGeom prst="rect">
+            <a:avLst/>
+          </a:prstGeom>
+          <a:noFill/>
+        </p:spPr>
+        <p:txBody>
+          <a:bodyPr wrap="square" rtlCol="0">
+            <a:spAutoFit/>
+          </a:bodyPr>
+          <a:lstStyle/>
+          <a:p>
+            <a:pPr algn="ctr"/>
+            <a:r>
+              <a:rPr lang="en-US" dirty="0" smtClean="0">
+                <a:solidFill>
+                  <a:schemeClr val="bg1"/>
+                </a:solidFill>
+                <a:latin typeface="Swis721 Hv BT" panose="020B0804020202020204"/>
+              </a:rPr>
+              <a:t>venue:</a:t>
+            </a:r>
+          </a:p>
+          <a:p>
+            <a:r>
+              <a:rPr lang="en-US" dirty="0" smtClean="0">
+                <a:latin typeface="Swis721 Hv BT" panose="020B0804020202020204"/>
+              </a:rPr>
+              <a:t>ASO Hall, Abuja Continental Hotel, FCT, Abuja</a:t>
+            </a:r>
+            <a:endParaRPr lang="en-US" dirty="0">
+              <a:latin typeface="Swis721 Hv BT" panose="020B0804020202020204"/>
             </a:endParaRPr>
           </a:p>
         </p:txBody>
@@ -4685,7 +4919,7 @@
           <p:cNvPr id="10" name="Title 9">
             <a:extLst>
               <a:ext uri="{FF2B5EF4-FFF2-40B4-BE49-F238E27FC236}">
-                <a16:creationId xmlns:a16="http://schemas.microsoft.com/office/drawing/2014/main" id="{4EB7BA3F-919D-7BBF-8C31-DAD5CBC47646}"/>
+                <a16:creationId xmlns:a16="http://schemas.microsoft.com/office/drawing/2014/main" xmlns="" id="{4EB7BA3F-919D-7BBF-8C31-DAD5CBC47646}"/>
               </a:ext>
             </a:extLst>
           </p:cNvPr>
@@ -4715,7 +4949,7 @@
               </a:spcBef>
             </a:pPr>
             <a:r>
-              <a:rPr lang="en-US" dirty="0">
+              <a:rPr lang="en-US" b="1" dirty="0">
                 <a:solidFill>
                   <a:prstClr val="black"/>
                 </a:solidFill>
@@ -4731,7 +4965,7 @@
           <p:cNvPr id="19" name="Content Placeholder 2">
             <a:extLst>
               <a:ext uri="{FF2B5EF4-FFF2-40B4-BE49-F238E27FC236}">
-                <a16:creationId xmlns:a16="http://schemas.microsoft.com/office/drawing/2014/main" id="{98349F09-71B1-87BB-EA53-81192F0663CA}"/>
+                <a16:creationId xmlns:a16="http://schemas.microsoft.com/office/drawing/2014/main" xmlns="" id="{98349F09-71B1-87BB-EA53-81192F0663CA}"/>
               </a:ext>
             </a:extLst>
           </p:cNvPr>
@@ -4978,7 +5212,7 @@
               <a:buFont typeface="Arial" pitchFamily="34" charset="0"/>
               <a:buNone/>
             </a:pPr>
-            <a:endParaRPr lang="en-US" sz="2400" kern="100" dirty="0">
+            <a:endParaRPr lang="en-US" sz="400" kern="100" dirty="0" smtClean="0">
               <a:solidFill>
                 <a:prstClr val="black"/>
               </a:solidFill>
@@ -5001,6 +5235,29 @@
               <a:buFont typeface="Arial" pitchFamily="34" charset="0"/>
               <a:buNone/>
             </a:pPr>
+            <a:endParaRPr lang="en-US" sz="2000" kern="100" dirty="0">
+              <a:solidFill>
+                <a:prstClr val="black"/>
+              </a:solidFill>
+              <a:latin typeface="Aptos" panose="020B0004020202020204" pitchFamily="34" charset="0"/>
+              <a:ea typeface="Calibri" panose="020F0502020204030204" pitchFamily="34" charset="0"/>
+              <a:cs typeface="Times New Roman" panose="02020603050405020304" pitchFamily="18" charset="0"/>
+            </a:endParaRPr>
+          </a:p>
+          <a:p>
+            <a:pPr marL="0" indent="0" algn="just">
+              <a:lnSpc>
+                <a:spcPct val="107000"/>
+              </a:lnSpc>
+              <a:spcBef>
+                <a:spcPts val="0"/>
+              </a:spcBef>
+              <a:spcAft>
+                <a:spcPts val="800"/>
+              </a:spcAft>
+              <a:buFont typeface="Arial" pitchFamily="34" charset="0"/>
+              <a:buNone/>
+            </a:pPr>
             <a:r>
               <a:rPr lang="en-US" sz="2400" kern="100" dirty="0">
                 <a:solidFill>
@@ -5033,6 +5290,216 @@
                 <a:cs typeface="Times New Roman" panose="02020603050405020304" pitchFamily="18" charset="0"/>
               </a:rPr>
               <a:t> Organic relationships.</a:t>
+            </a:r>
+          </a:p>
+          <a:p>
+            <a:pPr marL="0" indent="0" algn="just">
+              <a:lnSpc>
+                <a:spcPct val="107000"/>
+              </a:lnSpc>
+              <a:spcBef>
+                <a:spcPts val="0"/>
+              </a:spcBef>
+              <a:spcAft>
+                <a:spcPts val="800"/>
+              </a:spcAft>
+              <a:buFont typeface="Arial" pitchFamily="34" charset="0"/>
+              <a:buNone/>
+            </a:pPr>
+            <a:endParaRPr lang="en-US" sz="600" kern="100" dirty="0" smtClean="0">
+              <a:solidFill>
+                <a:prstClr val="black"/>
+              </a:solidFill>
+              <a:latin typeface="Aptos" panose="020B0004020202020204" pitchFamily="34" charset="0"/>
+              <a:ea typeface="Calibri" panose="020F0502020204030204" pitchFamily="34" charset="0"/>
+              <a:cs typeface="Times New Roman" panose="02020603050405020304" pitchFamily="18" charset="0"/>
+            </a:endParaRPr>
+          </a:p>
+          <a:p>
+            <a:pPr marL="0" indent="0" algn="just">
+              <a:lnSpc>
+                <a:spcPct val="107000"/>
+              </a:lnSpc>
+              <a:spcBef>
+                <a:spcPts val="0"/>
+              </a:spcBef>
+              <a:spcAft>
+                <a:spcPts val="800"/>
+              </a:spcAft>
+              <a:buFont typeface="Arial" pitchFamily="34" charset="0"/>
+              <a:buNone/>
+            </a:pPr>
+            <a:endParaRPr lang="en-US" sz="2000" kern="100" dirty="0">
+              <a:solidFill>
+                <a:prstClr val="black"/>
+              </a:solidFill>
+              <a:latin typeface="Aptos" panose="020B0004020202020204" pitchFamily="34" charset="0"/>
+              <a:ea typeface="Calibri" panose="020F0502020204030204" pitchFamily="34" charset="0"/>
+              <a:cs typeface="Times New Roman" panose="02020603050405020304" pitchFamily="18" charset="0"/>
+            </a:endParaRPr>
+          </a:p>
+          <a:p>
+            <a:pPr marL="0" indent="0" algn="just">
+              <a:lnSpc>
+                <a:spcPct val="107000"/>
+              </a:lnSpc>
+              <a:spcBef>
+                <a:spcPts val="0"/>
+              </a:spcBef>
+              <a:spcAft>
+                <a:spcPts val="800"/>
+              </a:spcAft>
+              <a:buFont typeface="Arial" pitchFamily="34" charset="0"/>
+              <a:buNone/>
+            </a:pPr>
+            <a:r>
+              <a:rPr lang="en-US" sz="2400" kern="100" dirty="0">
+                <a:solidFill>
+                  <a:prstClr val="black"/>
+                </a:solidFill>
+                <a:latin typeface="Aptos" panose="020B0004020202020204" pitchFamily="34" charset="0"/>
+                <a:ea typeface="Calibri" panose="020F0502020204030204" pitchFamily="34" charset="0"/>
+                <a:cs typeface="Times New Roman" panose="02020603050405020304" pitchFamily="18" charset="0"/>
+              </a:rPr>
+              <a:t>3. </a:t>
+            </a:r>
+            <a:r>
+              <a:rPr lang="en-US" sz="2400" b="1" kern="100" dirty="0">
+                <a:solidFill>
+                  <a:prstClr val="black"/>
+                </a:solidFill>
+                <a:latin typeface="Aptos" panose="020B0004020202020204" pitchFamily="34" charset="0"/>
+                <a:ea typeface="Calibri" panose="020F0502020204030204" pitchFamily="34" charset="0"/>
+                <a:cs typeface="Times New Roman" panose="02020603050405020304" pitchFamily="18" charset="0"/>
+              </a:rPr>
+              <a:t>Peer mentoring:</a:t>
+            </a:r>
+            <a:r>
+              <a:rPr lang="en-US" sz="2400" kern="100" dirty="0">
+                <a:solidFill>
+                  <a:prstClr val="black"/>
+                </a:solidFill>
+                <a:latin typeface="Aptos" panose="020B0004020202020204" pitchFamily="34" charset="0"/>
+                <a:ea typeface="Calibri" panose="020F0502020204030204" pitchFamily="34" charset="0"/>
+                <a:cs typeface="Times New Roman" panose="02020603050405020304" pitchFamily="18" charset="0"/>
+              </a:rPr>
+              <a:t> Colleagues of similar experience supporting each other.</a:t>
+            </a:r>
+          </a:p>
+          <a:p>
+            <a:pPr marL="0" indent="0" algn="just">
+              <a:lnSpc>
+                <a:spcPct val="107000"/>
+              </a:lnSpc>
+              <a:spcBef>
+                <a:spcPts val="0"/>
+              </a:spcBef>
+              <a:spcAft>
+                <a:spcPts val="800"/>
+              </a:spcAft>
+              <a:buFont typeface="Arial" pitchFamily="34" charset="0"/>
+              <a:buNone/>
+            </a:pPr>
+            <a:endParaRPr lang="en-US" sz="700" kern="100" dirty="0" smtClean="0">
+              <a:solidFill>
+                <a:prstClr val="black"/>
+              </a:solidFill>
+              <a:latin typeface="Aptos" panose="020B0004020202020204" pitchFamily="34" charset="0"/>
+              <a:ea typeface="Calibri" panose="020F0502020204030204" pitchFamily="34" charset="0"/>
+              <a:cs typeface="Times New Roman" panose="02020603050405020304" pitchFamily="18" charset="0"/>
+            </a:endParaRPr>
+          </a:p>
+          <a:p>
+            <a:pPr marL="0" indent="0" algn="just">
+              <a:lnSpc>
+                <a:spcPct val="107000"/>
+              </a:lnSpc>
+              <a:spcBef>
+                <a:spcPts val="0"/>
+              </a:spcBef>
+              <a:spcAft>
+                <a:spcPts val="800"/>
+              </a:spcAft>
+              <a:buFont typeface="Arial" pitchFamily="34" charset="0"/>
+              <a:buNone/>
+            </a:pPr>
+            <a:endParaRPr lang="en-US" sz="2000" kern="100" dirty="0">
+              <a:solidFill>
+                <a:prstClr val="black"/>
+              </a:solidFill>
+              <a:latin typeface="Aptos" panose="020B0004020202020204" pitchFamily="34" charset="0"/>
+              <a:ea typeface="Calibri" panose="020F0502020204030204" pitchFamily="34" charset="0"/>
+              <a:cs typeface="Times New Roman" panose="02020603050405020304" pitchFamily="18" charset="0"/>
+            </a:endParaRPr>
+          </a:p>
+          <a:p>
+            <a:pPr marL="0" indent="0" algn="just">
+              <a:lnSpc>
+                <a:spcPct val="107000"/>
+              </a:lnSpc>
+              <a:spcBef>
+                <a:spcPts val="0"/>
+              </a:spcBef>
+              <a:spcAft>
+                <a:spcPts val="800"/>
+              </a:spcAft>
+              <a:buFont typeface="Arial" pitchFamily="34" charset="0"/>
+              <a:buNone/>
+            </a:pPr>
+            <a:r>
+              <a:rPr lang="en-US" sz="2400" kern="100" dirty="0">
+                <a:solidFill>
+                  <a:prstClr val="black"/>
+                </a:solidFill>
+                <a:latin typeface="Aptos" panose="020B0004020202020204" pitchFamily="34" charset="0"/>
+                <a:ea typeface="Calibri" panose="020F0502020204030204" pitchFamily="34" charset="0"/>
+                <a:cs typeface="Times New Roman" panose="02020603050405020304" pitchFamily="18" charset="0"/>
+              </a:rPr>
+              <a:t>4. </a:t>
+            </a:r>
+            <a:r>
+              <a:rPr lang="en-US" sz="2400" b="1" kern="100" dirty="0">
+                <a:solidFill>
+                  <a:prstClr val="black"/>
+                </a:solidFill>
+                <a:latin typeface="Aptos" panose="020B0004020202020204" pitchFamily="34" charset="0"/>
+                <a:ea typeface="Calibri" panose="020F0502020204030204" pitchFamily="34" charset="0"/>
+                <a:cs typeface="Times New Roman" panose="02020603050405020304" pitchFamily="18" charset="0"/>
+              </a:rPr>
+              <a:t>Reverse mentoring:</a:t>
+            </a:r>
+            <a:r>
+              <a:rPr lang="en-US" sz="2400" kern="100" dirty="0">
+                <a:solidFill>
+                  <a:prstClr val="black"/>
+                </a:solidFill>
+                <a:latin typeface="Aptos" panose="020B0004020202020204" pitchFamily="34" charset="0"/>
+                <a:ea typeface="Calibri" panose="020F0502020204030204" pitchFamily="34" charset="0"/>
+                <a:cs typeface="Times New Roman" panose="02020603050405020304" pitchFamily="18" charset="0"/>
+              </a:rPr>
+              <a:t> Younger professionals </a:t>
+            </a:r>
+            <a:r>
+              <a:rPr lang="en-US" sz="2400" kern="100" dirty="0" smtClean="0">
+                <a:solidFill>
+                  <a:prstClr val="black"/>
+                </a:solidFill>
+                <a:latin typeface="Aptos" panose="020B0004020202020204" pitchFamily="34" charset="0"/>
+                <a:ea typeface="Calibri" panose="020F0502020204030204" pitchFamily="34" charset="0"/>
+                <a:cs typeface="Times New Roman" panose="02020603050405020304" pitchFamily="18" charset="0"/>
+              </a:rPr>
+              <a:t>introducing current trends and development to senior colleagues, </a:t>
+            </a:r>
+            <a:r>
+              <a:rPr lang="en-US" sz="2400" kern="100" dirty="0">
+                <a:solidFill>
+                  <a:prstClr val="black"/>
+                </a:solidFill>
+                <a:latin typeface="Aptos" panose="020B0004020202020204" pitchFamily="34" charset="0"/>
+                <a:ea typeface="Calibri" panose="020F0502020204030204" pitchFamily="34" charset="0"/>
+                <a:cs typeface="Times New Roman" panose="02020603050405020304" pitchFamily="18" charset="0"/>
+              </a:rPr>
+              <a:t>particularly in technology.</a:t>
             </a:r>
           </a:p>
           <a:p>
@@ -5072,39 +5539,14 @@
               <a:buFont typeface="Arial" pitchFamily="34" charset="0"/>
               <a:buNone/>
             </a:pPr>
-            <a:r>
-              <a:rPr lang="en-US" sz="2400" kern="100" dirty="0">
-                <a:solidFill>
-                  <a:prstClr val="black"/>
-                </a:solidFill>
-                <a:latin typeface="Aptos" panose="020B0004020202020204" pitchFamily="34" charset="0"/>
-                <a:ea typeface="Calibri" panose="020F0502020204030204" pitchFamily="34" charset="0"/>
-                <a:cs typeface="Times New Roman" panose="02020603050405020304" pitchFamily="18" charset="0"/>
-              </a:rPr>
-              <a:t>3. </a:t>
-            </a:r>
-            <a:r>
-              <a:rPr lang="en-US" sz="2400" b="1" kern="100" dirty="0">
-                <a:solidFill>
-                  <a:prstClr val="black"/>
-                </a:solidFill>
-                <a:latin typeface="Aptos" panose="020B0004020202020204" pitchFamily="34" charset="0"/>
-                <a:ea typeface="Calibri" panose="020F0502020204030204" pitchFamily="34" charset="0"/>
-                <a:cs typeface="Times New Roman" panose="02020603050405020304" pitchFamily="18" charset="0"/>
-              </a:rPr>
-              <a:t>Peer mentoring:</a:t>
-            </a:r>
-            <a:r>
-              <a:rPr lang="en-US" sz="2400" kern="100" dirty="0">
-                <a:solidFill>
-                  <a:prstClr val="black"/>
-                </a:solidFill>
-                <a:latin typeface="Aptos" panose="020B0004020202020204" pitchFamily="34" charset="0"/>
-                <a:ea typeface="Calibri" panose="020F0502020204030204" pitchFamily="34" charset="0"/>
-                <a:cs typeface="Times New Roman" panose="02020603050405020304" pitchFamily="18" charset="0"/>
-              </a:rPr>
-              <a:t> Colleagues of similar experience supporting each other.</a:t>
-            </a:r>
+            <a:endParaRPr lang="en-US" sz="2400" kern="100" dirty="0">
+              <a:solidFill>
+                <a:prstClr val="black"/>
+              </a:solidFill>
+              <a:latin typeface="Aptos" panose="020B0004020202020204" pitchFamily="34" charset="0"/>
+              <a:ea typeface="Calibri" panose="020F0502020204030204" pitchFamily="34" charset="0"/>
+              <a:cs typeface="Times New Roman" panose="02020603050405020304" pitchFamily="18" charset="0"/>
+            </a:endParaRPr>
           </a:p>
           <a:p>
             <a:pPr marL="0" indent="0" algn="just">
@@ -5129,123 +5571,6 @@
               <a:cs typeface="Times New Roman" panose="02020603050405020304" pitchFamily="18" charset="0"/>
             </a:endParaRPr>
           </a:p>
-          <a:p>
-            <a:pPr marL="0" indent="0" algn="just">
-              <a:lnSpc>
-                <a:spcPct val="107000"/>
-              </a:lnSpc>
-              <a:spcBef>
-                <a:spcPts val="0"/>
-              </a:spcBef>
-              <a:spcAft>
-                <a:spcPts val="800"/>
-              </a:spcAft>
-              <a:buFont typeface="Arial" pitchFamily="34" charset="0"/>
-              <a:buNone/>
-            </a:pPr>
-            <a:r>
-              <a:rPr lang="en-US" sz="2400" kern="100" dirty="0">
-                <a:solidFill>
-                  <a:prstClr val="black"/>
-                </a:solidFill>
-                <a:latin typeface="Aptos" panose="020B0004020202020204" pitchFamily="34" charset="0"/>
-                <a:ea typeface="Calibri" panose="020F0502020204030204" pitchFamily="34" charset="0"/>
-                <a:cs typeface="Times New Roman" panose="02020603050405020304" pitchFamily="18" charset="0"/>
-              </a:rPr>
-              <a:t>4. </a:t>
-            </a:r>
-            <a:r>
-              <a:rPr lang="en-US" sz="2400" b="1" kern="100" dirty="0">
-                <a:solidFill>
-                  <a:prstClr val="black"/>
-                </a:solidFill>
-                <a:latin typeface="Aptos" panose="020B0004020202020204" pitchFamily="34" charset="0"/>
-                <a:ea typeface="Calibri" panose="020F0502020204030204" pitchFamily="34" charset="0"/>
-                <a:cs typeface="Times New Roman" panose="02020603050405020304" pitchFamily="18" charset="0"/>
-              </a:rPr>
-              <a:t>Reverse mentoring:</a:t>
-            </a:r>
-            <a:r>
-              <a:rPr lang="en-US" sz="2400" kern="100" dirty="0">
-                <a:solidFill>
-                  <a:prstClr val="black"/>
-                </a:solidFill>
-                <a:latin typeface="Aptos" panose="020B0004020202020204" pitchFamily="34" charset="0"/>
-                <a:ea typeface="Calibri" panose="020F0502020204030204" pitchFamily="34" charset="0"/>
-                <a:cs typeface="Times New Roman" panose="02020603050405020304" pitchFamily="18" charset="0"/>
-              </a:rPr>
-              <a:t> Younger professionals guiding senior colleagues, particularly in technology.</a:t>
-            </a:r>
-          </a:p>
-          <a:p>
-            <a:pPr marL="0" indent="0" algn="just">
-              <a:lnSpc>
-                <a:spcPct val="107000"/>
-              </a:lnSpc>
-              <a:spcBef>
-                <a:spcPts val="0"/>
-              </a:spcBef>
-              <a:spcAft>
-                <a:spcPts val="800"/>
-              </a:spcAft>
-              <a:buFont typeface="Arial" pitchFamily="34" charset="0"/>
-              <a:buNone/>
-            </a:pPr>
-            <a:endParaRPr lang="en-US" sz="2400" kern="100" dirty="0">
-              <a:solidFill>
-                <a:prstClr val="black"/>
-              </a:solidFill>
-              <a:latin typeface="Aptos" panose="020B0004020202020204" pitchFamily="34" charset="0"/>
-              <a:ea typeface="Calibri" panose="020F0502020204030204" pitchFamily="34" charset="0"/>
-              <a:cs typeface="Times New Roman" panose="02020603050405020304" pitchFamily="18" charset="0"/>
-            </a:endParaRPr>
-          </a:p>
-          <a:p>
-            <a:pPr marL="0" indent="0" algn="just">
-              <a:lnSpc>
-                <a:spcPct val="107000"/>
-              </a:lnSpc>
-              <a:spcBef>
-                <a:spcPts val="0"/>
-              </a:spcBef>
-              <a:spcAft>
-                <a:spcPts val="800"/>
-              </a:spcAft>
-              <a:buFont typeface="Arial" pitchFamily="34" charset="0"/>
-              <a:buNone/>
-            </a:pPr>
-            <a:endParaRPr lang="en-US" sz="2400" kern="100" dirty="0">
-              <a:solidFill>
-                <a:prstClr val="black"/>
-              </a:solidFill>
-              <a:latin typeface="Aptos" panose="020B0004020202020204" pitchFamily="34" charset="0"/>
-              <a:ea typeface="Calibri" panose="020F0502020204030204" pitchFamily="34" charset="0"/>
-              <a:cs typeface="Times New Roman" panose="02020603050405020304" pitchFamily="18" charset="0"/>
-            </a:endParaRPr>
-          </a:p>
-          <a:p>
-            <a:pPr marL="0" indent="0" algn="just">
-              <a:lnSpc>
-                <a:spcPct val="107000"/>
-              </a:lnSpc>
-              <a:spcBef>
-                <a:spcPts val="0"/>
-              </a:spcBef>
-              <a:spcAft>
-                <a:spcPts val="800"/>
-              </a:spcAft>
-              <a:buFont typeface="Arial" pitchFamily="34" charset="0"/>
-              <a:buNone/>
-            </a:pPr>
-            <a:endParaRPr lang="en-US" sz="2400" kern="100" dirty="0">
-              <a:solidFill>
-                <a:prstClr val="black"/>
-              </a:solidFill>
-              <a:latin typeface="Aptos" panose="020B0004020202020204" pitchFamily="34" charset="0"/>
-              <a:ea typeface="Calibri" panose="020F0502020204030204" pitchFamily="34" charset="0"/>
-              <a:cs typeface="Times New Roman" panose="02020603050405020304" pitchFamily="18" charset="0"/>
-            </a:endParaRPr>
-          </a:p>
         </p:txBody>
       </p:sp>
       <p:sp>
@@ -5253,7 +5578,7 @@
           <p:cNvPr id="4" name="Cube 3">
             <a:extLst>
               <a:ext uri="{FF2B5EF4-FFF2-40B4-BE49-F238E27FC236}">
-                <a16:creationId xmlns:a16="http://schemas.microsoft.com/office/drawing/2014/main" id="{3F369C50-F938-25E6-8C9F-8C61B4F9A478}"/>
+                <a16:creationId xmlns:a16="http://schemas.microsoft.com/office/drawing/2014/main" xmlns="" id="{3F369C50-F938-25E6-8C9F-8C61B4F9A478}"/>
               </a:ext>
             </a:extLst>
           </p:cNvPr>
@@ -5307,7 +5632,7 @@
           <p:cNvPr id="5" name="Cube 4">
             <a:extLst>
               <a:ext uri="{FF2B5EF4-FFF2-40B4-BE49-F238E27FC236}">
-                <a16:creationId xmlns:a16="http://schemas.microsoft.com/office/drawing/2014/main" id="{7A910264-0DE8-B963-DE96-EE3584745E8E}"/>
+                <a16:creationId xmlns:a16="http://schemas.microsoft.com/office/drawing/2014/main" xmlns="" id="{7A910264-0DE8-B963-DE96-EE3584745E8E}"/>
               </a:ext>
             </a:extLst>
           </p:cNvPr>
@@ -5361,7 +5686,7 @@
           <p:cNvPr id="6" name="Cube 5">
             <a:extLst>
               <a:ext uri="{FF2B5EF4-FFF2-40B4-BE49-F238E27FC236}">
-                <a16:creationId xmlns:a16="http://schemas.microsoft.com/office/drawing/2014/main" id="{EC8B89D5-D9CC-087E-36EF-4EC41ED1630F}"/>
+                <a16:creationId xmlns:a16="http://schemas.microsoft.com/office/drawing/2014/main" xmlns="" id="{EC8B89D5-D9CC-087E-36EF-4EC41ED1630F}"/>
               </a:ext>
             </a:extLst>
           </p:cNvPr>
@@ -5415,7 +5740,7 @@
           <p:cNvPr id="7" name="Cube 6">
             <a:extLst>
               <a:ext uri="{FF2B5EF4-FFF2-40B4-BE49-F238E27FC236}">
-                <a16:creationId xmlns:a16="http://schemas.microsoft.com/office/drawing/2014/main" id="{A5D187C9-215D-EF72-AC8B-B401A1FC93AD}"/>
+                <a16:creationId xmlns:a16="http://schemas.microsoft.com/office/drawing/2014/main" xmlns="" id="{A5D187C9-215D-EF72-AC8B-B401A1FC93AD}"/>
               </a:ext>
             </a:extLst>
           </p:cNvPr>
@@ -5469,7 +5794,7 @@
           <p:cNvPr id="8" name="Rectangle 7">
             <a:extLst>
               <a:ext uri="{FF2B5EF4-FFF2-40B4-BE49-F238E27FC236}">
-                <a16:creationId xmlns:a16="http://schemas.microsoft.com/office/drawing/2014/main" id="{5C0D1C0C-E860-DEFE-D96E-BDDB3B858EB1}"/>
+                <a16:creationId xmlns:a16="http://schemas.microsoft.com/office/drawing/2014/main" xmlns="" id="{5C0D1C0C-E860-DEFE-D96E-BDDB3B858EB1}"/>
               </a:ext>
             </a:extLst>
           </p:cNvPr>
@@ -5562,7 +5887,7 @@
           <p:cNvPr id="10" name="Title 9">
             <a:extLst>
               <a:ext uri="{FF2B5EF4-FFF2-40B4-BE49-F238E27FC236}">
-                <a16:creationId xmlns:a16="http://schemas.microsoft.com/office/drawing/2014/main" id="{4EB7BA3F-919D-7BBF-8C31-DAD5CBC47646}"/>
+                <a16:creationId xmlns:a16="http://schemas.microsoft.com/office/drawing/2014/main" xmlns="" id="{4EB7BA3F-919D-7BBF-8C31-DAD5CBC47646}"/>
               </a:ext>
             </a:extLst>
           </p:cNvPr>
@@ -5575,8 +5900,8 @@
         </p:nvSpPr>
         <p:spPr>
           <a:xfrm>
-            <a:off x="1011667" y="586396"/>
-            <a:ext cx="10165492" cy="737644"/>
+            <a:off x="621804" y="260648"/>
+            <a:ext cx="11161239" cy="720080"/>
           </a:xfrm>
         </p:spPr>
         <p:txBody>
@@ -5584,9 +5909,6 @@
           <a:lstStyle/>
           <a:p>
             <a:pPr marL="0" marR="0">
-              <a:lnSpc>
-                <a:spcPct val="115000"/>
-              </a:lnSpc>
               <a:spcBef>
                 <a:spcPts val="0"/>
               </a:spcBef>
@@ -5595,27 +5917,45 @@
               </a:spcAft>
             </a:pPr>
             <a:r>
-              <a:rPr lang="en-US" sz="3200" kern="0" dirty="0">
+              <a:rPr lang="en-US" sz="3200" b="1" kern="0" dirty="0">
+                <a:solidFill>
+                  <a:schemeClr val="tx1"/>
+                </a:solidFill>
                 <a:latin typeface="Aptos" panose="020B0004020202020204" pitchFamily="34" charset="0"/>
                 <a:ea typeface="Times New Roman" panose="02020603050405020304" pitchFamily="18" charset="0"/>
                 <a:cs typeface="Times New Roman" panose="02020603050405020304" pitchFamily="18" charset="0"/>
               </a:rPr>
               <a:t>The Presumption and Responsibility of the </a:t>
             </a:r>
-            <a:br>
-              <a:rPr lang="en-US" sz="3200" kern="0" dirty="0">
+            <a:r>
+              <a:rPr lang="en-US" sz="3200" b="1" kern="0" dirty="0" smtClean="0">
+                <a:solidFill>
+                  <a:schemeClr val="tx1"/>
+                </a:solidFill>
                 <a:latin typeface="Aptos" panose="020B0004020202020204" pitchFamily="34" charset="0"/>
                 <a:ea typeface="Times New Roman" panose="02020603050405020304" pitchFamily="18" charset="0"/>
                 <a:cs typeface="Times New Roman" panose="02020603050405020304" pitchFamily="18" charset="0"/>
               </a:rPr>
-            </a:br>
-            <a:r>
-              <a:rPr lang="en-US" sz="3200" kern="0" dirty="0">
+              <a:t>Senior </a:t>
+            </a:r>
+            <a:r>
+              <a:rPr lang="en-US" sz="3200" b="1" kern="0" dirty="0">
+                <a:solidFill>
+                  <a:schemeClr val="tx1"/>
+                </a:solidFill>
                 <a:latin typeface="Aptos" panose="020B0004020202020204" pitchFamily="34" charset="0"/>
                 <a:ea typeface="Times New Roman" panose="02020603050405020304" pitchFamily="18" charset="0"/>
                 <a:cs typeface="Times New Roman" panose="02020603050405020304" pitchFamily="18" charset="0"/>
               </a:rPr>
-              <a:t>Senior Advocate as a Mentor</a:t>
+              <a:t>Advocate as a Mentor</a:t>
+            </a:r>
+            <a:r>
+              <a:rPr lang="en-US" sz="3200" kern="100" dirty="0">
+                <a:latin typeface="Aptos" panose="020B0004020202020204" pitchFamily="34" charset="0"/>
+                <a:ea typeface="Calibri" panose="020F0502020204030204" pitchFamily="34" charset="0"/>
+                <a:cs typeface="Times New Roman" panose="02020603050405020304" pitchFamily="18" charset="0"/>
+              </a:rPr>
+              <a:t/>
             </a:r>
             <a:br>
               <a:rPr lang="en-US" sz="3200" kern="100" dirty="0">
@@ -5638,7 +5978,7 @@
           <p:cNvPr id="19" name="Content Placeholder 2">
             <a:extLst>
               <a:ext uri="{FF2B5EF4-FFF2-40B4-BE49-F238E27FC236}">
-                <a16:creationId xmlns:a16="http://schemas.microsoft.com/office/drawing/2014/main" id="{98349F09-71B1-87BB-EA53-81192F0663CA}"/>
+                <a16:creationId xmlns:a16="http://schemas.microsoft.com/office/drawing/2014/main" xmlns="" id="{98349F09-71B1-87BB-EA53-81192F0663CA}"/>
               </a:ext>
             </a:extLst>
           </p:cNvPr>
@@ -5649,8 +5989,8 @@
         </p:nvSpPr>
         <p:spPr>
           <a:xfrm>
-            <a:off x="981844" y="1340768"/>
-            <a:ext cx="10195315" cy="6093296"/>
+            <a:off x="981844" y="980728"/>
+            <a:ext cx="10195315" cy="6453336"/>
           </a:xfrm>
           <a:prstGeom prst="rect">
             <a:avLst/>
@@ -5798,283 +6138,133 @@
             </a:lvl9pPr>
           </a:lstStyle>
           <a:p>
-            <a:pPr marL="0" algn="just">
+            <a:pPr marL="0" lvl="0" indent="0" algn="just">
               <a:lnSpc>
                 <a:spcPct val="115000"/>
               </a:lnSpc>
               <a:spcBef>
                 <a:spcPts val="0"/>
               </a:spcBef>
-              <a:spcAft>
-                <a:spcPts val="1000"/>
-              </a:spcAft>
+              <a:buNone/>
             </a:pPr>
             <a:r>
-              <a:rPr lang="en-US" sz="1500" kern="0" dirty="0">
+              <a:rPr lang="en-US" sz="2200" kern="0" dirty="0" smtClean="0">
                 <a:latin typeface="Aptos" panose="020B0004020202020204" pitchFamily="34" charset="0"/>
                 <a:ea typeface="Times New Roman" panose="02020603050405020304" pitchFamily="18" charset="0"/>
                 <a:cs typeface="Times New Roman" panose="02020603050405020304" pitchFamily="18" charset="0"/>
               </a:rPr>
-              <a:t>A mentor must possess character, integrity and adhere to the ethics of whatever industry or profession he is mentoring in.</a:t>
-            </a:r>
-            <a:r>
-              <a:rPr lang="en-US" sz="1500" b="1" kern="0" dirty="0">
+              <a:t>The Senior Advocate as a leader is the mentor. He/she  is presumed to be  a person of impeccable character above reproach and adheres </a:t>
+            </a:r>
+            <a:r>
+              <a:rPr lang="en-US" sz="2200" kern="0" dirty="0">
                 <a:latin typeface="Aptos" panose="020B0004020202020204" pitchFamily="34" charset="0"/>
                 <a:ea typeface="Times New Roman" panose="02020603050405020304" pitchFamily="18" charset="0"/>
                 <a:cs typeface="Times New Roman" panose="02020603050405020304" pitchFamily="18" charset="0"/>
               </a:rPr>
-              <a:t> </a:t>
-            </a:r>
-            <a:r>
-              <a:rPr lang="en-US" sz="1500" kern="0" dirty="0">
+              <a:t>to the ethics of </a:t>
+            </a:r>
+            <a:r>
+              <a:rPr lang="en-US" sz="2200" kern="0" dirty="0" smtClean="0">
                 <a:latin typeface="Aptos" panose="020B0004020202020204" pitchFamily="34" charset="0"/>
                 <a:ea typeface="Times New Roman" panose="02020603050405020304" pitchFamily="18" charset="0"/>
                 <a:cs typeface="Times New Roman" panose="02020603050405020304" pitchFamily="18" charset="0"/>
               </a:rPr>
-              <a:t>This presumption of leadership carries the duty to exert positive influence and to deliver impactful guidance.</a:t>
-            </a:r>
-            <a:r>
-              <a:rPr lang="en-US" sz="1500" b="1" kern="0" dirty="0">
+              <a:t>the</a:t>
+            </a:r>
+            <a:r>
+              <a:rPr lang="en-US" sz="2200" kern="0" dirty="0" smtClean="0">
                 <a:latin typeface="Aptos" panose="020B0004020202020204" pitchFamily="34" charset="0"/>
                 <a:ea typeface="Times New Roman" panose="02020603050405020304" pitchFamily="18" charset="0"/>
                 <a:cs typeface="Times New Roman" panose="02020603050405020304" pitchFamily="18" charset="0"/>
               </a:rPr>
-              <a:t> </a:t>
-            </a:r>
-            <a:r>
-              <a:rPr lang="en-US" sz="1500" kern="0" dirty="0">
+              <a:t> profession. This </a:t>
+            </a:r>
+            <a:r>
+              <a:rPr lang="en-US" sz="2200" kern="0" dirty="0">
                 <a:latin typeface="Aptos" panose="020B0004020202020204" pitchFamily="34" charset="0"/>
                 <a:ea typeface="Times New Roman" panose="02020603050405020304" pitchFamily="18" charset="0"/>
                 <a:cs typeface="Times New Roman" panose="02020603050405020304" pitchFamily="18" charset="0"/>
               </a:rPr>
-              <a:t>It is not enough to be distinguished, a mentor must transfer values, skills and standards thereby preserving legacy.</a:t>
-            </a:r>
-            <a:endParaRPr lang="en-US" sz="1500" kern="100" dirty="0">
+              <a:t>presumption of leadership carries the duty to exert positive influence and to deliver impactful guidance.</a:t>
+            </a:r>
+            <a:r>
+              <a:rPr lang="en-US" sz="2200" b="1" kern="0" dirty="0">
+                <a:latin typeface="Aptos" panose="020B0004020202020204" pitchFamily="34" charset="0"/>
+                <a:ea typeface="Times New Roman" panose="02020603050405020304" pitchFamily="18" charset="0"/>
+                <a:cs typeface="Times New Roman" panose="02020603050405020304" pitchFamily="18" charset="0"/>
+              </a:rPr>
+              <a:t> </a:t>
+            </a:r>
+            <a:r>
+              <a:rPr lang="en-US" sz="2200" kern="0" dirty="0" smtClean="0">
+                <a:latin typeface="Aptos" panose="020B0004020202020204" pitchFamily="34" charset="0"/>
+                <a:ea typeface="Times New Roman" panose="02020603050405020304" pitchFamily="18" charset="0"/>
+                <a:cs typeface="Times New Roman" panose="02020603050405020304" pitchFamily="18" charset="0"/>
+              </a:rPr>
+              <a:t>Therefore the</a:t>
+            </a:r>
+            <a:r>
+              <a:rPr lang="en-US" sz="2200" kern="0" dirty="0" smtClean="0">
+                <a:latin typeface="Aptos" panose="020B0004020202020204" pitchFamily="34" charset="0"/>
+                <a:ea typeface="Times New Roman" panose="02020603050405020304" pitchFamily="18" charset="0"/>
+                <a:cs typeface="Times New Roman" panose="02020603050405020304" pitchFamily="18" charset="0"/>
+              </a:rPr>
+              <a:t> </a:t>
+            </a:r>
+            <a:r>
+              <a:rPr lang="en-US" sz="2200" kern="0" dirty="0">
+                <a:latin typeface="Aptos" panose="020B0004020202020204" pitchFamily="34" charset="0"/>
+                <a:ea typeface="Times New Roman" panose="02020603050405020304" pitchFamily="18" charset="0"/>
+                <a:cs typeface="Times New Roman" panose="02020603050405020304" pitchFamily="18" charset="0"/>
+              </a:rPr>
+              <a:t>mentor must transfer values, skills and </a:t>
+            </a:r>
+            <a:r>
+              <a:rPr lang="en-US" sz="2200" kern="0" dirty="0" smtClean="0">
+                <a:latin typeface="Aptos" panose="020B0004020202020204" pitchFamily="34" charset="0"/>
+                <a:ea typeface="Times New Roman" panose="02020603050405020304" pitchFamily="18" charset="0"/>
+                <a:cs typeface="Times New Roman" panose="02020603050405020304" pitchFamily="18" charset="0"/>
+              </a:rPr>
+              <a:t>standards. As a mentor, a new Silk  </a:t>
+            </a:r>
+            <a:r>
+              <a:rPr lang="en-US" sz="2200" kern="0" dirty="0" smtClean="0">
+                <a:latin typeface="Aptos" panose="020B0004020202020204" pitchFamily="34" charset="0"/>
+                <a:ea typeface="Times New Roman" panose="02020603050405020304" pitchFamily="18" charset="0"/>
+                <a:cs typeface="Times New Roman" panose="02020603050405020304" pitchFamily="18" charset="0"/>
+              </a:rPr>
+              <a:t>becomes</a:t>
+            </a:r>
+            <a:r>
+              <a:rPr lang="en-US" sz="2200" kern="0" dirty="0" smtClean="0">
+                <a:latin typeface="Aptos" panose="020B0004020202020204" pitchFamily="34" charset="0"/>
+                <a:ea typeface="Times New Roman" panose="02020603050405020304" pitchFamily="18" charset="0"/>
+                <a:cs typeface="Times New Roman" panose="02020603050405020304" pitchFamily="18" charset="0"/>
+              </a:rPr>
+              <a:t> a </a:t>
+            </a:r>
+            <a:r>
+              <a:rPr lang="en-US" sz="2200" kern="0" dirty="0">
+                <a:solidFill>
+                  <a:prstClr val="black"/>
+                </a:solidFill>
+                <a:latin typeface="Aptos" panose="020B0004020202020204" pitchFamily="34" charset="0"/>
+                <a:ea typeface="Times New Roman" panose="02020603050405020304" pitchFamily="18" charset="0"/>
+                <a:cs typeface="Times New Roman" panose="02020603050405020304" pitchFamily="18" charset="0"/>
+              </a:rPr>
+              <a:t>standard-bearer, and a custodian of the values of our profession.</a:t>
+            </a:r>
+            <a:endParaRPr lang="en-US" sz="2200" kern="100" dirty="0">
+              <a:solidFill>
+                <a:prstClr val="black"/>
+              </a:solidFill>
               <a:latin typeface="Aptos" panose="020B0004020202020204" pitchFamily="34" charset="0"/>
               <a:ea typeface="Calibri" panose="020F0502020204030204" pitchFamily="34" charset="0"/>
               <a:cs typeface="Times New Roman" panose="02020603050405020304" pitchFamily="18" charset="0"/>
             </a:endParaRPr>
           </a:p>
           <a:p>
-            <a:pPr marL="0" algn="just">
-              <a:lnSpc>
-                <a:spcPct val="115000"/>
-              </a:lnSpc>
-              <a:spcBef>
-                <a:spcPts val="0"/>
-              </a:spcBef>
-            </a:pPr>
-            <a:r>
-              <a:rPr lang="en-US" sz="1500" b="1" kern="0" dirty="0">
-                <a:latin typeface="Aptos" panose="020B0004020202020204" pitchFamily="34" charset="0"/>
-                <a:ea typeface="Times New Roman" panose="02020603050405020304" pitchFamily="18" charset="0"/>
-                <a:cs typeface="Times New Roman" panose="02020603050405020304" pitchFamily="18" charset="0"/>
-              </a:rPr>
-              <a:t>The Meaning of Your New Role as Mentors</a:t>
-            </a:r>
-            <a:endParaRPr lang="en-US" sz="1500" kern="100" dirty="0">
-              <a:latin typeface="Aptos" panose="020B0004020202020204" pitchFamily="34" charset="0"/>
-              <a:ea typeface="Calibri" panose="020F0502020204030204" pitchFamily="34" charset="0"/>
-              <a:cs typeface="Times New Roman" panose="02020603050405020304" pitchFamily="18" charset="0"/>
-            </a:endParaRPr>
-          </a:p>
-          <a:p>
-            <a:pPr marL="0" algn="just">
-              <a:lnSpc>
-                <a:spcPct val="115000"/>
-              </a:lnSpc>
-              <a:spcBef>
-                <a:spcPts val="0"/>
-              </a:spcBef>
-            </a:pPr>
-            <a:r>
-              <a:rPr lang="en-US" sz="1500" kern="0" dirty="0">
-                <a:latin typeface="Aptos" panose="020B0004020202020204" pitchFamily="34" charset="0"/>
-                <a:ea typeface="Times New Roman" panose="02020603050405020304" pitchFamily="18" charset="0"/>
-                <a:cs typeface="Times New Roman" panose="02020603050405020304" pitchFamily="18" charset="0"/>
-              </a:rPr>
-              <a:t>Mentorship, in its truest form, is not a casual or accidental relationship. It is a deliberate commitment by a senior to guide, </a:t>
-            </a:r>
-            <a:r>
-              <a:rPr lang="en-US" sz="1500" kern="0" dirty="0" err="1">
-                <a:latin typeface="Aptos" panose="020B0004020202020204" pitchFamily="34" charset="0"/>
-                <a:ea typeface="Times New Roman" panose="02020603050405020304" pitchFamily="18" charset="0"/>
-                <a:cs typeface="Times New Roman" panose="02020603050405020304" pitchFamily="18" charset="0"/>
-              </a:rPr>
-              <a:t>mould</a:t>
-            </a:r>
-            <a:r>
-              <a:rPr lang="en-US" sz="1500" kern="0" dirty="0">
-                <a:latin typeface="Aptos" panose="020B0004020202020204" pitchFamily="34" charset="0"/>
-                <a:ea typeface="Times New Roman" panose="02020603050405020304" pitchFamily="18" charset="0"/>
-                <a:cs typeface="Times New Roman" panose="02020603050405020304" pitchFamily="18" charset="0"/>
-              </a:rPr>
-              <a:t>, and empower a junior. By your elevation, you are presumed to be men and women of impeccable character, integrity, and professional discipline. That presumption is not symbolic, it is sacred and comes with responsibility:</a:t>
-            </a:r>
-            <a:endParaRPr lang="en-US" sz="1500" kern="100" dirty="0">
-              <a:latin typeface="Aptos" panose="020B0004020202020204" pitchFamily="34" charset="0"/>
-              <a:ea typeface="Calibri" panose="020F0502020204030204" pitchFamily="34" charset="0"/>
-              <a:cs typeface="Times New Roman" panose="02020603050405020304" pitchFamily="18" charset="0"/>
-            </a:endParaRPr>
-          </a:p>
-          <a:p>
-            <a:pPr marL="0" indent="0" algn="just">
-              <a:lnSpc>
-                <a:spcPct val="115000"/>
-              </a:lnSpc>
-              <a:spcBef>
-                <a:spcPts val="0"/>
-              </a:spcBef>
-              <a:buFont typeface="Arial" pitchFamily="34" charset="0"/>
-              <a:buNone/>
-            </a:pPr>
-            <a:r>
-              <a:rPr lang="en-US" sz="1500" kern="0" dirty="0">
-                <a:latin typeface="Aptos" panose="020B0004020202020204" pitchFamily="34" charset="0"/>
-                <a:ea typeface="Times New Roman" panose="02020603050405020304" pitchFamily="18" charset="0"/>
-                <a:cs typeface="Times New Roman" panose="02020603050405020304" pitchFamily="18" charset="0"/>
-              </a:rPr>
-              <a:t> </a:t>
-            </a:r>
-            <a:endParaRPr lang="en-US" sz="1500" kern="100" dirty="0">
-              <a:latin typeface="Aptos" panose="020B0004020202020204" pitchFamily="34" charset="0"/>
-              <a:ea typeface="Calibri" panose="020F0502020204030204" pitchFamily="34" charset="0"/>
-              <a:cs typeface="Times New Roman" panose="02020603050405020304" pitchFamily="18" charset="0"/>
-            </a:endParaRPr>
-          </a:p>
-          <a:p>
-            <a:pPr marL="342900" indent="-342900" algn="just">
-              <a:lnSpc>
-                <a:spcPct val="115000"/>
-              </a:lnSpc>
-              <a:spcBef>
-                <a:spcPts val="0"/>
-              </a:spcBef>
-              <a:buFont typeface="Helvetica" panose="020B0604020202020204" pitchFamily="34" charset="0"/>
-              <a:buChar char="-"/>
-            </a:pPr>
-            <a:r>
-              <a:rPr lang="en-US" sz="1500" kern="0" dirty="0">
-                <a:latin typeface="Aptos" panose="020B0004020202020204" pitchFamily="34" charset="0"/>
-                <a:ea typeface="Times New Roman" panose="02020603050405020304" pitchFamily="18" charset="0"/>
-                <a:cs typeface="Helvetica" panose="020B0604020202020204" pitchFamily="34" charset="0"/>
-              </a:rPr>
-              <a:t>You are expected to inspire younger lawyers by your conduct in and out of court.</a:t>
-            </a:r>
-            <a:endParaRPr lang="en-US" sz="1500" kern="100" dirty="0">
-              <a:latin typeface="Aptos" panose="020B0004020202020204" pitchFamily="34" charset="0"/>
-              <a:ea typeface="Times New Roman" panose="02020603050405020304" pitchFamily="18" charset="0"/>
-              <a:cs typeface="Helvetica" panose="020B0604020202020204" pitchFamily="34" charset="0"/>
-            </a:endParaRPr>
-          </a:p>
-          <a:p>
-            <a:pPr marL="342900" indent="-342900" algn="just">
-              <a:lnSpc>
-                <a:spcPct val="115000"/>
-              </a:lnSpc>
-              <a:spcBef>
-                <a:spcPts val="0"/>
-              </a:spcBef>
-              <a:buFont typeface="Helvetica" panose="020B0604020202020204" pitchFamily="34" charset="0"/>
-              <a:buChar char="-"/>
-            </a:pPr>
-            <a:r>
-              <a:rPr lang="en-US" sz="1500" kern="0" dirty="0">
-                <a:latin typeface="Aptos" panose="020B0004020202020204" pitchFamily="34" charset="0"/>
-                <a:ea typeface="Times New Roman" panose="02020603050405020304" pitchFamily="18" charset="0"/>
-                <a:cs typeface="Helvetica" panose="020B0604020202020204" pitchFamily="34" charset="0"/>
-              </a:rPr>
-              <a:t>You are expected to guide and </a:t>
-            </a:r>
-            <a:r>
-              <a:rPr lang="en-US" sz="1500" kern="0" dirty="0" err="1">
-                <a:latin typeface="Aptos" panose="020B0004020202020204" pitchFamily="34" charset="0"/>
-                <a:ea typeface="Times New Roman" panose="02020603050405020304" pitchFamily="18" charset="0"/>
-                <a:cs typeface="Helvetica" panose="020B0604020202020204" pitchFamily="34" charset="0"/>
-              </a:rPr>
-              <a:t>mould</a:t>
-            </a:r>
-            <a:r>
-              <a:rPr lang="en-US" sz="1500" kern="0" dirty="0">
-                <a:latin typeface="Aptos" panose="020B0004020202020204" pitchFamily="34" charset="0"/>
-                <a:ea typeface="Times New Roman" panose="02020603050405020304" pitchFamily="18" charset="0"/>
-                <a:cs typeface="Helvetica" panose="020B0604020202020204" pitchFamily="34" charset="0"/>
-              </a:rPr>
-              <a:t> those who look up to you, whether or not they are directly under your chambers.</a:t>
-            </a:r>
-            <a:endParaRPr lang="en-US" sz="1500" kern="100" dirty="0">
-              <a:latin typeface="Aptos" panose="020B0004020202020204" pitchFamily="34" charset="0"/>
-              <a:ea typeface="Times New Roman" panose="02020603050405020304" pitchFamily="18" charset="0"/>
-              <a:cs typeface="Helvetica" panose="020B0604020202020204" pitchFamily="34" charset="0"/>
-            </a:endParaRPr>
-          </a:p>
-          <a:p>
-            <a:pPr marL="342900" indent="-342900" algn="just">
-              <a:lnSpc>
-                <a:spcPct val="115000"/>
-              </a:lnSpc>
-              <a:spcBef>
-                <a:spcPts val="0"/>
-              </a:spcBef>
-              <a:buFont typeface="Helvetica" panose="020B0604020202020204" pitchFamily="34" charset="0"/>
-              <a:buChar char="-"/>
-            </a:pPr>
-            <a:r>
-              <a:rPr lang="en-US" sz="1500" kern="0" dirty="0">
-                <a:latin typeface="Aptos" panose="020B0004020202020204" pitchFamily="34" charset="0"/>
-                <a:ea typeface="Times New Roman" panose="02020603050405020304" pitchFamily="18" charset="0"/>
-                <a:cs typeface="Helvetica" panose="020B0604020202020204" pitchFamily="34" charset="0"/>
-              </a:rPr>
-              <a:t>You are expected to raise the bar, not merely in legal skill, but in ethics, humility, and service.</a:t>
-            </a:r>
-            <a:endParaRPr lang="en-US" sz="1500" kern="100" dirty="0">
-              <a:latin typeface="Aptos" panose="020B0004020202020204" pitchFamily="34" charset="0"/>
-              <a:ea typeface="Times New Roman" panose="02020603050405020304" pitchFamily="18" charset="0"/>
-              <a:cs typeface="Helvetica" panose="020B0604020202020204" pitchFamily="34" charset="0"/>
-            </a:endParaRPr>
-          </a:p>
-          <a:p>
-            <a:pPr marL="0" indent="0" algn="just">
-              <a:lnSpc>
-                <a:spcPct val="115000"/>
-              </a:lnSpc>
-              <a:spcBef>
-                <a:spcPts val="0"/>
-              </a:spcBef>
-              <a:buFont typeface="Arial" pitchFamily="34" charset="0"/>
-              <a:buNone/>
-            </a:pPr>
-            <a:endParaRPr lang="en-US" sz="1500" kern="100" dirty="0">
-              <a:latin typeface="Aptos" panose="020B0004020202020204" pitchFamily="34" charset="0"/>
-              <a:ea typeface="Calibri" panose="020F0502020204030204" pitchFamily="34" charset="0"/>
-              <a:cs typeface="Times New Roman" panose="02020603050405020304" pitchFamily="18" charset="0"/>
-            </a:endParaRPr>
-          </a:p>
-          <a:p>
-            <a:pPr marL="0" algn="just">
-              <a:lnSpc>
-                <a:spcPct val="115000"/>
-              </a:lnSpc>
-              <a:spcBef>
-                <a:spcPts val="0"/>
-              </a:spcBef>
-            </a:pPr>
-            <a:r>
-              <a:rPr lang="en-US" sz="1500" kern="0" dirty="0">
-                <a:latin typeface="Aptos" panose="020B0004020202020204" pitchFamily="34" charset="0"/>
-                <a:ea typeface="Times New Roman" panose="02020603050405020304" pitchFamily="18" charset="0"/>
-                <a:cs typeface="Times New Roman" panose="02020603050405020304" pitchFamily="18" charset="0"/>
-              </a:rPr>
-              <a:t>So you see that to be a Senior Advocate is not only to excel in practice, it is to be a standard-bearer, and a custodian of the values of our profession.</a:t>
-            </a:r>
-            <a:endParaRPr lang="en-US" sz="1500" kern="100" dirty="0">
-              <a:latin typeface="Aptos" panose="020B0004020202020204" pitchFamily="34" charset="0"/>
-              <a:ea typeface="Calibri" panose="020F0502020204030204" pitchFamily="34" charset="0"/>
-              <a:cs typeface="Times New Roman" panose="02020603050405020304" pitchFamily="18" charset="0"/>
-            </a:endParaRPr>
-          </a:p>
-          <a:p>
-            <a:pPr marL="0" indent="0" algn="just">
+            <a:pPr marL="0" lvl="0" indent="0" algn="just">
               <a:lnSpc>
                 <a:spcPct val="115000"/>
               </a:lnSpc>
@@ -6087,20 +6277,47 @@
               </a:tabLst>
             </a:pPr>
             <a:r>
-              <a:rPr lang="en-US" sz="1500" b="1" kern="0" dirty="0">
+              <a:rPr lang="en-US" sz="2200" b="1" kern="0" dirty="0">
+                <a:solidFill>
+                  <a:prstClr val="black"/>
+                </a:solidFill>
                 <a:latin typeface="Aptos" panose="020B0004020202020204" pitchFamily="34" charset="0"/>
                 <a:ea typeface="Times New Roman" panose="02020603050405020304" pitchFamily="18" charset="0"/>
                 <a:cs typeface="Times New Roman" panose="02020603050405020304" pitchFamily="18" charset="0"/>
               </a:rPr>
               <a:t>	</a:t>
             </a:r>
-            <a:endParaRPr lang="en-US" sz="1500" kern="100" dirty="0">
+            <a:endParaRPr lang="en-US" sz="2200" kern="100" dirty="0">
               <a:latin typeface="Aptos" panose="020B0004020202020204" pitchFamily="34" charset="0"/>
               <a:ea typeface="Calibri" panose="020F0502020204030204" pitchFamily="34" charset="0"/>
               <a:cs typeface="Times New Roman" panose="02020603050405020304" pitchFamily="18" charset="0"/>
             </a:endParaRPr>
           </a:p>
           <a:p>
+            <a:pPr marL="0" indent="0" algn="just">
+              <a:lnSpc>
+                <a:spcPct val="115000"/>
+              </a:lnSpc>
+              <a:spcBef>
+                <a:spcPts val="0"/>
+              </a:spcBef>
+              <a:buNone/>
+            </a:pPr>
+            <a:r>
+              <a:rPr lang="en-US" sz="2200" b="1" kern="0" dirty="0">
+                <a:latin typeface="Aptos" panose="020B0004020202020204" pitchFamily="34" charset="0"/>
+                <a:ea typeface="Times New Roman" panose="02020603050405020304" pitchFamily="18" charset="0"/>
+                <a:cs typeface="Times New Roman" panose="02020603050405020304" pitchFamily="18" charset="0"/>
+              </a:rPr>
+              <a:t>The Meaning of Your New Role as Mentors</a:t>
+            </a:r>
+            <a:endParaRPr lang="en-US" sz="2200" kern="100" dirty="0">
+              <a:latin typeface="Aptos" panose="020B0004020202020204" pitchFamily="34" charset="0"/>
+              <a:ea typeface="Calibri" panose="020F0502020204030204" pitchFamily="34" charset="0"/>
+              <a:cs typeface="Times New Roman" panose="02020603050405020304" pitchFamily="18" charset="0"/>
+            </a:endParaRPr>
+          </a:p>
+          <a:p>
             <a:pPr marL="0" algn="just">
               <a:lnSpc>
                 <a:spcPct val="115000"/>
@@ -6110,32 +6327,194 @@
               </a:spcBef>
             </a:pPr>
             <a:r>
-              <a:rPr lang="en-US" sz="1500" kern="0" dirty="0">
+              <a:rPr lang="en-US" sz="2200" kern="0" dirty="0">
                 <a:latin typeface="Aptos" panose="020B0004020202020204" pitchFamily="34" charset="0"/>
                 <a:ea typeface="Times New Roman" panose="02020603050405020304" pitchFamily="18" charset="0"/>
                 <a:cs typeface="Times New Roman" panose="02020603050405020304" pitchFamily="18" charset="0"/>
               </a:rPr>
-              <a:t>You cannot hold these virtues without shaping those around you. If you are regarded as a leader, you must have a tangible, positive impact on others. The moment you rise to silk, you inherit not just prestige but also the duty to transfer those qualities to others. That is how the legacy of our profession is preserved.</a:t>
-            </a:r>
-            <a:endParaRPr lang="en-US" sz="1500" kern="100" dirty="0">
+              <a:t>Mentorship, in its truest form, is not a casual or accidental relationship. It is a deliberate commitment by a senior to guide, </a:t>
+            </a:r>
+            <a:r>
+              <a:rPr lang="en-US" sz="2200" kern="0" dirty="0" err="1">
+                <a:latin typeface="Aptos" panose="020B0004020202020204" pitchFamily="34" charset="0"/>
+                <a:ea typeface="Times New Roman" panose="02020603050405020304" pitchFamily="18" charset="0"/>
+                <a:cs typeface="Times New Roman" panose="02020603050405020304" pitchFamily="18" charset="0"/>
+              </a:rPr>
+              <a:t>mould</a:t>
+            </a:r>
+            <a:r>
+              <a:rPr lang="en-US" sz="2200" kern="0" dirty="0">
+                <a:latin typeface="Aptos" panose="020B0004020202020204" pitchFamily="34" charset="0"/>
+                <a:ea typeface="Times New Roman" panose="02020603050405020304" pitchFamily="18" charset="0"/>
+                <a:cs typeface="Times New Roman" panose="02020603050405020304" pitchFamily="18" charset="0"/>
+              </a:rPr>
+              <a:t>, and empower a junior. </a:t>
+            </a:r>
+            <a:endParaRPr lang="en-US" sz="2200" kern="0" dirty="0" smtClean="0">
+              <a:latin typeface="Aptos" panose="020B0004020202020204" pitchFamily="34" charset="0"/>
+              <a:ea typeface="Times New Roman" panose="02020603050405020304" pitchFamily="18" charset="0"/>
+              <a:cs typeface="Times New Roman" panose="02020603050405020304" pitchFamily="18" charset="0"/>
+            </a:endParaRPr>
+          </a:p>
+          <a:p>
+            <a:pPr marL="0" indent="0" algn="just">
+              <a:lnSpc>
+                <a:spcPct val="115000"/>
+              </a:lnSpc>
+              <a:spcBef>
+                <a:spcPts val="0"/>
+              </a:spcBef>
+              <a:buNone/>
+            </a:pPr>
+            <a:r>
+              <a:rPr lang="en-US" sz="2200" kern="0" dirty="0">
+                <a:latin typeface="Aptos" panose="020B0004020202020204" pitchFamily="34" charset="0"/>
+                <a:ea typeface="Times New Roman" panose="02020603050405020304" pitchFamily="18" charset="0"/>
+                <a:cs typeface="Times New Roman" panose="02020603050405020304" pitchFamily="18" charset="0"/>
+              </a:rPr>
+              <a:t> </a:t>
+            </a:r>
+            <a:endParaRPr lang="en-US" sz="2200" kern="100" dirty="0">
               <a:latin typeface="Aptos" panose="020B0004020202020204" pitchFamily="34" charset="0"/>
               <a:ea typeface="Calibri" panose="020F0502020204030204" pitchFamily="34" charset="0"/>
               <a:cs typeface="Times New Roman" panose="02020603050405020304" pitchFamily="18" charset="0"/>
             </a:endParaRPr>
           </a:p>
           <a:p>
-            <a:pPr marL="0" algn="just">
+            <a:pPr marL="342900" indent="-342900" algn="just">
               <a:lnSpc>
-                <a:spcPct val="107000"/>
+                <a:spcPct val="115000"/>
               </a:lnSpc>
               <a:spcBef>
                 <a:spcPts val="0"/>
               </a:spcBef>
-              <a:spcAft>
-                <a:spcPts val="800"/>
-              </a:spcAft>
+              <a:buFont typeface="Helvetica" panose="020B0604020202020204" pitchFamily="34" charset="0"/>
+              <a:buChar char="-"/>
             </a:pPr>
-            <a:endParaRPr lang="en-US" sz="1500" kern="100" dirty="0">
+            <a:r>
+              <a:rPr lang="en-US" sz="2200" kern="0" dirty="0">
+                <a:latin typeface="Aptos" panose="020B0004020202020204" pitchFamily="34" charset="0"/>
+                <a:ea typeface="Times New Roman" panose="02020603050405020304" pitchFamily="18" charset="0"/>
+                <a:cs typeface="Helvetica" panose="020B0604020202020204" pitchFamily="34" charset="0"/>
+              </a:rPr>
+              <a:t>You are expected to inspire younger lawyers by your conduct in and out of court.</a:t>
+            </a:r>
+            <a:endParaRPr lang="en-US" sz="2200" kern="100" dirty="0">
+              <a:latin typeface="Aptos" panose="020B0004020202020204" pitchFamily="34" charset="0"/>
+              <a:ea typeface="Times New Roman" panose="02020603050405020304" pitchFamily="18" charset="0"/>
+              <a:cs typeface="Helvetica" panose="020B0604020202020204" pitchFamily="34" charset="0"/>
+            </a:endParaRPr>
+          </a:p>
+          <a:p>
+            <a:pPr marL="342900" indent="-342900" algn="just">
+              <a:lnSpc>
+                <a:spcPct val="115000"/>
+              </a:lnSpc>
+              <a:spcBef>
+                <a:spcPts val="0"/>
+              </a:spcBef>
+              <a:buFont typeface="Helvetica" panose="020B0604020202020204" pitchFamily="34" charset="0"/>
+              <a:buChar char="-"/>
+            </a:pPr>
+            <a:r>
+              <a:rPr lang="en-US" sz="2200" kern="0" dirty="0">
+                <a:latin typeface="Aptos" panose="020B0004020202020204" pitchFamily="34" charset="0"/>
+                <a:ea typeface="Times New Roman" panose="02020603050405020304" pitchFamily="18" charset="0"/>
+                <a:cs typeface="Helvetica" panose="020B0604020202020204" pitchFamily="34" charset="0"/>
+              </a:rPr>
+              <a:t>You are expected to guide and </a:t>
+            </a:r>
+            <a:r>
+              <a:rPr lang="en-US" sz="2200" kern="0" dirty="0" err="1">
+                <a:latin typeface="Aptos" panose="020B0004020202020204" pitchFamily="34" charset="0"/>
+                <a:ea typeface="Times New Roman" panose="02020603050405020304" pitchFamily="18" charset="0"/>
+                <a:cs typeface="Helvetica" panose="020B0604020202020204" pitchFamily="34" charset="0"/>
+              </a:rPr>
+              <a:t>mould</a:t>
+            </a:r>
+            <a:r>
+              <a:rPr lang="en-US" sz="2200" kern="0" dirty="0">
+                <a:latin typeface="Aptos" panose="020B0004020202020204" pitchFamily="34" charset="0"/>
+                <a:ea typeface="Times New Roman" panose="02020603050405020304" pitchFamily="18" charset="0"/>
+                <a:cs typeface="Helvetica" panose="020B0604020202020204" pitchFamily="34" charset="0"/>
+              </a:rPr>
+              <a:t> those who look up to you, whether or not they are directly </a:t>
+            </a:r>
+            <a:r>
+              <a:rPr lang="en-US" sz="2200" kern="0" dirty="0" smtClean="0">
+                <a:latin typeface="Aptos" panose="020B0004020202020204" pitchFamily="34" charset="0"/>
+                <a:ea typeface="Times New Roman" panose="02020603050405020304" pitchFamily="18" charset="0"/>
+                <a:cs typeface="Helvetica" panose="020B0604020202020204" pitchFamily="34" charset="0"/>
+              </a:rPr>
+              <a:t>work with you</a:t>
+            </a:r>
+            <a:r>
+              <a:rPr lang="en-US" sz="2200" kern="0" dirty="0" smtClean="0">
+                <a:latin typeface="Aptos" panose="020B0004020202020204" pitchFamily="34" charset="0"/>
+                <a:ea typeface="Times New Roman" panose="02020603050405020304" pitchFamily="18" charset="0"/>
+                <a:cs typeface="Helvetica" panose="020B0604020202020204" pitchFamily="34" charset="0"/>
+              </a:rPr>
+              <a:t>.</a:t>
+            </a:r>
+            <a:endParaRPr lang="en-US" sz="2200" kern="100" dirty="0">
+              <a:latin typeface="Aptos" panose="020B0004020202020204" pitchFamily="34" charset="0"/>
+              <a:ea typeface="Times New Roman" panose="02020603050405020304" pitchFamily="18" charset="0"/>
+              <a:cs typeface="Helvetica" panose="020B0604020202020204" pitchFamily="34" charset="0"/>
+            </a:endParaRPr>
+          </a:p>
+          <a:p>
+            <a:pPr marL="342900" indent="-342900" algn="just">
+              <a:lnSpc>
+                <a:spcPct val="115000"/>
+              </a:lnSpc>
+              <a:spcBef>
+                <a:spcPts val="0"/>
+              </a:spcBef>
+              <a:buFont typeface="Helvetica" panose="020B0604020202020204" pitchFamily="34" charset="0"/>
+              <a:buChar char="-"/>
+            </a:pPr>
+            <a:r>
+              <a:rPr lang="en-US" sz="2200" kern="0" dirty="0">
+                <a:latin typeface="Aptos" panose="020B0004020202020204" pitchFamily="34" charset="0"/>
+                <a:ea typeface="Times New Roman" panose="02020603050405020304" pitchFamily="18" charset="0"/>
+                <a:cs typeface="Helvetica" panose="020B0604020202020204" pitchFamily="34" charset="0"/>
+              </a:rPr>
+              <a:t>You are expected to raise the bar, not merely in legal skill, but in ethics, </a:t>
+            </a:r>
+            <a:r>
+              <a:rPr lang="en-US" sz="2200" kern="0" dirty="0" smtClean="0">
+                <a:latin typeface="Aptos" panose="020B0004020202020204" pitchFamily="34" charset="0"/>
+                <a:ea typeface="Times New Roman" panose="02020603050405020304" pitchFamily="18" charset="0"/>
+                <a:cs typeface="Helvetica" panose="020B0604020202020204" pitchFamily="34" charset="0"/>
+              </a:rPr>
+              <a:t>empathy, humility and </a:t>
+            </a:r>
+            <a:r>
+              <a:rPr lang="en-US" sz="2200" kern="0" dirty="0">
+                <a:latin typeface="Aptos" panose="020B0004020202020204" pitchFamily="34" charset="0"/>
+                <a:ea typeface="Times New Roman" panose="02020603050405020304" pitchFamily="18" charset="0"/>
+                <a:cs typeface="Helvetica" panose="020B0604020202020204" pitchFamily="34" charset="0"/>
+              </a:rPr>
+              <a:t>service.</a:t>
+            </a:r>
+            <a:endParaRPr lang="en-US" sz="2200" kern="100" dirty="0">
+              <a:latin typeface="Aptos" panose="020B0004020202020204" pitchFamily="34" charset="0"/>
+              <a:ea typeface="Times New Roman" panose="02020603050405020304" pitchFamily="18" charset="0"/>
+              <a:cs typeface="Helvetica" panose="020B0604020202020204" pitchFamily="34" charset="0"/>
+            </a:endParaRPr>
+          </a:p>
+          <a:p>
+            <a:pPr marL="0" indent="0" algn="just">
+              <a:lnSpc>
+                <a:spcPct val="115000"/>
+              </a:lnSpc>
+              <a:spcBef>
+                <a:spcPts val="0"/>
+              </a:spcBef>
+              <a:buFont typeface="Arial" pitchFamily="34" charset="0"/>
+              <a:buNone/>
+            </a:pPr>
+            <a:endParaRPr lang="en-US" sz="2200" kern="100" dirty="0">
               <a:latin typeface="Aptos" panose="020B0004020202020204" pitchFamily="34" charset="0"/>
               <a:ea typeface="Calibri" panose="020F0502020204030204" pitchFamily="34" charset="0"/>
               <a:cs typeface="Times New Roman" panose="02020603050405020304" pitchFamily="18" charset="0"/>
@@ -6148,7 +6527,7 @@
           <p:cNvPr id="2" name="Rectangle 1">
             <a:extLst>
               <a:ext uri="{FF2B5EF4-FFF2-40B4-BE49-F238E27FC236}">
-                <a16:creationId xmlns:a16="http://schemas.microsoft.com/office/drawing/2014/main" id="{C6C03596-78EE-F1D9-A595-D1529ADE4334}"/>
+                <a16:creationId xmlns:a16="http://schemas.microsoft.com/office/drawing/2014/main" xmlns="" id="{C6C03596-78EE-F1D9-A595-D1529ADE4334}"/>
               </a:ext>
             </a:extLst>
           </p:cNvPr>
@@ -6241,7 +6620,7 @@
           <p:cNvPr id="10" name="Title 9">
             <a:extLst>
               <a:ext uri="{FF2B5EF4-FFF2-40B4-BE49-F238E27FC236}">
-                <a16:creationId xmlns:a16="http://schemas.microsoft.com/office/drawing/2014/main" id="{4EB7BA3F-919D-7BBF-8C31-DAD5CBC47646}"/>
+                <a16:creationId xmlns:a16="http://schemas.microsoft.com/office/drawing/2014/main" xmlns="" id="{4EB7BA3F-919D-7BBF-8C31-DAD5CBC47646}"/>
               </a:ext>
             </a:extLst>
           </p:cNvPr>
@@ -6287,7 +6666,7 @@
           <p:cNvPr id="19" name="Content Placeholder 2">
             <a:extLst>
               <a:ext uri="{FF2B5EF4-FFF2-40B4-BE49-F238E27FC236}">
-                <a16:creationId xmlns:a16="http://schemas.microsoft.com/office/drawing/2014/main" id="{98349F09-71B1-87BB-EA53-81192F0663CA}"/>
+                <a16:creationId xmlns:a16="http://schemas.microsoft.com/office/drawing/2014/main" xmlns="" id="{98349F09-71B1-87BB-EA53-81192F0663CA}"/>
               </a:ext>
             </a:extLst>
           </p:cNvPr>
@@ -6299,7 +6678,7 @@
         <p:spPr>
           <a:xfrm>
             <a:off x="1465783" y="1196752"/>
-            <a:ext cx="9868241" cy="5179584"/>
+            <a:ext cx="9868241" cy="5472608"/>
           </a:xfrm>
           <a:prstGeom prst="rect">
             <a:avLst/>
@@ -6460,7 +6839,7 @@
               <a:buNone/>
             </a:pPr>
             <a:r>
-              <a:rPr lang="en-US" sz="2000" kern="100" dirty="0">
+              <a:rPr lang="en-US" sz="2400" kern="100" dirty="0">
                 <a:solidFill>
                   <a:prstClr val="black"/>
                 </a:solidFill>
@@ -6485,7 +6864,7 @@
               <a:buNone/>
             </a:pPr>
             <a:r>
-              <a:rPr lang="en-US" sz="2000" kern="100" dirty="0">
+              <a:rPr lang="en-US" sz="2400" kern="100" dirty="0">
                 <a:solidFill>
                   <a:prstClr val="black"/>
                 </a:solidFill>
@@ -6493,23 +6872,10 @@
                 <a:ea typeface="Calibri" panose="020F0502020204030204" pitchFamily="34" charset="0"/>
                 <a:cs typeface="Times New Roman" panose="02020603050405020304" pitchFamily="18" charset="0"/>
               </a:rPr>
-              <a:t>It encompasses:</a:t>
-            </a:r>
-          </a:p>
-          <a:p>
-            <a:pPr marL="0" algn="just">
-              <a:lnSpc>
-                <a:spcPct val="107000"/>
-              </a:lnSpc>
-              <a:spcBef>
-                <a:spcPts val="0"/>
-              </a:spcBef>
-              <a:spcAft>
-                <a:spcPts val="800"/>
-              </a:spcAft>
-            </a:pPr>
-            <a:r>
-              <a:rPr lang="en-US" sz="2000" b="1" kern="100" dirty="0">
+              <a:t>It encompasses</a:t>
+            </a:r>
+            <a:r>
+              <a:rPr lang="en-US" sz="2400" kern="100" dirty="0" smtClean="0">
                 <a:solidFill>
                   <a:prstClr val="black"/>
                 </a:solidFill>
@@ -6517,18 +6883,7 @@
                 <a:ea typeface="Calibri" panose="020F0502020204030204" pitchFamily="34" charset="0"/>
                 <a:cs typeface="Times New Roman" panose="02020603050405020304" pitchFamily="18" charset="0"/>
               </a:rPr>
-              <a:t>Technical Knowledge:</a:t>
-            </a:r>
-            <a:r>
-              <a:rPr lang="en-US" sz="2000" kern="100" dirty="0">
-                <a:solidFill>
-                  <a:prstClr val="black"/>
-                </a:solidFill>
-                <a:latin typeface="Aptos" panose="020B0004020202020204" pitchFamily="34" charset="0"/>
-                <a:ea typeface="Calibri" panose="020F0502020204030204" pitchFamily="34" charset="0"/>
-                <a:cs typeface="Times New Roman" panose="02020603050405020304" pitchFamily="18" charset="0"/>
-              </a:rPr>
-              <a:t> "Mastery of procedure, advocacy skills, case management, and adaptation to new tools, including technology and mastery of the law.“</a:t>
+              <a:t>:</a:t>
             </a:r>
           </a:p>
           <a:p>
@@ -6544,7 +6899,7 @@
               </a:spcAft>
               <a:buNone/>
             </a:pPr>
-            <a:endParaRPr lang="en-US" sz="2000" kern="100" dirty="0">
+            <a:endParaRPr lang="en-US" sz="500" kern="100" dirty="0">
               <a:solidFill>
                 <a:prstClr val="black"/>
               </a:solidFill>
@@ -6566,7 +6921,7 @@
               </a:spcAft>
             </a:pPr>
             <a:r>
-              <a:rPr lang="en-US" sz="2000" b="1" kern="100" dirty="0">
+              <a:rPr lang="en-US" sz="2400" b="1" kern="100" dirty="0">
                 <a:solidFill>
                   <a:prstClr val="black"/>
                 </a:solidFill>
@@ -6574,10 +6929,10 @@
                 <a:ea typeface="Calibri" panose="020F0502020204030204" pitchFamily="34" charset="0"/>
                 <a:cs typeface="Times New Roman" panose="02020603050405020304" pitchFamily="18" charset="0"/>
               </a:rPr>
-              <a:t>Moral Knowledge:</a:t>
-            </a:r>
-            <a:r>
-              <a:rPr lang="en-US" sz="2000" kern="100" dirty="0">
+              <a:t>Technical Knowledge:</a:t>
+            </a:r>
+            <a:r>
+              <a:rPr lang="en-US" sz="2400" kern="100" dirty="0">
                 <a:solidFill>
                   <a:prstClr val="black"/>
                 </a:solidFill>
@@ -6585,51 +6940,7 @@
                 <a:ea typeface="Calibri" panose="020F0502020204030204" pitchFamily="34" charset="0"/>
                 <a:cs typeface="Times New Roman" panose="02020603050405020304" pitchFamily="18" charset="0"/>
               </a:rPr>
-              <a:t> "Upholding </a:t>
-            </a:r>
-            <a:r>
-              <a:rPr lang="en-US" sz="2000" kern="100" dirty="0" err="1">
-                <a:solidFill>
-                  <a:prstClr val="black"/>
-                </a:solidFill>
-                <a:latin typeface="Aptos" panose="020B0004020202020204" pitchFamily="34" charset="0"/>
-                <a:ea typeface="Calibri" panose="020F0502020204030204" pitchFamily="34" charset="0"/>
-                <a:cs typeface="Times New Roman" panose="02020603050405020304" pitchFamily="18" charset="0"/>
-              </a:rPr>
-              <a:t>candour</a:t>
-            </a:r>
-            <a:r>
-              <a:rPr lang="en-US" sz="2000" kern="100" dirty="0">
-                <a:solidFill>
-                  <a:prstClr val="black"/>
-                </a:solidFill>
-                <a:latin typeface="Aptos" panose="020B0004020202020204" pitchFamily="34" charset="0"/>
-                <a:ea typeface="Calibri" panose="020F0502020204030204" pitchFamily="34" charset="0"/>
-                <a:cs typeface="Times New Roman" panose="02020603050405020304" pitchFamily="18" charset="0"/>
-              </a:rPr>
-              <a:t> to the court, honesty to clients, and fairness to colleagues, passing on the virtues of honesty, </a:t>
-            </a:r>
-            <a:r>
-              <a:rPr lang="en-US" sz="2000" kern="100" dirty="0" err="1">
-                <a:solidFill>
-                  <a:prstClr val="black"/>
-                </a:solidFill>
-                <a:latin typeface="Aptos" panose="020B0004020202020204" pitchFamily="34" charset="0"/>
-                <a:ea typeface="Calibri" panose="020F0502020204030204" pitchFamily="34" charset="0"/>
-                <a:cs typeface="Times New Roman" panose="02020603050405020304" pitchFamily="18" charset="0"/>
-              </a:rPr>
-              <a:t>hardwork</a:t>
-            </a:r>
-            <a:r>
-              <a:rPr lang="en-US" sz="2000" kern="100" dirty="0">
-                <a:solidFill>
-                  <a:prstClr val="black"/>
-                </a:solidFill>
-                <a:latin typeface="Aptos" panose="020B0004020202020204" pitchFamily="34" charset="0"/>
-                <a:ea typeface="Calibri" panose="020F0502020204030204" pitchFamily="34" charset="0"/>
-                <a:cs typeface="Times New Roman" panose="02020603050405020304" pitchFamily="18" charset="0"/>
-              </a:rPr>
-              <a:t>, gratitude, fairness etc.“</a:t>
+              <a:t> "Mastery of procedure, advocacy skills, case management, and adaptation to new tools, including technology and mastery of the law.“</a:t>
             </a:r>
           </a:p>
           <a:p>
@@ -6645,7 +6956,7 @@
               </a:spcAft>
               <a:buNone/>
             </a:pPr>
-            <a:endParaRPr lang="en-US" sz="2000" kern="100" dirty="0">
+            <a:endParaRPr lang="en-US" sz="100" kern="100" dirty="0" smtClean="0">
               <a:solidFill>
                 <a:prstClr val="black"/>
               </a:solidFill>
@@ -6667,8 +6978,29 @@
               </a:spcAft>
               <a:buNone/>
             </a:pPr>
-            <a:r>
-              <a:rPr lang="en-US" sz="2000" kern="100" dirty="0">
+            <a:endParaRPr lang="en-US" sz="800" kern="100" dirty="0">
+              <a:solidFill>
+                <a:prstClr val="black"/>
+              </a:solidFill>
+              <a:latin typeface="Aptos" panose="020B0004020202020204" pitchFamily="34" charset="0"/>
+              <a:ea typeface="Calibri" panose="020F0502020204030204" pitchFamily="34" charset="0"/>
+              <a:cs typeface="Times New Roman" panose="02020603050405020304" pitchFamily="18" charset="0"/>
+            </a:endParaRPr>
+          </a:p>
+          <a:p>
+            <a:pPr marL="0" algn="just">
+              <a:lnSpc>
+                <a:spcPct val="107000"/>
+              </a:lnSpc>
+              <a:spcBef>
+                <a:spcPts val="0"/>
+              </a:spcBef>
+              <a:spcAft>
+                <a:spcPts val="800"/>
+              </a:spcAft>
+            </a:pPr>
+            <a:r>
+              <a:rPr lang="en-US" sz="2400" b="1" kern="100" dirty="0">
                 <a:solidFill>
                   <a:prstClr val="black"/>
                 </a:solidFill>
@@ -6676,7 +7008,172 @@
                 <a:ea typeface="Calibri" panose="020F0502020204030204" pitchFamily="34" charset="0"/>
                 <a:cs typeface="Times New Roman" panose="02020603050405020304" pitchFamily="18" charset="0"/>
               </a:rPr>
-              <a:t>SANs must consciously transfer both types of knowledge. Without structured transfer, the profession risks "decline, with each generation reinventing the wheel rather than building on solid foundations." The ultimate question for a SAN is: "Will I be remembered not just for my victories in court, but for the legacy I leave behind?"</a:t>
+              <a:t>Moral Knowledge:</a:t>
+            </a:r>
+            <a:r>
+              <a:rPr lang="en-US" sz="2400" kern="100" dirty="0">
+                <a:solidFill>
+                  <a:prstClr val="black"/>
+                </a:solidFill>
+                <a:latin typeface="Aptos" panose="020B0004020202020204" pitchFamily="34" charset="0"/>
+                <a:ea typeface="Calibri" panose="020F0502020204030204" pitchFamily="34" charset="0"/>
+                <a:cs typeface="Times New Roman" panose="02020603050405020304" pitchFamily="18" charset="0"/>
+              </a:rPr>
+              <a:t> "Upholding </a:t>
+            </a:r>
+            <a:r>
+              <a:rPr lang="en-US" sz="2400" kern="100" dirty="0" err="1">
+                <a:solidFill>
+                  <a:prstClr val="black"/>
+                </a:solidFill>
+                <a:latin typeface="Aptos" panose="020B0004020202020204" pitchFamily="34" charset="0"/>
+                <a:ea typeface="Calibri" panose="020F0502020204030204" pitchFamily="34" charset="0"/>
+                <a:cs typeface="Times New Roman" panose="02020603050405020304" pitchFamily="18" charset="0"/>
+              </a:rPr>
+              <a:t>candour</a:t>
+            </a:r>
+            <a:r>
+              <a:rPr lang="en-US" sz="2400" kern="100" dirty="0">
+                <a:solidFill>
+                  <a:prstClr val="black"/>
+                </a:solidFill>
+                <a:latin typeface="Aptos" panose="020B0004020202020204" pitchFamily="34" charset="0"/>
+                <a:ea typeface="Calibri" panose="020F0502020204030204" pitchFamily="34" charset="0"/>
+                <a:cs typeface="Times New Roman" panose="02020603050405020304" pitchFamily="18" charset="0"/>
+              </a:rPr>
+              <a:t> to the court, honesty to clients, and fairness to colleagues, passing on the virtues of honesty, </a:t>
+            </a:r>
+            <a:r>
+              <a:rPr lang="en-US" sz="2400" kern="100" dirty="0" err="1">
+                <a:solidFill>
+                  <a:prstClr val="black"/>
+                </a:solidFill>
+                <a:latin typeface="Aptos" panose="020B0004020202020204" pitchFamily="34" charset="0"/>
+                <a:ea typeface="Calibri" panose="020F0502020204030204" pitchFamily="34" charset="0"/>
+                <a:cs typeface="Times New Roman" panose="02020603050405020304" pitchFamily="18" charset="0"/>
+              </a:rPr>
+              <a:t>hardwork</a:t>
+            </a:r>
+            <a:r>
+              <a:rPr lang="en-US" sz="2400" kern="100" dirty="0">
+                <a:solidFill>
+                  <a:prstClr val="black"/>
+                </a:solidFill>
+                <a:latin typeface="Aptos" panose="020B0004020202020204" pitchFamily="34" charset="0"/>
+                <a:ea typeface="Calibri" panose="020F0502020204030204" pitchFamily="34" charset="0"/>
+                <a:cs typeface="Times New Roman" panose="02020603050405020304" pitchFamily="18" charset="0"/>
+              </a:rPr>
+              <a:t>, </a:t>
+            </a:r>
+            <a:r>
+              <a:rPr lang="en-US" sz="2400" kern="100" dirty="0" smtClean="0">
+                <a:solidFill>
+                  <a:prstClr val="black"/>
+                </a:solidFill>
+                <a:latin typeface="Aptos" panose="020B0004020202020204" pitchFamily="34" charset="0"/>
+                <a:ea typeface="Calibri" panose="020F0502020204030204" pitchFamily="34" charset="0"/>
+                <a:cs typeface="Times New Roman" panose="02020603050405020304" pitchFamily="18" charset="0"/>
+              </a:rPr>
+              <a:t>empathy, gratitude</a:t>
+            </a:r>
+            <a:r>
+              <a:rPr lang="en-US" sz="2400" kern="100" dirty="0">
+                <a:solidFill>
+                  <a:prstClr val="black"/>
+                </a:solidFill>
+                <a:latin typeface="Aptos" panose="020B0004020202020204" pitchFamily="34" charset="0"/>
+                <a:ea typeface="Calibri" panose="020F0502020204030204" pitchFamily="34" charset="0"/>
+                <a:cs typeface="Times New Roman" panose="02020603050405020304" pitchFamily="18" charset="0"/>
+              </a:rPr>
+              <a:t>, fairness </a:t>
+            </a:r>
+            <a:r>
+              <a:rPr lang="en-US" sz="2400" kern="100" dirty="0" smtClean="0">
+                <a:solidFill>
+                  <a:prstClr val="black"/>
+                </a:solidFill>
+                <a:latin typeface="Aptos" panose="020B0004020202020204" pitchFamily="34" charset="0"/>
+                <a:ea typeface="Calibri" panose="020F0502020204030204" pitchFamily="34" charset="0"/>
+                <a:cs typeface="Times New Roman" panose="02020603050405020304" pitchFamily="18" charset="0"/>
+              </a:rPr>
+              <a:t>and fear of God“</a:t>
+            </a:r>
+            <a:endParaRPr lang="en-US" sz="2400" kern="100" dirty="0">
+              <a:solidFill>
+                <a:prstClr val="black"/>
+              </a:solidFill>
+              <a:latin typeface="Aptos" panose="020B0004020202020204" pitchFamily="34" charset="0"/>
+              <a:ea typeface="Calibri" panose="020F0502020204030204" pitchFamily="34" charset="0"/>
+              <a:cs typeface="Times New Roman" panose="02020603050405020304" pitchFamily="18" charset="0"/>
+            </a:endParaRPr>
+          </a:p>
+          <a:p>
+            <a:pPr marL="0" indent="0" algn="just">
+              <a:lnSpc>
+                <a:spcPct val="107000"/>
+              </a:lnSpc>
+              <a:spcBef>
+                <a:spcPts val="0"/>
+              </a:spcBef>
+              <a:spcAft>
+                <a:spcPts val="800"/>
+              </a:spcAft>
+              <a:buNone/>
+            </a:pPr>
+            <a:endParaRPr lang="en-US" sz="100" kern="100" dirty="0">
+              <a:solidFill>
+                <a:prstClr val="black"/>
+              </a:solidFill>
+              <a:latin typeface="Aptos" panose="020B0004020202020204" pitchFamily="34" charset="0"/>
+              <a:ea typeface="Calibri" panose="020F0502020204030204" pitchFamily="34" charset="0"/>
+              <a:cs typeface="Times New Roman" panose="02020603050405020304" pitchFamily="18" charset="0"/>
+            </a:endParaRPr>
+          </a:p>
+          <a:p>
+            <a:pPr marL="0" indent="0" algn="just">
+              <a:lnSpc>
+                <a:spcPct val="107000"/>
+              </a:lnSpc>
+              <a:spcBef>
+                <a:spcPts val="0"/>
+              </a:spcBef>
+              <a:spcAft>
+                <a:spcPts val="800"/>
+              </a:spcAft>
+              <a:buNone/>
+            </a:pPr>
+            <a:r>
+              <a:rPr lang="en-US" sz="2400" kern="100" dirty="0">
+                <a:solidFill>
+                  <a:prstClr val="black"/>
+                </a:solidFill>
+                <a:latin typeface="Aptos" panose="020B0004020202020204" pitchFamily="34" charset="0"/>
+                <a:ea typeface="Calibri" panose="020F0502020204030204" pitchFamily="34" charset="0"/>
+                <a:cs typeface="Times New Roman" panose="02020603050405020304" pitchFamily="18" charset="0"/>
+              </a:rPr>
+              <a:t>SANs must consciously transfer both types of knowledge. Without structured transfer, the profession risks "decline, with each generation reinventing the wheel rather than building on solid foundations." The ultimate question for a SAN is: "Will I be remembered not just for my victories in court, but for the legacy I </a:t>
+            </a:r>
+            <a:r>
+              <a:rPr lang="en-US" sz="2400" kern="100" dirty="0" smtClean="0">
+                <a:solidFill>
+                  <a:prstClr val="black"/>
+                </a:solidFill>
+                <a:latin typeface="Aptos" panose="020B0004020202020204" pitchFamily="34" charset="0"/>
+                <a:ea typeface="Calibri" panose="020F0502020204030204" pitchFamily="34" charset="0"/>
+                <a:cs typeface="Times New Roman" panose="02020603050405020304" pitchFamily="18" charset="0"/>
+              </a:rPr>
+              <a:t>left </a:t>
+            </a:r>
+            <a:r>
+              <a:rPr lang="en-US" sz="2400" kern="100" dirty="0">
+                <a:solidFill>
+                  <a:prstClr val="black"/>
+                </a:solidFill>
+                <a:latin typeface="Aptos" panose="020B0004020202020204" pitchFamily="34" charset="0"/>
+                <a:ea typeface="Calibri" panose="020F0502020204030204" pitchFamily="34" charset="0"/>
+                <a:cs typeface="Times New Roman" panose="02020603050405020304" pitchFamily="18" charset="0"/>
+              </a:rPr>
+              <a:t>behind?"</a:t>
             </a:r>
           </a:p>
         </p:txBody>
@@ -6686,7 +7183,7 @@
           <p:cNvPr id="5" name="Group 4">
             <a:extLst>
               <a:ext uri="{FF2B5EF4-FFF2-40B4-BE49-F238E27FC236}">
-                <a16:creationId xmlns:a16="http://schemas.microsoft.com/office/drawing/2014/main" id="{6F7A4F78-CE5F-0172-9CB8-6A8FC661E79B}"/>
+                <a16:creationId xmlns:a16="http://schemas.microsoft.com/office/drawing/2014/main" xmlns="" id="{6F7A4F78-CE5F-0172-9CB8-6A8FC661E79B}"/>
               </a:ext>
             </a:extLst>
           </p:cNvPr>
@@ -6706,7 +7203,7 @@
             <p:cNvPr id="6" name="Chevron 32">
               <a:extLst>
                 <a:ext uri="{FF2B5EF4-FFF2-40B4-BE49-F238E27FC236}">
-                  <a16:creationId xmlns:a16="http://schemas.microsoft.com/office/drawing/2014/main" id="{EFB21ADE-212E-BE42-5879-8F47963191B8}"/>
+                  <a16:creationId xmlns:a16="http://schemas.microsoft.com/office/drawing/2014/main" xmlns="" id="{EFB21ADE-212E-BE42-5879-8F47963191B8}"/>
                 </a:ext>
               </a:extLst>
             </p:cNvPr>
@@ -6783,7 +7280,7 @@
             <p:cNvPr id="7" name="Parallelogram 6">
               <a:extLst>
                 <a:ext uri="{FF2B5EF4-FFF2-40B4-BE49-F238E27FC236}">
-                  <a16:creationId xmlns:a16="http://schemas.microsoft.com/office/drawing/2014/main" id="{06F03E46-4DD3-9E96-E5CC-BEAA3389370D}"/>
+                  <a16:creationId xmlns:a16="http://schemas.microsoft.com/office/drawing/2014/main" xmlns="" id="{06F03E46-4DD3-9E96-E5CC-BEAA3389370D}"/>
                 </a:ext>
               </a:extLst>
             </p:cNvPr>
@@ -6852,7 +7349,7 @@
           <p:cNvPr id="14" name="Group 13">
             <a:extLst>
               <a:ext uri="{FF2B5EF4-FFF2-40B4-BE49-F238E27FC236}">
-                <a16:creationId xmlns:a16="http://schemas.microsoft.com/office/drawing/2014/main" id="{ED935837-004A-FF29-6F18-A0DEE359D9AC}"/>
+                <a16:creationId xmlns:a16="http://schemas.microsoft.com/office/drawing/2014/main" xmlns="" id="{ED935837-004A-FF29-6F18-A0DEE359D9AC}"/>
               </a:ext>
             </a:extLst>
           </p:cNvPr>
@@ -6872,7 +7369,7 @@
             <p:cNvPr id="15" name="Chevron 2">
               <a:extLst>
                 <a:ext uri="{FF2B5EF4-FFF2-40B4-BE49-F238E27FC236}">
-                  <a16:creationId xmlns:a16="http://schemas.microsoft.com/office/drawing/2014/main" id="{0827B438-AE85-F8D8-AE9B-3C8E3F2C9F9B}"/>
+                  <a16:creationId xmlns:a16="http://schemas.microsoft.com/office/drawing/2014/main" xmlns="" id="{0827B438-AE85-F8D8-AE9B-3C8E3F2C9F9B}"/>
                 </a:ext>
               </a:extLst>
             </p:cNvPr>
@@ -6936,7 +7433,7 @@
             <p:cNvPr id="17" name="Parallelogram 16">
               <a:extLst>
                 <a:ext uri="{FF2B5EF4-FFF2-40B4-BE49-F238E27FC236}">
-                  <a16:creationId xmlns:a16="http://schemas.microsoft.com/office/drawing/2014/main" id="{33E28210-4DDB-78AB-53FA-A8931A8988F4}"/>
+                  <a16:creationId xmlns:a16="http://schemas.microsoft.com/office/drawing/2014/main" xmlns="" id="{33E28210-4DDB-78AB-53FA-A8931A8988F4}"/>
                 </a:ext>
               </a:extLst>
             </p:cNvPr>
@@ -7005,7 +7502,7 @@
           <p:cNvPr id="29" name="Group 28">
             <a:extLst>
               <a:ext uri="{FF2B5EF4-FFF2-40B4-BE49-F238E27FC236}">
-                <a16:creationId xmlns:a16="http://schemas.microsoft.com/office/drawing/2014/main" id="{608B0FE6-54C3-BBE2-710D-DE7EF0EABA47}"/>
+                <a16:creationId xmlns:a16="http://schemas.microsoft.com/office/drawing/2014/main" xmlns="" id="{608B0FE6-54C3-BBE2-710D-DE7EF0EABA47}"/>
               </a:ext>
             </a:extLst>
           </p:cNvPr>
@@ -7025,7 +7522,7 @@
             <p:cNvPr id="27" name="Rectangle 26">
               <a:extLst>
                 <a:ext uri="{FF2B5EF4-FFF2-40B4-BE49-F238E27FC236}">
-                  <a16:creationId xmlns:a16="http://schemas.microsoft.com/office/drawing/2014/main" id="{CBA39F5B-4BDD-06EA-0F44-3E561AEE3586}"/>
+                  <a16:creationId xmlns:a16="http://schemas.microsoft.com/office/drawing/2014/main" xmlns="" id="{CBA39F5B-4BDD-06EA-0F44-3E561AEE3586}"/>
                 </a:ext>
               </a:extLst>
             </p:cNvPr>
@@ -7086,7 +7583,7 @@
             <p:cNvPr id="28" name="Shape">
               <a:extLst>
                 <a:ext uri="{FF2B5EF4-FFF2-40B4-BE49-F238E27FC236}">
-                  <a16:creationId xmlns:a16="http://schemas.microsoft.com/office/drawing/2014/main" id="{563A65FD-1A48-9526-6327-C06278CDA5AD}"/>
+                  <a16:creationId xmlns:a16="http://schemas.microsoft.com/office/drawing/2014/main" xmlns="" id="{563A65FD-1A48-9526-6327-C06278CDA5AD}"/>
                 </a:ext>
               </a:extLst>
             </p:cNvPr>
@@ -7392,7 +7889,7 @@
           <p:cNvPr id="30" name="Rectangle 29">
             <a:extLst>
               <a:ext uri="{FF2B5EF4-FFF2-40B4-BE49-F238E27FC236}">
-                <a16:creationId xmlns:a16="http://schemas.microsoft.com/office/drawing/2014/main" id="{C6A1C433-5274-2B15-9362-3C47BB8607E8}"/>
+                <a16:creationId xmlns:a16="http://schemas.microsoft.com/office/drawing/2014/main" xmlns="" id="{C6A1C433-5274-2B15-9362-3C47BB8607E8}"/>
               </a:ext>
             </a:extLst>
           </p:cNvPr>
@@ -7485,7 +7982,7 @@
           <p:cNvPr id="10" name="Title 9">
             <a:extLst>
               <a:ext uri="{FF2B5EF4-FFF2-40B4-BE49-F238E27FC236}">
-                <a16:creationId xmlns:a16="http://schemas.microsoft.com/office/drawing/2014/main" id="{4EB7BA3F-919D-7BBF-8C31-DAD5CBC47646}"/>
+                <a16:creationId xmlns:a16="http://schemas.microsoft.com/office/drawing/2014/main" xmlns="" id="{4EB7BA3F-919D-7BBF-8C31-DAD5CBC47646}"/>
               </a:ext>
             </a:extLst>
           </p:cNvPr>
@@ -7515,14 +8012,20 @@
               </a:spcBef>
             </a:pPr>
             <a:r>
-              <a:rPr lang="en-US" sz="1400" dirty="0">
+              <a:rPr lang="en-US" sz="2800" b="1" dirty="0" smtClean="0">
                 <a:solidFill>
                   <a:prstClr val="black"/>
                 </a:solidFill>
                 <a:latin typeface="Aptos" panose="020B0004020202020204" pitchFamily="34" charset="0"/>
               </a:rPr>
-              <a:t>Mentorship: Skill Transfer</a:t>
-            </a:r>
+              <a:t>Understanding Mentorship;  A necessary mindset shift</a:t>
+            </a:r>
+            <a:endParaRPr lang="en-US" sz="2800" b="1" dirty="0">
+              <a:solidFill>
+                <a:prstClr val="black"/>
+              </a:solidFill>
+              <a:latin typeface="Aptos" panose="020B0004020202020204" pitchFamily="34" charset="0"/>
+            </a:endParaRPr>
           </a:p>
         </p:txBody>
       </p:sp>
@@ -7531,7 +8034,7 @@
           <p:cNvPr id="19" name="Content Placeholder 2">
             <a:extLst>
               <a:ext uri="{FF2B5EF4-FFF2-40B4-BE49-F238E27FC236}">
-                <a16:creationId xmlns:a16="http://schemas.microsoft.com/office/drawing/2014/main" id="{98349F09-71B1-87BB-EA53-81192F0663CA}"/>
+                <a16:creationId xmlns:a16="http://schemas.microsoft.com/office/drawing/2014/main" xmlns="" id="{98349F09-71B1-87BB-EA53-81192F0663CA}"/>
               </a:ext>
             </a:extLst>
           </p:cNvPr>
@@ -7542,8 +8045,8 @@
         </p:nvSpPr>
         <p:spPr>
           <a:xfrm>
-            <a:off x="829511" y="589579"/>
-            <a:ext cx="9505056" cy="5971671"/>
+            <a:off x="351008" y="589579"/>
+            <a:ext cx="9983559" cy="5971671"/>
           </a:xfrm>
           <a:prstGeom prst="rect">
             <a:avLst/>
@@ -7735,7 +8238,7 @@
               <a:buChar char="§"/>
             </a:pPr>
             <a:r>
-              <a:rPr lang="en-US" sz="1400" b="1" kern="0" dirty="0">
+              <a:rPr lang="en-US" sz="1600" b="1" kern="0" dirty="0">
                 <a:latin typeface="Aptos" panose="020B0004020202020204" pitchFamily="34" charset="0"/>
                 <a:ea typeface="Times New Roman" panose="02020603050405020304" pitchFamily="18" charset="0"/>
                 <a:cs typeface="Times New Roman" panose="02020603050405020304" pitchFamily="18" charset="0"/>
@@ -7743,14 +8246,14 @@
               <a:t>Character formation:</a:t>
             </a:r>
             <a:r>
-              <a:rPr lang="en-US" sz="1400" kern="0" dirty="0">
+              <a:rPr lang="en-US" sz="1600" kern="0" dirty="0">
                 <a:latin typeface="Aptos" panose="020B0004020202020204" pitchFamily="34" charset="0"/>
                 <a:ea typeface="Times New Roman" panose="02020603050405020304" pitchFamily="18" charset="0"/>
                 <a:cs typeface="Times New Roman" panose="02020603050405020304" pitchFamily="18" charset="0"/>
               </a:rPr>
               <a:t> Instilling integrity, discipline, and respect for professional ethics in yourself first. As you cannot give what you do not have.</a:t>
             </a:r>
-            <a:endParaRPr lang="en-US" sz="1400" kern="100" dirty="0">
+            <a:endParaRPr lang="en-US" sz="1600" kern="100" dirty="0">
               <a:latin typeface="Aptos" panose="020B0004020202020204" pitchFamily="34" charset="0"/>
               <a:ea typeface="Calibri" panose="020F0502020204030204" pitchFamily="34" charset="0"/>
               <a:cs typeface="Times New Roman" panose="02020603050405020304" pitchFamily="18" charset="0"/>
@@ -7771,7 +8274,7 @@
               <a:buChar char="§"/>
             </a:pPr>
             <a:r>
-              <a:rPr lang="en-US" sz="1400" b="1" kern="0" dirty="0">
+              <a:rPr lang="en-US" sz="1600" b="1" kern="0" dirty="0">
                 <a:latin typeface="Aptos" panose="020B0004020202020204" pitchFamily="34" charset="0"/>
                 <a:ea typeface="Times New Roman" panose="02020603050405020304" pitchFamily="18" charset="0"/>
                 <a:cs typeface="Times New Roman" panose="02020603050405020304" pitchFamily="18" charset="0"/>
@@ -7779,7 +8282,7 @@
               <a:t>Skill refinement:</a:t>
             </a:r>
             <a:r>
-              <a:rPr lang="en-US" sz="1400" kern="0" dirty="0">
+              <a:rPr lang="en-US" sz="1600" kern="0" dirty="0">
                 <a:latin typeface="Aptos" panose="020B0004020202020204" pitchFamily="34" charset="0"/>
                 <a:ea typeface="Times New Roman" panose="02020603050405020304" pitchFamily="18" charset="0"/>
                 <a:cs typeface="Times New Roman" panose="02020603050405020304" pitchFamily="18" charset="0"/>
@@ -7787,14 +8290,14 @@
               <a:t> Passing on the craft of advocacy: - research, articulation, persuasion, and decorum</a:t>
             </a:r>
             <a:r>
-              <a:rPr lang="en-US" sz="1400" b="1" kern="0" dirty="0">
+              <a:rPr lang="en-US" sz="1600" b="1" kern="0" dirty="0">
                 <a:latin typeface="Aptos" panose="020B0004020202020204" pitchFamily="34" charset="0"/>
                 <a:ea typeface="Times New Roman" panose="02020603050405020304" pitchFamily="18" charset="0"/>
                 <a:cs typeface="Times New Roman" panose="02020603050405020304" pitchFamily="18" charset="0"/>
               </a:rPr>
               <a:t>.</a:t>
             </a:r>
-            <a:endParaRPr lang="en-US" sz="1400" kern="100" dirty="0">
+            <a:endParaRPr lang="en-US" sz="1600" kern="100" dirty="0">
               <a:latin typeface="Aptos" panose="020B0004020202020204" pitchFamily="34" charset="0"/>
               <a:ea typeface="Calibri" panose="020F0502020204030204" pitchFamily="34" charset="0"/>
               <a:cs typeface="Times New Roman" panose="02020603050405020304" pitchFamily="18" charset="0"/>
@@ -7810,30 +8313,22 @@
               </a:spcBef>
             </a:pPr>
             <a:r>
-              <a:rPr lang="en-US" sz="1400" b="1" kern="0">
+              <a:rPr lang="en-US" sz="1600" b="1" kern="0" dirty="0">
                 <a:latin typeface="Aptos" panose="020B0004020202020204" pitchFamily="34" charset="0"/>
                 <a:ea typeface="Times New Roman" panose="02020603050405020304" pitchFamily="18" charset="0"/>
                 <a:cs typeface="Times New Roman" panose="02020603050405020304" pitchFamily="18" charset="0"/>
               </a:rPr>
-              <a:t>Recognizing  </a:t>
-            </a:r>
-            <a:r>
-              <a:rPr lang="en-US" sz="1400" b="1" kern="0" dirty="0">
+              <a:t>Recognizing  the Presumption of Leadership: </a:t>
+            </a:r>
+            <a:r>
+              <a:rPr lang="en-US" sz="1600" kern="0" dirty="0">
                 <a:latin typeface="Aptos" panose="020B0004020202020204" pitchFamily="34" charset="0"/>
                 <a:ea typeface="Times New Roman" panose="02020603050405020304" pitchFamily="18" charset="0"/>
                 <a:cs typeface="Times New Roman" panose="02020603050405020304" pitchFamily="18" charset="0"/>
               </a:rPr>
-              <a:t>the Presumption of Leadership: </a:t>
-            </a:r>
-            <a:r>
-              <a:rPr lang="en-US" sz="1400" kern="0" dirty="0">
-                <a:latin typeface="Aptos" panose="020B0004020202020204" pitchFamily="34" charset="0"/>
-                <a:ea typeface="Times New Roman" panose="02020603050405020304" pitchFamily="18" charset="0"/>
-                <a:cs typeface="Times New Roman" panose="02020603050405020304" pitchFamily="18" charset="0"/>
-              </a:rPr>
               <a:t>The silk places you in a position where younger lawyers, colleagues, and even society presume you to be a leader. Mentorship flows naturally from this presumption. Understanding mentoring means accepting that you cannot be a SAN without influencing others, for good or ill.</a:t>
             </a:r>
-            <a:endParaRPr lang="en-US" sz="1400" b="1" kern="100" dirty="0">
+            <a:endParaRPr lang="en-US" sz="1600" b="1" kern="100" dirty="0">
               <a:latin typeface="Aptos" panose="020B0004020202020204" pitchFamily="34" charset="0"/>
               <a:ea typeface="Times New Roman" panose="02020603050405020304" pitchFamily="18" charset="0"/>
               <a:cs typeface="Times New Roman" panose="02020603050405020304" pitchFamily="18" charset="0"/>
@@ -7849,7 +8344,7 @@
               </a:spcBef>
             </a:pPr>
             <a:r>
-              <a:rPr lang="en-US" sz="1400" b="1" kern="0" dirty="0">
+              <a:rPr lang="en-US" sz="1600" b="1" kern="0" dirty="0">
                 <a:latin typeface="Aptos" panose="020B0004020202020204" pitchFamily="34" charset="0"/>
                 <a:ea typeface="Times New Roman" panose="02020603050405020304" pitchFamily="18" charset="0"/>
                 <a:cs typeface="Times New Roman" panose="02020603050405020304" pitchFamily="18" charset="0"/>
@@ -7857,7 +8352,7 @@
               <a:t>Mentorship as a Duty, Not a </a:t>
             </a:r>
             <a:r>
-              <a:rPr lang="en-US" sz="1400" b="1" kern="0" dirty="0" err="1">
+              <a:rPr lang="en-US" sz="1600" b="1" kern="0" dirty="0" err="1">
                 <a:latin typeface="Aptos" panose="020B0004020202020204" pitchFamily="34" charset="0"/>
                 <a:ea typeface="Times New Roman" panose="02020603050405020304" pitchFamily="18" charset="0"/>
                 <a:cs typeface="Times New Roman" panose="02020603050405020304" pitchFamily="18" charset="0"/>
@@ -7865,7 +8360,7 @@
               <a:t>Favour</a:t>
             </a:r>
             <a:r>
-              <a:rPr lang="en-US" sz="1400" b="1" kern="0" dirty="0">
+              <a:rPr lang="en-US" sz="1600" b="1" kern="0" dirty="0">
                 <a:latin typeface="Aptos" panose="020B0004020202020204" pitchFamily="34" charset="0"/>
                 <a:ea typeface="Times New Roman" panose="02020603050405020304" pitchFamily="18" charset="0"/>
                 <a:cs typeface="Times New Roman" panose="02020603050405020304" pitchFamily="18" charset="0"/>
@@ -7873,14 +8368,14 @@
               <a:t>: </a:t>
             </a:r>
             <a:r>
-              <a:rPr lang="en-US" sz="1400" kern="0" dirty="0">
+              <a:rPr lang="en-US" sz="1600" kern="0" dirty="0">
                 <a:latin typeface="Aptos" panose="020B0004020202020204" pitchFamily="34" charset="0"/>
                 <a:ea typeface="Times New Roman" panose="02020603050405020304" pitchFamily="18" charset="0"/>
                 <a:cs typeface="Times New Roman" panose="02020603050405020304" pitchFamily="18" charset="0"/>
               </a:rPr>
               <a:t>For new SANs, mentoring is not optional. It is part of the professional ethics of the Inner Bar, helping others grow is a duty that preserves the integrity of the profession itself.</a:t>
             </a:r>
-            <a:endParaRPr lang="en-US" sz="1400" b="1" kern="100" dirty="0">
+            <a:endParaRPr lang="en-US" sz="1600" b="1" kern="100" dirty="0">
               <a:latin typeface="Aptos" panose="020B0004020202020204" pitchFamily="34" charset="0"/>
               <a:ea typeface="Times New Roman" panose="02020603050405020304" pitchFamily="18" charset="0"/>
               <a:cs typeface="Times New Roman" panose="02020603050405020304" pitchFamily="18" charset="0"/>
@@ -7896,7 +8391,7 @@
               </a:spcBef>
             </a:pPr>
             <a:r>
-              <a:rPr lang="en-US" sz="1400" b="1" kern="0" dirty="0">
+              <a:rPr lang="en-US" sz="1600" b="1" kern="0" dirty="0">
                 <a:latin typeface="Aptos" panose="020B0004020202020204" pitchFamily="34" charset="0"/>
                 <a:ea typeface="Times New Roman" panose="02020603050405020304" pitchFamily="18" charset="0"/>
                 <a:cs typeface="Times New Roman" panose="02020603050405020304" pitchFamily="18" charset="0"/>
@@ -7904,14 +8399,14 @@
               <a:t>Beyond Teaching Skills:</a:t>
             </a:r>
             <a:r>
-              <a:rPr lang="en-US" sz="1400" kern="0" dirty="0">
+              <a:rPr lang="en-US" sz="1600" kern="0" dirty="0">
                 <a:latin typeface="Aptos" panose="020B0004020202020204" pitchFamily="34" charset="0"/>
                 <a:ea typeface="Times New Roman" panose="02020603050405020304" pitchFamily="18" charset="0"/>
                 <a:cs typeface="Times New Roman" panose="02020603050405020304" pitchFamily="18" charset="0"/>
               </a:rPr>
               <a:t> Mentoring is not only about showing juniors how to draft pleadings, argue appeals, or manage clients. It is about transferring values: - discipline, honesty, resilience, and ethical responsibility, because these are the true standards of the Inner Bar.</a:t>
             </a:r>
-            <a:endParaRPr lang="en-US" sz="1400" b="1" kern="100" dirty="0">
+            <a:endParaRPr lang="en-US" sz="1600" b="1" kern="100" dirty="0">
               <a:latin typeface="Aptos" panose="020B0004020202020204" pitchFamily="34" charset="0"/>
               <a:ea typeface="Times New Roman" panose="02020603050405020304" pitchFamily="18" charset="0"/>
               <a:cs typeface="Times New Roman" panose="02020603050405020304" pitchFamily="18" charset="0"/>
@@ -7927,7 +8422,7 @@
               </a:spcBef>
             </a:pPr>
             <a:r>
-              <a:rPr lang="en-US" sz="1400" b="1" kern="0" dirty="0">
+              <a:rPr lang="en-US" sz="1600" b="1" kern="0" dirty="0">
                 <a:latin typeface="Aptos" panose="020B0004020202020204" pitchFamily="34" charset="0"/>
                 <a:ea typeface="Times New Roman" panose="02020603050405020304" pitchFamily="18" charset="0"/>
                 <a:cs typeface="Times New Roman" panose="02020603050405020304" pitchFamily="18" charset="0"/>
@@ -7935,14 +8430,14 @@
               <a:t>Conscious Legacy-Building/Leadership cultivation:</a:t>
             </a:r>
             <a:r>
-              <a:rPr lang="en-US" sz="1400" kern="0" dirty="0">
+              <a:rPr lang="en-US" sz="1600" kern="0" dirty="0">
                 <a:latin typeface="Aptos" panose="020B0004020202020204" pitchFamily="34" charset="0"/>
                 <a:ea typeface="Times New Roman" panose="02020603050405020304" pitchFamily="18" charset="0"/>
                 <a:cs typeface="Times New Roman" panose="02020603050405020304" pitchFamily="18" charset="0"/>
               </a:rPr>
               <a:t> Understanding mentoring means seeing yourself as part of a relay. The silk you wear was preserved by others before you; you are now expected to pass it forward, sharpened, not diminished. Preparing successors who can command respect, inspire others, and uphold the dignity of the Bar.</a:t>
             </a:r>
-            <a:endParaRPr lang="en-US" sz="1400" b="1" kern="100" dirty="0">
+            <a:endParaRPr lang="en-US" sz="1600" b="1" kern="100" dirty="0">
               <a:latin typeface="Aptos" panose="020B0004020202020204" pitchFamily="34" charset="0"/>
               <a:ea typeface="Times New Roman" panose="02020603050405020304" pitchFamily="18" charset="0"/>
               <a:cs typeface="Times New Roman" panose="02020603050405020304" pitchFamily="18" charset="0"/>
@@ -7958,7 +8453,7 @@
               </a:spcBef>
             </a:pPr>
             <a:r>
-              <a:rPr lang="en-US" sz="1400" b="1" kern="0" dirty="0">
+              <a:rPr lang="en-US" sz="1600" b="1" kern="0" dirty="0">
                 <a:latin typeface="Aptos" panose="020B0004020202020204" pitchFamily="34" charset="0"/>
                 <a:ea typeface="Times New Roman" panose="02020603050405020304" pitchFamily="18" charset="0"/>
                 <a:cs typeface="Times New Roman" panose="02020603050405020304" pitchFamily="18" charset="0"/>
@@ -7966,14 +8461,14 @@
               <a:t>Mentoring in a Modern Context: </a:t>
             </a:r>
             <a:r>
-              <a:rPr lang="en-US" sz="1400" kern="0" dirty="0">
+              <a:rPr lang="en-US" sz="1600" kern="0" dirty="0">
                 <a:latin typeface="Aptos" panose="020B0004020202020204" pitchFamily="34" charset="0"/>
                 <a:ea typeface="Times New Roman" panose="02020603050405020304" pitchFamily="18" charset="0"/>
                 <a:cs typeface="Times New Roman" panose="02020603050405020304" pitchFamily="18" charset="0"/>
               </a:rPr>
               <a:t>For today’s SAN, mentoring cannot ignore technology, global legal standards, and modern professional demands. Understanding this means equipping the next generation not only to survive but to thrive in a changing legal environment.</a:t>
             </a:r>
-            <a:endParaRPr lang="en-US" sz="1400" b="1" kern="100" dirty="0">
+            <a:endParaRPr lang="en-US" sz="1600" b="1" kern="100" dirty="0">
               <a:latin typeface="Aptos" panose="020B0004020202020204" pitchFamily="34" charset="0"/>
               <a:ea typeface="Times New Roman" panose="02020603050405020304" pitchFamily="18" charset="0"/>
               <a:cs typeface="Times New Roman" panose="02020603050405020304" pitchFamily="18" charset="0"/>
@@ -7989,7 +8484,7 @@
               </a:spcBef>
             </a:pPr>
             <a:r>
-              <a:rPr lang="en-US" sz="1400" b="1" kern="0" dirty="0">
+              <a:rPr lang="en-US" sz="1600" b="1" kern="0" dirty="0">
                 <a:latin typeface="Aptos" panose="020B0004020202020204" pitchFamily="34" charset="0"/>
                 <a:ea typeface="Times New Roman" panose="02020603050405020304" pitchFamily="18" charset="0"/>
                 <a:cs typeface="Times New Roman" panose="02020603050405020304" pitchFamily="18" charset="0"/>
@@ -7997,7 +8492,7 @@
               <a:t>Personal Accountability:</a:t>
             </a:r>
             <a:r>
-              <a:rPr lang="en-US" sz="1400" kern="0" dirty="0">
+              <a:rPr lang="en-US" sz="1600" kern="0" dirty="0">
                 <a:latin typeface="Aptos" panose="020B0004020202020204" pitchFamily="34" charset="0"/>
                 <a:ea typeface="Times New Roman" panose="02020603050405020304" pitchFamily="18" charset="0"/>
                 <a:cs typeface="Times New Roman" panose="02020603050405020304" pitchFamily="18" charset="0"/>
@@ -8005,7 +8500,7 @@
               <a:t> To mentor, you must ask: Who am I? What kind of example am I setting? A SAN cannot call others to higher standards while neglecting their own. Understanding mentorship means </a:t>
             </a:r>
             <a:r>
-              <a:rPr lang="en-US" sz="1400" kern="0" dirty="0" err="1">
+              <a:rPr lang="en-US" sz="1600" kern="0" dirty="0" err="1">
                 <a:latin typeface="Aptos" panose="020B0004020202020204" pitchFamily="34" charset="0"/>
                 <a:ea typeface="Times New Roman" panose="02020603050405020304" pitchFamily="18" charset="0"/>
                 <a:cs typeface="Times New Roman" panose="02020603050405020304" pitchFamily="18" charset="0"/>
@@ -8013,14 +8508,14 @@
               <a:t>internalising</a:t>
             </a:r>
             <a:r>
-              <a:rPr lang="en-US" sz="1400" kern="0" dirty="0">
+              <a:rPr lang="en-US" sz="1600" kern="0" dirty="0">
                 <a:latin typeface="Aptos" panose="020B0004020202020204" pitchFamily="34" charset="0"/>
                 <a:ea typeface="Times New Roman" panose="02020603050405020304" pitchFamily="18" charset="0"/>
                 <a:cs typeface="Times New Roman" panose="02020603050405020304" pitchFamily="18" charset="0"/>
               </a:rPr>
               <a:t> that you are the model.</a:t>
             </a:r>
-            <a:endParaRPr lang="en-US" sz="1400" kern="100" dirty="0">
+            <a:endParaRPr lang="en-US" sz="1600" kern="100" dirty="0">
               <a:latin typeface="Aptos" panose="020B0004020202020204" pitchFamily="34" charset="0"/>
               <a:ea typeface="Calibri" panose="020F0502020204030204" pitchFamily="34" charset="0"/>
               <a:cs typeface="Times New Roman" panose="02020603050405020304" pitchFamily="18" charset="0"/>
@@ -8039,7 +8534,7 @@
               </a:spcAft>
               <a:buNone/>
             </a:pPr>
-            <a:endParaRPr lang="en-US" sz="1400" kern="0" dirty="0">
+            <a:endParaRPr lang="en-US" sz="1600" kern="0" dirty="0">
               <a:latin typeface="Aptos" panose="020B0004020202020204" pitchFamily="34" charset="0"/>
               <a:ea typeface="Times New Roman" panose="02020603050405020304" pitchFamily="18" charset="0"/>
               <a:cs typeface="Times New Roman" panose="02020603050405020304" pitchFamily="18" charset="0"/>
@@ -8059,14 +8554,14 @@
               <a:buNone/>
             </a:pPr>
             <a:r>
-              <a:rPr lang="en-US" sz="1400" kern="0" dirty="0">
+              <a:rPr lang="en-US" sz="1600" kern="0" dirty="0">
                 <a:latin typeface="Aptos" panose="020B0004020202020204" pitchFamily="34" charset="0"/>
                 <a:ea typeface="Times New Roman" panose="02020603050405020304" pitchFamily="18" charset="0"/>
                 <a:cs typeface="Times New Roman" panose="02020603050405020304" pitchFamily="18" charset="0"/>
               </a:rPr>
               <a:t>So in essence for new Senior Advocates, understanding mentoring means accepting it as the heart of your leadership role. It is the intentional transfer of both skills and legacy, so that the profession remains one of distinction long after your own time at the Bar.</a:t>
             </a:r>
-            <a:endParaRPr lang="en-US" sz="1400" kern="100" dirty="0">
+            <a:endParaRPr lang="en-US" sz="1600" kern="100" dirty="0">
               <a:latin typeface="Aptos" panose="020B0004020202020204" pitchFamily="34" charset="0"/>
               <a:ea typeface="Calibri" panose="020F0502020204030204" pitchFamily="34" charset="0"/>
               <a:cs typeface="Times New Roman" panose="02020603050405020304" pitchFamily="18" charset="0"/>
@@ -8084,7 +8579,7 @@
                 <a:spcPts val="800"/>
               </a:spcAft>
             </a:pPr>
-            <a:endParaRPr lang="en-US" sz="1400" kern="100" dirty="0">
+            <a:endParaRPr lang="en-US" sz="1600" kern="100" dirty="0">
               <a:latin typeface="Aptos" panose="020B0004020202020204" pitchFamily="34" charset="0"/>
               <a:ea typeface="Calibri" panose="020F0502020204030204" pitchFamily="34" charset="0"/>
               <a:cs typeface="Times New Roman" panose="02020603050405020304" pitchFamily="18" charset="0"/>
@@ -8097,7 +8592,7 @@
           <p:cNvPr id="29" name="Group 28">
             <a:extLst>
               <a:ext uri="{FF2B5EF4-FFF2-40B4-BE49-F238E27FC236}">
-                <a16:creationId xmlns:a16="http://schemas.microsoft.com/office/drawing/2014/main" id="{EDB34A1F-437C-C5AA-8FDC-E2D660FF7BB4}"/>
+                <a16:creationId xmlns:a16="http://schemas.microsoft.com/office/drawing/2014/main" xmlns="" id="{EDB34A1F-437C-C5AA-8FDC-E2D660FF7BB4}"/>
               </a:ext>
             </a:extLst>
           </p:cNvPr>
@@ -8117,7 +8612,7 @@
             <p:cNvPr id="2" name="Group 1">
               <a:extLst>
                 <a:ext uri="{FF2B5EF4-FFF2-40B4-BE49-F238E27FC236}">
-                  <a16:creationId xmlns:a16="http://schemas.microsoft.com/office/drawing/2014/main" id="{9EF3914E-D805-B1AB-54C0-86B2653E6131}"/>
+                  <a16:creationId xmlns:a16="http://schemas.microsoft.com/office/drawing/2014/main" xmlns="" id="{9EF3914E-D805-B1AB-54C0-86B2653E6131}"/>
                 </a:ext>
               </a:extLst>
             </p:cNvPr>
@@ -8137,7 +8632,7 @@
               <p:cNvPr id="3" name="Shape">
                 <a:extLst>
                   <a:ext uri="{FF2B5EF4-FFF2-40B4-BE49-F238E27FC236}">
-                    <a16:creationId xmlns:a16="http://schemas.microsoft.com/office/drawing/2014/main" id="{DC3473B8-77B9-D438-70A3-A359F9C891FE}"/>
+                    <a16:creationId xmlns:a16="http://schemas.microsoft.com/office/drawing/2014/main" xmlns="" id="{DC3473B8-77B9-D438-70A3-A359F9C891FE}"/>
                   </a:ext>
                 </a:extLst>
               </p:cNvPr>
@@ -8279,7 +8774,7 @@
               <p:cNvPr id="4" name="Shape">
                 <a:extLst>
                   <a:ext uri="{FF2B5EF4-FFF2-40B4-BE49-F238E27FC236}">
-                    <a16:creationId xmlns:a16="http://schemas.microsoft.com/office/drawing/2014/main" id="{47CD214A-E219-36FB-E28D-ACD4394BA4B7}"/>
+                    <a16:creationId xmlns:a16="http://schemas.microsoft.com/office/drawing/2014/main" xmlns="" id="{47CD214A-E219-36FB-E28D-ACD4394BA4B7}"/>
                   </a:ext>
                 </a:extLst>
               </p:cNvPr>
@@ -8384,7 +8879,7 @@
               <p:cNvPr id="5" name="Shape">
                 <a:extLst>
                   <a:ext uri="{FF2B5EF4-FFF2-40B4-BE49-F238E27FC236}">
-                    <a16:creationId xmlns:a16="http://schemas.microsoft.com/office/drawing/2014/main" id="{A4B25807-39A5-394E-FF3B-E97C95FB6E38}"/>
+                    <a16:creationId xmlns:a16="http://schemas.microsoft.com/office/drawing/2014/main" xmlns="" id="{A4B25807-39A5-394E-FF3B-E97C95FB6E38}"/>
                   </a:ext>
                 </a:extLst>
               </p:cNvPr>
@@ -8490,7 +8985,7 @@
               <p:cNvPr id="6" name="Shape">
                 <a:extLst>
                   <a:ext uri="{FF2B5EF4-FFF2-40B4-BE49-F238E27FC236}">
-                    <a16:creationId xmlns:a16="http://schemas.microsoft.com/office/drawing/2014/main" id="{DCBE0D2D-8A75-AEF1-2C35-F58AD0BC01C4}"/>
+                    <a16:creationId xmlns:a16="http://schemas.microsoft.com/office/drawing/2014/main" xmlns="" id="{DCBE0D2D-8A75-AEF1-2C35-F58AD0BC01C4}"/>
                   </a:ext>
                 </a:extLst>
               </p:cNvPr>
@@ -8632,7 +9127,7 @@
               <p:cNvPr id="7" name="Shape">
                 <a:extLst>
                   <a:ext uri="{FF2B5EF4-FFF2-40B4-BE49-F238E27FC236}">
-                    <a16:creationId xmlns:a16="http://schemas.microsoft.com/office/drawing/2014/main" id="{30354AAA-CF21-FF89-DB1C-41B5D3A778B4}"/>
+                    <a16:creationId xmlns:a16="http://schemas.microsoft.com/office/drawing/2014/main" xmlns="" id="{30354AAA-CF21-FF89-DB1C-41B5D3A778B4}"/>
                   </a:ext>
                 </a:extLst>
               </p:cNvPr>
@@ -8737,7 +9232,7 @@
               <p:cNvPr id="8" name="Shape">
                 <a:extLst>
                   <a:ext uri="{FF2B5EF4-FFF2-40B4-BE49-F238E27FC236}">
-                    <a16:creationId xmlns:a16="http://schemas.microsoft.com/office/drawing/2014/main" id="{507BBBE1-AB8B-6303-FA28-86BFD50471EB}"/>
+                    <a16:creationId xmlns:a16="http://schemas.microsoft.com/office/drawing/2014/main" xmlns="" id="{507BBBE1-AB8B-6303-FA28-86BFD50471EB}"/>
                   </a:ext>
                 </a:extLst>
               </p:cNvPr>
@@ -8843,7 +9338,7 @@
               <p:cNvPr id="9" name="Shape">
                 <a:extLst>
                   <a:ext uri="{FF2B5EF4-FFF2-40B4-BE49-F238E27FC236}">
-                    <a16:creationId xmlns:a16="http://schemas.microsoft.com/office/drawing/2014/main" id="{DBB52328-7888-39DC-037F-9FAF21BE0102}"/>
+                    <a16:creationId xmlns:a16="http://schemas.microsoft.com/office/drawing/2014/main" xmlns="" id="{DBB52328-7888-39DC-037F-9FAF21BE0102}"/>
                   </a:ext>
                 </a:extLst>
               </p:cNvPr>
@@ -8985,7 +9480,7 @@
               <p:cNvPr id="11" name="Shape">
                 <a:extLst>
                   <a:ext uri="{FF2B5EF4-FFF2-40B4-BE49-F238E27FC236}">
-                    <a16:creationId xmlns:a16="http://schemas.microsoft.com/office/drawing/2014/main" id="{BB13F430-9DD6-C634-F207-46421EED5588}"/>
+                    <a16:creationId xmlns:a16="http://schemas.microsoft.com/office/drawing/2014/main" xmlns="" id="{BB13F430-9DD6-C634-F207-46421EED5588}"/>
                   </a:ext>
                 </a:extLst>
               </p:cNvPr>
@@ -9092,7 +9587,7 @@
               <p:cNvPr id="12" name="Shape">
                 <a:extLst>
                   <a:ext uri="{FF2B5EF4-FFF2-40B4-BE49-F238E27FC236}">
-                    <a16:creationId xmlns:a16="http://schemas.microsoft.com/office/drawing/2014/main" id="{30FC59E5-47DB-CD3A-D689-571102B473A7}"/>
+                    <a16:creationId xmlns:a16="http://schemas.microsoft.com/office/drawing/2014/main" xmlns="" id="{30FC59E5-47DB-CD3A-D689-571102B473A7}"/>
                   </a:ext>
                 </a:extLst>
               </p:cNvPr>
@@ -9204,7 +9699,7 @@
               <p:cNvPr id="13" name="Shape">
                 <a:extLst>
                   <a:ext uri="{FF2B5EF4-FFF2-40B4-BE49-F238E27FC236}">
-                    <a16:creationId xmlns:a16="http://schemas.microsoft.com/office/drawing/2014/main" id="{D895ED9D-75DD-AF6F-E735-D4CF51E1AB05}"/>
+                    <a16:creationId xmlns:a16="http://schemas.microsoft.com/office/drawing/2014/main" xmlns="" id="{D895ED9D-75DD-AF6F-E735-D4CF51E1AB05}"/>
                   </a:ext>
                 </a:extLst>
               </p:cNvPr>
@@ -9346,7 +9841,7 @@
               <p:cNvPr id="14" name="Shape">
                 <a:extLst>
                   <a:ext uri="{FF2B5EF4-FFF2-40B4-BE49-F238E27FC236}">
-                    <a16:creationId xmlns:a16="http://schemas.microsoft.com/office/drawing/2014/main" id="{E1097C04-5437-BEB0-24C4-6CC7A01F2701}"/>
+                    <a16:creationId xmlns:a16="http://schemas.microsoft.com/office/drawing/2014/main" xmlns="" id="{E1097C04-5437-BEB0-24C4-6CC7A01F2701}"/>
                   </a:ext>
                 </a:extLst>
               </p:cNvPr>
@@ -9458,7 +9953,7 @@
               <p:cNvPr id="15" name="Shape">
                 <a:extLst>
                   <a:ext uri="{FF2B5EF4-FFF2-40B4-BE49-F238E27FC236}">
-                    <a16:creationId xmlns:a16="http://schemas.microsoft.com/office/drawing/2014/main" id="{E10A8087-5ACA-CA49-E5D2-F6E5CA1AAC3C}"/>
+                    <a16:creationId xmlns:a16="http://schemas.microsoft.com/office/drawing/2014/main" xmlns="" id="{E10A8087-5ACA-CA49-E5D2-F6E5CA1AAC3C}"/>
                   </a:ext>
                 </a:extLst>
               </p:cNvPr>
@@ -9570,7 +10065,7 @@
               <p:cNvPr id="17" name="Shape">
                 <a:extLst>
                   <a:ext uri="{FF2B5EF4-FFF2-40B4-BE49-F238E27FC236}">
-                    <a16:creationId xmlns:a16="http://schemas.microsoft.com/office/drawing/2014/main" id="{E27CAF25-AB69-4BAB-CD24-5492A0B8763E}"/>
+                    <a16:creationId xmlns:a16="http://schemas.microsoft.com/office/drawing/2014/main" xmlns="" id="{E27CAF25-AB69-4BAB-CD24-5492A0B8763E}"/>
                   </a:ext>
                 </a:extLst>
               </p:cNvPr>
@@ -9698,7 +10193,7 @@
             <p:cNvPr id="25" name="Shape">
               <a:extLst>
                 <a:ext uri="{FF2B5EF4-FFF2-40B4-BE49-F238E27FC236}">
-                  <a16:creationId xmlns:a16="http://schemas.microsoft.com/office/drawing/2014/main" id="{E9107857-9297-A739-904E-837112161FF8}"/>
+                  <a16:creationId xmlns:a16="http://schemas.microsoft.com/office/drawing/2014/main" xmlns="" id="{E9107857-9297-A739-904E-837112161FF8}"/>
                 </a:ext>
               </a:extLst>
             </p:cNvPr>
@@ -10332,7 +10827,7 @@
             <p:cNvPr id="26" name="Shape">
               <a:extLst>
                 <a:ext uri="{FF2B5EF4-FFF2-40B4-BE49-F238E27FC236}">
-                  <a16:creationId xmlns:a16="http://schemas.microsoft.com/office/drawing/2014/main" id="{7EDDC229-757D-BD86-8B02-4A3AD6CC6806}"/>
+                  <a16:creationId xmlns:a16="http://schemas.microsoft.com/office/drawing/2014/main" xmlns="" id="{7EDDC229-757D-BD86-8B02-4A3AD6CC6806}"/>
                 </a:ext>
               </a:extLst>
             </p:cNvPr>
@@ -10917,7 +11412,7 @@
             <p:cNvPr id="27" name="Shape">
               <a:extLst>
                 <a:ext uri="{FF2B5EF4-FFF2-40B4-BE49-F238E27FC236}">
-                  <a16:creationId xmlns:a16="http://schemas.microsoft.com/office/drawing/2014/main" id="{C6CE5E72-A257-203A-9345-C99F2620E2B0}"/>
+                  <a16:creationId xmlns:a16="http://schemas.microsoft.com/office/drawing/2014/main" xmlns="" id="{C6CE5E72-A257-203A-9345-C99F2620E2B0}"/>
                 </a:ext>
               </a:extLst>
             </p:cNvPr>
@@ -11502,7 +11997,7 @@
             <p:cNvPr id="28" name="Shape">
               <a:extLst>
                 <a:ext uri="{FF2B5EF4-FFF2-40B4-BE49-F238E27FC236}">
-                  <a16:creationId xmlns:a16="http://schemas.microsoft.com/office/drawing/2014/main" id="{8F19FF01-1F39-EA0E-7D35-B4E7D53D5783}"/>
+                  <a16:creationId xmlns:a16="http://schemas.microsoft.com/office/drawing/2014/main" xmlns="" id="{8F19FF01-1F39-EA0E-7D35-B4E7D53D5783}"/>
                 </a:ext>
               </a:extLst>
             </p:cNvPr>
@@ -12137,7 +12632,7 @@
           <p:cNvPr id="30" name="Rectangle 29">
             <a:extLst>
               <a:ext uri="{FF2B5EF4-FFF2-40B4-BE49-F238E27FC236}">
-                <a16:creationId xmlns:a16="http://schemas.microsoft.com/office/drawing/2014/main" id="{9186FCC2-A44D-A7A2-14D4-0A8BD4481333}"/>
+                <a16:creationId xmlns:a16="http://schemas.microsoft.com/office/drawing/2014/main" xmlns="" id="{9186FCC2-A44D-A7A2-14D4-0A8BD4481333}"/>
               </a:ext>
             </a:extLst>
           </p:cNvPr>
@@ -12238,7 +12733,7 @@
         <p:spPr>
           <a:xfrm>
             <a:off x="985682" y="620688"/>
-            <a:ext cx="10051526" cy="711081"/>
+            <a:ext cx="10509330" cy="711081"/>
           </a:xfrm>
         </p:spPr>
         <p:txBody>
@@ -12246,13 +12741,40 @@
           <a:lstStyle/>
           <a:p>
             <a:r>
-              <a:rPr lang="en-US" dirty="0">
+              <a:rPr lang="en-US" b="1" dirty="0">
                 <a:solidFill>
                   <a:schemeClr val="tx1"/>
                 </a:solidFill>
                 <a:latin typeface="Aptos" panose="020B0004020202020204" pitchFamily="34" charset="0"/>
               </a:rPr>
-              <a:t>Practical Steps of Preserving Standards</a:t>
+              <a:t>Practical Steps </a:t>
+            </a:r>
+            <a:r>
+              <a:rPr lang="en-US" b="1" dirty="0" smtClean="0">
+                <a:solidFill>
+                  <a:schemeClr val="tx1"/>
+                </a:solidFill>
+                <a:latin typeface="Aptos" panose="020B0004020202020204" pitchFamily="34" charset="0"/>
+              </a:rPr>
+              <a:t>for</a:t>
+            </a:r>
+            <a:r>
+              <a:rPr lang="en-US" b="1" dirty="0" smtClean="0">
+                <a:solidFill>
+                  <a:schemeClr val="tx1"/>
+                </a:solidFill>
+                <a:latin typeface="Aptos" panose="020B0004020202020204" pitchFamily="34" charset="0"/>
+              </a:rPr>
+              <a:t> </a:t>
+            </a:r>
+            <a:r>
+              <a:rPr lang="en-US" b="1" dirty="0">
+                <a:solidFill>
+                  <a:schemeClr val="tx1"/>
+                </a:solidFill>
+                <a:latin typeface="Aptos" panose="020B0004020202020204" pitchFamily="34" charset="0"/>
+              </a:rPr>
+              <a:t>Preserving Standards</a:t>
             </a:r>
           </a:p>
         </p:txBody>
@@ -12269,8 +12791,8 @@
         </p:nvSpPr>
         <p:spPr>
           <a:xfrm>
-            <a:off x="963396" y="1196752"/>
-            <a:ext cx="10531616" cy="4464495"/>
+            <a:off x="963396" y="1628800"/>
+            <a:ext cx="10531616" cy="4032447"/>
           </a:xfrm>
         </p:spPr>
         <p:txBody>
@@ -12361,8 +12883,60 @@
                 <a:ea typeface="Calibri" panose="020F0502020204030204" pitchFamily="34" charset="0"/>
                 <a:cs typeface="Times New Roman" panose="02020603050405020304" pitchFamily="18" charset="0"/>
               </a:rPr>
-              <a:t>are now members, is a sanctuary of distinction but can only remain so, if each generation preserves, maintain its standards for the next generation of lawyers. </a:t>
-            </a:r>
+              <a:t>are now members, is a sanctuary of distinction but can only remain so, if each generation preserves, </a:t>
+            </a:r>
+            <a:r>
+              <a:rPr lang="en-US" sz="2400" kern="100" dirty="0" smtClean="0">
+                <a:solidFill>
+                  <a:prstClr val="black"/>
+                </a:solidFill>
+                <a:latin typeface="Aptos" panose="020B0004020202020204" pitchFamily="34" charset="0"/>
+                <a:ea typeface="Calibri" panose="020F0502020204030204" pitchFamily="34" charset="0"/>
+                <a:cs typeface="Times New Roman" panose="02020603050405020304" pitchFamily="18" charset="0"/>
+              </a:rPr>
+              <a:t>maintains </a:t>
+            </a:r>
+            <a:r>
+              <a:rPr lang="en-US" sz="2400" kern="100" dirty="0">
+                <a:solidFill>
+                  <a:prstClr val="black"/>
+                </a:solidFill>
+                <a:latin typeface="Aptos" panose="020B0004020202020204" pitchFamily="34" charset="0"/>
+                <a:ea typeface="Calibri" panose="020F0502020204030204" pitchFamily="34" charset="0"/>
+                <a:cs typeface="Times New Roman" panose="02020603050405020304" pitchFamily="18" charset="0"/>
+              </a:rPr>
+              <a:t>its standards for the next generation </a:t>
+            </a:r>
+            <a:r>
+              <a:rPr lang="en-US" sz="2400" kern="100" dirty="0" smtClean="0">
+                <a:solidFill>
+                  <a:prstClr val="black"/>
+                </a:solidFill>
+                <a:latin typeface="Aptos" panose="020B0004020202020204" pitchFamily="34" charset="0"/>
+                <a:ea typeface="Calibri" panose="020F0502020204030204" pitchFamily="34" charset="0"/>
+                <a:cs typeface="Times New Roman" panose="02020603050405020304" pitchFamily="18" charset="0"/>
+              </a:rPr>
+              <a:t>to inherit</a:t>
+            </a:r>
+            <a:r>
+              <a:rPr lang="en-US" sz="2400" kern="100" dirty="0" smtClean="0">
+                <a:solidFill>
+                  <a:prstClr val="black"/>
+                </a:solidFill>
+                <a:latin typeface="Aptos" panose="020B0004020202020204" pitchFamily="34" charset="0"/>
+                <a:ea typeface="Calibri" panose="020F0502020204030204" pitchFamily="34" charset="0"/>
+                <a:cs typeface="Times New Roman" panose="02020603050405020304" pitchFamily="18" charset="0"/>
+              </a:rPr>
+              <a:t>. </a:t>
+            </a:r>
+            <a:endParaRPr lang="en-US" sz="2400" kern="100" dirty="0">
+              <a:solidFill>
+                <a:prstClr val="black"/>
+              </a:solidFill>
+              <a:latin typeface="Aptos" panose="020B0004020202020204" pitchFamily="34" charset="0"/>
+              <a:ea typeface="Calibri" panose="020F0502020204030204" pitchFamily="34" charset="0"/>
+              <a:cs typeface="Times New Roman" panose="02020603050405020304" pitchFamily="18" charset="0"/>
+            </a:endParaRPr>
           </a:p>
           <a:p>
             <a:pPr lvl="0" algn="just">
@@ -12385,8 +12959,49 @@
                 <a:ea typeface="Calibri" panose="020F0502020204030204" pitchFamily="34" charset="0"/>
                 <a:cs typeface="Times New Roman" panose="02020603050405020304" pitchFamily="18" charset="0"/>
               </a:rPr>
-              <a:t>Today, you are invited to take on the responsibility of preserving the ethos and standards of the legal profession through Mentorship and transfer of Learning. </a:t>
-            </a:r>
+              <a:t>Today, you are invited to take on the responsibility of preserving the ethos and standards of the legal profession </a:t>
+            </a:r>
+            <a:r>
+              <a:rPr lang="en-US" sz="2400" kern="100" dirty="0" smtClean="0">
+                <a:solidFill>
+                  <a:prstClr val="black"/>
+                </a:solidFill>
+                <a:latin typeface="Aptos" panose="020B0004020202020204" pitchFamily="34" charset="0"/>
+                <a:ea typeface="Calibri" panose="020F0502020204030204" pitchFamily="34" charset="0"/>
+                <a:cs typeface="Times New Roman" panose="02020603050405020304" pitchFamily="18" charset="0"/>
+              </a:rPr>
+              <a:t>through mentoring </a:t>
+            </a:r>
+            <a:r>
+              <a:rPr lang="en-US" sz="2400" kern="100" dirty="0">
+                <a:solidFill>
+                  <a:prstClr val="black"/>
+                </a:solidFill>
+                <a:latin typeface="Aptos" panose="020B0004020202020204" pitchFamily="34" charset="0"/>
+                <a:ea typeface="Calibri" panose="020F0502020204030204" pitchFamily="34" charset="0"/>
+                <a:cs typeface="Times New Roman" panose="02020603050405020304" pitchFamily="18" charset="0"/>
+              </a:rPr>
+              <a:t>and transfer of </a:t>
+            </a:r>
+            <a:r>
+              <a:rPr lang="en-US" sz="2400" kern="100" dirty="0" smtClean="0">
+                <a:solidFill>
+                  <a:prstClr val="black"/>
+                </a:solidFill>
+                <a:latin typeface="Aptos" panose="020B0004020202020204" pitchFamily="34" charset="0"/>
+                <a:ea typeface="Calibri" panose="020F0502020204030204" pitchFamily="34" charset="0"/>
+                <a:cs typeface="Times New Roman" panose="02020603050405020304" pitchFamily="18" charset="0"/>
+              </a:rPr>
+              <a:t>your knowledge. </a:t>
+            </a:r>
+            <a:endParaRPr lang="en-US" sz="2400" kern="100" dirty="0">
+              <a:solidFill>
+                <a:prstClr val="black"/>
+              </a:solidFill>
+              <a:latin typeface="Aptos" panose="020B0004020202020204" pitchFamily="34" charset="0"/>
+              <a:ea typeface="Calibri" panose="020F0502020204030204" pitchFamily="34" charset="0"/>
+              <a:cs typeface="Times New Roman" panose="02020603050405020304" pitchFamily="18" charset="0"/>
+            </a:endParaRPr>
           </a:p>
           <a:p>
             <a:pPr lvl="0" algn="just">
@@ -12467,7 +13082,7 @@
           <p:cNvPr id="25" name="Rectangle 24">
             <a:extLst>
               <a:ext uri="{FF2B5EF4-FFF2-40B4-BE49-F238E27FC236}">
-                <a16:creationId xmlns:a16="http://schemas.microsoft.com/office/drawing/2014/main" id="{91EACF3B-490C-99E3-79D9-C215136D1CEC}"/>
+                <a16:creationId xmlns:a16="http://schemas.microsoft.com/office/drawing/2014/main" xmlns="" id="{91EACF3B-490C-99E3-79D9-C215136D1CEC}"/>
               </a:ext>
             </a:extLst>
           </p:cNvPr>
@@ -12546,7 +13161,7 @@
         <p:cNvPr id="1" name="">
           <a:extLst>
             <a:ext uri="{FF2B5EF4-FFF2-40B4-BE49-F238E27FC236}">
-              <a16:creationId xmlns:a16="http://schemas.microsoft.com/office/drawing/2014/main" id="{75BD39EA-0024-68B6-A277-BB5636AC4A8D}"/>
+              <a16:creationId xmlns:a16="http://schemas.microsoft.com/office/drawing/2014/main" xmlns="" id="{75BD39EA-0024-68B6-A277-BB5636AC4A8D}"/>
             </a:ext>
           </a:extLst>
         </p:cNvPr>
@@ -12566,7 +13181,7 @@
           <p:cNvPr id="2" name="Title 1">
             <a:extLst>
               <a:ext uri="{FF2B5EF4-FFF2-40B4-BE49-F238E27FC236}">
-                <a16:creationId xmlns:a16="http://schemas.microsoft.com/office/drawing/2014/main" id="{6ADCCBE2-5132-89A9-215F-362064FD576E}"/>
+                <a16:creationId xmlns:a16="http://schemas.microsoft.com/office/drawing/2014/main" xmlns="" id="{6ADCCBE2-5132-89A9-215F-362064FD576E}"/>
               </a:ext>
             </a:extLst>
           </p:cNvPr>
@@ -12579,8 +13194,8 @@
         </p:nvSpPr>
         <p:spPr>
           <a:xfrm>
-            <a:off x="5061616" y="204597"/>
-            <a:ext cx="6984776" cy="711081"/>
+            <a:off x="1557908" y="163448"/>
+            <a:ext cx="8113782" cy="711081"/>
           </a:xfrm>
         </p:spPr>
         <p:txBody>
@@ -12588,7 +13203,7 @@
           <a:lstStyle/>
           <a:p>
             <a:r>
-              <a:rPr lang="en-US" sz="3200" dirty="0">
+              <a:rPr lang="en-US" sz="3200" b="1" dirty="0">
                 <a:solidFill>
                   <a:schemeClr val="tx1"/>
                 </a:solidFill>
@@ -12604,7 +13219,7 @@
           <p:cNvPr id="6" name="Freeform: Shape 5">
             <a:extLst>
               <a:ext uri="{FF2B5EF4-FFF2-40B4-BE49-F238E27FC236}">
-                <a16:creationId xmlns:a16="http://schemas.microsoft.com/office/drawing/2014/main" id="{6C522939-0AAA-D250-6BEC-BDCCFA46D876}"/>
+                <a16:creationId xmlns:a16="http://schemas.microsoft.com/office/drawing/2014/main" xmlns="" id="{6C522939-0AAA-D250-6BEC-BDCCFA46D876}"/>
               </a:ext>
             </a:extLst>
           </p:cNvPr>
@@ -12742,310 +13357,10 @@
       </p:sp>
       <p:sp>
         <p:nvSpPr>
-          <p:cNvPr id="7" name="Freeform: Shape 6">
-            <a:extLst>
-              <a:ext uri="{FF2B5EF4-FFF2-40B4-BE49-F238E27FC236}">
-                <a16:creationId xmlns:a16="http://schemas.microsoft.com/office/drawing/2014/main" id="{CC26DD35-522F-B054-996F-8846A051A7D7}"/>
-              </a:ext>
-            </a:extLst>
-          </p:cNvPr>
-          <p:cNvSpPr/>
-          <p:nvPr/>
-        </p:nvSpPr>
-        <p:spPr>
-          <a:xfrm rot="16200000">
-            <a:off x="4012653" y="2208522"/>
-            <a:ext cx="515901" cy="344655"/>
-          </a:xfrm>
-          <a:custGeom>
-            <a:avLst/>
-            <a:gdLst>
-              <a:gd name="connsiteX0" fmla="*/ 0 w 356004"/>
-              <a:gd name="connsiteY0" fmla="*/ 46231 h 231157"/>
-              <a:gd name="connsiteX1" fmla="*/ 240426 w 356004"/>
-              <a:gd name="connsiteY1" fmla="*/ 46231 h 231157"/>
-              <a:gd name="connsiteX2" fmla="*/ 240426 w 356004"/>
-              <a:gd name="connsiteY2" fmla="*/ 0 h 231157"/>
-              <a:gd name="connsiteX3" fmla="*/ 356004 w 356004"/>
-              <a:gd name="connsiteY3" fmla="*/ 115579 h 231157"/>
-              <a:gd name="connsiteX4" fmla="*/ 240426 w 356004"/>
-              <a:gd name="connsiteY4" fmla="*/ 231157 h 231157"/>
-              <a:gd name="connsiteX5" fmla="*/ 240426 w 356004"/>
-              <a:gd name="connsiteY5" fmla="*/ 184926 h 231157"/>
-              <a:gd name="connsiteX6" fmla="*/ 0 w 356004"/>
-              <a:gd name="connsiteY6" fmla="*/ 184926 h 231157"/>
-              <a:gd name="connsiteX7" fmla="*/ 0 w 356004"/>
-              <a:gd name="connsiteY7" fmla="*/ 46231 h 231157"/>
-            </a:gdLst>
-            <a:ahLst/>
-            <a:cxnLst>
-              <a:cxn ang="0">
-                <a:pos x="connsiteX0" y="connsiteY0"/>
-              </a:cxn>
-              <a:cxn ang="0">
-                <a:pos x="connsiteX1" y="connsiteY1"/>
-              </a:cxn>
-              <a:cxn ang="0">
-                <a:pos x="connsiteX2" y="connsiteY2"/>
-              </a:cxn>
-              <a:cxn ang="0">
-                <a:pos x="connsiteX3" y="connsiteY3"/>
-              </a:cxn>
-              <a:cxn ang="0">
-                <a:pos x="connsiteX4" y="connsiteY4"/>
-              </a:cxn>
-              <a:cxn ang="0">
-                <a:pos x="connsiteX5" y="connsiteY5"/>
-              </a:cxn>
-              <a:cxn ang="0">
-                <a:pos x="connsiteX6" y="connsiteY6"/>
-              </a:cxn>
-              <a:cxn ang="0">
-                <a:pos x="connsiteX7" y="connsiteY7"/>
-              </a:cxn>
-            </a:cxnLst>
-            <a:rect l="l" t="t" r="r" b="b"/>
-            <a:pathLst>
-              <a:path w="356004" h="231157">
-                <a:moveTo>
-                  <a:pt x="0" y="46231"/>
-                </a:moveTo>
-                <a:lnTo>
-                  <a:pt x="240426" y="46231"/>
-                </a:lnTo>
-                <a:lnTo>
-                  <a:pt x="240426" y="0"/>
-                </a:lnTo>
-                <a:lnTo>
-                  <a:pt x="356004" y="115579"/>
-                </a:lnTo>
-                <a:lnTo>
-                  <a:pt x="240426" y="231157"/>
-                </a:lnTo>
-                <a:lnTo>
-                  <a:pt x="240426" y="184926"/>
-                </a:lnTo>
-                <a:lnTo>
-                  <a:pt x="0" y="184926"/>
-                </a:lnTo>
-                <a:lnTo>
-                  <a:pt x="0" y="46231"/>
-                </a:lnTo>
-                <a:close/>
-              </a:path>
-            </a:pathLst>
-          </a:custGeom>
-          <a:solidFill>
-            <a:schemeClr val="bg2">
-              <a:lumMod val="50000"/>
-            </a:schemeClr>
-          </a:solidFill>
-        </p:spPr>
-        <p:style>
-          <a:lnRef idx="0">
-            <a:schemeClr val="accent1">
-              <a:tint val="60000"/>
-              <a:hueOff val="0"/>
-              <a:satOff val="0"/>
-              <a:lumOff val="0"/>
-              <a:alphaOff val="0"/>
-            </a:schemeClr>
-          </a:lnRef>
-          <a:fillRef idx="1">
-            <a:schemeClr val="accent1">
-              <a:tint val="60000"/>
-              <a:hueOff val="0"/>
-              <a:satOff val="0"/>
-              <a:lumOff val="0"/>
-              <a:alphaOff val="0"/>
-            </a:schemeClr>
-          </a:fillRef>
-          <a:effectRef idx="0">
-            <a:schemeClr val="accent1">
-              <a:tint val="60000"/>
-              <a:hueOff val="0"/>
-              <a:satOff val="0"/>
-              <a:lumOff val="0"/>
-              <a:alphaOff val="0"/>
-            </a:schemeClr>
-          </a:effectRef>
-          <a:fontRef idx="minor">
-            <a:schemeClr val="lt1"/>
-          </a:fontRef>
-        </p:style>
-        <p:txBody>
-          <a:bodyPr spcFirstLastPara="0" vert="horz" wrap="square" lIns="-1" tIns="46231" rIns="69348" bIns="46231" numCol="1" spcCol="1270" anchor="ctr" anchorCtr="0">
-            <a:noAutofit/>
-          </a:bodyPr>
-          <a:lstStyle/>
-          <a:p>
-            <a:pPr marL="0" lvl="0" indent="0" algn="ctr" defTabSz="222250">
-              <a:lnSpc>
-                <a:spcPct val="90000"/>
-              </a:lnSpc>
-              <a:spcBef>
-                <a:spcPct val="0"/>
-              </a:spcBef>
-              <a:spcAft>
-                <a:spcPct val="35000"/>
-              </a:spcAft>
-              <a:buNone/>
-            </a:pPr>
-            <a:endParaRPr lang="en-US" sz="900" kern="1200">
-              <a:latin typeface="Aptos" panose="020B0004020202020204" pitchFamily="34" charset="0"/>
-            </a:endParaRPr>
-          </a:p>
-        </p:txBody>
-      </p:sp>
-      <p:sp>
-        <p:nvSpPr>
-          <p:cNvPr id="8" name="Freeform: Shape 7">
-            <a:extLst>
-              <a:ext uri="{FF2B5EF4-FFF2-40B4-BE49-F238E27FC236}">
-                <a16:creationId xmlns:a16="http://schemas.microsoft.com/office/drawing/2014/main" id="{E5602FB3-E6E8-AEFC-83D6-5E703D91D2D4}"/>
-              </a:ext>
-            </a:extLst>
-          </p:cNvPr>
-          <p:cNvSpPr/>
-          <p:nvPr/>
-        </p:nvSpPr>
-        <p:spPr>
-          <a:xfrm>
-            <a:off x="3240698" y="317875"/>
-            <a:ext cx="1715155" cy="1788214"/>
-          </a:xfrm>
-          <a:custGeom>
-            <a:avLst/>
-            <a:gdLst>
-              <a:gd name="connsiteX0" fmla="*/ 0 w 1061242"/>
-              <a:gd name="connsiteY0" fmla="*/ 530621 h 1061242"/>
-              <a:gd name="connsiteX1" fmla="*/ 530621 w 1061242"/>
-              <a:gd name="connsiteY1" fmla="*/ 0 h 1061242"/>
-              <a:gd name="connsiteX2" fmla="*/ 1061242 w 1061242"/>
-              <a:gd name="connsiteY2" fmla="*/ 530621 h 1061242"/>
-              <a:gd name="connsiteX3" fmla="*/ 530621 w 1061242"/>
-              <a:gd name="connsiteY3" fmla="*/ 1061242 h 1061242"/>
-              <a:gd name="connsiteX4" fmla="*/ 0 w 1061242"/>
-              <a:gd name="connsiteY4" fmla="*/ 530621 h 1061242"/>
-            </a:gdLst>
-            <a:ahLst/>
-            <a:cxnLst>
-              <a:cxn ang="0">
-                <a:pos x="connsiteX0" y="connsiteY0"/>
-              </a:cxn>
-              <a:cxn ang="0">
-                <a:pos x="connsiteX1" y="connsiteY1"/>
-              </a:cxn>
-              <a:cxn ang="0">
-                <a:pos x="connsiteX2" y="connsiteY2"/>
-              </a:cxn>
-              <a:cxn ang="0">
-                <a:pos x="connsiteX3" y="connsiteY3"/>
-              </a:cxn>
-              <a:cxn ang="0">
-                <a:pos x="connsiteX4" y="connsiteY4"/>
-              </a:cxn>
-            </a:cxnLst>
-            <a:rect l="l" t="t" r="r" b="b"/>
-            <a:pathLst>
-              <a:path w="1061242" h="1061242">
-                <a:moveTo>
-                  <a:pt x="0" y="530621"/>
-                </a:moveTo>
-                <a:cubicBezTo>
-                  <a:pt x="0" y="237567"/>
-                  <a:pt x="237567" y="0"/>
-                  <a:pt x="530621" y="0"/>
-                </a:cubicBezTo>
-                <a:cubicBezTo>
-                  <a:pt x="823675" y="0"/>
-                  <a:pt x="1061242" y="237567"/>
-                  <a:pt x="1061242" y="530621"/>
-                </a:cubicBezTo>
-                <a:cubicBezTo>
-                  <a:pt x="1061242" y="823675"/>
-                  <a:pt x="823675" y="1061242"/>
-                  <a:pt x="530621" y="1061242"/>
-                </a:cubicBezTo>
-                <a:cubicBezTo>
-                  <a:pt x="237567" y="1061242"/>
-                  <a:pt x="0" y="823675"/>
-                  <a:pt x="0" y="530621"/>
-                </a:cubicBezTo>
-                <a:close/>
-              </a:path>
-            </a:pathLst>
-          </a:custGeom>
-          <a:solidFill>
-            <a:schemeClr val="bg2">
-              <a:lumMod val="50000"/>
-            </a:schemeClr>
-          </a:solidFill>
-        </p:spPr>
-        <p:style>
-          <a:lnRef idx="2">
-            <a:schemeClr val="lt1">
-              <a:hueOff val="0"/>
-              <a:satOff val="0"/>
-              <a:lumOff val="0"/>
-              <a:alphaOff val="0"/>
-            </a:schemeClr>
-          </a:lnRef>
-          <a:fillRef idx="1">
-            <a:schemeClr val="accent1">
-              <a:hueOff val="0"/>
-              <a:satOff val="0"/>
-              <a:lumOff val="0"/>
-              <a:alphaOff val="0"/>
-            </a:schemeClr>
-          </a:fillRef>
-          <a:effectRef idx="0">
-            <a:schemeClr val="accent1">
-              <a:hueOff val="0"/>
-              <a:satOff val="0"/>
-              <a:lumOff val="0"/>
-              <a:alphaOff val="0"/>
-            </a:schemeClr>
-          </a:effectRef>
-          <a:fontRef idx="minor">
-            <a:schemeClr val="lt1"/>
-          </a:fontRef>
-        </p:style>
-        <p:txBody>
-          <a:bodyPr spcFirstLastPara="0" vert="horz" wrap="square" lIns="161765" tIns="161765" rIns="161765" bIns="161765" numCol="1" spcCol="1270" anchor="ctr" anchorCtr="0">
-            <a:noAutofit/>
-          </a:bodyPr>
-          <a:lstStyle/>
-          <a:p>
-            <a:pPr marL="0" lvl="0" indent="0" algn="ctr" defTabSz="222250">
-              <a:lnSpc>
-                <a:spcPct val="90000"/>
-              </a:lnSpc>
-              <a:spcBef>
-                <a:spcPct val="0"/>
-              </a:spcBef>
-              <a:spcAft>
-                <a:spcPct val="35000"/>
-              </a:spcAft>
-              <a:buNone/>
-            </a:pPr>
-            <a:r>
-              <a:rPr lang="en-US" sz="1100" kern="1200" dirty="0">
-                <a:latin typeface="Aptos" panose="020B0004020202020204" pitchFamily="34" charset="0"/>
-                <a:ea typeface="Calibri" panose="020F0502020204030204" pitchFamily="34" charset="0"/>
-                <a:cs typeface="Times New Roman" panose="02020603050405020304" pitchFamily="18" charset="0"/>
-              </a:rPr>
-              <a:t>SANs are both "custodian and bridge: - custodian of an enduring legacy, and bridge to the next generation."</a:t>
-            </a:r>
-          </a:p>
-        </p:txBody>
-      </p:sp>
-      <p:sp>
-        <p:nvSpPr>
           <p:cNvPr id="9" name="Freeform: Shape 8">
             <a:extLst>
               <a:ext uri="{FF2B5EF4-FFF2-40B4-BE49-F238E27FC236}">
-                <a16:creationId xmlns:a16="http://schemas.microsoft.com/office/drawing/2014/main" id="{905396D8-F156-363F-E61A-3DC733F702CD}"/>
+                <a16:creationId xmlns:a16="http://schemas.microsoft.com/office/drawing/2014/main" xmlns="" id="{905396D8-F156-363F-E61A-3DC733F702CD}"/>
               </a:ext>
             </a:extLst>
           </p:cNvPr>
@@ -13202,7 +13517,7 @@
           <p:cNvPr id="10" name="Freeform: Shape 9">
             <a:extLst>
               <a:ext uri="{FF2B5EF4-FFF2-40B4-BE49-F238E27FC236}">
-                <a16:creationId xmlns:a16="http://schemas.microsoft.com/office/drawing/2014/main" id="{1FEC499D-615F-4352-CA6C-5509EF359892}"/>
+                <a16:creationId xmlns:a16="http://schemas.microsoft.com/office/drawing/2014/main" xmlns="" id="{1FEC499D-615F-4352-CA6C-5509EF359892}"/>
               </a:ext>
             </a:extLst>
           </p:cNvPr>
@@ -13343,8 +13658,37 @@
                 <a:ea typeface="Calibri" panose="020F0502020204030204" pitchFamily="34" charset="0"/>
                 <a:cs typeface="Times New Roman" panose="02020603050405020304" pitchFamily="18" charset="0"/>
               </a:rPr>
-              <a:t> Moving beyond informal relationships to "structured, institutionalized mentorship programs under the Nigerian Bar Association (NBA), BOSAN, and the Body of Benchers."</a:t>
-            </a:r>
+              <a:t> Moving beyond informal relationships to "structured, institutionalized mentorship programs under the Nigerian Bar Association (NBA), BOSAN, and the Body of Benchers</a:t>
+            </a:r>
+            <a:r>
+              <a:rPr lang="en-US" sz="1000" kern="1200" dirty="0" smtClean="0">
+                <a:latin typeface="Aptos" panose="020B0004020202020204" pitchFamily="34" charset="0"/>
+                <a:ea typeface="Calibri" panose="020F0502020204030204" pitchFamily="34" charset="0"/>
+                <a:cs typeface="Times New Roman" panose="02020603050405020304" pitchFamily="18" charset="0"/>
+              </a:rPr>
+              <a:t>.“ Section 8(7) Legal </a:t>
+            </a:r>
+            <a:r>
+              <a:rPr lang="en-US" sz="1000" kern="1200" dirty="0" err="1" smtClean="0">
+                <a:latin typeface="Aptos" panose="020B0004020202020204" pitchFamily="34" charset="0"/>
+                <a:ea typeface="Calibri" panose="020F0502020204030204" pitchFamily="34" charset="0"/>
+                <a:cs typeface="Times New Roman" panose="02020603050405020304" pitchFamily="18" charset="0"/>
+              </a:rPr>
+              <a:t>Practioners</a:t>
+            </a:r>
+            <a:r>
+              <a:rPr lang="en-US" sz="1000" kern="1200" dirty="0" smtClean="0">
+                <a:latin typeface="Aptos" panose="020B0004020202020204" pitchFamily="34" charset="0"/>
+                <a:ea typeface="Calibri" panose="020F0502020204030204" pitchFamily="34" charset="0"/>
+                <a:cs typeface="Times New Roman" panose="02020603050405020304" pitchFamily="18" charset="0"/>
+              </a:rPr>
+              <a:t> Act and RULE 3  LPPR</a:t>
+            </a:r>
+            <a:endParaRPr lang="en-US" sz="1000" kern="1200" dirty="0">
+              <a:latin typeface="Aptos" panose="020B0004020202020204" pitchFamily="34" charset="0"/>
+              <a:ea typeface="Calibri" panose="020F0502020204030204" pitchFamily="34" charset="0"/>
+              <a:cs typeface="Times New Roman" panose="02020603050405020304" pitchFamily="18" charset="0"/>
+            </a:endParaRPr>
           </a:p>
         </p:txBody>
       </p:sp>
@@ -13353,7 +13697,7 @@
           <p:cNvPr id="11" name="Freeform: Shape 10">
             <a:extLst>
               <a:ext uri="{FF2B5EF4-FFF2-40B4-BE49-F238E27FC236}">
-                <a16:creationId xmlns:a16="http://schemas.microsoft.com/office/drawing/2014/main" id="{D1C349F9-5704-CF99-267C-72B75DE0D501}"/>
+                <a16:creationId xmlns:a16="http://schemas.microsoft.com/office/drawing/2014/main" xmlns="" id="{D1C349F9-5704-CF99-267C-72B75DE0D501}"/>
               </a:ext>
             </a:extLst>
           </p:cNvPr>
@@ -13508,7 +13852,7 @@
           <p:cNvPr id="12" name="Freeform: Shape 11">
             <a:extLst>
               <a:ext uri="{FF2B5EF4-FFF2-40B4-BE49-F238E27FC236}">
-                <a16:creationId xmlns:a16="http://schemas.microsoft.com/office/drawing/2014/main" id="{EC3E1827-393E-2D6E-CE75-DE99B1A25C10}"/>
+                <a16:creationId xmlns:a16="http://schemas.microsoft.com/office/drawing/2014/main" xmlns="" id="{EC3E1827-393E-2D6E-CE75-DE99B1A25C10}"/>
               </a:ext>
             </a:extLst>
           </p:cNvPr>
@@ -13646,7 +13990,31 @@
                 <a:ea typeface="Calibri" panose="020F0502020204030204" pitchFamily="34" charset="0"/>
                 <a:cs typeface="Times New Roman" panose="02020603050405020304" pitchFamily="18" charset="0"/>
               </a:rPr>
-              <a:t>SANs "must live by example, demonstrating excellence in advocacy and unimpeachable character."</a:t>
+              <a:t>SANs "must live by example, demonstrating excellence in advocacy and </a:t>
+            </a:r>
+            <a:r>
+              <a:rPr lang="en-US" sz="1100" dirty="0" smtClean="0">
+                <a:latin typeface="Aptos" panose="020B0004020202020204" pitchFamily="34" charset="0"/>
+                <a:ea typeface="Calibri" panose="020F0502020204030204" pitchFamily="34" charset="0"/>
+                <a:cs typeface="Times New Roman" panose="02020603050405020304" pitchFamily="18" charset="0"/>
+              </a:rPr>
+              <a:t>impeccable</a:t>
+            </a:r>
+            <a:r>
+              <a:rPr lang="en-US" sz="1100" dirty="0" smtClean="0">
+                <a:latin typeface="Aptos" panose="020B0004020202020204" pitchFamily="34" charset="0"/>
+                <a:ea typeface="Calibri" panose="020F0502020204030204" pitchFamily="34" charset="0"/>
+                <a:cs typeface="Times New Roman" panose="02020603050405020304" pitchFamily="18" charset="0"/>
+              </a:rPr>
+              <a:t> </a:t>
+            </a:r>
+            <a:r>
+              <a:rPr lang="en-US" sz="1100" dirty="0">
+                <a:latin typeface="Aptos" panose="020B0004020202020204" pitchFamily="34" charset="0"/>
+                <a:ea typeface="Calibri" panose="020F0502020204030204" pitchFamily="34" charset="0"/>
+                <a:cs typeface="Times New Roman" panose="02020603050405020304" pitchFamily="18" charset="0"/>
+              </a:rPr>
+              <a:t>character."</a:t>
             </a:r>
             <a:r>
               <a:rPr lang="en-US" sz="1100" kern="1200" dirty="0">
@@ -13664,7 +14032,7 @@
           <p:cNvPr id="13" name="Freeform: Shape 12">
             <a:extLst>
               <a:ext uri="{FF2B5EF4-FFF2-40B4-BE49-F238E27FC236}">
-                <a16:creationId xmlns:a16="http://schemas.microsoft.com/office/drawing/2014/main" id="{93A270B7-18AF-5A34-0B0A-5C0371A9BBE1}"/>
+                <a16:creationId xmlns:a16="http://schemas.microsoft.com/office/drawing/2014/main" xmlns="" id="{93A270B7-18AF-5A34-0B0A-5C0371A9BBE1}"/>
               </a:ext>
             </a:extLst>
           </p:cNvPr>
@@ -13819,7 +14187,7 @@
           <p:cNvPr id="14" name="Freeform: Shape 13">
             <a:extLst>
               <a:ext uri="{FF2B5EF4-FFF2-40B4-BE49-F238E27FC236}">
-                <a16:creationId xmlns:a16="http://schemas.microsoft.com/office/drawing/2014/main" id="{871EE43B-7236-D1E1-B541-CDFED60C8ED1}"/>
+                <a16:creationId xmlns:a16="http://schemas.microsoft.com/office/drawing/2014/main" xmlns="" id="{871EE43B-7236-D1E1-B541-CDFED60C8ED1}"/>
               </a:ext>
             </a:extLst>
           </p:cNvPr>
@@ -13968,7 +14336,7 @@
           <p:cNvPr id="15" name="Freeform: Shape 14">
             <a:extLst>
               <a:ext uri="{FF2B5EF4-FFF2-40B4-BE49-F238E27FC236}">
-                <a16:creationId xmlns:a16="http://schemas.microsoft.com/office/drawing/2014/main" id="{B97AAACA-7B57-72CE-1633-24854A4B97A2}"/>
+                <a16:creationId xmlns:a16="http://schemas.microsoft.com/office/drawing/2014/main" xmlns="" id="{B97AAACA-7B57-72CE-1633-24854A4B97A2}"/>
               </a:ext>
             </a:extLst>
           </p:cNvPr>
@@ -14123,7 +14491,7 @@
           <p:cNvPr id="16" name="Freeform: Shape 15">
             <a:extLst>
               <a:ext uri="{FF2B5EF4-FFF2-40B4-BE49-F238E27FC236}">
-                <a16:creationId xmlns:a16="http://schemas.microsoft.com/office/drawing/2014/main" id="{09AA9F6B-C42C-7931-C5FF-1BE1405A763B}"/>
+                <a16:creationId xmlns:a16="http://schemas.microsoft.com/office/drawing/2014/main" xmlns="" id="{09AA9F6B-C42C-7931-C5FF-1BE1405A763B}"/>
               </a:ext>
             </a:extLst>
           </p:cNvPr>
@@ -14268,8 +14636,38 @@
                 <a:ea typeface="Calibri" panose="020F0502020204030204" pitchFamily="34" charset="0"/>
                 <a:cs typeface="Times New Roman" panose="02020603050405020304" pitchFamily="18" charset="0"/>
               </a:rPr>
-              <a:t> Transfer "not only the traditions of advocacy but also the adaptability to thrive in a digital era."</a:t>
-            </a:r>
+              <a:t> Transfer "not only the traditions of advocacy but also the adaptability to thrive in a digital </a:t>
+            </a:r>
+            <a:r>
+              <a:rPr lang="en-US" sz="1100" dirty="0" smtClean="0">
+                <a:solidFill>
+                  <a:schemeClr val="tx1"/>
+                </a:solidFill>
+                <a:latin typeface="Aptos" panose="020B0004020202020204" pitchFamily="34" charset="0"/>
+                <a:ea typeface="Calibri" panose="020F0502020204030204" pitchFamily="34" charset="0"/>
+                <a:cs typeface="Times New Roman" panose="02020603050405020304" pitchFamily="18" charset="0"/>
+              </a:rPr>
+              <a:t>space</a:t>
+            </a:r>
+            <a:r>
+              <a:rPr lang="en-US" sz="1100" kern="1200" dirty="0" smtClean="0">
+                <a:solidFill>
+                  <a:schemeClr val="tx1"/>
+                </a:solidFill>
+                <a:latin typeface="Aptos" panose="020B0004020202020204" pitchFamily="34" charset="0"/>
+                <a:ea typeface="Calibri" panose="020F0502020204030204" pitchFamily="34" charset="0"/>
+                <a:cs typeface="Times New Roman" panose="02020603050405020304" pitchFamily="18" charset="0"/>
+              </a:rPr>
+              <a:t>."</a:t>
+            </a:r>
+            <a:endParaRPr lang="en-US" sz="1100" kern="1200" dirty="0">
+              <a:solidFill>
+                <a:schemeClr val="tx1"/>
+              </a:solidFill>
+              <a:latin typeface="Aptos" panose="020B0004020202020204" pitchFamily="34" charset="0"/>
+              <a:ea typeface="Calibri" panose="020F0502020204030204" pitchFamily="34" charset="0"/>
+              <a:cs typeface="Times New Roman" panose="02020603050405020304" pitchFamily="18" charset="0"/>
+            </a:endParaRPr>
           </a:p>
         </p:txBody>
       </p:sp>
@@ -14278,7 +14676,7 @@
           <p:cNvPr id="17" name="Freeform: Shape 16">
             <a:extLst>
               <a:ext uri="{FF2B5EF4-FFF2-40B4-BE49-F238E27FC236}">
-                <a16:creationId xmlns:a16="http://schemas.microsoft.com/office/drawing/2014/main" id="{D75D14CB-4672-6618-CC05-F261BFBF62AF}"/>
+                <a16:creationId xmlns:a16="http://schemas.microsoft.com/office/drawing/2014/main" xmlns="" id="{D75D14CB-4672-6618-CC05-F261BFBF62AF}"/>
               </a:ext>
             </a:extLst>
           </p:cNvPr>
@@ -14433,7 +14831,7 @@
           <p:cNvPr id="18" name="Freeform: Shape 17">
             <a:extLst>
               <a:ext uri="{FF2B5EF4-FFF2-40B4-BE49-F238E27FC236}">
-                <a16:creationId xmlns:a16="http://schemas.microsoft.com/office/drawing/2014/main" id="{0169818F-24DF-9E11-8386-531417719FB5}"/>
+                <a16:creationId xmlns:a16="http://schemas.microsoft.com/office/drawing/2014/main" xmlns="" id="{0169818F-24DF-9E11-8386-531417719FB5}"/>
               </a:ext>
             </a:extLst>
           </p:cNvPr>
@@ -14582,7 +14980,7 @@
           <p:cNvPr id="19" name="Freeform: Shape 18">
             <a:extLst>
               <a:ext uri="{FF2B5EF4-FFF2-40B4-BE49-F238E27FC236}">
-                <a16:creationId xmlns:a16="http://schemas.microsoft.com/office/drawing/2014/main" id="{248928E6-9DFD-2FBF-6D16-8FB720188B13}"/>
+                <a16:creationId xmlns:a16="http://schemas.microsoft.com/office/drawing/2014/main" xmlns="" id="{248928E6-9DFD-2FBF-6D16-8FB720188B13}"/>
               </a:ext>
             </a:extLst>
           </p:cNvPr>
@@ -14739,7 +15137,7 @@
           <p:cNvPr id="20" name="Freeform: Shape 19">
             <a:extLst>
               <a:ext uri="{FF2B5EF4-FFF2-40B4-BE49-F238E27FC236}">
-                <a16:creationId xmlns:a16="http://schemas.microsoft.com/office/drawing/2014/main" id="{F5688AF2-7F89-D84F-C663-85E5A649143B}"/>
+                <a16:creationId xmlns:a16="http://schemas.microsoft.com/office/drawing/2014/main" xmlns="" id="{F5688AF2-7F89-D84F-C663-85E5A649143B}"/>
               </a:ext>
             </a:extLst>
           </p:cNvPr>
@@ -14880,7 +15278,23 @@
                 <a:ea typeface="Calibri" panose="020F0502020204030204" pitchFamily="34" charset="0"/>
                 <a:cs typeface="Times New Roman" panose="02020603050405020304" pitchFamily="18" charset="0"/>
               </a:rPr>
-              <a:t> Each SAN must consider "what will endure when my voice is silent?" The answer lies in "the lawyers they have raised, and the standards they have preserved."</a:t>
+              <a:t> Each SAN must consider "what will endure when my voice is silent?" The answer lies in "the lawyers they have raised, and the standards they have </a:t>
+            </a:r>
+            <a:r>
+              <a:rPr lang="en-US" sz="1050" kern="1200" dirty="0" smtClean="0">
+                <a:latin typeface="Aptos" panose="020B0004020202020204" pitchFamily="34" charset="0"/>
+                <a:ea typeface="Calibri" panose="020F0502020204030204" pitchFamily="34" charset="0"/>
+                <a:cs typeface="Times New Roman" panose="02020603050405020304" pitchFamily="18" charset="0"/>
+              </a:rPr>
+              <a:t>set and preserved</a:t>
+            </a:r>
+            <a:r>
+              <a:rPr lang="en-US" sz="1050" kern="1200" dirty="0">
+                <a:latin typeface="Aptos" panose="020B0004020202020204" pitchFamily="34" charset="0"/>
+                <a:ea typeface="Calibri" panose="020F0502020204030204" pitchFamily="34" charset="0"/>
+                <a:cs typeface="Times New Roman" panose="02020603050405020304" pitchFamily="18" charset="0"/>
+              </a:rPr>
+              <a:t>."</a:t>
             </a:r>
           </a:p>
         </p:txBody>
@@ -14890,7 +15304,7 @@
           <p:cNvPr id="21" name="Freeform: Shape 20">
             <a:extLst>
               <a:ext uri="{FF2B5EF4-FFF2-40B4-BE49-F238E27FC236}">
-                <a16:creationId xmlns:a16="http://schemas.microsoft.com/office/drawing/2014/main" id="{8CC9F982-9D65-AC3B-2B75-D084E8470E62}"/>
+                <a16:creationId xmlns:a16="http://schemas.microsoft.com/office/drawing/2014/main" xmlns="" id="{8CC9F982-9D65-AC3B-2B75-D084E8470E62}"/>
               </a:ext>
             </a:extLst>
           </p:cNvPr>
@@ -15047,7 +15461,7 @@
           <p:cNvPr id="22" name="Freeform: Shape 21">
             <a:extLst>
               <a:ext uri="{FF2B5EF4-FFF2-40B4-BE49-F238E27FC236}">
-                <a16:creationId xmlns:a16="http://schemas.microsoft.com/office/drawing/2014/main" id="{508ABAB1-5521-ACB9-2C44-4CFF6AF3A528}"/>
+                <a16:creationId xmlns:a16="http://schemas.microsoft.com/office/drawing/2014/main" xmlns="" id="{508ABAB1-5521-ACB9-2C44-4CFF6AF3A528}"/>
               </a:ext>
             </a:extLst>
           </p:cNvPr>
@@ -15193,7 +15607,7 @@
           <p:cNvPr id="27" name="Rectangle 26">
             <a:extLst>
               <a:ext uri="{FF2B5EF4-FFF2-40B4-BE49-F238E27FC236}">
-                <a16:creationId xmlns:a16="http://schemas.microsoft.com/office/drawing/2014/main" id="{F86AC38A-CFFF-F86C-A32E-8967A718A7BA}"/>
+                <a16:creationId xmlns:a16="http://schemas.microsoft.com/office/drawing/2014/main" xmlns="" id="{F86AC38A-CFFF-F86C-A32E-8967A718A7BA}"/>
               </a:ext>
             </a:extLst>
           </p:cNvPr>
@@ -15286,7 +15700,7 @@
           <p:cNvPr id="10" name="Title 9">
             <a:extLst>
               <a:ext uri="{FF2B5EF4-FFF2-40B4-BE49-F238E27FC236}">
-                <a16:creationId xmlns:a16="http://schemas.microsoft.com/office/drawing/2014/main" id="{4EB7BA3F-919D-7BBF-8C31-DAD5CBC47646}"/>
+                <a16:creationId xmlns:a16="http://schemas.microsoft.com/office/drawing/2014/main" xmlns="" id="{4EB7BA3F-919D-7BBF-8C31-DAD5CBC47646}"/>
               </a:ext>
             </a:extLst>
           </p:cNvPr>
@@ -15332,7 +15746,7 @@
           <p:cNvPr id="19" name="Content Placeholder 2">
             <a:extLst>
               <a:ext uri="{FF2B5EF4-FFF2-40B4-BE49-F238E27FC236}">
-                <a16:creationId xmlns:a16="http://schemas.microsoft.com/office/drawing/2014/main" id="{98349F09-71B1-87BB-EA53-81192F0663CA}"/>
+                <a16:creationId xmlns:a16="http://schemas.microsoft.com/office/drawing/2014/main" xmlns="" id="{98349F09-71B1-87BB-EA53-81192F0663CA}"/>
               </a:ext>
             </a:extLst>
           </p:cNvPr>
@@ -15604,7 +16018,7 @@
           <p:cNvPr id="3" name="Freeform 533">
             <a:extLst>
               <a:ext uri="{FF2B5EF4-FFF2-40B4-BE49-F238E27FC236}">
-                <a16:creationId xmlns:a16="http://schemas.microsoft.com/office/drawing/2014/main" id="{C5BBDB00-29E7-6BE7-D183-0541EAE26188}"/>
+                <a16:creationId xmlns:a16="http://schemas.microsoft.com/office/drawing/2014/main" xmlns="" id="{C5BBDB00-29E7-6BE7-D183-0541EAE26188}"/>
               </a:ext>
             </a:extLst>
           </p:cNvPr>
@@ -15785,7 +16199,7 @@
           <p:cNvPr id="23" name="Freeform 521">
             <a:extLst>
               <a:ext uri="{FF2B5EF4-FFF2-40B4-BE49-F238E27FC236}">
-                <a16:creationId xmlns:a16="http://schemas.microsoft.com/office/drawing/2014/main" id="{A5B43F29-C26B-6581-DAFE-05CA0688086F}"/>
+                <a16:creationId xmlns:a16="http://schemas.microsoft.com/office/drawing/2014/main" xmlns="" id="{A5B43F29-C26B-6581-DAFE-05CA0688086F}"/>
               </a:ext>
             </a:extLst>
           </p:cNvPr>
@@ -15966,7 +16380,7 @@
           <p:cNvPr id="26" name="Freeform 517">
             <a:extLst>
               <a:ext uri="{FF2B5EF4-FFF2-40B4-BE49-F238E27FC236}">
-                <a16:creationId xmlns:a16="http://schemas.microsoft.com/office/drawing/2014/main" id="{D958FA88-DDA2-537F-4534-B15C663E9CBA}"/>
+                <a16:creationId xmlns:a16="http://schemas.microsoft.com/office/drawing/2014/main" xmlns="" id="{D958FA88-DDA2-537F-4534-B15C663E9CBA}"/>
               </a:ext>
             </a:extLst>
           </p:cNvPr>
@@ -16147,7 +16561,7 @@
           <p:cNvPr id="28" name="Freeform 533">
             <a:extLst>
               <a:ext uri="{FF2B5EF4-FFF2-40B4-BE49-F238E27FC236}">
-                <a16:creationId xmlns:a16="http://schemas.microsoft.com/office/drawing/2014/main" id="{D0E2D712-3592-3C8A-4AF1-73F6E5BBC5D8}"/>
+                <a16:creationId xmlns:a16="http://schemas.microsoft.com/office/drawing/2014/main" xmlns="" id="{D0E2D712-3592-3C8A-4AF1-73F6E5BBC5D8}"/>
               </a:ext>
             </a:extLst>
           </p:cNvPr>
@@ -16328,7 +16742,7 @@
           <p:cNvPr id="29" name="Rectangle 28">
             <a:extLst>
               <a:ext uri="{FF2B5EF4-FFF2-40B4-BE49-F238E27FC236}">
-                <a16:creationId xmlns:a16="http://schemas.microsoft.com/office/drawing/2014/main" id="{2094900B-AB44-6798-6B92-E33E53C5EA5F}"/>
+                <a16:creationId xmlns:a16="http://schemas.microsoft.com/office/drawing/2014/main" xmlns="" id="{2094900B-AB44-6798-6B92-E33E53C5EA5F}"/>
               </a:ext>
             </a:extLst>
           </p:cNvPr>
@@ -16421,7 +16835,7 @@
           <p:cNvPr id="10" name="Title 9">
             <a:extLst>
               <a:ext uri="{FF2B5EF4-FFF2-40B4-BE49-F238E27FC236}">
-                <a16:creationId xmlns:a16="http://schemas.microsoft.com/office/drawing/2014/main" id="{4EB7BA3F-919D-7BBF-8C31-DAD5CBC47646}"/>
+                <a16:creationId xmlns:a16="http://schemas.microsoft.com/office/drawing/2014/main" xmlns="" id="{4EB7BA3F-919D-7BBF-8C31-DAD5CBC47646}"/>
               </a:ext>
             </a:extLst>
           </p:cNvPr>
@@ -16451,7 +16865,7 @@
               </a:spcBef>
             </a:pPr>
             <a:r>
-              <a:rPr lang="en-US" sz="4000" dirty="0">
+              <a:rPr lang="en-US" sz="4000" b="1" dirty="0">
                 <a:solidFill>
                   <a:prstClr val="black"/>
                 </a:solidFill>
@@ -16467,7 +16881,7 @@
           <p:cNvPr id="19" name="Content Placeholder 2">
             <a:extLst>
               <a:ext uri="{FF2B5EF4-FFF2-40B4-BE49-F238E27FC236}">
-                <a16:creationId xmlns:a16="http://schemas.microsoft.com/office/drawing/2014/main" id="{98349F09-71B1-87BB-EA53-81192F0663CA}"/>
+                <a16:creationId xmlns:a16="http://schemas.microsoft.com/office/drawing/2014/main" xmlns="" id="{98349F09-71B1-87BB-EA53-81192F0663CA}"/>
               </a:ext>
             </a:extLst>
           </p:cNvPr>
@@ -16657,13 +17071,39 @@
                 <a:spcPts val="800"/>
               </a:spcAft>
             </a:pPr>
-            <a:r>
-              <a:rPr lang="en-US" sz="2000" kern="100" dirty="0">
+            <a:endParaRPr lang="en-US" sz="2000" kern="100" dirty="0" smtClean="0">
+              <a:latin typeface="Aptos" panose="020B0004020202020204" pitchFamily="34" charset="0"/>
+              <a:ea typeface="Calibri" panose="020F0502020204030204" pitchFamily="34" charset="0"/>
+              <a:cs typeface="Times New Roman" panose="02020603050405020304" pitchFamily="18" charset="0"/>
+            </a:endParaRPr>
+          </a:p>
+          <a:p>
+            <a:pPr marL="0" marR="0" algn="just">
+              <a:lnSpc>
+                <a:spcPct val="107000"/>
+              </a:lnSpc>
+              <a:spcBef>
+                <a:spcPts val="0"/>
+              </a:spcBef>
+              <a:spcAft>
+                <a:spcPts val="800"/>
+              </a:spcAft>
+            </a:pPr>
+            <a:r>
+              <a:rPr lang="en-US" sz="2000" kern="100" dirty="0" smtClean="0">
                 <a:latin typeface="Aptos" panose="020B0004020202020204" pitchFamily="34" charset="0"/>
                 <a:ea typeface="Calibri" panose="020F0502020204030204" pitchFamily="34" charset="0"/>
                 <a:cs typeface="Times New Roman" panose="02020603050405020304" pitchFamily="18" charset="0"/>
               </a:rPr>
-              <a:t>"Wear your silk not as a personal crown, but as a mantle of responsibility.“</a:t>
+              <a:t>"</a:t>
+            </a:r>
+            <a:r>
+              <a:rPr lang="en-US" sz="2000" kern="100" dirty="0">
+                <a:latin typeface="Aptos" panose="020B0004020202020204" pitchFamily="34" charset="0"/>
+                <a:ea typeface="Calibri" panose="020F0502020204030204" pitchFamily="34" charset="0"/>
+                <a:cs typeface="Times New Roman" panose="02020603050405020304" pitchFamily="18" charset="0"/>
+              </a:rPr>
+              <a:t>Wear your silk not as a personal crown, but as a mantle of responsibility.“</a:t>
             </a:r>
           </a:p>
           <a:p>
@@ -16719,7 +17159,7 @@
               </a:spcAft>
               <a:buNone/>
             </a:pPr>
-            <a:endParaRPr lang="en-US" sz="2000" kern="100" dirty="0">
+            <a:endParaRPr lang="en-US" sz="2800" kern="100" dirty="0">
               <a:latin typeface="Aptos" panose="020B0004020202020204" pitchFamily="34" charset="0"/>
               <a:ea typeface="Calibri" panose="020F0502020204030204" pitchFamily="34" charset="0"/>
               <a:cs typeface="Times New Roman" panose="02020603050405020304" pitchFamily="18" charset="0"/>
@@ -16759,7 +17199,7 @@
               </a:spcAft>
               <a:buNone/>
             </a:pPr>
-            <a:endParaRPr lang="en-US" sz="2000" kern="100" dirty="0">
+            <a:endParaRPr lang="en-US" sz="3200" kern="100" dirty="0">
               <a:latin typeface="Aptos" panose="020B0004020202020204" pitchFamily="34" charset="0"/>
               <a:ea typeface="Calibri" panose="020F0502020204030204" pitchFamily="34" charset="0"/>
               <a:cs typeface="Times New Roman" panose="02020603050405020304" pitchFamily="18" charset="0"/>
@@ -16799,7 +17239,7 @@
               </a:spcAft>
               <a:buNone/>
             </a:pPr>
-            <a:endParaRPr lang="en-US" sz="2000" kern="100" dirty="0">
+            <a:endParaRPr lang="en-US" sz="2400" kern="100" dirty="0">
               <a:latin typeface="Aptos" panose="020B0004020202020204" pitchFamily="34" charset="0"/>
               <a:ea typeface="Calibri" panose="020F0502020204030204" pitchFamily="34" charset="0"/>
               <a:cs typeface="Times New Roman" panose="02020603050405020304" pitchFamily="18" charset="0"/>
@@ -16855,7 +17295,7 @@
               </a:spcAft>
               <a:buNone/>
             </a:pPr>
-            <a:endParaRPr lang="en-US" sz="2000" kern="100" dirty="0">
+            <a:endParaRPr lang="en-US" sz="1050" kern="100" dirty="0">
               <a:latin typeface="Aptos" panose="020B0004020202020204" pitchFamily="34" charset="0"/>
               <a:ea typeface="Calibri" panose="020F0502020204030204" pitchFamily="34" charset="0"/>
               <a:cs typeface="Times New Roman" panose="02020603050405020304" pitchFamily="18" charset="0"/>
@@ -16910,7 +17350,7 @@
           <p:cNvPr id="3" name="Cube 2">
             <a:extLst>
               <a:ext uri="{FF2B5EF4-FFF2-40B4-BE49-F238E27FC236}">
-                <a16:creationId xmlns:a16="http://schemas.microsoft.com/office/drawing/2014/main" id="{B1A43812-0FCD-90BB-5E23-CF844C3AEC67}"/>
+                <a16:creationId xmlns:a16="http://schemas.microsoft.com/office/drawing/2014/main" xmlns="" id="{B1A43812-0FCD-90BB-5E23-CF844C3AEC67}"/>
               </a:ext>
             </a:extLst>
           </p:cNvPr>
@@ -16919,8 +17359,8 @@
         </p:nvSpPr>
         <p:spPr>
           <a:xfrm rot="8100000">
-            <a:off x="443218" y="2380081"/>
-            <a:ext cx="574956" cy="505125"/>
+            <a:off x="439128" y="2370209"/>
+            <a:ext cx="602877" cy="505125"/>
           </a:xfrm>
           <a:prstGeom prst="cube">
             <a:avLst>
@@ -16964,7 +17404,7 @@
           <p:cNvPr id="4" name="Cube 3">
             <a:extLst>
               <a:ext uri="{FF2B5EF4-FFF2-40B4-BE49-F238E27FC236}">
-                <a16:creationId xmlns:a16="http://schemas.microsoft.com/office/drawing/2014/main" id="{6A76D216-42A3-8BCF-EFFB-8CC33B415636}"/>
+                <a16:creationId xmlns:a16="http://schemas.microsoft.com/office/drawing/2014/main" xmlns="" id="{6A76D216-42A3-8BCF-EFFB-8CC33B415636}"/>
               </a:ext>
             </a:extLst>
           </p:cNvPr>
@@ -17018,7 +17458,7 @@
           <p:cNvPr id="5" name="Cube 4">
             <a:extLst>
               <a:ext uri="{FF2B5EF4-FFF2-40B4-BE49-F238E27FC236}">
-                <a16:creationId xmlns:a16="http://schemas.microsoft.com/office/drawing/2014/main" id="{868C2115-3DE9-C0E5-C72D-4E6F2CD3008D}"/>
+                <a16:creationId xmlns:a16="http://schemas.microsoft.com/office/drawing/2014/main" xmlns="" id="{868C2115-3DE9-C0E5-C72D-4E6F2CD3008D}"/>
               </a:ext>
             </a:extLst>
           </p:cNvPr>
@@ -17072,7 +17512,7 @@
           <p:cNvPr id="6" name="Cube 5">
             <a:extLst>
               <a:ext uri="{FF2B5EF4-FFF2-40B4-BE49-F238E27FC236}">
-                <a16:creationId xmlns:a16="http://schemas.microsoft.com/office/drawing/2014/main" id="{C18313EC-C91D-2ED8-3AF0-7A3948C850B5}"/>
+                <a16:creationId xmlns:a16="http://schemas.microsoft.com/office/drawing/2014/main" xmlns="" id="{C18313EC-C91D-2ED8-3AF0-7A3948C850B5}"/>
               </a:ext>
             </a:extLst>
           </p:cNvPr>
@@ -17126,7 +17566,7 @@
           <p:cNvPr id="8" name="Cube 7">
             <a:extLst>
               <a:ext uri="{FF2B5EF4-FFF2-40B4-BE49-F238E27FC236}">
-                <a16:creationId xmlns:a16="http://schemas.microsoft.com/office/drawing/2014/main" id="{3C42F522-B289-9392-D7CD-97A9ADCABBA0}"/>
+                <a16:creationId xmlns:a16="http://schemas.microsoft.com/office/drawing/2014/main" xmlns="" id="{3C42F522-B289-9392-D7CD-97A9ADCABBA0}"/>
               </a:ext>
             </a:extLst>
           </p:cNvPr>
@@ -17135,7 +17575,7 @@
         </p:nvSpPr>
         <p:spPr>
           <a:xfrm rot="18900000">
-            <a:off x="443217" y="5532554"/>
+            <a:off x="443216" y="5321732"/>
             <a:ext cx="574956" cy="505125"/>
           </a:xfrm>
           <a:prstGeom prst="cube">
@@ -17180,7 +17620,7 @@
           <p:cNvPr id="9" name="Rectangle 8">
             <a:extLst>
               <a:ext uri="{FF2B5EF4-FFF2-40B4-BE49-F238E27FC236}">
-                <a16:creationId xmlns:a16="http://schemas.microsoft.com/office/drawing/2014/main" id="{E4696681-9740-ABC9-FA78-7C933C477141}"/>
+                <a16:creationId xmlns:a16="http://schemas.microsoft.com/office/drawing/2014/main" xmlns="" id="{E4696681-9740-ABC9-FA78-7C933C477141}"/>
               </a:ext>
             </a:extLst>
           </p:cNvPr>
@@ -17238,6 +17678,38 @@
           </a:p>
         </p:txBody>
       </p:sp>
+      <p:pic>
+        <p:nvPicPr>
+          <p:cNvPr id="2" name="Picture 1"/>
+          <p:cNvPicPr>
+            <a:picLocks noChangeAspect="1"/>
+          </p:cNvPicPr>
+          <p:nvPr/>
+        </p:nvPicPr>
+        <p:blipFill>
+          <a:blip r:embed="rId3">
+            <a:duotone>
+              <a:schemeClr val="accent6">
+                <a:shade val="45000"/>
+                <a:satMod val="135000"/>
+              </a:schemeClr>
+              <a:prstClr val="white"/>
+            </a:duotone>
+          </a:blip>
+          <a:stretch>
+            <a:fillRect/>
+          </a:stretch>
+        </p:blipFill>
+        <p:spPr>
+          <a:xfrm>
+            <a:off x="420057" y="6196853"/>
+            <a:ext cx="688908" cy="792549"/>
+          </a:xfrm>
+          <a:prstGeom prst="rect">
+            <a:avLst/>
+          </a:prstGeom>
+        </p:spPr>
+      </p:pic>
     </p:spTree>
     <p:extLst>
       <p:ext uri="{BB962C8B-B14F-4D97-AF65-F5344CB8AC3E}">
@@ -17273,7 +17745,7 @@
           <p:cNvPr id="10" name="Title 9">
             <a:extLst>
               <a:ext uri="{FF2B5EF4-FFF2-40B4-BE49-F238E27FC236}">
-                <a16:creationId xmlns:a16="http://schemas.microsoft.com/office/drawing/2014/main" id="{4EB7BA3F-919D-7BBF-8C31-DAD5CBC47646}"/>
+                <a16:creationId xmlns:a16="http://schemas.microsoft.com/office/drawing/2014/main" xmlns="" id="{4EB7BA3F-919D-7BBF-8C31-DAD5CBC47646}"/>
               </a:ext>
             </a:extLst>
           </p:cNvPr>
@@ -17303,14 +17775,29 @@
               </a:spcBef>
             </a:pPr>
             <a:r>
-              <a:rPr lang="en-US" sz="3200" dirty="0">
+              <a:rPr lang="en-US" sz="3200" b="1" dirty="0" smtClean="0">
                 <a:solidFill>
                   <a:prstClr val="black"/>
                 </a:solidFill>
                 <a:latin typeface="Aptos" panose="020B0004020202020204" pitchFamily="34" charset="0"/>
               </a:rPr>
-              <a:t>Proposal for Body of Senior Advocates of Nigeria (BOSAN)</a:t>
-            </a:r>
+              <a:t>BOSAN: Proposal for the Future</a:t>
+            </a:r>
+            <a:r>
+              <a:rPr lang="en-US" sz="3200" dirty="0" smtClean="0">
+                <a:solidFill>
+                  <a:prstClr val="black"/>
+                </a:solidFill>
+                <a:latin typeface="Aptos" panose="020B0004020202020204" pitchFamily="34" charset="0"/>
+              </a:rPr>
+              <a:t> </a:t>
+            </a:r>
+            <a:endParaRPr lang="en-US" sz="3200" dirty="0">
+              <a:solidFill>
+                <a:prstClr val="black"/>
+              </a:solidFill>
+              <a:latin typeface="Aptos" panose="020B0004020202020204" pitchFamily="34" charset="0"/>
+            </a:endParaRPr>
           </a:p>
         </p:txBody>
       </p:sp>
@@ -17319,7 +17806,7 @@
           <p:cNvPr id="19" name="Content Placeholder 2">
             <a:extLst>
               <a:ext uri="{FF2B5EF4-FFF2-40B4-BE49-F238E27FC236}">
-                <a16:creationId xmlns:a16="http://schemas.microsoft.com/office/drawing/2014/main" id="{98349F09-71B1-87BB-EA53-81192F0663CA}"/>
+                <a16:creationId xmlns:a16="http://schemas.microsoft.com/office/drawing/2014/main" xmlns="" id="{98349F09-71B1-87BB-EA53-81192F0663CA}"/>
               </a:ext>
             </a:extLst>
           </p:cNvPr>
@@ -17497,7 +17984,74 @@
                 <a:ea typeface="Calibri" panose="020F0502020204030204" pitchFamily="34" charset="0"/>
                 <a:cs typeface="Times New Roman" panose="02020603050405020304" pitchFamily="18" charset="0"/>
               </a:rPr>
-              <a:t>The Body of Benchers should identify with, support, and collaborate with the various professional bodies and initiatives to ensure that Senior Advocates consciously and deliberately participate in Mentorship and Leadership programs. For Instance: </a:t>
+              <a:t>The Body of Benchers should identify with, support, and collaborate with the </a:t>
+            </a:r>
+            <a:r>
+              <a:rPr lang="en-US" sz="1900" kern="100" dirty="0" smtClean="0">
+                <a:latin typeface="Aptos" panose="020B0004020202020204" pitchFamily="34" charset="0"/>
+                <a:ea typeface="Calibri" panose="020F0502020204030204" pitchFamily="34" charset="0"/>
+                <a:cs typeface="Times New Roman" panose="02020603050405020304" pitchFamily="18" charset="0"/>
+              </a:rPr>
+              <a:t>various </a:t>
+            </a:r>
+            <a:r>
+              <a:rPr lang="en-US" sz="1900" kern="100" dirty="0">
+                <a:latin typeface="Aptos" panose="020B0004020202020204" pitchFamily="34" charset="0"/>
+                <a:ea typeface="Calibri" panose="020F0502020204030204" pitchFamily="34" charset="0"/>
+                <a:cs typeface="Times New Roman" panose="02020603050405020304" pitchFamily="18" charset="0"/>
+              </a:rPr>
+              <a:t>initiatives </a:t>
+            </a:r>
+            <a:r>
+              <a:rPr lang="en-US" sz="1900" kern="100" dirty="0" smtClean="0">
+                <a:latin typeface="Aptos" panose="020B0004020202020204" pitchFamily="34" charset="0"/>
+                <a:ea typeface="Calibri" panose="020F0502020204030204" pitchFamily="34" charset="0"/>
+                <a:cs typeface="Times New Roman" panose="02020603050405020304" pitchFamily="18" charset="0"/>
+              </a:rPr>
+              <a:t>that have been set up pursuant to the relevant statutes such as </a:t>
+            </a:r>
+            <a:r>
+              <a:rPr lang="en-US" sz="1900" dirty="0" smtClean="0">
+                <a:solidFill>
+                  <a:prstClr val="black"/>
+                </a:solidFill>
+                <a:latin typeface="Aptos" panose="020B0004020202020204"/>
+              </a:rPr>
+              <a:t>t</a:t>
+            </a:r>
+            <a:r>
+              <a:rPr lang="en-US" sz="1900" dirty="0" smtClean="0">
+                <a:solidFill>
+                  <a:prstClr val="black"/>
+                </a:solidFill>
+                <a:latin typeface="Aptos" panose="020B0004020202020204"/>
+              </a:rPr>
+              <a:t>he </a:t>
+            </a:r>
+            <a:r>
+              <a:rPr lang="en-US" sz="1900" dirty="0">
+                <a:solidFill>
+                  <a:prstClr val="black"/>
+                </a:solidFill>
+                <a:latin typeface="Aptos" panose="020B0004020202020204"/>
+              </a:rPr>
+              <a:t>Legal Practitioners Act, the Legal Practitioners (Privileges)   Rules and the Rules of Professional Conduct </a:t>
+            </a:r>
+            <a:r>
+              <a:rPr lang="en-US" sz="1900" kern="100" dirty="0" smtClean="0">
+                <a:latin typeface="Aptos" panose="020B0004020202020204" pitchFamily="34" charset="0"/>
+                <a:ea typeface="Calibri" panose="020F0502020204030204" pitchFamily="34" charset="0"/>
+                <a:cs typeface="Times New Roman" panose="02020603050405020304" pitchFamily="18" charset="0"/>
+              </a:rPr>
+              <a:t>to </a:t>
+            </a:r>
+            <a:r>
+              <a:rPr lang="en-US" sz="1900" kern="100" dirty="0">
+                <a:latin typeface="Aptos" panose="020B0004020202020204" pitchFamily="34" charset="0"/>
+                <a:ea typeface="Calibri" panose="020F0502020204030204" pitchFamily="34" charset="0"/>
+                <a:cs typeface="Times New Roman" panose="02020603050405020304" pitchFamily="18" charset="0"/>
+              </a:rPr>
+              <a:t>ensure that Senior Advocates consciously and deliberately participate in Mentorship and Leadership programs. For Instance: </a:t>
             </a:r>
           </a:p>
           <a:p>
@@ -17526,8 +18080,29 @@
                 <a:ea typeface="Calibri" panose="020F0502020204030204" pitchFamily="34" charset="0"/>
                 <a:cs typeface="Times New Roman" panose="02020603050405020304" pitchFamily="18" charset="0"/>
               </a:rPr>
-              <a:t> wherein formal -mentor-mentee pairings with set objectives monitored by professional bodies such as the Body of Benchers and the Nigerian Law School is key into.</a:t>
-            </a:r>
+              <a:t> wherein formal -mentor-mentee pairings with set objectives monitored by professional bodies such as the </a:t>
+            </a:r>
+            <a:r>
+              <a:rPr lang="en-US" sz="1900" b="1" kern="100" dirty="0">
+                <a:latin typeface="Aptos" panose="020B0004020202020204" pitchFamily="34" charset="0"/>
+                <a:ea typeface="Calibri" panose="020F0502020204030204" pitchFamily="34" charset="0"/>
+                <a:cs typeface="Times New Roman" panose="02020603050405020304" pitchFamily="18" charset="0"/>
+              </a:rPr>
+              <a:t>Body of Benchers and the Nigerian Law School </a:t>
+            </a:r>
+            <a:r>
+              <a:rPr lang="en-US" sz="1900" b="1" kern="100" dirty="0" smtClean="0">
+                <a:latin typeface="Aptos" panose="020B0004020202020204" pitchFamily="34" charset="0"/>
+                <a:ea typeface="Calibri" panose="020F0502020204030204" pitchFamily="34" charset="0"/>
+                <a:cs typeface="Times New Roman" panose="02020603050405020304" pitchFamily="18" charset="0"/>
+              </a:rPr>
+              <a:t>and the Nigerian Bar Association</a:t>
+            </a:r>
+            <a:endParaRPr lang="en-US" sz="1900" b="1" kern="100" dirty="0">
+              <a:latin typeface="Aptos" panose="020B0004020202020204" pitchFamily="34" charset="0"/>
+              <a:ea typeface="Calibri" panose="020F0502020204030204" pitchFamily="34" charset="0"/>
+              <a:cs typeface="Times New Roman" panose="02020603050405020304" pitchFamily="18" charset="0"/>
+            </a:endParaRPr>
           </a:p>
           <a:p>
             <a:pPr marL="0" marR="0" algn="just">
@@ -17555,7 +18130,23 @@
                 <a:ea typeface="Calibri" panose="020F0502020204030204" pitchFamily="34" charset="0"/>
                 <a:cs typeface="Times New Roman" panose="02020603050405020304" pitchFamily="18" charset="0"/>
               </a:rPr>
-              <a:t> Using digital platforms for training, shadowing, and continuous professional development deployed by the NBA Young Lawyers Forum to deliver structured virtual mentorship programs.</a:t>
+              <a:t> Using digital platforms for training, shadowing, and continuous professional development deployed by the </a:t>
+            </a:r>
+            <a:r>
+              <a:rPr lang="en-US" sz="1900" b="1" kern="100" dirty="0">
+                <a:latin typeface="Aptos" panose="020B0004020202020204" pitchFamily="34" charset="0"/>
+                <a:ea typeface="Calibri" panose="020F0502020204030204" pitchFamily="34" charset="0"/>
+                <a:cs typeface="Times New Roman" panose="02020603050405020304" pitchFamily="18" charset="0"/>
+              </a:rPr>
+              <a:t>NBA Young Lawyers Forum </a:t>
+            </a:r>
+            <a:r>
+              <a:rPr lang="en-US" sz="1900" kern="100" dirty="0">
+                <a:latin typeface="Aptos" panose="020B0004020202020204" pitchFamily="34" charset="0"/>
+                <a:ea typeface="Calibri" panose="020F0502020204030204" pitchFamily="34" charset="0"/>
+                <a:cs typeface="Times New Roman" panose="02020603050405020304" pitchFamily="18" charset="0"/>
+              </a:rPr>
+              <a:t>to deliver structured virtual mentorship programs.</a:t>
             </a:r>
           </a:p>
           <a:p>
@@ -17637,7 +18228,29 @@
                 <a:ea typeface="Calibri" panose="020F0502020204030204" pitchFamily="34" charset="0"/>
                 <a:cs typeface="Times New Roman" panose="02020603050405020304" pitchFamily="18" charset="0"/>
               </a:rPr>
-              <a:t>Keep an eye on  the  National Policy on Mentorship being designed by the Body of Benchers which seeks to produce a comprehensive framework and structured Mentorship development program with emphasis on ethics and leadership cultivation  across all levels of legal practice.</a:t>
+              <a:t>Keep an eye on  the  </a:t>
+            </a:r>
+            <a:r>
+              <a:rPr lang="en-US" sz="1900" b="1" kern="100" dirty="0">
+                <a:solidFill>
+                  <a:prstClr val="black"/>
+                </a:solidFill>
+                <a:latin typeface="Aptos" panose="020B0004020202020204" pitchFamily="34" charset="0"/>
+                <a:ea typeface="Calibri" panose="020F0502020204030204" pitchFamily="34" charset="0"/>
+                <a:cs typeface="Times New Roman" panose="02020603050405020304" pitchFamily="18" charset="0"/>
+              </a:rPr>
+              <a:t>National Policy on Mentorship </a:t>
+            </a:r>
+            <a:r>
+              <a:rPr lang="en-US" sz="1900" kern="100" dirty="0">
+                <a:solidFill>
+                  <a:prstClr val="black"/>
+                </a:solidFill>
+                <a:latin typeface="Aptos" panose="020B0004020202020204" pitchFamily="34" charset="0"/>
+                <a:ea typeface="Calibri" panose="020F0502020204030204" pitchFamily="34" charset="0"/>
+                <a:cs typeface="Times New Roman" panose="02020603050405020304" pitchFamily="18" charset="0"/>
+              </a:rPr>
+              <a:t>being designed by the Body of Benchers which seeks to produce a comprehensive framework and structured Mentorship development program with emphasis on ethics and leadership cultivation  across all levels of legal practice.</a:t>
             </a:r>
           </a:p>
           <a:p>
@@ -17668,7 +18281,7 @@
           <p:cNvPr id="2" name="Rectangle 1">
             <a:extLst>
               <a:ext uri="{FF2B5EF4-FFF2-40B4-BE49-F238E27FC236}">
-                <a16:creationId xmlns:a16="http://schemas.microsoft.com/office/drawing/2014/main" id="{AFC7B0BD-FEEE-A7CD-7837-4BEFB98E1A7C}"/>
+                <a16:creationId xmlns:a16="http://schemas.microsoft.com/office/drawing/2014/main" xmlns="" id="{AFC7B0BD-FEEE-A7CD-7837-4BEFB98E1A7C}"/>
               </a:ext>
             </a:extLst>
           </p:cNvPr>
@@ -17747,7 +18360,7 @@
         <p:cNvPr id="1" name="">
           <a:extLst>
             <a:ext uri="{FF2B5EF4-FFF2-40B4-BE49-F238E27FC236}">
-              <a16:creationId xmlns:a16="http://schemas.microsoft.com/office/drawing/2014/main" id="{632209F5-B6BF-FC4E-F456-4A360AA1C6E3}"/>
+              <a16:creationId xmlns:a16="http://schemas.microsoft.com/office/drawing/2014/main" xmlns="" id="{632209F5-B6BF-FC4E-F456-4A360AA1C6E3}"/>
             </a:ext>
           </a:extLst>
         </p:cNvPr>
@@ -17767,7 +18380,7 @@
           <p:cNvPr id="19" name="Content Placeholder 6">
             <a:extLst>
               <a:ext uri="{FF2B5EF4-FFF2-40B4-BE49-F238E27FC236}">
-                <a16:creationId xmlns:a16="http://schemas.microsoft.com/office/drawing/2014/main" id="{6863FE2B-D250-2203-6BE6-9B4F84C52716}"/>
+                <a16:creationId xmlns:a16="http://schemas.microsoft.com/office/drawing/2014/main" xmlns="" id="{6863FE2B-D250-2203-6BE6-9B4F84C52716}"/>
               </a:ext>
             </a:extLst>
           </p:cNvPr>
@@ -17963,7 +18576,25 @@
                 </a:solidFill>
                 <a:latin typeface="Aptos" panose="020B0004020202020204" pitchFamily="34" charset="0"/>
               </a:rPr>
-              <a:t> lies not just in personal brilliance or individual accolade, but in the indelible mark left on the lives shaped and the standards preserved for generations of lawyers to come”</a:t>
+              <a:t> lies not just in personal brilliance or individual </a:t>
+            </a:r>
+            <a:r>
+              <a:rPr lang="en-US" sz="3200" dirty="0" smtClean="0">
+                <a:solidFill>
+                  <a:prstClr val="black"/>
+                </a:solidFill>
+                <a:latin typeface="Aptos" panose="020B0004020202020204" pitchFamily="34" charset="0"/>
+              </a:rPr>
+              <a:t>accolades, </a:t>
+            </a:r>
+            <a:r>
+              <a:rPr lang="en-US" sz="3200" dirty="0">
+                <a:solidFill>
+                  <a:prstClr val="black"/>
+                </a:solidFill>
+                <a:latin typeface="Aptos" panose="020B0004020202020204" pitchFamily="34" charset="0"/>
+              </a:rPr>
+              <a:t>but in the indelible mark left on the lives shaped and the standards preserved for generations of lawyers to come”</a:t>
             </a:r>
             <a:endParaRPr lang="x-none" sz="3200" dirty="0">
               <a:solidFill>
@@ -17979,7 +18610,7 @@
           <p:cNvPr id="10" name="Group 9">
             <a:extLst>
               <a:ext uri="{FF2B5EF4-FFF2-40B4-BE49-F238E27FC236}">
-                <a16:creationId xmlns:a16="http://schemas.microsoft.com/office/drawing/2014/main" id="{AA8B0F41-152A-C5F3-FFEE-D77A89E98B7E}"/>
+                <a16:creationId xmlns:a16="http://schemas.microsoft.com/office/drawing/2014/main" xmlns="" id="{AA8B0F41-152A-C5F3-FFEE-D77A89E98B7E}"/>
               </a:ext>
             </a:extLst>
           </p:cNvPr>
@@ -17999,7 +18630,7 @@
             <p:cNvPr id="6" name="Freeform: Shape 5">
               <a:extLst>
                 <a:ext uri="{FF2B5EF4-FFF2-40B4-BE49-F238E27FC236}">
-                  <a16:creationId xmlns:a16="http://schemas.microsoft.com/office/drawing/2014/main" id="{B55B15FE-7B64-954D-3430-89D20E57804F}"/>
+                  <a16:creationId xmlns:a16="http://schemas.microsoft.com/office/drawing/2014/main" xmlns="" id="{B55B15FE-7B64-954D-3430-89D20E57804F}"/>
                 </a:ext>
               </a:extLst>
             </p:cNvPr>
@@ -18163,7 +18794,7 @@
             <p:cNvPr id="9" name="Shape">
               <a:extLst>
                 <a:ext uri="{FF2B5EF4-FFF2-40B4-BE49-F238E27FC236}">
-                  <a16:creationId xmlns:a16="http://schemas.microsoft.com/office/drawing/2014/main" id="{12CAB85D-7C01-C4A6-AA75-769DD778D9C3}"/>
+                  <a16:creationId xmlns:a16="http://schemas.microsoft.com/office/drawing/2014/main" xmlns="" id="{12CAB85D-7C01-C4A6-AA75-769DD778D9C3}"/>
                 </a:ext>
               </a:extLst>
             </p:cNvPr>
@@ -18725,7 +19356,7 @@
           <p:cNvPr id="2" name="Rectangle 1">
             <a:extLst>
               <a:ext uri="{FF2B5EF4-FFF2-40B4-BE49-F238E27FC236}">
-                <a16:creationId xmlns:a16="http://schemas.microsoft.com/office/drawing/2014/main" id="{6464BA72-0CE8-603E-9837-837ECF208B7F}"/>
+                <a16:creationId xmlns:a16="http://schemas.microsoft.com/office/drawing/2014/main" xmlns="" id="{6464BA72-0CE8-603E-9837-837ECF208B7F}"/>
               </a:ext>
             </a:extLst>
           </p:cNvPr>
@@ -18818,7 +19449,7 @@
           <p:cNvPr id="10" name="Title 9">
             <a:extLst>
               <a:ext uri="{FF2B5EF4-FFF2-40B4-BE49-F238E27FC236}">
-                <a16:creationId xmlns:a16="http://schemas.microsoft.com/office/drawing/2014/main" id="{4EB7BA3F-919D-7BBF-8C31-DAD5CBC47646}"/>
+                <a16:creationId xmlns:a16="http://schemas.microsoft.com/office/drawing/2014/main" xmlns="" id="{4EB7BA3F-919D-7BBF-8C31-DAD5CBC47646}"/>
               </a:ext>
             </a:extLst>
           </p:cNvPr>
@@ -18856,7 +19487,7 @@
           <p:cNvPr id="19" name="Content Placeholder 2">
             <a:extLst>
               <a:ext uri="{FF2B5EF4-FFF2-40B4-BE49-F238E27FC236}">
-                <a16:creationId xmlns:a16="http://schemas.microsoft.com/office/drawing/2014/main" id="{98349F09-71B1-87BB-EA53-81192F0663CA}"/>
+                <a16:creationId xmlns:a16="http://schemas.microsoft.com/office/drawing/2014/main" xmlns="" id="{98349F09-71B1-87BB-EA53-81192F0663CA}"/>
               </a:ext>
             </a:extLst>
           </p:cNvPr>
@@ -19018,7 +19649,7 @@
           <a:p>
             <a:pPr marL="457200" indent="-457200"/>
             <a:r>
-              <a:rPr lang="en-US" sz="1800" dirty="0">
+              <a:rPr lang="en-US" sz="1800" b="1" dirty="0">
                 <a:latin typeface="Aptos" panose="020B0004020202020204" pitchFamily="34" charset="0"/>
               </a:rPr>
               <a:t>Preamble</a:t>
@@ -19027,7 +19658,7 @@
           <a:p>
             <a:pPr marL="457200" indent="-457200"/>
             <a:r>
-              <a:rPr lang="en-US" sz="1800" dirty="0">
+              <a:rPr lang="en-US" sz="1800" b="1" dirty="0">
                 <a:latin typeface="Aptos" panose="020B0004020202020204" pitchFamily="34" charset="0"/>
               </a:rPr>
               <a:t>Introduction</a:t>
@@ -19036,7 +19667,7 @@
           <a:p>
             <a:pPr marL="457200" indent="-457200"/>
             <a:r>
-              <a:rPr lang="en-US" sz="1800" dirty="0">
+              <a:rPr lang="en-US" sz="1800" b="1" dirty="0">
                 <a:latin typeface="Aptos" panose="020B0004020202020204" pitchFamily="34" charset="0"/>
               </a:rPr>
               <a:t>Posers</a:t>
@@ -19045,7 +19676,7 @@
           <a:p>
             <a:pPr marL="457200" indent="-457200"/>
             <a:r>
-              <a:rPr lang="en-US" sz="1800" dirty="0">
+              <a:rPr lang="en-US" sz="1800" b="1" dirty="0">
                 <a:latin typeface="Aptos" panose="020B0004020202020204" pitchFamily="34" charset="0"/>
               </a:rPr>
               <a:t>Cornerstone Pillars of the Inner Bar</a:t>
@@ -19054,7 +19685,7 @@
           <a:p>
             <a:pPr marL="457200" indent="-457200"/>
             <a:r>
-              <a:rPr lang="en-US" sz="1800" dirty="0">
+              <a:rPr lang="en-US" sz="1800" b="1" dirty="0">
                 <a:latin typeface="Aptos" panose="020B0004020202020204" pitchFamily="34" charset="0"/>
               </a:rPr>
               <a:t>Mentorship</a:t>
@@ -19063,7 +19694,7 @@
           <a:p>
             <a:pPr marL="457200" indent="-457200"/>
             <a:r>
-              <a:rPr lang="en-US" sz="1800" dirty="0">
+              <a:rPr lang="en-US" sz="1800" b="1" dirty="0">
                 <a:latin typeface="Aptos" panose="020B0004020202020204" pitchFamily="34" charset="0"/>
               </a:rPr>
               <a:t>Types of Mentorship</a:t>
@@ -19072,7 +19703,7 @@
           <a:p>
             <a:pPr marL="457200" indent="-457200"/>
             <a:r>
-              <a:rPr lang="en-US" sz="1800" kern="0" dirty="0">
+              <a:rPr lang="en-US" sz="1800" b="1" kern="0" dirty="0">
                 <a:latin typeface="Aptos" panose="020B0004020202020204" pitchFamily="34" charset="0"/>
                 <a:ea typeface="Times New Roman" panose="02020603050405020304" pitchFamily="18" charset="0"/>
                 <a:cs typeface="Times New Roman" panose="02020603050405020304" pitchFamily="18" charset="0"/>
@@ -19080,7 +19711,7 @@
               <a:t>The Presumption and Responsibility of the Senior Advocate as a Mentor</a:t>
             </a:r>
             <a:r>
-              <a:rPr lang="en-US" sz="1800" dirty="0">
+              <a:rPr lang="en-US" sz="1800" b="1" dirty="0">
                 <a:latin typeface="Aptos" panose="020B0004020202020204" pitchFamily="34" charset="0"/>
               </a:rPr>
               <a:t> </a:t>
@@ -19089,7 +19720,7 @@
           <a:p>
             <a:pPr marL="457200" indent="-457200"/>
             <a:r>
-              <a:rPr lang="en-US" sz="1800" dirty="0">
+              <a:rPr lang="en-US" sz="1800" b="1" dirty="0">
                 <a:latin typeface="Aptos" panose="020B0004020202020204" pitchFamily="34" charset="0"/>
               </a:rPr>
               <a:t>Knowledge Transfer as Legacy: Technical and Moral</a:t>
@@ -19098,25 +19729,40 @@
           <a:p>
             <a:pPr marL="457200" indent="-457200"/>
             <a:r>
-              <a:rPr lang="en-US" sz="1800" dirty="0">
-                <a:latin typeface="Aptos" panose="020B0004020202020204" pitchFamily="34" charset="0"/>
-              </a:rPr>
-              <a:t>Mentorship: Skill Transfer</a:t>
-            </a:r>
+              <a:rPr lang="en-US" sz="1800" b="1" dirty="0" smtClean="0">
+                <a:latin typeface="Aptos" panose="020B0004020202020204" pitchFamily="34" charset="0"/>
+              </a:rPr>
+              <a:t>Understanding Mentorship; A necessary mind shift</a:t>
+            </a:r>
+            <a:endParaRPr lang="en-US" sz="1800" b="1" dirty="0">
+              <a:latin typeface="Aptos" panose="020B0004020202020204" pitchFamily="34" charset="0"/>
+            </a:endParaRPr>
           </a:p>
           <a:p>
             <a:pPr marL="457200" indent="-457200"/>
             <a:r>
-              <a:rPr lang="en-US" sz="1800" dirty="0">
-                <a:latin typeface="Aptos" panose="020B0004020202020204" pitchFamily="34" charset="0"/>
-              </a:rPr>
-              <a:t>Practical Steps of Preserving  Standards </a:t>
+              <a:rPr lang="en-US" sz="1800" b="1" dirty="0">
+                <a:latin typeface="Aptos" panose="020B0004020202020204" pitchFamily="34" charset="0"/>
+              </a:rPr>
+              <a:t>Practical Steps </a:t>
+            </a:r>
+            <a:r>
+              <a:rPr lang="en-US" sz="1800" b="1" dirty="0" smtClean="0">
+                <a:latin typeface="Aptos" panose="020B0004020202020204" pitchFamily="34" charset="0"/>
+              </a:rPr>
+              <a:t>of </a:t>
+            </a:r>
+            <a:r>
+              <a:rPr lang="en-US" sz="1800" b="1" dirty="0">
+                <a:latin typeface="Aptos" panose="020B0004020202020204" pitchFamily="34" charset="0"/>
+              </a:rPr>
+              <a:t>Preserving  Standards </a:t>
             </a:r>
           </a:p>
           <a:p>
             <a:pPr marL="457200" indent="-457200"/>
             <a:r>
-              <a:rPr lang="en-US" sz="1800" dirty="0">
+              <a:rPr lang="en-US" sz="1800" b="1" dirty="0">
                 <a:latin typeface="Aptos" panose="020B0004020202020204" pitchFamily="34" charset="0"/>
               </a:rPr>
               <a:t>Challenges to Overcome as Mentors</a:t>
@@ -19125,7 +19771,7 @@
           <a:p>
             <a:pPr marL="457200" indent="-457200"/>
             <a:r>
-              <a:rPr lang="en-US" sz="1800" dirty="0">
+              <a:rPr lang="en-US" sz="1800" b="1" dirty="0">
                 <a:latin typeface="Aptos" panose="020B0004020202020204" pitchFamily="34" charset="0"/>
               </a:rPr>
               <a:t>Charge to New Senior Advocates </a:t>
@@ -19134,16 +19780,19 @@
           <a:p>
             <a:pPr marL="457200" indent="-457200"/>
             <a:r>
-              <a:rPr lang="en-US" sz="1800" dirty="0">
-                <a:latin typeface="Aptos" panose="020B0004020202020204" pitchFamily="34" charset="0"/>
-              </a:rPr>
-              <a:t>Proposals for Body of Senior Advocates of Nigeria (BOSAN)</a:t>
-            </a:r>
+              <a:rPr lang="en-US" sz="1800" b="1" dirty="0" smtClean="0">
+                <a:latin typeface="Aptos" panose="020B0004020202020204" pitchFamily="34" charset="0"/>
+              </a:rPr>
+              <a:t>BOSAN: Proposal for the future</a:t>
+            </a:r>
+            <a:endParaRPr lang="en-US" sz="1800" b="1" dirty="0">
+              <a:latin typeface="Aptos" panose="020B0004020202020204" pitchFamily="34" charset="0"/>
+            </a:endParaRPr>
           </a:p>
           <a:p>
             <a:pPr marL="457200" indent="-457200"/>
             <a:r>
-              <a:rPr lang="en-US" sz="1800" dirty="0">
+              <a:rPr lang="en-US" sz="1800" b="1" dirty="0">
                 <a:latin typeface="Aptos" panose="020B0004020202020204" pitchFamily="34" charset="0"/>
               </a:rPr>
               <a:t>Conclusion: A Legacy of Distinction</a:t>
@@ -19156,7 +19805,7 @@
           <p:cNvPr id="2" name="Group 1">
             <a:extLst>
               <a:ext uri="{FF2B5EF4-FFF2-40B4-BE49-F238E27FC236}">
-                <a16:creationId xmlns:a16="http://schemas.microsoft.com/office/drawing/2014/main" id="{B3F68C73-32D7-9C31-060A-B3232A84E9C2}"/>
+                <a16:creationId xmlns:a16="http://schemas.microsoft.com/office/drawing/2014/main" xmlns="" id="{B3F68C73-32D7-9C31-060A-B3232A84E9C2}"/>
               </a:ext>
             </a:extLst>
           </p:cNvPr>
@@ -19176,7 +19825,7 @@
             <p:cNvPr id="3" name="Oval 2">
               <a:extLst>
                 <a:ext uri="{FF2B5EF4-FFF2-40B4-BE49-F238E27FC236}">
-                  <a16:creationId xmlns:a16="http://schemas.microsoft.com/office/drawing/2014/main" id="{4E5F00D2-3BE0-90F8-AEDA-9E244B326735}"/>
+                  <a16:creationId xmlns:a16="http://schemas.microsoft.com/office/drawing/2014/main" xmlns="" id="{4E5F00D2-3BE0-90F8-AEDA-9E244B326735}"/>
                 </a:ext>
               </a:extLst>
             </p:cNvPr>
@@ -19234,7 +19883,7 @@
             <p:cNvPr id="4" name="Graphic 3" descr="Open book outline">
               <a:extLst>
                 <a:ext uri="{FF2B5EF4-FFF2-40B4-BE49-F238E27FC236}">
-                  <a16:creationId xmlns:a16="http://schemas.microsoft.com/office/drawing/2014/main" id="{10DCAB6C-3AE1-E177-2D18-41195A3149A7}"/>
+                  <a16:creationId xmlns:a16="http://schemas.microsoft.com/office/drawing/2014/main" xmlns="" id="{10DCAB6C-3AE1-E177-2D18-41195A3149A7}"/>
                 </a:ext>
               </a:extLst>
             </p:cNvPr>
@@ -19250,7 +19899,7 @@
                   <a14:useLocalDpi xmlns:a14="http://schemas.microsoft.com/office/drawing/2010/main" val="0"/>
                 </a:ext>
                 <a:ext uri="{96DAC541-7B7A-43D3-8B79-37D633B846F1}">
-                  <asvg:svgBlip xmlns:asvg="http://schemas.microsoft.com/office/drawing/2016/SVG/main" r:embed="rId4"/>
+                  <asvg:svgBlip xmlns:asvg="http://schemas.microsoft.com/office/drawing/2016/SVG/main" xmlns="" r:embed="rId4"/>
                 </a:ext>
               </a:extLst>
             </a:blip>
@@ -19274,7 +19923,7 @@
           <p:cNvPr id="6" name="Rectangle 5">
             <a:extLst>
               <a:ext uri="{FF2B5EF4-FFF2-40B4-BE49-F238E27FC236}">
-                <a16:creationId xmlns:a16="http://schemas.microsoft.com/office/drawing/2014/main" id="{14F1603A-EC9B-BBAC-579A-2778C34FF01F}"/>
+                <a16:creationId xmlns:a16="http://schemas.microsoft.com/office/drawing/2014/main" xmlns="" id="{14F1603A-EC9B-BBAC-579A-2778C34FF01F}"/>
               </a:ext>
             </a:extLst>
           </p:cNvPr>
@@ -19372,7 +20021,7 @@
           <p:cNvPr id="10" name="Title 9">
             <a:extLst>
               <a:ext uri="{FF2B5EF4-FFF2-40B4-BE49-F238E27FC236}">
-                <a16:creationId xmlns:a16="http://schemas.microsoft.com/office/drawing/2014/main" id="{4EB7BA3F-919D-7BBF-8C31-DAD5CBC47646}"/>
+                <a16:creationId xmlns:a16="http://schemas.microsoft.com/office/drawing/2014/main" xmlns="" id="{4EB7BA3F-919D-7BBF-8C31-DAD5CBC47646}"/>
               </a:ext>
             </a:extLst>
           </p:cNvPr>
@@ -19402,7 +20051,7 @@
               </a:spcBef>
             </a:pPr>
             <a:r>
-              <a:rPr lang="en-US" dirty="0">
+              <a:rPr lang="en-US" b="1" dirty="0">
                 <a:solidFill>
                   <a:prstClr val="black"/>
                 </a:solidFill>
@@ -19418,7 +20067,7 @@
           <p:cNvPr id="19" name="Content Placeholder 2">
             <a:extLst>
               <a:ext uri="{FF2B5EF4-FFF2-40B4-BE49-F238E27FC236}">
-                <a16:creationId xmlns:a16="http://schemas.microsoft.com/office/drawing/2014/main" id="{98349F09-71B1-87BB-EA53-81192F0663CA}"/>
+                <a16:creationId xmlns:a16="http://schemas.microsoft.com/office/drawing/2014/main" xmlns="" id="{98349F09-71B1-87BB-EA53-81192F0663CA}"/>
               </a:ext>
             </a:extLst>
           </p:cNvPr>
@@ -19429,8 +20078,8 @@
         </p:nvSpPr>
         <p:spPr>
           <a:xfrm>
-            <a:off x="3286100" y="1143842"/>
-            <a:ext cx="7146138" cy="3447474"/>
+            <a:off x="2998068" y="1143842"/>
+            <a:ext cx="8136904" cy="3447474"/>
           </a:xfrm>
           <a:prstGeom prst="rect">
             <a:avLst/>
@@ -19590,13 +20239,42 @@
               </a:spcAft>
             </a:pPr>
             <a:r>
-              <a:rPr lang="en-US" sz="2400" kern="100" dirty="0">
+              <a:rPr lang="en-US" sz="2200" kern="100" dirty="0">
                 <a:latin typeface="Aptos" panose="020B0004020202020204" pitchFamily="34" charset="0"/>
                 <a:ea typeface="Calibri" panose="020F0502020204030204" pitchFamily="34" charset="0"/>
                 <a:cs typeface="Times New Roman" panose="02020603050405020304" pitchFamily="18" charset="0"/>
               </a:rPr>
-              <a:t>The silk represents "the beginning of your greatest duty: to leave a legacy of distinction for those who will come after." Mentoring and knowledge transfer are "the lifeblood of our profession, the bridge between what we have received and what we must pass on." </a:t>
-            </a:r>
+              <a:t>The silk represents "the beginning of your greatest duty: to leave a legacy of distinction for those who will come after." Mentoring and knowledge transfer are "the </a:t>
+            </a:r>
+            <a:r>
+              <a:rPr lang="en-US" sz="2200" kern="100" dirty="0" smtClean="0">
+                <a:latin typeface="Aptos" panose="020B0004020202020204" pitchFamily="34" charset="0"/>
+                <a:ea typeface="Calibri" panose="020F0502020204030204" pitchFamily="34" charset="0"/>
+                <a:cs typeface="Times New Roman" panose="02020603050405020304" pitchFamily="18" charset="0"/>
+              </a:rPr>
+              <a:t>lifeline </a:t>
+            </a:r>
+            <a:r>
+              <a:rPr lang="en-US" sz="2200" kern="100" dirty="0">
+                <a:latin typeface="Aptos" panose="020B0004020202020204" pitchFamily="34" charset="0"/>
+                <a:ea typeface="Calibri" panose="020F0502020204030204" pitchFamily="34" charset="0"/>
+                <a:cs typeface="Times New Roman" panose="02020603050405020304" pitchFamily="18" charset="0"/>
+              </a:rPr>
+              <a:t>of our profession, the bridge between what we have received and what we must pass </a:t>
+            </a:r>
+            <a:r>
+              <a:rPr lang="en-US" sz="2200" kern="100" dirty="0" smtClean="0">
+                <a:latin typeface="Aptos" panose="020B0004020202020204" pitchFamily="34" charset="0"/>
+                <a:ea typeface="Calibri" panose="020F0502020204030204" pitchFamily="34" charset="0"/>
+                <a:cs typeface="Times New Roman" panose="02020603050405020304" pitchFamily="18" charset="0"/>
+              </a:rPr>
+              <a:t>on“. </a:t>
+            </a:r>
+            <a:endParaRPr lang="en-US" sz="2200" kern="100" dirty="0">
+              <a:latin typeface="Aptos" panose="020B0004020202020204" pitchFamily="34" charset="0"/>
+              <a:ea typeface="Calibri" panose="020F0502020204030204" pitchFamily="34" charset="0"/>
+              <a:cs typeface="Times New Roman" panose="02020603050405020304" pitchFamily="18" charset="0"/>
+            </a:endParaRPr>
           </a:p>
           <a:p>
             <a:pPr marL="0" marR="0" indent="0" algn="just">
@@ -19612,13 +20290,42 @@
               <a:buNone/>
             </a:pPr>
             <a:r>
-              <a:rPr lang="en-US" sz="2400" kern="100" dirty="0">
+              <a:rPr lang="en-US" sz="2200" kern="100" dirty="0">
                 <a:latin typeface="Aptos" panose="020B0004020202020204" pitchFamily="34" charset="0"/>
                 <a:ea typeface="Calibri" panose="020F0502020204030204" pitchFamily="34" charset="0"/>
                 <a:cs typeface="Times New Roman" panose="02020603050405020304" pitchFamily="18" charset="0"/>
               </a:rPr>
-              <a:t>By living with integrity, teaching with intention, and leading with humility, SANs will ensure that "the legacy of excellence which defines the Senior Advocate of Nigeria endures far beyond time." </a:t>
-            </a:r>
+              <a:t>By living with integrity, teaching with intention, and leading with </a:t>
+            </a:r>
+            <a:r>
+              <a:rPr lang="en-US" sz="2200" kern="100" dirty="0" smtClean="0">
+                <a:latin typeface="Aptos" panose="020B0004020202020204" pitchFamily="34" charset="0"/>
+                <a:ea typeface="Calibri" panose="020F0502020204030204" pitchFamily="34" charset="0"/>
+                <a:cs typeface="Times New Roman" panose="02020603050405020304" pitchFamily="18" charset="0"/>
+              </a:rPr>
+              <a:t>humility and the fear of God, </a:t>
+            </a:r>
+            <a:r>
+              <a:rPr lang="en-US" sz="2200" kern="100" dirty="0">
+                <a:latin typeface="Aptos" panose="020B0004020202020204" pitchFamily="34" charset="0"/>
+                <a:ea typeface="Calibri" panose="020F0502020204030204" pitchFamily="34" charset="0"/>
+                <a:cs typeface="Times New Roman" panose="02020603050405020304" pitchFamily="18" charset="0"/>
+              </a:rPr>
+              <a:t>SANs will ensure that "the legacy of excellence which defines the </a:t>
+            </a:r>
+            <a:r>
+              <a:rPr lang="en-US" sz="2200" kern="100" dirty="0" smtClean="0">
+                <a:latin typeface="Aptos" panose="020B0004020202020204" pitchFamily="34" charset="0"/>
+                <a:ea typeface="Calibri" panose="020F0502020204030204" pitchFamily="34" charset="0"/>
+                <a:cs typeface="Times New Roman" panose="02020603050405020304" pitchFamily="18" charset="0"/>
+              </a:rPr>
+              <a:t>Inner Bar will endure”. </a:t>
+            </a:r>
+            <a:endParaRPr lang="en-US" sz="2200" kern="100" dirty="0">
+              <a:latin typeface="Aptos" panose="020B0004020202020204" pitchFamily="34" charset="0"/>
+              <a:ea typeface="Calibri" panose="020F0502020204030204" pitchFamily="34" charset="0"/>
+              <a:cs typeface="Times New Roman" panose="02020603050405020304" pitchFamily="18" charset="0"/>
+            </a:endParaRPr>
           </a:p>
           <a:p>
             <a:pPr marL="0" marR="0" indent="0" algn="just">
@@ -19634,14 +20341,22 @@
               <a:buNone/>
             </a:pPr>
             <a:r>
-              <a:rPr lang="en-US" sz="2400" kern="100" dirty="0">
+              <a:rPr lang="en-US" sz="2200" kern="100" dirty="0" smtClean="0">
                 <a:latin typeface="Aptos" panose="020B0004020202020204" pitchFamily="34" charset="0"/>
                 <a:ea typeface="Calibri" panose="020F0502020204030204" pitchFamily="34" charset="0"/>
                 <a:cs typeface="Times New Roman" panose="02020603050405020304" pitchFamily="18" charset="0"/>
               </a:rPr>
-              <a:t>The true measure of a SAN is "not just in your judgments, but in how you shaped the profession and those who follow."</a:t>
-            </a:r>
-            <a:endParaRPr lang="en-US" sz="1800" kern="100" dirty="0">
+              <a:t>Let me end by drawing your attention to  the three Poser in slide six and hoped that you ponder on them and at your leisure answer the questions. </a:t>
+            </a:r>
+            <a:r>
+              <a:rPr lang="en-US" sz="2200" kern="100" dirty="0" smtClean="0">
+                <a:latin typeface="Aptos" panose="020B0004020202020204" pitchFamily="34" charset="0"/>
+                <a:ea typeface="Calibri" panose="020F0502020204030204" pitchFamily="34" charset="0"/>
+                <a:cs typeface="Times New Roman" panose="02020603050405020304" pitchFamily="18" charset="0"/>
+              </a:rPr>
+              <a:t> </a:t>
+            </a:r>
+            <a:endParaRPr lang="en-US" sz="2200" kern="100" dirty="0">
               <a:latin typeface="Aptos" panose="020B0004020202020204" pitchFamily="34" charset="0"/>
               <a:ea typeface="Calibri" panose="020F0502020204030204" pitchFamily="34" charset="0"/>
               <a:cs typeface="Times New Roman" panose="02020603050405020304" pitchFamily="18" charset="0"/>
@@ -19699,7 +20414,7 @@
           <p:cNvPr id="2" name="Group 1">
             <a:extLst>
               <a:ext uri="{FF2B5EF4-FFF2-40B4-BE49-F238E27FC236}">
-                <a16:creationId xmlns:a16="http://schemas.microsoft.com/office/drawing/2014/main" id="{35DADCE3-F0E2-CABE-4583-C1FC6C390262}"/>
+                <a16:creationId xmlns:a16="http://schemas.microsoft.com/office/drawing/2014/main" xmlns="" id="{35DADCE3-F0E2-CABE-4583-C1FC6C390262}"/>
               </a:ext>
             </a:extLst>
           </p:cNvPr>
@@ -19708,8 +20423,8 @@
         </p:nvGrpSpPr>
         <p:grpSpPr>
           <a:xfrm>
-            <a:off x="765820" y="2136597"/>
-            <a:ext cx="2366691" cy="2455626"/>
+            <a:off x="333773" y="2136597"/>
+            <a:ext cx="2304256" cy="2455626"/>
             <a:chOff x="1783505" y="2413534"/>
             <a:chExt cx="1002890" cy="1002890"/>
           </a:xfrm>
@@ -19719,7 +20434,7 @@
             <p:cNvPr id="3" name="Oval 2">
               <a:extLst>
                 <a:ext uri="{FF2B5EF4-FFF2-40B4-BE49-F238E27FC236}">
-                  <a16:creationId xmlns:a16="http://schemas.microsoft.com/office/drawing/2014/main" id="{7FCFBDE8-7509-ADA0-F6F2-C8F6EE46C0CB}"/>
+                  <a16:creationId xmlns:a16="http://schemas.microsoft.com/office/drawing/2014/main" xmlns="" id="{7FCFBDE8-7509-ADA0-F6F2-C8F6EE46C0CB}"/>
                 </a:ext>
               </a:extLst>
             </p:cNvPr>
@@ -19773,7 +20488,7 @@
             <p:cNvPr id="4" name="Graphic 3" descr="Open book outline">
               <a:extLst>
                 <a:ext uri="{FF2B5EF4-FFF2-40B4-BE49-F238E27FC236}">
-                  <a16:creationId xmlns:a16="http://schemas.microsoft.com/office/drawing/2014/main" id="{FBF77CFB-A657-30C8-925C-7A4291FD61BE}"/>
+                  <a16:creationId xmlns:a16="http://schemas.microsoft.com/office/drawing/2014/main" xmlns="" id="{FBF77CFB-A657-30C8-925C-7A4291FD61BE}"/>
                 </a:ext>
               </a:extLst>
             </p:cNvPr>
@@ -19789,7 +20504,7 @@
                   <a14:useLocalDpi xmlns:a14="http://schemas.microsoft.com/office/drawing/2010/main" val="0"/>
                 </a:ext>
                 <a:ext uri="{96DAC541-7B7A-43D3-8B79-37D633B846F1}">
-                  <asvg:svgBlip xmlns:asvg="http://schemas.microsoft.com/office/drawing/2016/SVG/main" r:embed="rId4"/>
+                  <asvg:svgBlip xmlns:asvg="http://schemas.microsoft.com/office/drawing/2016/SVG/main" xmlns="" r:embed="rId4"/>
                 </a:ext>
               </a:extLst>
             </a:blip>
@@ -19813,7 +20528,7 @@
           <p:cNvPr id="5" name="Rectangle 4">
             <a:extLst>
               <a:ext uri="{FF2B5EF4-FFF2-40B4-BE49-F238E27FC236}">
-                <a16:creationId xmlns:a16="http://schemas.microsoft.com/office/drawing/2014/main" id="{D0245C8E-2FDA-4786-FA2B-5C9C1F1C7996}"/>
+                <a16:creationId xmlns:a16="http://schemas.microsoft.com/office/drawing/2014/main" xmlns="" id="{D0245C8E-2FDA-4786-FA2B-5C9C1F1C7996}"/>
               </a:ext>
             </a:extLst>
           </p:cNvPr>
@@ -19884,6 +20599,415 @@
 </p:sld>
 </file>
 
+<file path=ppt/slides/slide21.xml><?xml version="1.0" encoding="utf-8"?>
+<p:sld xmlns:a="http://schemas.openxmlformats.org/drawingml/2006/main" xmlns:r="http://schemas.openxmlformats.org/officeDocument/2006/relationships" xmlns:p="http://schemas.openxmlformats.org/presentationml/2006/main">
+  <p:cSld>
+    <p:spTree>
+      <p:nvGrpSpPr>
+        <p:cNvPr id="1" name=""/>
+        <p:cNvGrpSpPr/>
+        <p:nvPr/>
+      </p:nvGrpSpPr>
+      <p:grpSpPr>
+        <a:xfrm>
+          <a:off x="0" y="0"/>
+          <a:ext cx="0" cy="0"/>
+          <a:chOff x="0" y="0"/>
+          <a:chExt cx="0" cy="0"/>
+        </a:xfrm>
+      </p:grpSpPr>
+      <p:sp>
+        <p:nvSpPr>
+          <p:cNvPr id="19" name="Content Placeholder 2">
+            <a:extLst>
+              <a:ext uri="{FF2B5EF4-FFF2-40B4-BE49-F238E27FC236}">
+                <a16:creationId xmlns:a16="http://schemas.microsoft.com/office/drawing/2014/main" xmlns="" id="{98349F09-71B1-87BB-EA53-81192F0663CA}"/>
+              </a:ext>
+            </a:extLst>
+          </p:cNvPr>
+          <p:cNvSpPr txBox="1">
+            <a:spLocks/>
+          </p:cNvSpPr>
+          <p:nvPr/>
+        </p:nvSpPr>
+        <p:spPr>
+          <a:xfrm>
+            <a:off x="2998068" y="1143842"/>
+            <a:ext cx="8136904" cy="3447474"/>
+          </a:xfrm>
+          <a:prstGeom prst="rect">
+            <a:avLst/>
+          </a:prstGeom>
+        </p:spPr>
+        <p:txBody>
+          <a:bodyPr>
+            <a:noAutofit/>
+          </a:bodyPr>
+          <a:lstStyle>
+            <a:lvl1pPr marL="457120" indent="-457120" algn="l" defTabSz="1218987" rtl="0" eaLnBrk="1" latinLnBrk="0" hangingPunct="1">
+              <a:spcBef>
+                <a:spcPct val="20000"/>
+              </a:spcBef>
+              <a:buFont typeface="Arial" pitchFamily="34" charset="0"/>
+              <a:buChar char="•"/>
+              <a:defRPr sz="3600" kern="1200">
+                <a:solidFill>
+                  <a:schemeClr val="tx1"/>
+                </a:solidFill>
+                <a:latin typeface="+mj-lt"/>
+                <a:ea typeface="+mn-ea"/>
+                <a:cs typeface="+mn-cs"/>
+              </a:defRPr>
+            </a:lvl1pPr>
+            <a:lvl2pPr marL="990427" indent="-380933" algn="l" defTabSz="1218987" rtl="0" eaLnBrk="1" latinLnBrk="0" hangingPunct="1">
+              <a:spcBef>
+                <a:spcPct val="20000"/>
+              </a:spcBef>
+              <a:buFont typeface="Arial" pitchFamily="34" charset="0"/>
+              <a:buChar char="–"/>
+              <a:defRPr sz="3200" kern="1200">
+                <a:solidFill>
+                  <a:schemeClr val="tx1"/>
+                </a:solidFill>
+                <a:latin typeface="+mj-lt"/>
+                <a:ea typeface="+mn-ea"/>
+                <a:cs typeface="+mn-cs"/>
+              </a:defRPr>
+            </a:lvl2pPr>
+            <a:lvl3pPr marL="1523733" indent="-304747" algn="l" defTabSz="1218987" rtl="0" eaLnBrk="1" latinLnBrk="0" hangingPunct="1">
+              <a:spcBef>
+                <a:spcPct val="20000"/>
+              </a:spcBef>
+              <a:buFont typeface="Arial" pitchFamily="34" charset="0"/>
+              <a:buChar char="•"/>
+              <a:defRPr sz="2400" kern="1200">
+                <a:solidFill>
+                  <a:schemeClr val="tx1"/>
+                </a:solidFill>
+                <a:latin typeface="+mj-lt"/>
+                <a:ea typeface="+mn-ea"/>
+                <a:cs typeface="+mn-cs"/>
+              </a:defRPr>
+            </a:lvl3pPr>
+            <a:lvl4pPr marL="2133227" indent="-304747" algn="l" defTabSz="1218987" rtl="0" eaLnBrk="1" latinLnBrk="0" hangingPunct="1">
+              <a:spcBef>
+                <a:spcPct val="20000"/>
+              </a:spcBef>
+              <a:buFont typeface="Arial" pitchFamily="34" charset="0"/>
+              <a:buChar char="–"/>
+              <a:defRPr sz="2000" kern="1200">
+                <a:solidFill>
+                  <a:schemeClr val="tx1"/>
+                </a:solidFill>
+                <a:latin typeface="+mj-lt"/>
+                <a:ea typeface="+mn-ea"/>
+                <a:cs typeface="+mn-cs"/>
+              </a:defRPr>
+            </a:lvl4pPr>
+            <a:lvl5pPr marL="2742720" indent="-304747" algn="l" defTabSz="1218987" rtl="0" eaLnBrk="1" latinLnBrk="0" hangingPunct="1">
+              <a:spcBef>
+                <a:spcPct val="20000"/>
+              </a:spcBef>
+              <a:buFont typeface="Arial" pitchFamily="34" charset="0"/>
+              <a:buChar char="»"/>
+              <a:defRPr sz="2000" kern="1200">
+                <a:solidFill>
+                  <a:schemeClr val="tx1"/>
+                </a:solidFill>
+                <a:latin typeface="+mj-lt"/>
+                <a:ea typeface="+mn-ea"/>
+                <a:cs typeface="+mn-cs"/>
+              </a:defRPr>
+            </a:lvl5pPr>
+            <a:lvl6pPr marL="3352213" indent="-304747" algn="l" defTabSz="1218987" rtl="0" eaLnBrk="1" latinLnBrk="0" hangingPunct="1">
+              <a:spcBef>
+                <a:spcPct val="20000"/>
+              </a:spcBef>
+              <a:buFont typeface="Arial" pitchFamily="34" charset="0"/>
+              <a:buChar char="•"/>
+              <a:defRPr sz="2700" kern="1200">
+                <a:solidFill>
+                  <a:schemeClr val="tx1"/>
+                </a:solidFill>
+                <a:latin typeface="+mn-lt"/>
+                <a:ea typeface="+mn-ea"/>
+                <a:cs typeface="+mn-cs"/>
+              </a:defRPr>
+            </a:lvl6pPr>
+            <a:lvl7pPr marL="3961707" indent="-304747" algn="l" defTabSz="1218987" rtl="0" eaLnBrk="1" latinLnBrk="0" hangingPunct="1">
+              <a:spcBef>
+                <a:spcPct val="20000"/>
+              </a:spcBef>
+              <a:buFont typeface="Arial" pitchFamily="34" charset="0"/>
+              <a:buChar char="•"/>
+              <a:defRPr sz="2700" kern="1200">
+                <a:solidFill>
+                  <a:schemeClr val="tx1"/>
+                </a:solidFill>
+                <a:latin typeface="+mn-lt"/>
+                <a:ea typeface="+mn-ea"/>
+                <a:cs typeface="+mn-cs"/>
+              </a:defRPr>
+            </a:lvl7pPr>
+            <a:lvl8pPr marL="4571200" indent="-304747" algn="l" defTabSz="1218987" rtl="0" eaLnBrk="1" latinLnBrk="0" hangingPunct="1">
+              <a:spcBef>
+                <a:spcPct val="20000"/>
+              </a:spcBef>
+              <a:buFont typeface="Arial" pitchFamily="34" charset="0"/>
+              <a:buChar char="•"/>
+              <a:defRPr sz="2700" kern="1200">
+                <a:solidFill>
+                  <a:schemeClr val="tx1"/>
+                </a:solidFill>
+                <a:latin typeface="+mn-lt"/>
+                <a:ea typeface="+mn-ea"/>
+                <a:cs typeface="+mn-cs"/>
+              </a:defRPr>
+            </a:lvl8pPr>
+            <a:lvl9pPr marL="5180693" indent="-304747" algn="l" defTabSz="1218987" rtl="0" eaLnBrk="1" latinLnBrk="0" hangingPunct="1">
+              <a:spcBef>
+                <a:spcPct val="20000"/>
+              </a:spcBef>
+              <a:buFont typeface="Arial" pitchFamily="34" charset="0"/>
+              <a:buChar char="•"/>
+              <a:defRPr sz="2700" kern="1200">
+                <a:solidFill>
+                  <a:schemeClr val="tx1"/>
+                </a:solidFill>
+                <a:latin typeface="+mn-lt"/>
+                <a:ea typeface="+mn-ea"/>
+                <a:cs typeface="+mn-cs"/>
+              </a:defRPr>
+            </a:lvl9pPr>
+          </a:lstStyle>
+          <a:p>
+            <a:pPr marL="0" indent="0" algn="just">
+              <a:lnSpc>
+                <a:spcPct val="107000"/>
+              </a:lnSpc>
+              <a:spcBef>
+                <a:spcPts val="0"/>
+              </a:spcBef>
+              <a:spcAft>
+                <a:spcPts val="800"/>
+              </a:spcAft>
+              <a:buFont typeface="Arial" pitchFamily="34" charset="0"/>
+              <a:buNone/>
+            </a:pPr>
+            <a:endParaRPr lang="en-US" sz="2000" kern="100" dirty="0">
+              <a:solidFill>
+                <a:prstClr val="black"/>
+              </a:solidFill>
+              <a:latin typeface="Aptos" panose="020B0004020202020204" pitchFamily="34" charset="0"/>
+              <a:ea typeface="Calibri" panose="020F0502020204030204" pitchFamily="34" charset="0"/>
+              <a:cs typeface="Times New Roman" panose="02020603050405020304" pitchFamily="18" charset="0"/>
+            </a:endParaRPr>
+          </a:p>
+          <a:p>
+            <a:pPr marL="0" indent="0" algn="just">
+              <a:lnSpc>
+                <a:spcPct val="107000"/>
+              </a:lnSpc>
+              <a:spcBef>
+                <a:spcPts val="0"/>
+              </a:spcBef>
+              <a:spcAft>
+                <a:spcPts val="800"/>
+              </a:spcAft>
+              <a:buFont typeface="Arial" pitchFamily="34" charset="0"/>
+              <a:buNone/>
+            </a:pPr>
+            <a:endParaRPr lang="en-US" sz="2000" kern="100" dirty="0">
+              <a:solidFill>
+                <a:prstClr val="black"/>
+              </a:solidFill>
+              <a:latin typeface="Aptos" panose="020B0004020202020204" pitchFamily="34" charset="0"/>
+              <a:ea typeface="Calibri" panose="020F0502020204030204" pitchFamily="34" charset="0"/>
+              <a:cs typeface="Times New Roman" panose="02020603050405020304" pitchFamily="18" charset="0"/>
+            </a:endParaRPr>
+          </a:p>
+        </p:txBody>
+      </p:sp>
+      <p:sp>
+        <p:nvSpPr>
+          <p:cNvPr id="5" name="Rectangle 4">
+            <a:extLst>
+              <a:ext uri="{FF2B5EF4-FFF2-40B4-BE49-F238E27FC236}">
+                <a16:creationId xmlns:a16="http://schemas.microsoft.com/office/drawing/2014/main" xmlns="" id="{D0245C8E-2FDA-4786-FA2B-5C9C1F1C7996}"/>
+              </a:ext>
+            </a:extLst>
+          </p:cNvPr>
+          <p:cNvSpPr/>
+          <p:nvPr/>
+        </p:nvSpPr>
+        <p:spPr>
+          <a:xfrm>
+            <a:off x="11334024" y="5484255"/>
+            <a:ext cx="854801" cy="1373745"/>
+          </a:xfrm>
+          <a:prstGeom prst="rect">
+            <a:avLst/>
+          </a:prstGeom>
+          <a:solidFill>
+            <a:schemeClr val="accent1">
+              <a:lumMod val="75000"/>
+            </a:schemeClr>
+          </a:solidFill>
+          <a:ln>
+            <a:noFill/>
+          </a:ln>
+        </p:spPr>
+        <p:style>
+          <a:lnRef idx="2">
+            <a:schemeClr val="accent1">
+              <a:shade val="50000"/>
+            </a:schemeClr>
+          </a:lnRef>
+          <a:fillRef idx="1">
+            <a:schemeClr val="accent1"/>
+          </a:fillRef>
+          <a:effectRef idx="0">
+            <a:schemeClr val="accent1"/>
+          </a:effectRef>
+          <a:fontRef idx="minor">
+            <a:schemeClr val="lt1"/>
+          </a:fontRef>
+        </p:style>
+        <p:txBody>
+          <a:bodyPr rtlCol="0" anchor="ctr"/>
+          <a:lstStyle/>
+          <a:p>
+            <a:pPr algn="ctr"/>
+            <a:r>
+              <a:rPr lang="en-US" b="1" dirty="0" smtClean="0">
+                <a:solidFill>
+                  <a:prstClr val="white"/>
+                </a:solidFill>
+                <a:latin typeface="Aptos" panose="020B0004020202020204" pitchFamily="34" charset="0"/>
+              </a:rPr>
+              <a:t>21</a:t>
+            </a:r>
+            <a:endParaRPr lang="en-US" sz="2399" dirty="0">
+              <a:solidFill>
+                <a:prstClr val="white"/>
+              </a:solidFill>
+            </a:endParaRPr>
+          </a:p>
+        </p:txBody>
+      </p:sp>
+      <p:pic>
+        <p:nvPicPr>
+          <p:cNvPr id="8" name="Picture 7">
+            <a:extLst>
+              <a:ext uri="{FF2B5EF4-FFF2-40B4-BE49-F238E27FC236}">
+                <a16:creationId xmlns="" xmlns:a16="http://schemas.microsoft.com/office/drawing/2014/main" id="{BE6FCB66-FAE9-DA0B-760E-100738ACD0D4}"/>
+              </a:ext>
+            </a:extLst>
+          </p:cNvPr>
+          <p:cNvPicPr>
+            <a:picLocks noChangeAspect="1"/>
+          </p:cNvPicPr>
+          <p:nvPr/>
+        </p:nvPicPr>
+        <p:blipFill>
+          <a:blip r:embed="rId3"/>
+          <a:srcRect b="5280"/>
+          <a:stretch/>
+        </p:blipFill>
+        <p:spPr>
+          <a:xfrm>
+            <a:off x="1053851" y="980729"/>
+            <a:ext cx="9505057" cy="3384376"/>
+          </a:xfrm>
+          <a:prstGeom prst="rect">
+            <a:avLst/>
+          </a:prstGeom>
+        </p:spPr>
+      </p:pic>
+      <p:sp>
+        <p:nvSpPr>
+          <p:cNvPr id="6" name="TextBox 5"/>
+          <p:cNvSpPr txBox="1"/>
+          <p:nvPr/>
+        </p:nvSpPr>
+        <p:spPr>
+          <a:xfrm>
+            <a:off x="1629916" y="5373216"/>
+            <a:ext cx="8352928" cy="400110"/>
+          </a:xfrm>
+          <a:prstGeom prst="rect">
+            <a:avLst/>
+          </a:prstGeom>
+          <a:noFill/>
+        </p:spPr>
+        <p:txBody>
+          <a:bodyPr wrap="square" rtlCol="0">
+            <a:spAutoFit/>
+          </a:bodyPr>
+          <a:lstStyle/>
+          <a:p>
+            <a:pPr algn="r"/>
+            <a:r>
+              <a:rPr lang="en-US" sz="2000" b="1" dirty="0" smtClean="0">
+                <a:latin typeface="Aptos" panose="020B0004020202020204"/>
+              </a:rPr>
+              <a:t>Mrs. </a:t>
+            </a:r>
+            <a:r>
+              <a:rPr lang="en-US" sz="2000" b="1" dirty="0" err="1" smtClean="0">
+                <a:latin typeface="Aptos" panose="020B0004020202020204"/>
+              </a:rPr>
+              <a:t>Nella</a:t>
+            </a:r>
+            <a:r>
+              <a:rPr lang="en-US" sz="2000" b="1" dirty="0" smtClean="0">
+                <a:latin typeface="Aptos" panose="020B0004020202020204"/>
+              </a:rPr>
+              <a:t> </a:t>
+            </a:r>
+            <a:r>
+              <a:rPr lang="en-US" sz="2000" b="1" dirty="0" err="1" smtClean="0">
+                <a:latin typeface="Aptos" panose="020B0004020202020204"/>
+              </a:rPr>
+              <a:t>Andem-Ewa</a:t>
+            </a:r>
+            <a:r>
+              <a:rPr lang="en-US" sz="2000" b="1" dirty="0" smtClean="0">
+                <a:latin typeface="Aptos" panose="020B0004020202020204"/>
+              </a:rPr>
+              <a:t> SAN, FCI </a:t>
+            </a:r>
+            <a:r>
+              <a:rPr lang="en-US" sz="2000" b="1" dirty="0" err="1" smtClean="0">
+                <a:latin typeface="Aptos" panose="020B0004020202020204"/>
+              </a:rPr>
+              <a:t>Arb</a:t>
+            </a:r>
+            <a:r>
+              <a:rPr lang="en-US" sz="2000" b="1" dirty="0" smtClean="0">
+                <a:latin typeface="Aptos" panose="020B0004020202020204"/>
+              </a:rPr>
+              <a:t>, FNIPR</a:t>
+            </a:r>
+            <a:endParaRPr lang="en-US" sz="2000" b="1" dirty="0">
+              <a:latin typeface="Aptos" panose="020B0004020202020204"/>
+            </a:endParaRPr>
+          </a:p>
+        </p:txBody>
+      </p:sp>
+    </p:spTree>
+    <p:extLst>
+      <p:ext uri="{BB962C8B-B14F-4D97-AF65-F5344CB8AC3E}">
+        <p14:creationId xmlns:p14="http://schemas.microsoft.com/office/powerpoint/2010/main" val="2226111440"/>
+      </p:ext>
+    </p:extLst>
+  </p:cSld>
+  <p:clrMapOvr>
+    <a:masterClrMapping/>
+  </p:clrMapOvr>
+</p:sld>
+</file>
+
 <file path=ppt/slides/slide3.xml><?xml version="1.0" encoding="utf-8"?>
 <p:sld xmlns:a="http://schemas.openxmlformats.org/drawingml/2006/main" xmlns:r="http://schemas.openxmlformats.org/officeDocument/2006/relationships" xmlns:p="http://schemas.openxmlformats.org/presentationml/2006/main">
   <p:cSld>
@@ -19906,7 +21030,7 @@
           <p:cNvPr id="3" name="Content Placeholder 2">
             <a:extLst>
               <a:ext uri="{FF2B5EF4-FFF2-40B4-BE49-F238E27FC236}">
-                <a16:creationId xmlns:a16="http://schemas.microsoft.com/office/drawing/2014/main" id="{3354BAD5-3A3D-62AC-75A9-D8D375CADDDE}"/>
+                <a16:creationId xmlns:a16="http://schemas.microsoft.com/office/drawing/2014/main" xmlns="" id="{3354BAD5-3A3D-62AC-75A9-D8D375CADDDE}"/>
               </a:ext>
             </a:extLst>
           </p:cNvPr>
@@ -20075,8 +21199,41 @@
               <a:rPr lang="en-US" sz="1800" dirty="0">
                 <a:latin typeface="Aptos" panose="020B0004020202020204" pitchFamily="34" charset="0"/>
               </a:rPr>
-              <a:t>Congratulations for successfully achieving the feat of entering the Body of Senior Advocates of Nigeria (BOSAN).</a:t>
-            </a:r>
+              <a:t>Congratulations for </a:t>
+            </a:r>
+            <a:r>
+              <a:rPr lang="en-US" sz="1800" dirty="0" smtClean="0">
+                <a:latin typeface="Aptos" panose="020B0004020202020204" pitchFamily="34" charset="0"/>
+              </a:rPr>
+              <a:t>successfully entering into the Inner Bar, a place reserved not just for legal distinction in </a:t>
+            </a:r>
+            <a:r>
+              <a:rPr lang="en-US" sz="1800" b="1" dirty="0" smtClean="0">
+                <a:latin typeface="Aptos" panose="020B0004020202020204" pitchFamily="34" charset="0"/>
+              </a:rPr>
+              <a:t>Advocacy</a:t>
+            </a:r>
+            <a:r>
+              <a:rPr lang="en-US" sz="1800" dirty="0" smtClean="0">
+                <a:latin typeface="Aptos" panose="020B0004020202020204" pitchFamily="34" charset="0"/>
+              </a:rPr>
+              <a:t> and </a:t>
+            </a:r>
+            <a:r>
+              <a:rPr lang="en-US" sz="1800" b="1" dirty="0" smtClean="0">
+                <a:latin typeface="Aptos" panose="020B0004020202020204" pitchFamily="34" charset="0"/>
+              </a:rPr>
+              <a:t>Scholarship</a:t>
+            </a:r>
+            <a:r>
+              <a:rPr lang="en-US" sz="1800" dirty="0" smtClean="0">
+                <a:latin typeface="Aptos" panose="020B0004020202020204" pitchFamily="34" charset="0"/>
+              </a:rPr>
+              <a:t> in law but for leadership in the profession.</a:t>
+            </a:r>
+            <a:endParaRPr lang="en-US" sz="1800" dirty="0">
+              <a:latin typeface="Aptos" panose="020B0004020202020204" pitchFamily="34" charset="0"/>
+            </a:endParaRPr>
           </a:p>
           <a:p>
             <a:pPr marL="0" indent="0">
@@ -20099,31 +21256,110 @@
               <a:rPr lang="en-US" sz="1800" dirty="0">
                 <a:latin typeface="Aptos" panose="020B0004020202020204" pitchFamily="34" charset="0"/>
               </a:rPr>
-              <a:t>By achieving the highest legal distinction in</a:t>
+              <a:t>It is not just a personal triumph  but a badge of </a:t>
+            </a:r>
+            <a:r>
+              <a:rPr lang="en-US" sz="1800" dirty="0" err="1">
+                <a:latin typeface="Aptos" panose="020B0004020202020204" pitchFamily="34" charset="0"/>
+              </a:rPr>
+              <a:t>honour</a:t>
+            </a:r>
+            <a:r>
+              <a:rPr lang="en-US" sz="1800" dirty="0">
+                <a:latin typeface="Aptos" panose="020B0004020202020204" pitchFamily="34" charset="0"/>
+              </a:rPr>
+              <a:t> and prestige and a recognition of expertise and excellence, </a:t>
             </a:r>
             <a:r>
               <a:rPr lang="en-US" sz="1800" b="1" dirty="0">
                 <a:latin typeface="Aptos" panose="020B0004020202020204" pitchFamily="34" charset="0"/>
               </a:rPr>
-              <a:t> Advocacy </a:t>
-            </a:r>
+              <a:t>Congratulations!!!</a:t>
+            </a:r>
+          </a:p>
+          <a:p>
+            <a:pPr marL="0" indent="0">
+              <a:spcBef>
+                <a:spcPts val="0"/>
+              </a:spcBef>
+              <a:buNone/>
+            </a:pPr>
+            <a:endParaRPr lang="en-US" sz="1600" b="1" dirty="0">
+              <a:latin typeface="Aptos" panose="020B0004020202020204" pitchFamily="34" charset="0"/>
+            </a:endParaRPr>
+          </a:p>
+          <a:p>
+            <a:pPr marL="457200" indent="-457200">
+              <a:spcBef>
+                <a:spcPts val="0"/>
+              </a:spcBef>
+            </a:pPr>
             <a:r>
               <a:rPr lang="en-US" sz="1800" dirty="0">
                 <a:latin typeface="Aptos" panose="020B0004020202020204" pitchFamily="34" charset="0"/>
               </a:rPr>
-              <a:t>and </a:t>
+              <a:t>The rank confers the Awardee with:</a:t>
+            </a:r>
+          </a:p>
+          <a:p>
+            <a:pPr marL="0" indent="0">
+              <a:spcBef>
+                <a:spcPts val="0"/>
+              </a:spcBef>
+              <a:buNone/>
+            </a:pPr>
+            <a:r>
+              <a:rPr lang="en-US" sz="1800" dirty="0">
+                <a:latin typeface="Aptos" panose="020B0004020202020204" pitchFamily="34" charset="0"/>
+              </a:rPr>
+              <a:t>	- </a:t>
             </a:r>
             <a:r>
               <a:rPr lang="en-US" sz="1800" b="1" dirty="0">
                 <a:latin typeface="Aptos" panose="020B0004020202020204" pitchFamily="34" charset="0"/>
               </a:rPr>
-              <a:t>Scholarship</a:t>
+              <a:t>Great Responsibility </a:t>
             </a:r>
             <a:r>
               <a:rPr lang="en-US" sz="1800" dirty="0">
                 <a:latin typeface="Aptos" panose="020B0004020202020204" pitchFamily="34" charset="0"/>
               </a:rPr>
-              <a:t> of the law.</a:t>
+              <a:t>– to shape the next generation of lawyers by </a:t>
+            </a:r>
+            <a:r>
+              <a:rPr lang="en-US" sz="1800" dirty="0" smtClean="0">
+                <a:latin typeface="Aptos" panose="020B0004020202020204" pitchFamily="34" charset="0"/>
+              </a:rPr>
+              <a:t>transferring skills and 	values. </a:t>
+            </a:r>
+            <a:endParaRPr lang="en-US" sz="1800" dirty="0">
+              <a:latin typeface="Aptos" panose="020B0004020202020204" pitchFamily="34" charset="0"/>
+            </a:endParaRPr>
+          </a:p>
+          <a:p>
+            <a:pPr marL="0" indent="0">
+              <a:spcBef>
+                <a:spcPts val="0"/>
+              </a:spcBef>
+              <a:buNone/>
+            </a:pPr>
+            <a:r>
+              <a:rPr lang="en-US" sz="1800" dirty="0">
+                <a:latin typeface="Aptos" panose="020B0004020202020204" pitchFamily="34" charset="0"/>
+              </a:rPr>
+              <a:t>	- </a:t>
+            </a:r>
+            <a:r>
+              <a:rPr lang="en-US" sz="1800" b="1" dirty="0">
+                <a:latin typeface="Aptos" panose="020B0004020202020204" pitchFamily="34" charset="0"/>
+              </a:rPr>
+              <a:t>Massive duty </a:t>
+            </a:r>
+            <a:r>
+              <a:rPr lang="en-US" sz="1800" dirty="0">
+                <a:latin typeface="Aptos" panose="020B0004020202020204" pitchFamily="34" charset="0"/>
+              </a:rPr>
+              <a:t>– to guide and inspire those who follow.</a:t>
             </a:r>
           </a:p>
           <a:p>
@@ -20147,126 +21383,17 @@
               <a:rPr lang="en-US" sz="1800" dirty="0">
                 <a:latin typeface="Aptos" panose="020B0004020202020204" pitchFamily="34" charset="0"/>
               </a:rPr>
-              <a:t>It is not just a personal triumph  but a badge of </a:t>
-            </a:r>
-            <a:r>
-              <a:rPr lang="en-US" sz="1800" dirty="0" err="1">
-                <a:latin typeface="Aptos" panose="020B0004020202020204" pitchFamily="34" charset="0"/>
-              </a:rPr>
-              <a:t>honour</a:t>
-            </a:r>
-            <a:r>
-              <a:rPr lang="en-US" sz="1800" dirty="0">
-                <a:latin typeface="Aptos" panose="020B0004020202020204" pitchFamily="34" charset="0"/>
-              </a:rPr>
-              <a:t> and prestige and a recognition of expertise and excellence, </a:t>
-            </a:r>
-            <a:r>
-              <a:rPr lang="en-US" sz="1800" b="1" dirty="0">
-                <a:latin typeface="Aptos" panose="020B0004020202020204" pitchFamily="34" charset="0"/>
-              </a:rPr>
-              <a:t>Congratulations!!!</a:t>
-            </a:r>
-          </a:p>
-          <a:p>
-            <a:pPr marL="0" indent="0">
-              <a:spcBef>
-                <a:spcPts val="0"/>
-              </a:spcBef>
-              <a:buNone/>
-            </a:pPr>
-            <a:endParaRPr lang="en-US" sz="1600" b="1" dirty="0">
+              <a:t>This new status marks the beginning of the transition from your individual achievement(s) to a collective professional stewardship where you individually and collectively have a duty to ensure that the fabric of the legal profession is strengthened and </a:t>
+            </a:r>
+            <a:r>
+              <a:rPr lang="en-US" sz="1800" dirty="0" smtClean="0">
+                <a:latin typeface="Aptos" panose="020B0004020202020204" pitchFamily="34" charset="0"/>
+              </a:rPr>
+              <a:t>preserved. </a:t>
+            </a:r>
+            <a:endParaRPr lang="en-US" sz="1800" dirty="0">
               <a:latin typeface="Aptos" panose="020B0004020202020204" pitchFamily="34" charset="0"/>
             </a:endParaRPr>
-          </a:p>
-          <a:p>
-            <a:pPr marL="457200" indent="-457200">
-              <a:spcBef>
-                <a:spcPts val="0"/>
-              </a:spcBef>
-            </a:pPr>
-            <a:r>
-              <a:rPr lang="en-US" sz="1800" dirty="0">
-                <a:latin typeface="Aptos" panose="020B0004020202020204" pitchFamily="34" charset="0"/>
-              </a:rPr>
-              <a:t>The rank confers the Awardee with:</a:t>
-            </a:r>
-          </a:p>
-          <a:p>
-            <a:pPr marL="0" indent="0">
-              <a:spcBef>
-                <a:spcPts val="0"/>
-              </a:spcBef>
-              <a:buNone/>
-            </a:pPr>
-            <a:r>
-              <a:rPr lang="en-US" sz="1800" dirty="0">
-                <a:latin typeface="Aptos" panose="020B0004020202020204" pitchFamily="34" charset="0"/>
-              </a:rPr>
-              <a:t>	- </a:t>
-            </a:r>
-            <a:r>
-              <a:rPr lang="en-US" sz="1800" b="1" dirty="0">
-                <a:latin typeface="Aptos" panose="020B0004020202020204" pitchFamily="34" charset="0"/>
-              </a:rPr>
-              <a:t>Great Responsibility </a:t>
-            </a:r>
-            <a:r>
-              <a:rPr lang="en-US" sz="1800" dirty="0">
-                <a:latin typeface="Aptos" panose="020B0004020202020204" pitchFamily="34" charset="0"/>
-              </a:rPr>
-              <a:t>– to shape the next generation of lawyers by passing not just your skills but values.</a:t>
-            </a:r>
-          </a:p>
-          <a:p>
-            <a:pPr marL="0" indent="0">
-              <a:spcBef>
-                <a:spcPts val="0"/>
-              </a:spcBef>
-              <a:buNone/>
-            </a:pPr>
-            <a:r>
-              <a:rPr lang="en-US" sz="1800" dirty="0">
-                <a:latin typeface="Aptos" panose="020B0004020202020204" pitchFamily="34" charset="0"/>
-              </a:rPr>
-              <a:t>	- </a:t>
-            </a:r>
-            <a:r>
-              <a:rPr lang="en-US" sz="1800" b="1" dirty="0">
-                <a:latin typeface="Aptos" panose="020B0004020202020204" pitchFamily="34" charset="0"/>
-              </a:rPr>
-              <a:t>Massive duty </a:t>
-            </a:r>
-            <a:r>
-              <a:rPr lang="en-US" sz="1800" dirty="0">
-                <a:latin typeface="Aptos" panose="020B0004020202020204" pitchFamily="34" charset="0"/>
-              </a:rPr>
-              <a:t>– to guide and inspire those who follow.</a:t>
-            </a:r>
-          </a:p>
-          <a:p>
-            <a:pPr marL="0" indent="0">
-              <a:spcBef>
-                <a:spcPts val="0"/>
-              </a:spcBef>
-              <a:buNone/>
-            </a:pPr>
-            <a:endParaRPr lang="en-US" sz="1600" dirty="0">
-              <a:latin typeface="Aptos" panose="020B0004020202020204" pitchFamily="34" charset="0"/>
-            </a:endParaRPr>
-          </a:p>
-          <a:p>
-            <a:pPr marL="457200" indent="-457200">
-              <a:spcBef>
-                <a:spcPts val="0"/>
-              </a:spcBef>
-            </a:pPr>
-            <a:r>
-              <a:rPr lang="en-US" sz="1800" dirty="0">
-                <a:latin typeface="Aptos" panose="020B0004020202020204" pitchFamily="34" charset="0"/>
-              </a:rPr>
-              <a:t>This new status marks the beginning of the transition from your individual achievement(s) to a collective professional stewardship where you individually and collectively have a duty to ensure that the fabric of the legal profession is strengthened and protected. </a:t>
-            </a:r>
           </a:p>
           <a:p>
             <a:pPr marL="457200" indent="-457200">
@@ -20295,7 +21422,7 @@
           <p:cNvPr id="6" name="Group 5">
             <a:extLst>
               <a:ext uri="{FF2B5EF4-FFF2-40B4-BE49-F238E27FC236}">
-                <a16:creationId xmlns:a16="http://schemas.microsoft.com/office/drawing/2014/main" id="{DD6A2D09-BEEB-2FD6-14DE-3D3BCA92F993}"/>
+                <a16:creationId xmlns:a16="http://schemas.microsoft.com/office/drawing/2014/main" xmlns="" id="{DD6A2D09-BEEB-2FD6-14DE-3D3BCA92F993}"/>
               </a:ext>
             </a:extLst>
           </p:cNvPr>
@@ -20315,7 +21442,7 @@
             <p:cNvPr id="17" name="Rectangle: Rounded Corners 16">
               <a:extLst>
                 <a:ext uri="{FF2B5EF4-FFF2-40B4-BE49-F238E27FC236}">
-                  <a16:creationId xmlns:a16="http://schemas.microsoft.com/office/drawing/2014/main" id="{F0018598-6351-C8FF-FAE4-C990D1A47A5C}"/>
+                  <a16:creationId xmlns:a16="http://schemas.microsoft.com/office/drawing/2014/main" xmlns="" id="{F0018598-6351-C8FF-FAE4-C990D1A47A5C}"/>
                 </a:ext>
               </a:extLst>
             </p:cNvPr>
@@ -20371,7 +21498,7 @@
             <p:cNvPr id="23" name="Graphic 22" descr="Beaker outline">
               <a:extLst>
                 <a:ext uri="{FF2B5EF4-FFF2-40B4-BE49-F238E27FC236}">
-                  <a16:creationId xmlns:a16="http://schemas.microsoft.com/office/drawing/2014/main" id="{62F09559-CC35-0693-DAB8-ABBBBA9D322A}"/>
+                  <a16:creationId xmlns:a16="http://schemas.microsoft.com/office/drawing/2014/main" xmlns="" id="{62F09559-CC35-0693-DAB8-ABBBBA9D322A}"/>
                 </a:ext>
               </a:extLst>
             </p:cNvPr>
@@ -20387,7 +21514,7 @@
                   <a14:useLocalDpi xmlns:a14="http://schemas.microsoft.com/office/drawing/2010/main" val="0"/>
                 </a:ext>
                 <a:ext uri="{96DAC541-7B7A-43D3-8B79-37D633B846F1}">
-                  <asvg:svgBlip xmlns:asvg="http://schemas.microsoft.com/office/drawing/2016/SVG/main" r:embed="rId4"/>
+                  <asvg:svgBlip xmlns:asvg="http://schemas.microsoft.com/office/drawing/2016/SVG/main" xmlns="" r:embed="rId4"/>
                 </a:ext>
               </a:extLst>
             </a:blip>
@@ -20410,7 +21537,7 @@
             <p:cNvPr id="25" name="TextBox 24">
               <a:extLst>
                 <a:ext uri="{FF2B5EF4-FFF2-40B4-BE49-F238E27FC236}">
-                  <a16:creationId xmlns:a16="http://schemas.microsoft.com/office/drawing/2014/main" id="{CBBE8DA3-BEB8-518E-2B47-EA6008FB4254}"/>
+                  <a16:creationId xmlns:a16="http://schemas.microsoft.com/office/drawing/2014/main" xmlns="" id="{CBBE8DA3-BEB8-518E-2B47-EA6008FB4254}"/>
                 </a:ext>
               </a:extLst>
             </p:cNvPr>
@@ -20448,7 +21575,7 @@
           <p:cNvPr id="4" name="Rectangle 3">
             <a:extLst>
               <a:ext uri="{FF2B5EF4-FFF2-40B4-BE49-F238E27FC236}">
-                <a16:creationId xmlns:a16="http://schemas.microsoft.com/office/drawing/2014/main" id="{F6D51883-7F3D-7223-57B0-EE14A6380264}"/>
+                <a16:creationId xmlns:a16="http://schemas.microsoft.com/office/drawing/2014/main" xmlns="" id="{F6D51883-7F3D-7223-57B0-EE14A6380264}"/>
               </a:ext>
             </a:extLst>
           </p:cNvPr>
@@ -20527,7 +21654,7 @@
         <p:cNvPr id="1" name="">
           <a:extLst>
             <a:ext uri="{FF2B5EF4-FFF2-40B4-BE49-F238E27FC236}">
-              <a16:creationId xmlns:a16="http://schemas.microsoft.com/office/drawing/2014/main" id="{632209F5-B6BF-FC4E-F456-4A360AA1C6E3}"/>
+              <a16:creationId xmlns:a16="http://schemas.microsoft.com/office/drawing/2014/main" xmlns="" id="{632209F5-B6BF-FC4E-F456-4A360AA1C6E3}"/>
             </a:ext>
           </a:extLst>
         </p:cNvPr>
@@ -20547,7 +21674,7 @@
           <p:cNvPr id="27" name="Group 26">
             <a:extLst>
               <a:ext uri="{FF2B5EF4-FFF2-40B4-BE49-F238E27FC236}">
-                <a16:creationId xmlns:a16="http://schemas.microsoft.com/office/drawing/2014/main" id="{C1EEFA78-D63A-6A57-52BB-78C402BED1A0}"/>
+                <a16:creationId xmlns:a16="http://schemas.microsoft.com/office/drawing/2014/main" xmlns="" id="{C1EEFA78-D63A-6A57-52BB-78C402BED1A0}"/>
               </a:ext>
             </a:extLst>
           </p:cNvPr>
@@ -20567,7 +21694,7 @@
             <p:cNvPr id="3" name="Oval 2">
               <a:extLst>
                 <a:ext uri="{FF2B5EF4-FFF2-40B4-BE49-F238E27FC236}">
-                  <a16:creationId xmlns:a16="http://schemas.microsoft.com/office/drawing/2014/main" id="{27273E46-8D3C-5A4E-7DDF-C7D0EAAA7F6A}"/>
+                  <a16:creationId xmlns:a16="http://schemas.microsoft.com/office/drawing/2014/main" xmlns="" id="{27273E46-8D3C-5A4E-7DDF-C7D0EAAA7F6A}"/>
                 </a:ext>
               </a:extLst>
             </p:cNvPr>
@@ -20625,7 +21752,7 @@
             <p:cNvPr id="28" name="Graphic 27" descr="Open book outline">
               <a:extLst>
                 <a:ext uri="{FF2B5EF4-FFF2-40B4-BE49-F238E27FC236}">
-                  <a16:creationId xmlns:a16="http://schemas.microsoft.com/office/drawing/2014/main" id="{BC9A7929-0EF0-5ACD-CB09-42A599C5227C}"/>
+                  <a16:creationId xmlns:a16="http://schemas.microsoft.com/office/drawing/2014/main" xmlns="" id="{BC9A7929-0EF0-5ACD-CB09-42A599C5227C}"/>
                 </a:ext>
               </a:extLst>
             </p:cNvPr>
@@ -20641,7 +21768,7 @@
                   <a14:useLocalDpi xmlns:a14="http://schemas.microsoft.com/office/drawing/2010/main" val="0"/>
                 </a:ext>
                 <a:ext uri="{96DAC541-7B7A-43D3-8B79-37D633B846F1}">
-                  <asvg:svgBlip xmlns:asvg="http://schemas.microsoft.com/office/drawing/2016/SVG/main" r:embed="rId4"/>
+                  <asvg:svgBlip xmlns:asvg="http://schemas.microsoft.com/office/drawing/2016/SVG/main" xmlns="" r:embed="rId4"/>
                 </a:ext>
               </a:extLst>
             </a:blip>
@@ -20665,7 +21792,7 @@
           <p:cNvPr id="19" name="Content Placeholder 6">
             <a:extLst>
               <a:ext uri="{FF2B5EF4-FFF2-40B4-BE49-F238E27FC236}">
-                <a16:creationId xmlns:a16="http://schemas.microsoft.com/office/drawing/2014/main" id="{6863FE2B-D250-2203-6BE6-9B4F84C52716}"/>
+                <a16:creationId xmlns:a16="http://schemas.microsoft.com/office/drawing/2014/main" xmlns="" id="{6863FE2B-D250-2203-6BE6-9B4F84C52716}"/>
               </a:ext>
             </a:extLst>
           </p:cNvPr>
@@ -20886,7 +22013,7 @@
           <p:cNvPr id="4" name="Rectangle 3">
             <a:extLst>
               <a:ext uri="{FF2B5EF4-FFF2-40B4-BE49-F238E27FC236}">
-                <a16:creationId xmlns:a16="http://schemas.microsoft.com/office/drawing/2014/main" id="{9A06DE84-CC17-71AA-4D4A-104846BE3747}"/>
+                <a16:creationId xmlns:a16="http://schemas.microsoft.com/office/drawing/2014/main" xmlns="" id="{9A06DE84-CC17-71AA-4D4A-104846BE3747}"/>
               </a:ext>
             </a:extLst>
           </p:cNvPr>
@@ -20979,7 +22106,7 @@
           <p:cNvPr id="10" name="Title 9">
             <a:extLst>
               <a:ext uri="{FF2B5EF4-FFF2-40B4-BE49-F238E27FC236}">
-                <a16:creationId xmlns:a16="http://schemas.microsoft.com/office/drawing/2014/main" id="{4EB7BA3F-919D-7BBF-8C31-DAD5CBC47646}"/>
+                <a16:creationId xmlns:a16="http://schemas.microsoft.com/office/drawing/2014/main" xmlns="" id="{4EB7BA3F-919D-7BBF-8C31-DAD5CBC47646}"/>
               </a:ext>
             </a:extLst>
           </p:cNvPr>
@@ -21001,7 +22128,10 @@
           <a:lstStyle/>
           <a:p>
             <a:r>
-              <a:rPr lang="en-US" dirty="0">
+              <a:rPr lang="en-US" b="1" dirty="0">
+                <a:solidFill>
+                  <a:schemeClr val="tx1"/>
+                </a:solidFill>
                 <a:latin typeface="Aptos" panose="020B0004020202020204" pitchFamily="34" charset="0"/>
               </a:rPr>
               <a:t>Introduction</a:t>
@@ -21014,7 +22144,7 @@
           <p:cNvPr id="19" name="Content Placeholder 2">
             <a:extLst>
               <a:ext uri="{FF2B5EF4-FFF2-40B4-BE49-F238E27FC236}">
-                <a16:creationId xmlns:a16="http://schemas.microsoft.com/office/drawing/2014/main" id="{98349F09-71B1-87BB-EA53-81192F0663CA}"/>
+                <a16:creationId xmlns:a16="http://schemas.microsoft.com/office/drawing/2014/main" xmlns="" id="{98349F09-71B1-87BB-EA53-81192F0663CA}"/>
               </a:ext>
             </a:extLst>
           </p:cNvPr>
@@ -21191,8 +22321,45 @@
                 <a:ea typeface="Calibri" panose="020F0502020204030204" pitchFamily="34" charset="0"/>
                 <a:cs typeface="Times New Roman" panose="02020603050405020304" pitchFamily="18" charset="0"/>
               </a:rPr>
-              <a:t>The elevation to the rank of Senior Advocate of Nigeria (SAN) is the highest recognition of  professional achievement that can be bestowed on a lawyer and this recognition comes with huge responsibility.</a:t>
-            </a:r>
+              <a:t>The elevation to the rank of Senior Advocate of Nigeria (SAN) is the highest recognition of  professional achievement </a:t>
+            </a:r>
+            <a:r>
+              <a:rPr lang="en-US" sz="1800" kern="100" dirty="0" smtClean="0">
+                <a:latin typeface="Aptos" panose="020B0004020202020204" pitchFamily="34" charset="0"/>
+                <a:ea typeface="Calibri" panose="020F0502020204030204" pitchFamily="34" charset="0"/>
+                <a:cs typeface="Times New Roman" panose="02020603050405020304" pitchFamily="18" charset="0"/>
+              </a:rPr>
+              <a:t>which</a:t>
+            </a:r>
+            <a:r>
+              <a:rPr lang="en-US" sz="1800" kern="100" dirty="0" smtClean="0">
+                <a:latin typeface="Aptos" panose="020B0004020202020204" pitchFamily="34" charset="0"/>
+                <a:ea typeface="Calibri" panose="020F0502020204030204" pitchFamily="34" charset="0"/>
+                <a:cs typeface="Times New Roman" panose="02020603050405020304" pitchFamily="18" charset="0"/>
+              </a:rPr>
+              <a:t> </a:t>
+            </a:r>
+            <a:r>
+              <a:rPr lang="en-US" sz="1800" kern="100" dirty="0">
+                <a:latin typeface="Aptos" panose="020B0004020202020204" pitchFamily="34" charset="0"/>
+                <a:ea typeface="Calibri" panose="020F0502020204030204" pitchFamily="34" charset="0"/>
+                <a:cs typeface="Times New Roman" panose="02020603050405020304" pitchFamily="18" charset="0"/>
+              </a:rPr>
+              <a:t>can be bestowed on a lawyer and this recognition comes with huge </a:t>
+            </a:r>
+            <a:r>
+              <a:rPr lang="en-US" sz="1800" kern="100" dirty="0" smtClean="0">
+                <a:latin typeface="Aptos" panose="020B0004020202020204" pitchFamily="34" charset="0"/>
+                <a:ea typeface="Calibri" panose="020F0502020204030204" pitchFamily="34" charset="0"/>
+                <a:cs typeface="Times New Roman" panose="02020603050405020304" pitchFamily="18" charset="0"/>
+              </a:rPr>
+              <a:t>responsibilities.</a:t>
+            </a:r>
+            <a:endParaRPr lang="en-US" sz="1800" kern="100" dirty="0">
+              <a:latin typeface="Aptos" panose="020B0004020202020204" pitchFamily="34" charset="0"/>
+              <a:ea typeface="Calibri" panose="020F0502020204030204" pitchFamily="34" charset="0"/>
+              <a:cs typeface="Times New Roman" panose="02020603050405020304" pitchFamily="18" charset="0"/>
+            </a:endParaRPr>
           </a:p>
           <a:p>
             <a:pPr marL="0" marR="0" algn="just">
@@ -21207,13 +22374,50 @@
               </a:spcAft>
             </a:pPr>
             <a:r>
-              <a:rPr lang="en-US" sz="1800" kern="100" dirty="0">
+              <a:rPr lang="en-US" sz="1800" kern="100" dirty="0" smtClean="0">
                 <a:latin typeface="Aptos" panose="020B0004020202020204" pitchFamily="34" charset="0"/>
                 <a:ea typeface="Calibri" panose="020F0502020204030204" pitchFamily="34" charset="0"/>
                 <a:cs typeface="Times New Roman" panose="02020603050405020304" pitchFamily="18" charset="0"/>
               </a:rPr>
-              <a:t>The elevation to the rank of Senior Advocate of Nigeria is a conferment of profound responsibility which vests the Senior Advocate with  a mandate to become a custodian of the legal tradition(s), a role model for the Bar, and trustee of the standards of the Inner Bar and by extension the future of the  legal profession. This role demands active participation in "shaping not just the future of ethics and practice of members of the legal profession but affects the very fabric of the legal profession. At the core of the mandate is the preservation of the standards of the Inner Bar.“</a:t>
-            </a:r>
+              <a:t>With your new silk, you are no longer simply practitioners of law, you are custodians </a:t>
+            </a:r>
+            <a:r>
+              <a:rPr lang="en-US" sz="1800" kern="100" dirty="0">
+                <a:latin typeface="Aptos" panose="020B0004020202020204" pitchFamily="34" charset="0"/>
+                <a:ea typeface="Calibri" panose="020F0502020204030204" pitchFamily="34" charset="0"/>
+                <a:cs typeface="Times New Roman" panose="02020603050405020304" pitchFamily="18" charset="0"/>
+              </a:rPr>
+              <a:t>of the legal tradition(s), a role model for the Bar, and </a:t>
+            </a:r>
+            <a:r>
+              <a:rPr lang="en-US" sz="1800" kern="100" dirty="0" smtClean="0">
+                <a:latin typeface="Aptos" panose="020B0004020202020204" pitchFamily="34" charset="0"/>
+                <a:ea typeface="Calibri" panose="020F0502020204030204" pitchFamily="34" charset="0"/>
+                <a:cs typeface="Times New Roman" panose="02020603050405020304" pitchFamily="18" charset="0"/>
+              </a:rPr>
+              <a:t>trustees </a:t>
+            </a:r>
+            <a:r>
+              <a:rPr lang="en-US" sz="1800" kern="100" dirty="0">
+                <a:latin typeface="Aptos" panose="020B0004020202020204" pitchFamily="34" charset="0"/>
+                <a:ea typeface="Calibri" panose="020F0502020204030204" pitchFamily="34" charset="0"/>
+                <a:cs typeface="Times New Roman" panose="02020603050405020304" pitchFamily="18" charset="0"/>
+              </a:rPr>
+              <a:t>of </a:t>
+            </a:r>
+            <a:r>
+              <a:rPr lang="en-US" sz="1800" kern="100" dirty="0" smtClean="0">
+                <a:latin typeface="Aptos" panose="020B0004020202020204" pitchFamily="34" charset="0"/>
+                <a:ea typeface="Calibri" panose="020F0502020204030204" pitchFamily="34" charset="0"/>
+                <a:cs typeface="Times New Roman" panose="02020603050405020304" pitchFamily="18" charset="0"/>
+              </a:rPr>
+              <a:t>its future</a:t>
+            </a:r>
+            <a:endParaRPr lang="en-US" sz="1800" kern="100" dirty="0">
+              <a:latin typeface="Aptos" panose="020B0004020202020204" pitchFamily="34" charset="0"/>
+              <a:ea typeface="Calibri" panose="020F0502020204030204" pitchFamily="34" charset="0"/>
+              <a:cs typeface="Times New Roman" panose="02020603050405020304" pitchFamily="18" charset="0"/>
+            </a:endParaRPr>
           </a:p>
           <a:p>
             <a:pPr marL="0" marR="0" algn="just">
@@ -21228,45 +22432,37 @@
               </a:spcAft>
             </a:pPr>
             <a:r>
-              <a:rPr lang="en-US" sz="1800" kern="100" dirty="0">
+              <a:rPr lang="en-US" sz="1800" kern="100" dirty="0" smtClean="0">
                 <a:latin typeface="Aptos" panose="020B0004020202020204" pitchFamily="34" charset="0"/>
                 <a:ea typeface="Calibri" panose="020F0502020204030204" pitchFamily="34" charset="0"/>
                 <a:cs typeface="Times New Roman" panose="02020603050405020304" pitchFamily="18" charset="0"/>
               </a:rPr>
-              <a:t>It is profound responsibility to preserve standards, to diligently transmit wisdom and to consciously shape the future of the legal profession through active </a:t>
-            </a:r>
-            <a:r>
-              <a:rPr lang="en-US" sz="1800" b="1" kern="100" dirty="0">
+              <a:t>This program is therefore designed to remind you of these core responsibilities such as your leadership role, the ethical standards expected of you and the duties you owe to client, the C</a:t>
+            </a:r>
+            <a:r>
+              <a:rPr lang="en-US" sz="1800" kern="100" dirty="0" smtClean="0">
                 <a:latin typeface="Aptos" panose="020B0004020202020204" pitchFamily="34" charset="0"/>
                 <a:ea typeface="Calibri" panose="020F0502020204030204" pitchFamily="34" charset="0"/>
                 <a:cs typeface="Times New Roman" panose="02020603050405020304" pitchFamily="18" charset="0"/>
               </a:rPr>
-              <a:t>mentorship</a:t>
-            </a:r>
-            <a:r>
-              <a:rPr lang="en-US" sz="1800" kern="100" dirty="0">
+              <a:t>ou</a:t>
+            </a:r>
+            <a:r>
+              <a:rPr lang="en-US" sz="1800" kern="100" dirty="0" smtClean="0">
                 <a:latin typeface="Aptos" panose="020B0004020202020204" pitchFamily="34" charset="0"/>
                 <a:ea typeface="Calibri" panose="020F0502020204030204" pitchFamily="34" charset="0"/>
                 <a:cs typeface="Times New Roman" panose="02020603050405020304" pitchFamily="18" charset="0"/>
               </a:rPr>
-              <a:t> and </a:t>
-            </a:r>
-            <a:r>
-              <a:rPr lang="en-US" sz="1800" b="1" kern="100" dirty="0">
-                <a:latin typeface="Aptos" panose="020B0004020202020204" pitchFamily="34" charset="0"/>
-                <a:ea typeface="Calibri" panose="020F0502020204030204" pitchFamily="34" charset="0"/>
-                <a:cs typeface="Times New Roman" panose="02020603050405020304" pitchFamily="18" charset="0"/>
-              </a:rPr>
-              <a:t>committed knowledge transfer</a:t>
-            </a:r>
-            <a:r>
-              <a:rPr lang="en-US" sz="1800" kern="100" dirty="0">
-                <a:latin typeface="Aptos" panose="020B0004020202020204" pitchFamily="34" charset="0"/>
-                <a:ea typeface="Calibri" panose="020F0502020204030204" pitchFamily="34" charset="0"/>
-                <a:cs typeface="Times New Roman" panose="02020603050405020304" pitchFamily="18" charset="0"/>
-              </a:rPr>
-              <a:t>.</a:t>
-            </a:r>
+              <a:t>rt and society at large.</a:t>
+            </a:r>
+            <a:endParaRPr lang="en-US" sz="1800" kern="100" dirty="0" smtClean="0">
+              <a:solidFill>
+                <a:prstClr val="black"/>
+              </a:solidFill>
+              <a:latin typeface="Aptos" panose="020B0004020202020204" pitchFamily="34" charset="0"/>
+              <a:ea typeface="Calibri" panose="020F0502020204030204" pitchFamily="34" charset="0"/>
+              <a:cs typeface="Times New Roman" panose="02020603050405020304" pitchFamily="18" charset="0"/>
+            </a:endParaRPr>
           </a:p>
           <a:p>
             <a:pPr marL="0" marR="0" algn="just">
@@ -21281,45 +22477,150 @@
               </a:spcAft>
             </a:pPr>
             <a:r>
-              <a:rPr lang="en-US" sz="1800" kern="100" dirty="0">
+              <a:rPr lang="en-US" sz="1800" kern="100" dirty="0" smtClean="0">
+                <a:solidFill>
+                  <a:prstClr val="black"/>
+                </a:solidFill>
                 <a:latin typeface="Aptos" panose="020B0004020202020204" pitchFamily="34" charset="0"/>
                 <a:ea typeface="Calibri" panose="020F0502020204030204" pitchFamily="34" charset="0"/>
                 <a:cs typeface="Times New Roman" panose="02020603050405020304" pitchFamily="18" charset="0"/>
               </a:rPr>
-              <a:t>Today, I propose to remind all of us of what the rank stands for (portends). I shall also highlight the primary role of the Senior Advocate which is </a:t>
-            </a:r>
-            <a:r>
-              <a:rPr lang="en-US" sz="1800" b="1" kern="100" dirty="0">
+              <a:t>It </a:t>
+            </a:r>
+            <a:r>
+              <a:rPr lang="en-US" sz="1800" kern="100" dirty="0">
+                <a:solidFill>
+                  <a:prstClr val="black"/>
+                </a:solidFill>
                 <a:latin typeface="Aptos" panose="020B0004020202020204" pitchFamily="34" charset="0"/>
                 <a:ea typeface="Calibri" panose="020F0502020204030204" pitchFamily="34" charset="0"/>
                 <a:cs typeface="Times New Roman" panose="02020603050405020304" pitchFamily="18" charset="0"/>
               </a:rPr>
-              <a:t>Mentorship</a:t>
-            </a:r>
-            <a:r>
-              <a:rPr lang="en-US" sz="1800" kern="100" dirty="0">
+              <a:t>is </a:t>
+            </a:r>
+            <a:r>
+              <a:rPr lang="en-US" sz="1800" kern="100" dirty="0" smtClean="0">
+                <a:solidFill>
+                  <a:prstClr val="black"/>
+                </a:solidFill>
                 <a:latin typeface="Aptos" panose="020B0004020202020204" pitchFamily="34" charset="0"/>
                 <a:ea typeface="Calibri" panose="020F0502020204030204" pitchFamily="34" charset="0"/>
                 <a:cs typeface="Times New Roman" panose="02020603050405020304" pitchFamily="18" charset="0"/>
               </a:rPr>
-              <a:t> and </a:t>
-            </a:r>
-            <a:r>
-              <a:rPr lang="en-US" sz="1800" b="1" kern="100" dirty="0">
+              <a:t>therefore a </a:t>
+            </a:r>
+            <a:r>
+              <a:rPr lang="en-US" sz="1800" kern="100" dirty="0">
+                <a:solidFill>
+                  <a:prstClr val="black"/>
+                </a:solidFill>
                 <a:latin typeface="Aptos" panose="020B0004020202020204" pitchFamily="34" charset="0"/>
                 <a:ea typeface="Calibri" panose="020F0502020204030204" pitchFamily="34" charset="0"/>
                 <a:cs typeface="Times New Roman" panose="02020603050405020304" pitchFamily="18" charset="0"/>
               </a:rPr>
-              <a:t>Leadership</a:t>
-            </a:r>
-            <a:r>
-              <a:rPr lang="en-US" sz="1800" kern="100" dirty="0">
+              <a:t>profound responsibility to preserve standards, to diligently </a:t>
+            </a:r>
+            <a:r>
+              <a:rPr lang="en-US" sz="1800" kern="100" dirty="0" smtClean="0">
+                <a:solidFill>
+                  <a:prstClr val="black"/>
+                </a:solidFill>
                 <a:latin typeface="Aptos" panose="020B0004020202020204" pitchFamily="34" charset="0"/>
                 <a:ea typeface="Calibri" panose="020F0502020204030204" pitchFamily="34" charset="0"/>
                 <a:cs typeface="Times New Roman" panose="02020603050405020304" pitchFamily="18" charset="0"/>
               </a:rPr>
+              <a:t>transmit skills </a:t>
+            </a:r>
+            <a:r>
+              <a:rPr lang="en-US" sz="1800" kern="100" dirty="0">
+                <a:solidFill>
+                  <a:prstClr val="black"/>
+                </a:solidFill>
+                <a:latin typeface="Aptos" panose="020B0004020202020204" pitchFamily="34" charset="0"/>
+                <a:ea typeface="Calibri" panose="020F0502020204030204" pitchFamily="34" charset="0"/>
+                <a:cs typeface="Times New Roman" panose="02020603050405020304" pitchFamily="18" charset="0"/>
+              </a:rPr>
+              <a:t>and </a:t>
+            </a:r>
+            <a:r>
+              <a:rPr lang="en-US" sz="1800" kern="100" dirty="0" smtClean="0">
+                <a:solidFill>
+                  <a:prstClr val="black"/>
+                </a:solidFill>
+                <a:latin typeface="Aptos" panose="020B0004020202020204" pitchFamily="34" charset="0"/>
+                <a:ea typeface="Calibri" panose="020F0502020204030204" pitchFamily="34" charset="0"/>
+                <a:cs typeface="Times New Roman" panose="02020603050405020304" pitchFamily="18" charset="0"/>
+              </a:rPr>
+              <a:t>expertise and to </a:t>
+            </a:r>
+            <a:r>
+              <a:rPr lang="en-US" sz="1800" kern="100" dirty="0">
+                <a:solidFill>
+                  <a:prstClr val="black"/>
+                </a:solidFill>
+                <a:latin typeface="Aptos" panose="020B0004020202020204" pitchFamily="34" charset="0"/>
+                <a:ea typeface="Calibri" panose="020F0502020204030204" pitchFamily="34" charset="0"/>
+                <a:cs typeface="Times New Roman" panose="02020603050405020304" pitchFamily="18" charset="0"/>
+              </a:rPr>
+              <a:t>consciously shape the future of the legal profession through active </a:t>
+            </a:r>
+            <a:r>
+              <a:rPr lang="en-US" sz="1800" b="1" kern="100" dirty="0">
+                <a:solidFill>
+                  <a:prstClr val="black"/>
+                </a:solidFill>
+                <a:latin typeface="Aptos" panose="020B0004020202020204" pitchFamily="34" charset="0"/>
+                <a:ea typeface="Calibri" panose="020F0502020204030204" pitchFamily="34" charset="0"/>
+                <a:cs typeface="Times New Roman" panose="02020603050405020304" pitchFamily="18" charset="0"/>
+              </a:rPr>
+              <a:t>mentorship</a:t>
+            </a:r>
+            <a:r>
+              <a:rPr lang="en-US" sz="1800" kern="100" dirty="0">
+                <a:solidFill>
+                  <a:prstClr val="black"/>
+                </a:solidFill>
+                <a:latin typeface="Aptos" panose="020B0004020202020204" pitchFamily="34" charset="0"/>
+                <a:ea typeface="Calibri" panose="020F0502020204030204" pitchFamily="34" charset="0"/>
+                <a:cs typeface="Times New Roman" panose="02020603050405020304" pitchFamily="18" charset="0"/>
+              </a:rPr>
+              <a:t> and </a:t>
+            </a:r>
+            <a:r>
+              <a:rPr lang="en-US" sz="1800" b="1" kern="100" dirty="0">
+                <a:solidFill>
+                  <a:prstClr val="black"/>
+                </a:solidFill>
+                <a:latin typeface="Aptos" panose="020B0004020202020204" pitchFamily="34" charset="0"/>
+                <a:ea typeface="Calibri" panose="020F0502020204030204" pitchFamily="34" charset="0"/>
+                <a:cs typeface="Times New Roman" panose="02020603050405020304" pitchFamily="18" charset="0"/>
+              </a:rPr>
+              <a:t>committed knowledge transfer</a:t>
+            </a:r>
+            <a:r>
+              <a:rPr lang="en-US" sz="1800" kern="100" dirty="0">
+                <a:solidFill>
+                  <a:prstClr val="black"/>
+                </a:solidFill>
+                <a:latin typeface="Aptos" panose="020B0004020202020204" pitchFamily="34" charset="0"/>
+                <a:ea typeface="Calibri" panose="020F0502020204030204" pitchFamily="34" charset="0"/>
+                <a:cs typeface="Times New Roman" panose="02020603050405020304" pitchFamily="18" charset="0"/>
+              </a:rPr>
               <a:t>.</a:t>
             </a:r>
+            <a:r>
+              <a:rPr lang="en-US" sz="1800" kern="100" dirty="0" smtClean="0">
+                <a:latin typeface="Aptos" panose="020B0004020202020204" pitchFamily="34" charset="0"/>
+                <a:ea typeface="Calibri" panose="020F0502020204030204" pitchFamily="34" charset="0"/>
+                <a:cs typeface="Times New Roman" panose="02020603050405020304" pitchFamily="18" charset="0"/>
+              </a:rPr>
+              <a:t> </a:t>
+            </a:r>
+            <a:endParaRPr lang="en-US" sz="1800" kern="100" dirty="0">
+              <a:latin typeface="Aptos" panose="020B0004020202020204" pitchFamily="34" charset="0"/>
+              <a:ea typeface="Calibri" panose="020F0502020204030204" pitchFamily="34" charset="0"/>
+              <a:cs typeface="Times New Roman" panose="02020603050405020304" pitchFamily="18" charset="0"/>
+            </a:endParaRPr>
           </a:p>
           <a:p>
             <a:pPr marL="0" marR="0" algn="just">
@@ -21339,7 +22640,55 @@
                 <a:ea typeface="Calibri" panose="020F0502020204030204" pitchFamily="34" charset="0"/>
                 <a:cs typeface="Times New Roman" panose="02020603050405020304" pitchFamily="18" charset="0"/>
               </a:rPr>
-              <a:t>I will touch on Mentorship and the various types of Mentorship, some challenges that may be faced by the Mentor and give a Charge to the new Senior Advocates whilst proposing some steps that could be taken by Body of Senior Advocates of Nigeria (BOSAN) to strengthen this critical tool for preserving standards of the Inner Bar.</a:t>
+              <a:t>I will touch on Mentorship and the various types of Mentorship, some challenges that may be faced by the Mentor and give a Charge to the new Senior Advocates whilst proposing some steps that could be taken by </a:t>
+            </a:r>
+            <a:r>
+              <a:rPr lang="en-US" sz="1800" kern="100" dirty="0" smtClean="0">
+                <a:latin typeface="Aptos" panose="020B0004020202020204" pitchFamily="34" charset="0"/>
+                <a:ea typeface="Calibri" panose="020F0502020204030204" pitchFamily="34" charset="0"/>
+                <a:cs typeface="Times New Roman" panose="02020603050405020304" pitchFamily="18" charset="0"/>
+              </a:rPr>
+              <a:t>the Body </a:t>
+            </a:r>
+            <a:r>
+              <a:rPr lang="en-US" sz="1800" kern="100" dirty="0">
+                <a:latin typeface="Aptos" panose="020B0004020202020204" pitchFamily="34" charset="0"/>
+                <a:ea typeface="Calibri" panose="020F0502020204030204" pitchFamily="34" charset="0"/>
+                <a:cs typeface="Times New Roman" panose="02020603050405020304" pitchFamily="18" charset="0"/>
+              </a:rPr>
+              <a:t>of Senior Advocates of Nigeria (BOSAN) to strengthen </a:t>
+            </a:r>
+            <a:r>
+              <a:rPr lang="en-US" sz="1800" kern="100" dirty="0" smtClean="0">
+                <a:latin typeface="Aptos" panose="020B0004020202020204" pitchFamily="34" charset="0"/>
+                <a:ea typeface="Calibri" panose="020F0502020204030204" pitchFamily="34" charset="0"/>
+                <a:cs typeface="Times New Roman" panose="02020603050405020304" pitchFamily="18" charset="0"/>
+              </a:rPr>
+              <a:t>these </a:t>
+            </a:r>
+            <a:r>
+              <a:rPr lang="en-US" sz="1800" kern="100" dirty="0">
+                <a:latin typeface="Aptos" panose="020B0004020202020204" pitchFamily="34" charset="0"/>
+                <a:ea typeface="Calibri" panose="020F0502020204030204" pitchFamily="34" charset="0"/>
+                <a:cs typeface="Times New Roman" panose="02020603050405020304" pitchFamily="18" charset="0"/>
+              </a:rPr>
+              <a:t>critical </a:t>
+            </a:r>
+            <a:r>
+              <a:rPr lang="en-US" sz="1800" kern="100" dirty="0" smtClean="0">
+                <a:latin typeface="Aptos" panose="020B0004020202020204" pitchFamily="34" charset="0"/>
+                <a:ea typeface="Calibri" panose="020F0502020204030204" pitchFamily="34" charset="0"/>
+                <a:cs typeface="Times New Roman" panose="02020603050405020304" pitchFamily="18" charset="0"/>
+              </a:rPr>
+              <a:t>tools </a:t>
+            </a:r>
+            <a:r>
+              <a:rPr lang="en-US" sz="1800" kern="100" dirty="0">
+                <a:latin typeface="Aptos" panose="020B0004020202020204" pitchFamily="34" charset="0"/>
+                <a:ea typeface="Calibri" panose="020F0502020204030204" pitchFamily="34" charset="0"/>
+                <a:cs typeface="Times New Roman" panose="02020603050405020304" pitchFamily="18" charset="0"/>
+              </a:rPr>
+              <a:t>for preserving standards of the Inner Bar.</a:t>
             </a:r>
           </a:p>
         </p:txBody>
@@ -21349,7 +22698,7 @@
           <p:cNvPr id="2" name="Rectangle 1">
             <a:extLst>
               <a:ext uri="{FF2B5EF4-FFF2-40B4-BE49-F238E27FC236}">
-                <a16:creationId xmlns:a16="http://schemas.microsoft.com/office/drawing/2014/main" id="{90000FD2-4632-D312-3FA0-046EA666C38F}"/>
+                <a16:creationId xmlns:a16="http://schemas.microsoft.com/office/drawing/2014/main" xmlns="" id="{90000FD2-4632-D312-3FA0-046EA666C38F}"/>
               </a:ext>
             </a:extLst>
           </p:cNvPr>
@@ -21442,7 +22791,7 @@
           <p:cNvPr id="10" name="Title 9">
             <a:extLst>
               <a:ext uri="{FF2B5EF4-FFF2-40B4-BE49-F238E27FC236}">
-                <a16:creationId xmlns:a16="http://schemas.microsoft.com/office/drawing/2014/main" id="{4EB7BA3F-919D-7BBF-8C31-DAD5CBC47646}"/>
+                <a16:creationId xmlns:a16="http://schemas.microsoft.com/office/drawing/2014/main" xmlns="" id="{4EB7BA3F-919D-7BBF-8C31-DAD5CBC47646}"/>
               </a:ext>
             </a:extLst>
           </p:cNvPr>
@@ -21464,7 +22813,10 @@
           <a:lstStyle/>
           <a:p>
             <a:r>
-              <a:rPr lang="en-US" dirty="0">
+              <a:rPr lang="en-US" b="1" dirty="0">
+                <a:solidFill>
+                  <a:schemeClr val="tx1"/>
+                </a:solidFill>
                 <a:latin typeface="Aptos" panose="020B0004020202020204" pitchFamily="34" charset="0"/>
               </a:rPr>
               <a:t>POSERS</a:t>
@@ -21477,7 +22829,7 @@
           <p:cNvPr id="19" name="Content Placeholder 2">
             <a:extLst>
               <a:ext uri="{FF2B5EF4-FFF2-40B4-BE49-F238E27FC236}">
-                <a16:creationId xmlns:a16="http://schemas.microsoft.com/office/drawing/2014/main" id="{98349F09-71B1-87BB-EA53-81192F0663CA}"/>
+                <a16:creationId xmlns:a16="http://schemas.microsoft.com/office/drawing/2014/main" xmlns="" id="{98349F09-71B1-87BB-EA53-81192F0663CA}"/>
               </a:ext>
             </a:extLst>
           </p:cNvPr>
@@ -21659,8 +23011,49 @@
                 <a:ea typeface="Calibri" panose="020F0502020204030204" pitchFamily="34" charset="0"/>
                 <a:cs typeface="Times New Roman" panose="02020603050405020304" pitchFamily="18" charset="0"/>
               </a:rPr>
-              <a:t>Do you feel that in your journey so far, you have been a custodian of legal excellence and legal tradition(s)</a:t>
-            </a:r>
+              <a:t>Do you feel that in your journey so far, you </a:t>
+            </a:r>
+            <a:r>
+              <a:rPr lang="en-US" sz="2000" kern="100" dirty="0" smtClean="0">
+                <a:solidFill>
+                  <a:prstClr val="black"/>
+                </a:solidFill>
+                <a:latin typeface="Aptos" panose="020B0004020202020204" pitchFamily="34" charset="0"/>
+                <a:ea typeface="Calibri" panose="020F0502020204030204" pitchFamily="34" charset="0"/>
+                <a:cs typeface="Times New Roman" panose="02020603050405020304" pitchFamily="18" charset="0"/>
+              </a:rPr>
+              <a:t>have imbibed sufficient </a:t>
+            </a:r>
+            <a:r>
+              <a:rPr lang="en-US" sz="2000" kern="100" dirty="0">
+                <a:solidFill>
+                  <a:prstClr val="black"/>
+                </a:solidFill>
+                <a:latin typeface="Aptos" panose="020B0004020202020204" pitchFamily="34" charset="0"/>
+                <a:ea typeface="Calibri" panose="020F0502020204030204" pitchFamily="34" charset="0"/>
+                <a:cs typeface="Times New Roman" panose="02020603050405020304" pitchFamily="18" charset="0"/>
+              </a:rPr>
+              <a:t>legal excellence </a:t>
+            </a:r>
+            <a:r>
+              <a:rPr lang="en-US" sz="2000" kern="100" dirty="0" smtClean="0">
+                <a:solidFill>
+                  <a:prstClr val="black"/>
+                </a:solidFill>
+                <a:latin typeface="Aptos" panose="020B0004020202020204" pitchFamily="34" charset="0"/>
+                <a:ea typeface="Calibri" panose="020F0502020204030204" pitchFamily="34" charset="0"/>
+                <a:cs typeface="Times New Roman" panose="02020603050405020304" pitchFamily="18" charset="0"/>
+              </a:rPr>
+              <a:t>and legal tradition(s) to transfer to others?</a:t>
+            </a:r>
+            <a:endParaRPr lang="en-US" sz="2000" kern="100" dirty="0">
+              <a:solidFill>
+                <a:prstClr val="black"/>
+              </a:solidFill>
+              <a:latin typeface="Aptos" panose="020B0004020202020204" pitchFamily="34" charset="0"/>
+              <a:ea typeface="Calibri" panose="020F0502020204030204" pitchFamily="34" charset="0"/>
+              <a:cs typeface="Times New Roman" panose="02020603050405020304" pitchFamily="18" charset="0"/>
+            </a:endParaRPr>
           </a:p>
           <a:p>
             <a:pPr>
@@ -21708,23 +23101,74 @@
                 <a:ea typeface="Calibri" panose="020F0502020204030204" pitchFamily="34" charset="0"/>
                 <a:cs typeface="Times New Roman" panose="02020603050405020304" pitchFamily="18" charset="0"/>
               </a:rPr>
-              <a:t>Are you positioned or do you already intentionally build bridges to the next generation?</a:t>
-            </a:r>
-          </a:p>
-          <a:p>
-            <a:pPr>
-              <a:lnSpc>
-                <a:spcPct val="107000"/>
-              </a:lnSpc>
-              <a:spcBef>
-                <a:spcPts val="0"/>
-              </a:spcBef>
-              <a:spcAft>
-                <a:spcPts val="800"/>
-              </a:spcAft>
-              <a:buFont typeface="Wingdings" panose="05000000000000000000" pitchFamily="2" charset="2"/>
-              <a:buChar char="§"/>
-            </a:pPr>
+              <a:t>Are you positioned or </a:t>
+            </a:r>
+            <a:r>
+              <a:rPr lang="en-US" sz="2000" kern="100" dirty="0" smtClean="0">
+                <a:solidFill>
+                  <a:prstClr val="black"/>
+                </a:solidFill>
+                <a:latin typeface="Aptos" panose="020B0004020202020204" pitchFamily="34" charset="0"/>
+                <a:ea typeface="Calibri" panose="020F0502020204030204" pitchFamily="34" charset="0"/>
+                <a:cs typeface="Times New Roman" panose="02020603050405020304" pitchFamily="18" charset="0"/>
+              </a:rPr>
+              <a:t>have</a:t>
+            </a:r>
+            <a:r>
+              <a:rPr lang="en-US" sz="2000" kern="100" dirty="0" smtClean="0">
+                <a:solidFill>
+                  <a:prstClr val="black"/>
+                </a:solidFill>
+                <a:latin typeface="Aptos" panose="020B0004020202020204" pitchFamily="34" charset="0"/>
+                <a:ea typeface="Calibri" panose="020F0502020204030204" pitchFamily="34" charset="0"/>
+                <a:cs typeface="Times New Roman" panose="02020603050405020304" pitchFamily="18" charset="0"/>
+              </a:rPr>
+              <a:t> </a:t>
+            </a:r>
+            <a:r>
+              <a:rPr lang="en-US" sz="2000" kern="100" dirty="0">
+                <a:solidFill>
+                  <a:prstClr val="black"/>
+                </a:solidFill>
+                <a:latin typeface="Aptos" panose="020B0004020202020204" pitchFamily="34" charset="0"/>
+                <a:ea typeface="Calibri" panose="020F0502020204030204" pitchFamily="34" charset="0"/>
+                <a:cs typeface="Times New Roman" panose="02020603050405020304" pitchFamily="18" charset="0"/>
+              </a:rPr>
+              <a:t>you </a:t>
+            </a:r>
+            <a:r>
+              <a:rPr lang="en-US" sz="2000" kern="100" dirty="0" smtClean="0">
+                <a:solidFill>
+                  <a:prstClr val="black"/>
+                </a:solidFill>
+                <a:latin typeface="Aptos" panose="020B0004020202020204" pitchFamily="34" charset="0"/>
+                <a:ea typeface="Calibri" panose="020F0502020204030204" pitchFamily="34" charset="0"/>
+                <a:cs typeface="Times New Roman" panose="02020603050405020304" pitchFamily="18" charset="0"/>
+              </a:rPr>
+              <a:t>already </a:t>
+            </a:r>
+            <a:r>
+              <a:rPr lang="en-US" sz="2000" kern="100" dirty="0">
+                <a:solidFill>
+                  <a:prstClr val="black"/>
+                </a:solidFill>
+                <a:latin typeface="Aptos" panose="020B0004020202020204" pitchFamily="34" charset="0"/>
+                <a:ea typeface="Calibri" panose="020F0502020204030204" pitchFamily="34" charset="0"/>
+                <a:cs typeface="Times New Roman" panose="02020603050405020304" pitchFamily="18" charset="0"/>
+              </a:rPr>
+              <a:t>build bridges to the next </a:t>
+            </a:r>
+            <a:r>
+              <a:rPr lang="en-US" sz="2000" kern="100" dirty="0" smtClean="0">
+                <a:solidFill>
+                  <a:prstClr val="black"/>
+                </a:solidFill>
+                <a:latin typeface="Aptos" panose="020B0004020202020204" pitchFamily="34" charset="0"/>
+                <a:ea typeface="Calibri" panose="020F0502020204030204" pitchFamily="34" charset="0"/>
+                <a:cs typeface="Times New Roman" panose="02020603050405020304" pitchFamily="18" charset="0"/>
+              </a:rPr>
+              <a:t>generation of lawyers or colleagues?</a:t>
+            </a:r>
             <a:endParaRPr lang="en-US" sz="2000" kern="100" dirty="0">
               <a:solidFill>
                 <a:prstClr val="black"/>
@@ -21748,8 +23192,53 @@
               <a:buFont typeface="Wingdings" panose="05000000000000000000" pitchFamily="2" charset="2"/>
               <a:buChar char="§"/>
             </a:pPr>
-            <a:r>
-              <a:rPr lang="en-US" sz="2000" kern="100" dirty="0">
+            <a:endParaRPr lang="en-US" sz="1600" kern="100" dirty="0" smtClean="0">
+              <a:solidFill>
+                <a:prstClr val="black"/>
+              </a:solidFill>
+              <a:latin typeface="Aptos" panose="020B0004020202020204" pitchFamily="34" charset="0"/>
+              <a:ea typeface="Calibri" panose="020F0502020204030204" pitchFamily="34" charset="0"/>
+              <a:cs typeface="Times New Roman" panose="02020603050405020304" pitchFamily="18" charset="0"/>
+            </a:endParaRPr>
+          </a:p>
+          <a:p>
+            <a:pPr marL="0" indent="0">
+              <a:lnSpc>
+                <a:spcPct val="107000"/>
+              </a:lnSpc>
+              <a:spcBef>
+                <a:spcPts val="0"/>
+              </a:spcBef>
+              <a:spcAft>
+                <a:spcPts val="800"/>
+              </a:spcAft>
+              <a:buNone/>
+            </a:pPr>
+            <a:endParaRPr lang="en-US" sz="1800" kern="100" dirty="0">
+              <a:solidFill>
+                <a:prstClr val="black"/>
+              </a:solidFill>
+              <a:latin typeface="Aptos" panose="020B0004020202020204" pitchFamily="34" charset="0"/>
+              <a:ea typeface="Calibri" panose="020F0502020204030204" pitchFamily="34" charset="0"/>
+              <a:cs typeface="Times New Roman" panose="02020603050405020304" pitchFamily="18" charset="0"/>
+            </a:endParaRPr>
+          </a:p>
+          <a:p>
+            <a:pPr>
+              <a:lnSpc>
+                <a:spcPct val="107000"/>
+              </a:lnSpc>
+              <a:spcBef>
+                <a:spcPts val="0"/>
+              </a:spcBef>
+              <a:spcAft>
+                <a:spcPts val="800"/>
+              </a:spcAft>
+              <a:buFont typeface="Wingdings" panose="05000000000000000000" pitchFamily="2" charset="2"/>
+              <a:buChar char="§"/>
+            </a:pPr>
+            <a:r>
+              <a:rPr lang="en-US" sz="2000" kern="100" dirty="0" smtClean="0">
                 <a:solidFill>
                   <a:prstClr val="black"/>
                 </a:solidFill>
@@ -21757,7 +23246,18 @@
                 <a:ea typeface="Calibri" panose="020F0502020204030204" pitchFamily="34" charset="0"/>
                 <a:cs typeface="Times New Roman" panose="02020603050405020304" pitchFamily="18" charset="0"/>
               </a:rPr>
-              <a:t>What legacy are intentionally creating or intend to start creating?  </a:t>
+              <a:t>Have you figured out how you would like to create a legacy in this profession?  </a:t>
+            </a:r>
+            <a:r>
+              <a:rPr lang="en-US" sz="2000" kern="100" dirty="0">
+                <a:solidFill>
+                  <a:prstClr val="black"/>
+                </a:solidFill>
+                <a:latin typeface="Aptos" panose="020B0004020202020204" pitchFamily="34" charset="0"/>
+                <a:ea typeface="Calibri" panose="020F0502020204030204" pitchFamily="34" charset="0"/>
+                <a:cs typeface="Times New Roman" panose="02020603050405020304" pitchFamily="18" charset="0"/>
+              </a:rPr>
+              <a:t/>
             </a:r>
             <a:br>
               <a:rPr lang="en-US" sz="2000" kern="100" dirty="0">
@@ -21794,7 +23294,7 @@
           <p:cNvPr id="2" name="Chevron 3">
             <a:extLst>
               <a:ext uri="{FF2B5EF4-FFF2-40B4-BE49-F238E27FC236}">
-                <a16:creationId xmlns:a16="http://schemas.microsoft.com/office/drawing/2014/main" id="{E7AAE9A5-98B2-7E4F-4F93-CAAD0366E8EF}"/>
+                <a16:creationId xmlns:a16="http://schemas.microsoft.com/office/drawing/2014/main" xmlns="" id="{E7AAE9A5-98B2-7E4F-4F93-CAAD0366E8EF}"/>
               </a:ext>
             </a:extLst>
           </p:cNvPr>
@@ -21911,7 +23411,7 @@
           <p:cNvPr id="3" name="Chevron 4">
             <a:extLst>
               <a:ext uri="{FF2B5EF4-FFF2-40B4-BE49-F238E27FC236}">
-                <a16:creationId xmlns:a16="http://schemas.microsoft.com/office/drawing/2014/main" id="{CAFC0233-219E-D5BE-E704-AD50E94B2B69}"/>
+                <a16:creationId xmlns:a16="http://schemas.microsoft.com/office/drawing/2014/main" xmlns="" id="{CAFC0233-219E-D5BE-E704-AD50E94B2B69}"/>
               </a:ext>
             </a:extLst>
           </p:cNvPr>
@@ -22020,7 +23520,7 @@
           <p:cNvPr id="4" name="Chevron 5">
             <a:extLst>
               <a:ext uri="{FF2B5EF4-FFF2-40B4-BE49-F238E27FC236}">
-                <a16:creationId xmlns:a16="http://schemas.microsoft.com/office/drawing/2014/main" id="{75C69F85-9F51-BCFD-735E-32E0C59F5058}"/>
+                <a16:creationId xmlns:a16="http://schemas.microsoft.com/office/drawing/2014/main" xmlns="" id="{75C69F85-9F51-BCFD-735E-32E0C59F5058}"/>
               </a:ext>
             </a:extLst>
           </p:cNvPr>
@@ -22107,7 +23607,7 @@
           <p:cNvPr id="5" name="Rectangle 4">
             <a:extLst>
               <a:ext uri="{FF2B5EF4-FFF2-40B4-BE49-F238E27FC236}">
-                <a16:creationId xmlns:a16="http://schemas.microsoft.com/office/drawing/2014/main" id="{0EF48D9D-512C-B819-109D-3A227EF540F8}"/>
+                <a16:creationId xmlns:a16="http://schemas.microsoft.com/office/drawing/2014/main" xmlns="" id="{0EF48D9D-512C-B819-109D-3A227EF540F8}"/>
               </a:ext>
             </a:extLst>
           </p:cNvPr>
@@ -22200,7 +23700,7 @@
           <p:cNvPr id="26" name="Rectangle 49">
             <a:extLst>
               <a:ext uri="{FF2B5EF4-FFF2-40B4-BE49-F238E27FC236}">
-                <a16:creationId xmlns:a16="http://schemas.microsoft.com/office/drawing/2014/main" id="{C56EA63D-0C52-6962-4050-5FDCB9ED9EA3}"/>
+                <a16:creationId xmlns:a16="http://schemas.microsoft.com/office/drawing/2014/main" xmlns="" id="{C56EA63D-0C52-6962-4050-5FDCB9ED9EA3}"/>
               </a:ext>
             </a:extLst>
           </p:cNvPr>
@@ -22335,7 +23835,7 @@
           <p:cNvPr id="38" name="Rectangle 49">
             <a:extLst>
               <a:ext uri="{FF2B5EF4-FFF2-40B4-BE49-F238E27FC236}">
-                <a16:creationId xmlns:a16="http://schemas.microsoft.com/office/drawing/2014/main" id="{A7DEDCE2-F9BE-8178-711D-C5E8E9904442}"/>
+                <a16:creationId xmlns:a16="http://schemas.microsoft.com/office/drawing/2014/main" xmlns="" id="{A7DEDCE2-F9BE-8178-711D-C5E8E9904442}"/>
               </a:ext>
             </a:extLst>
           </p:cNvPr>
@@ -22470,7 +23970,7 @@
           <p:cNvPr id="31" name="Rectangle 49">
             <a:extLst>
               <a:ext uri="{FF2B5EF4-FFF2-40B4-BE49-F238E27FC236}">
-                <a16:creationId xmlns:a16="http://schemas.microsoft.com/office/drawing/2014/main" id="{C3221AA6-D389-895D-F0FB-587A96CA47D7}"/>
+                <a16:creationId xmlns:a16="http://schemas.microsoft.com/office/drawing/2014/main" xmlns="" id="{C3221AA6-D389-895D-F0FB-587A96CA47D7}"/>
               </a:ext>
             </a:extLst>
           </p:cNvPr>
@@ -22607,7 +24107,7 @@
           <p:cNvPr id="32" name="Rectangle 49">
             <a:extLst>
               <a:ext uri="{FF2B5EF4-FFF2-40B4-BE49-F238E27FC236}">
-                <a16:creationId xmlns:a16="http://schemas.microsoft.com/office/drawing/2014/main" id="{4AC803A3-D47A-230C-25D6-0C1E21D1FC6D}"/>
+                <a16:creationId xmlns:a16="http://schemas.microsoft.com/office/drawing/2014/main" xmlns="" id="{4AC803A3-D47A-230C-25D6-0C1E21D1FC6D}"/>
               </a:ext>
             </a:extLst>
           </p:cNvPr>
@@ -22744,7 +24244,7 @@
           <p:cNvPr id="61" name="Group 60">
             <a:extLst>
               <a:ext uri="{FF2B5EF4-FFF2-40B4-BE49-F238E27FC236}">
-                <a16:creationId xmlns:a16="http://schemas.microsoft.com/office/drawing/2014/main" id="{D59FA504-FF03-1D4E-BE0C-AA9035B9FD87}"/>
+                <a16:creationId xmlns:a16="http://schemas.microsoft.com/office/drawing/2014/main" xmlns="" id="{D59FA504-FF03-1D4E-BE0C-AA9035B9FD87}"/>
               </a:ext>
             </a:extLst>
           </p:cNvPr>
@@ -22767,7 +24267,7 @@
             <p:cNvPr id="62" name="Oval 61">
               <a:extLst>
                 <a:ext uri="{FF2B5EF4-FFF2-40B4-BE49-F238E27FC236}">
-                  <a16:creationId xmlns:a16="http://schemas.microsoft.com/office/drawing/2014/main" id="{5346E639-A765-1623-B11B-A3034C446D8C}"/>
+                  <a16:creationId xmlns:a16="http://schemas.microsoft.com/office/drawing/2014/main" xmlns="" id="{5346E639-A765-1623-B11B-A3034C446D8C}"/>
                 </a:ext>
               </a:extLst>
             </p:cNvPr>
@@ -22817,7 +24317,7 @@
             <p:cNvPr id="63" name="TextBox 62">
               <a:extLst>
                 <a:ext uri="{FF2B5EF4-FFF2-40B4-BE49-F238E27FC236}">
-                  <a16:creationId xmlns:a16="http://schemas.microsoft.com/office/drawing/2014/main" id="{884CAFF0-1B7E-6EFA-2980-785D1CB10DC3}"/>
+                  <a16:creationId xmlns:a16="http://schemas.microsoft.com/office/drawing/2014/main" xmlns="" id="{884CAFF0-1B7E-6EFA-2980-785D1CB10DC3}"/>
                 </a:ext>
               </a:extLst>
             </p:cNvPr>
@@ -22869,7 +24369,7 @@
           <p:cNvPr id="17" name="Group 16">
             <a:extLst>
               <a:ext uri="{FF2B5EF4-FFF2-40B4-BE49-F238E27FC236}">
-                <a16:creationId xmlns:a16="http://schemas.microsoft.com/office/drawing/2014/main" id="{049C49D0-F758-1530-2CDD-B8712B3A49D8}"/>
+                <a16:creationId xmlns:a16="http://schemas.microsoft.com/office/drawing/2014/main" xmlns="" id="{049C49D0-F758-1530-2CDD-B8712B3A49D8}"/>
               </a:ext>
             </a:extLst>
           </p:cNvPr>
@@ -22889,7 +24389,7 @@
             <p:cNvPr id="18" name="Oval 17">
               <a:extLst>
                 <a:ext uri="{FF2B5EF4-FFF2-40B4-BE49-F238E27FC236}">
-                  <a16:creationId xmlns:a16="http://schemas.microsoft.com/office/drawing/2014/main" id="{0D09C12F-EF08-884F-49E7-DC6A02F85856}"/>
+                  <a16:creationId xmlns:a16="http://schemas.microsoft.com/office/drawing/2014/main" xmlns="" id="{0D09C12F-EF08-884F-49E7-DC6A02F85856}"/>
                 </a:ext>
               </a:extLst>
             </p:cNvPr>
@@ -22951,7 +24451,7 @@
             <p:cNvPr id="19" name="TextBox 18">
               <a:extLst>
                 <a:ext uri="{FF2B5EF4-FFF2-40B4-BE49-F238E27FC236}">
-                  <a16:creationId xmlns:a16="http://schemas.microsoft.com/office/drawing/2014/main" id="{F6B759A9-5F47-21DB-25C4-81B5048DFA6B}"/>
+                  <a16:creationId xmlns:a16="http://schemas.microsoft.com/office/drawing/2014/main" xmlns="" id="{F6B759A9-5F47-21DB-25C4-81B5048DFA6B}"/>
                 </a:ext>
               </a:extLst>
             </p:cNvPr>
@@ -23020,7 +24520,7 @@
           <p:cNvPr id="60" name="Oval 59">
             <a:extLst>
               <a:ext uri="{FF2B5EF4-FFF2-40B4-BE49-F238E27FC236}">
-                <a16:creationId xmlns:a16="http://schemas.microsoft.com/office/drawing/2014/main" id="{DBAA33C3-8874-15A3-BB6A-E9A28B07A0D4}"/>
+                <a16:creationId xmlns:a16="http://schemas.microsoft.com/office/drawing/2014/main" xmlns="" id="{DBAA33C3-8874-15A3-BB6A-E9A28B07A0D4}"/>
               </a:ext>
             </a:extLst>
           </p:cNvPr>
@@ -23082,7 +24582,7 @@
           <p:cNvPr id="3" name="Group 2">
             <a:extLst>
               <a:ext uri="{FF2B5EF4-FFF2-40B4-BE49-F238E27FC236}">
-                <a16:creationId xmlns:a16="http://schemas.microsoft.com/office/drawing/2014/main" id="{B5862104-035A-CAE9-9D7C-9B6FD041357C}"/>
+                <a16:creationId xmlns:a16="http://schemas.microsoft.com/office/drawing/2014/main" xmlns="" id="{B5862104-035A-CAE9-9D7C-9B6FD041357C}"/>
               </a:ext>
             </a:extLst>
           </p:cNvPr>
@@ -23102,7 +24602,7 @@
             <p:cNvPr id="4" name="Oval 3">
               <a:extLst>
                 <a:ext uri="{FF2B5EF4-FFF2-40B4-BE49-F238E27FC236}">
-                  <a16:creationId xmlns:a16="http://schemas.microsoft.com/office/drawing/2014/main" id="{9E4D583D-82FD-3F54-B730-E46E32D834C3}"/>
+                  <a16:creationId xmlns:a16="http://schemas.microsoft.com/office/drawing/2014/main" xmlns="" id="{9E4D583D-82FD-3F54-B730-E46E32D834C3}"/>
                 </a:ext>
               </a:extLst>
             </p:cNvPr>
@@ -23164,7 +24664,7 @@
             <p:cNvPr id="5" name="TextBox 4">
               <a:extLst>
                 <a:ext uri="{FF2B5EF4-FFF2-40B4-BE49-F238E27FC236}">
-                  <a16:creationId xmlns:a16="http://schemas.microsoft.com/office/drawing/2014/main" id="{7467C427-6F96-D55F-F877-DE95083C2240}"/>
+                  <a16:creationId xmlns:a16="http://schemas.microsoft.com/office/drawing/2014/main" xmlns="" id="{7467C427-6F96-D55F-F877-DE95083C2240}"/>
                 </a:ext>
               </a:extLst>
             </p:cNvPr>
@@ -23224,7 +24724,7 @@
           <p:cNvPr id="6" name="Title 1">
             <a:extLst>
               <a:ext uri="{FF2B5EF4-FFF2-40B4-BE49-F238E27FC236}">
-                <a16:creationId xmlns:a16="http://schemas.microsoft.com/office/drawing/2014/main" id="{1F274D52-3F8E-760A-2CF4-ADD275801624}"/>
+                <a16:creationId xmlns:a16="http://schemas.microsoft.com/office/drawing/2014/main" xmlns="" id="{1F274D52-3F8E-760A-2CF4-ADD275801624}"/>
               </a:ext>
             </a:extLst>
           </p:cNvPr>
@@ -23246,12 +24746,12 @@
           <a:lstStyle/>
           <a:p>
             <a:r>
-              <a:rPr lang="en-GB" sz="4400" dirty="0">
+              <a:rPr lang="en-GB" sz="4400" b="1" dirty="0">
                 <a:latin typeface="Aptos" panose="020B0004020202020204" pitchFamily="34" charset="0"/>
               </a:rPr>
               <a:t>Cornerstone Pillars of the Inner Bar</a:t>
             </a:r>
-            <a:endParaRPr lang="en-IN" sz="4400" dirty="0">
+            <a:endParaRPr lang="en-IN" sz="4400" b="1" dirty="0">
               <a:solidFill>
                 <a:schemeClr val="tx1">
                   <a:lumMod val="85000"/>
@@ -23268,7 +24768,7 @@
           <p:cNvPr id="7" name="Group 6">
             <a:extLst>
               <a:ext uri="{FF2B5EF4-FFF2-40B4-BE49-F238E27FC236}">
-                <a16:creationId xmlns:a16="http://schemas.microsoft.com/office/drawing/2014/main" id="{16EA7D68-DDE1-63BB-F9DB-87CDA55C95A3}"/>
+                <a16:creationId xmlns:a16="http://schemas.microsoft.com/office/drawing/2014/main" xmlns="" id="{16EA7D68-DDE1-63BB-F9DB-87CDA55C95A3}"/>
               </a:ext>
             </a:extLst>
           </p:cNvPr>
@@ -23288,7 +24788,7 @@
             <p:cNvPr id="10" name="TextBox 9">
               <a:extLst>
                 <a:ext uri="{FF2B5EF4-FFF2-40B4-BE49-F238E27FC236}">
-                  <a16:creationId xmlns:a16="http://schemas.microsoft.com/office/drawing/2014/main" id="{8D9CFC25-93E1-C7AE-7A01-18D080000F6B}"/>
+                  <a16:creationId xmlns:a16="http://schemas.microsoft.com/office/drawing/2014/main" xmlns="" id="{8D9CFC25-93E1-C7AE-7A01-18D080000F6B}"/>
                 </a:ext>
               </a:extLst>
             </p:cNvPr>
@@ -23334,7 +24834,7 @@
             <p:cNvPr id="9" name="TextBox 8">
               <a:extLst>
                 <a:ext uri="{FF2B5EF4-FFF2-40B4-BE49-F238E27FC236}">
-                  <a16:creationId xmlns:a16="http://schemas.microsoft.com/office/drawing/2014/main" id="{BF185785-3BF8-E955-9D30-9FB3161B070C}"/>
+                  <a16:creationId xmlns:a16="http://schemas.microsoft.com/office/drawing/2014/main" xmlns="" id="{BF185785-3BF8-E955-9D30-9FB3161B070C}"/>
                 </a:ext>
               </a:extLst>
             </p:cNvPr>
@@ -23359,7 +24859,7 @@
             <a:p>
               <a:pPr algn="ctr"/>
               <a:r>
-                <a:rPr lang="en-US" sz="4000" b="1" dirty="0">
+                <a:rPr lang="en-US" sz="4000" b="1" dirty="0" smtClean="0">
                   <a:gradFill>
                     <a:gsLst>
                       <a:gs pos="0">
@@ -23374,7 +24874,7 @@
                     <a:lin ang="13500000" scaled="1"/>
                   </a:gradFill>
                 </a:rPr>
-                <a:t>01</a:t>
+                <a:t>06</a:t>
               </a:r>
               <a:endParaRPr lang="en-IN" sz="4000" b="1" dirty="0">
                 <a:gradFill>
@@ -23400,7 +24900,7 @@
           <p:cNvPr id="12" name="Group 11">
             <a:extLst>
               <a:ext uri="{FF2B5EF4-FFF2-40B4-BE49-F238E27FC236}">
-                <a16:creationId xmlns:a16="http://schemas.microsoft.com/office/drawing/2014/main" id="{5320F542-4DCE-8493-9B94-550367B43F12}"/>
+                <a16:creationId xmlns:a16="http://schemas.microsoft.com/office/drawing/2014/main" xmlns="" id="{5320F542-4DCE-8493-9B94-550367B43F12}"/>
               </a:ext>
             </a:extLst>
           </p:cNvPr>
@@ -23420,7 +24920,7 @@
             <p:cNvPr id="15" name="TextBox 14">
               <a:extLst>
                 <a:ext uri="{FF2B5EF4-FFF2-40B4-BE49-F238E27FC236}">
-                  <a16:creationId xmlns:a16="http://schemas.microsoft.com/office/drawing/2014/main" id="{FE94A2E5-762C-EDDB-737E-2DC80DC67FBE}"/>
+                  <a16:creationId xmlns:a16="http://schemas.microsoft.com/office/drawing/2014/main" xmlns="" id="{FE94A2E5-762C-EDDB-737E-2DC80DC67FBE}"/>
                 </a:ext>
               </a:extLst>
             </p:cNvPr>
@@ -23448,7 +24948,19 @@
                 <a:rPr lang="en-US" sz="1400" dirty="0">
                   <a:latin typeface="Aptos" panose="020B0004020202020204" pitchFamily="34" charset="0"/>
                 </a:rPr>
-                <a:t>Excellence in Advocacy, distinction in Court room, mastery of the law, share legal brilliance</a:t>
+                <a:t>Excellence in Advocacy, distinction in Court room, mastery of the law, </a:t>
+              </a:r>
+              <a:r>
+                <a:rPr lang="en-US" sz="1400" dirty="0" smtClean="0">
+                  <a:latin typeface="Aptos" panose="020B0004020202020204" pitchFamily="34" charset="0"/>
+                </a:rPr>
+                <a:t>sheer </a:t>
+              </a:r>
+              <a:r>
+                <a:rPr lang="en-US" sz="1400" dirty="0">
+                  <a:latin typeface="Aptos" panose="020B0004020202020204" pitchFamily="34" charset="0"/>
+                </a:rPr>
+                <a:t>legal brilliance</a:t>
               </a:r>
               <a:endParaRPr lang="en-IN" sz="1400" dirty="0">
                 <a:solidFill>
@@ -23467,7 +24979,7 @@
             <p:cNvPr id="14" name="TextBox 13">
               <a:extLst>
                 <a:ext uri="{FF2B5EF4-FFF2-40B4-BE49-F238E27FC236}">
-                  <a16:creationId xmlns:a16="http://schemas.microsoft.com/office/drawing/2014/main" id="{AB0FE358-2000-B045-6955-178E9FC974A6}"/>
+                  <a16:creationId xmlns:a16="http://schemas.microsoft.com/office/drawing/2014/main" xmlns="" id="{AB0FE358-2000-B045-6955-178E9FC974A6}"/>
                 </a:ext>
               </a:extLst>
             </p:cNvPr>
@@ -23492,7 +25004,7 @@
             <a:p>
               <a:pPr algn="ctr"/>
               <a:r>
-                <a:rPr lang="en-US" sz="4000" b="1" dirty="0">
+                <a:rPr lang="en-US" sz="4000" b="1" dirty="0" smtClean="0">
                   <a:gradFill>
                     <a:gsLst>
                       <a:gs pos="0">
@@ -23507,7 +25019,7 @@
                     <a:lin ang="13500000" scaled="1"/>
                   </a:gradFill>
                 </a:rPr>
-                <a:t>02</a:t>
+                <a:t>01</a:t>
               </a:r>
               <a:endParaRPr lang="en-IN" sz="4000" b="1" dirty="0">
                 <a:gradFill>
@@ -23533,7 +25045,7 @@
           <p:cNvPr id="20" name="Group 19">
             <a:extLst>
               <a:ext uri="{FF2B5EF4-FFF2-40B4-BE49-F238E27FC236}">
-                <a16:creationId xmlns:a16="http://schemas.microsoft.com/office/drawing/2014/main" id="{2AE2139B-385A-FBE3-D074-2CF72E6873C9}"/>
+                <a16:creationId xmlns:a16="http://schemas.microsoft.com/office/drawing/2014/main" xmlns="" id="{2AE2139B-385A-FBE3-D074-2CF72E6873C9}"/>
               </a:ext>
             </a:extLst>
           </p:cNvPr>
@@ -23553,7 +25065,7 @@
             <p:cNvPr id="21" name="Oval 20">
               <a:extLst>
                 <a:ext uri="{FF2B5EF4-FFF2-40B4-BE49-F238E27FC236}">
-                  <a16:creationId xmlns:a16="http://schemas.microsoft.com/office/drawing/2014/main" id="{DFB9E65B-1044-D6CE-78B8-AD17A26CBF98}"/>
+                  <a16:creationId xmlns:a16="http://schemas.microsoft.com/office/drawing/2014/main" xmlns="" id="{DFB9E65B-1044-D6CE-78B8-AD17A26CBF98}"/>
                 </a:ext>
               </a:extLst>
             </p:cNvPr>
@@ -23615,7 +25127,7 @@
             <p:cNvPr id="22" name="TextBox 21">
               <a:extLst>
                 <a:ext uri="{FF2B5EF4-FFF2-40B4-BE49-F238E27FC236}">
-                  <a16:creationId xmlns:a16="http://schemas.microsoft.com/office/drawing/2014/main" id="{AF8B2EBB-0873-3278-EA12-82C852D9E0A4}"/>
+                  <a16:creationId xmlns:a16="http://schemas.microsoft.com/office/drawing/2014/main" xmlns="" id="{AF8B2EBB-0873-3278-EA12-82C852D9E0A4}"/>
                 </a:ext>
               </a:extLst>
             </p:cNvPr>
@@ -23667,7 +25179,7 @@
           <p:cNvPr id="24" name="Oval 23">
             <a:extLst>
               <a:ext uri="{FF2B5EF4-FFF2-40B4-BE49-F238E27FC236}">
-                <a16:creationId xmlns:a16="http://schemas.microsoft.com/office/drawing/2014/main" id="{FD582C9F-75D6-6B9C-E8BB-8DCAE915B12E}"/>
+                <a16:creationId xmlns:a16="http://schemas.microsoft.com/office/drawing/2014/main" xmlns="" id="{FD582C9F-75D6-6B9C-E8BB-8DCAE915B12E}"/>
               </a:ext>
             </a:extLst>
           </p:cNvPr>
@@ -23719,7 +25231,7 @@
           <p:cNvPr id="25" name="TextBox 24">
             <a:extLst>
               <a:ext uri="{FF2B5EF4-FFF2-40B4-BE49-F238E27FC236}">
-                <a16:creationId xmlns:a16="http://schemas.microsoft.com/office/drawing/2014/main" id="{61E06067-E4F1-0222-A467-02B184BE93E8}"/>
+                <a16:creationId xmlns:a16="http://schemas.microsoft.com/office/drawing/2014/main" xmlns="" id="{61E06067-E4F1-0222-A467-02B184BE93E8}"/>
               </a:ext>
             </a:extLst>
           </p:cNvPr>
@@ -23770,7 +25282,7 @@
           <p:cNvPr id="28" name="Oval 27">
             <a:extLst>
               <a:ext uri="{FF2B5EF4-FFF2-40B4-BE49-F238E27FC236}">
-                <a16:creationId xmlns:a16="http://schemas.microsoft.com/office/drawing/2014/main" id="{1539959B-DB6E-CDB5-6507-6FDE9198C344}"/>
+                <a16:creationId xmlns:a16="http://schemas.microsoft.com/office/drawing/2014/main" xmlns="" id="{1539959B-DB6E-CDB5-6507-6FDE9198C344}"/>
               </a:ext>
             </a:extLst>
           </p:cNvPr>
@@ -23827,7 +25339,7 @@
           <p:cNvPr id="29" name="Oval 28">
             <a:extLst>
               <a:ext uri="{FF2B5EF4-FFF2-40B4-BE49-F238E27FC236}">
-                <a16:creationId xmlns:a16="http://schemas.microsoft.com/office/drawing/2014/main" id="{5433A638-AD75-8CF1-6236-C216FEB58B26}"/>
+                <a16:creationId xmlns:a16="http://schemas.microsoft.com/office/drawing/2014/main" xmlns="" id="{5433A638-AD75-8CF1-6236-C216FEB58B26}"/>
               </a:ext>
             </a:extLst>
           </p:cNvPr>
@@ -23896,7 +25408,7 @@
           <p:cNvPr id="30" name="TextBox 29">
             <a:extLst>
               <a:ext uri="{FF2B5EF4-FFF2-40B4-BE49-F238E27FC236}">
-                <a16:creationId xmlns:a16="http://schemas.microsoft.com/office/drawing/2014/main" id="{2A91C772-973D-DD1C-AAE3-37B6BB62434B}"/>
+                <a16:creationId xmlns:a16="http://schemas.microsoft.com/office/drawing/2014/main" xmlns="" id="{2A91C772-973D-DD1C-AAE3-37B6BB62434B}"/>
               </a:ext>
             </a:extLst>
           </p:cNvPr>
@@ -23938,7 +25450,7 @@
           <p:cNvPr id="33" name="Group 32">
             <a:extLst>
               <a:ext uri="{FF2B5EF4-FFF2-40B4-BE49-F238E27FC236}">
-                <a16:creationId xmlns:a16="http://schemas.microsoft.com/office/drawing/2014/main" id="{790F5617-1249-8473-1FEF-210480514776}"/>
+                <a16:creationId xmlns:a16="http://schemas.microsoft.com/office/drawing/2014/main" xmlns="" id="{790F5617-1249-8473-1FEF-210480514776}"/>
               </a:ext>
             </a:extLst>
           </p:cNvPr>
@@ -23958,7 +25470,7 @@
             <p:cNvPr id="36" name="TextBox 35">
               <a:extLst>
                 <a:ext uri="{FF2B5EF4-FFF2-40B4-BE49-F238E27FC236}">
-                  <a16:creationId xmlns:a16="http://schemas.microsoft.com/office/drawing/2014/main" id="{508EC69B-6C59-4705-9C64-A10C37EB2DA6}"/>
+                  <a16:creationId xmlns:a16="http://schemas.microsoft.com/office/drawing/2014/main" xmlns="" id="{508EC69B-6C59-4705-9C64-A10C37EB2DA6}"/>
                 </a:ext>
               </a:extLst>
             </p:cNvPr>
@@ -24004,7 +25516,7 @@
             <p:cNvPr id="35" name="TextBox 34">
               <a:extLst>
                 <a:ext uri="{FF2B5EF4-FFF2-40B4-BE49-F238E27FC236}">
-                  <a16:creationId xmlns:a16="http://schemas.microsoft.com/office/drawing/2014/main" id="{057451D0-B193-D9F6-B7E0-1CEE292351AB}"/>
+                  <a16:creationId xmlns:a16="http://schemas.microsoft.com/office/drawing/2014/main" xmlns="" id="{057451D0-B193-D9F6-B7E0-1CEE292351AB}"/>
                 </a:ext>
               </a:extLst>
             </p:cNvPr>
@@ -24029,14 +25541,14 @@
             <a:p>
               <a:pPr algn="ctr"/>
               <a:r>
-                <a:rPr lang="en-US" sz="4000" b="1" dirty="0">
+                <a:rPr lang="en-US" sz="4000" b="1" dirty="0" smtClean="0">
                   <a:solidFill>
                     <a:schemeClr val="accent6">
                       <a:lumMod val="75000"/>
                     </a:schemeClr>
                   </a:solidFill>
                 </a:rPr>
-                <a:t>03</a:t>
+                <a:t>02</a:t>
               </a:r>
               <a:endParaRPr lang="en-IN" sz="4000" b="1" dirty="0">
                 <a:solidFill>
@@ -24054,7 +25566,7 @@
           <p:cNvPr id="39" name="Group 38">
             <a:extLst>
               <a:ext uri="{FF2B5EF4-FFF2-40B4-BE49-F238E27FC236}">
-                <a16:creationId xmlns:a16="http://schemas.microsoft.com/office/drawing/2014/main" id="{A77D3C75-B929-A5ED-36FE-CCD8666FE54E}"/>
+                <a16:creationId xmlns:a16="http://schemas.microsoft.com/office/drawing/2014/main" xmlns="" id="{A77D3C75-B929-A5ED-36FE-CCD8666FE54E}"/>
               </a:ext>
             </a:extLst>
           </p:cNvPr>
@@ -24074,7 +25586,7 @@
             <p:cNvPr id="42" name="TextBox 41">
               <a:extLst>
                 <a:ext uri="{FF2B5EF4-FFF2-40B4-BE49-F238E27FC236}">
-                  <a16:creationId xmlns:a16="http://schemas.microsoft.com/office/drawing/2014/main" id="{167D5988-A987-FDF2-CCAB-FC85DF42FF13}"/>
+                  <a16:creationId xmlns:a16="http://schemas.microsoft.com/office/drawing/2014/main" xmlns="" id="{167D5988-A987-FDF2-CCAB-FC85DF42FF13}"/>
                 </a:ext>
               </a:extLst>
             </p:cNvPr>
@@ -24120,7 +25632,7 @@
             <p:cNvPr id="41" name="TextBox 40">
               <a:extLst>
                 <a:ext uri="{FF2B5EF4-FFF2-40B4-BE49-F238E27FC236}">
-                  <a16:creationId xmlns:a16="http://schemas.microsoft.com/office/drawing/2014/main" id="{373B1AEC-CF21-DA63-49F7-EFFC3276B1C7}"/>
+                  <a16:creationId xmlns:a16="http://schemas.microsoft.com/office/drawing/2014/main" xmlns="" id="{373B1AEC-CF21-DA63-49F7-EFFC3276B1C7}"/>
                 </a:ext>
               </a:extLst>
             </p:cNvPr>
@@ -24145,7 +25657,7 @@
             <a:p>
               <a:pPr algn="ctr"/>
               <a:r>
-                <a:rPr lang="en-US" sz="4000" b="1" dirty="0">
+                <a:rPr lang="en-US" sz="4000" b="1" dirty="0" smtClean="0">
                   <a:gradFill>
                     <a:gsLst>
                       <a:gs pos="0">
@@ -24160,7 +25672,7 @@
                     <a:lin ang="13500000" scaled="1"/>
                   </a:gradFill>
                 </a:rPr>
-                <a:t>04</a:t>
+                <a:t>03</a:t>
               </a:r>
               <a:endParaRPr lang="en-IN" sz="4000" b="1" dirty="0">
                 <a:gradFill>
@@ -24186,7 +25698,7 @@
           <p:cNvPr id="64" name="Rectangle 49">
             <a:extLst>
               <a:ext uri="{FF2B5EF4-FFF2-40B4-BE49-F238E27FC236}">
-                <a16:creationId xmlns:a16="http://schemas.microsoft.com/office/drawing/2014/main" id="{EC91EF46-7D34-8FD3-B026-343AE41D9958}"/>
+                <a16:creationId xmlns:a16="http://schemas.microsoft.com/office/drawing/2014/main" xmlns="" id="{EC91EF46-7D34-8FD3-B026-343AE41D9958}"/>
               </a:ext>
             </a:extLst>
           </p:cNvPr>
@@ -24321,7 +25833,7 @@
           <p:cNvPr id="65" name="Group 64">
             <a:extLst>
               <a:ext uri="{FF2B5EF4-FFF2-40B4-BE49-F238E27FC236}">
-                <a16:creationId xmlns:a16="http://schemas.microsoft.com/office/drawing/2014/main" id="{0269B228-D63C-48F9-8BFC-F2C47DD24459}"/>
+                <a16:creationId xmlns:a16="http://schemas.microsoft.com/office/drawing/2014/main" xmlns="" id="{0269B228-D63C-48F9-8BFC-F2C47DD24459}"/>
               </a:ext>
             </a:extLst>
           </p:cNvPr>
@@ -24341,7 +25853,7 @@
             <p:cNvPr id="68" name="TextBox 67">
               <a:extLst>
                 <a:ext uri="{FF2B5EF4-FFF2-40B4-BE49-F238E27FC236}">
-                  <a16:creationId xmlns:a16="http://schemas.microsoft.com/office/drawing/2014/main" id="{11C288BD-5921-93CA-41F6-35CA0352966F}"/>
+                  <a16:creationId xmlns:a16="http://schemas.microsoft.com/office/drawing/2014/main" xmlns="" id="{11C288BD-5921-93CA-41F6-35CA0352966F}"/>
                 </a:ext>
               </a:extLst>
             </p:cNvPr>
@@ -24387,7 +25899,7 @@
             <p:cNvPr id="67" name="TextBox 66">
               <a:extLst>
                 <a:ext uri="{FF2B5EF4-FFF2-40B4-BE49-F238E27FC236}">
-                  <a16:creationId xmlns:a16="http://schemas.microsoft.com/office/drawing/2014/main" id="{DE3DD524-35EC-1CF6-4368-4BFA65F98A59}"/>
+                  <a16:creationId xmlns:a16="http://schemas.microsoft.com/office/drawing/2014/main" xmlns="" id="{DE3DD524-35EC-1CF6-4368-4BFA65F98A59}"/>
                 </a:ext>
               </a:extLst>
             </p:cNvPr>
@@ -24412,12 +25924,12 @@
             <a:p>
               <a:pPr algn="ctr"/>
               <a:r>
-                <a:rPr lang="en-US" sz="4000" b="1" dirty="0">
+                <a:rPr lang="en-US" sz="4000" b="1" dirty="0" smtClean="0">
                   <a:solidFill>
                     <a:srgbClr val="7030A0"/>
                   </a:solidFill>
                 </a:rPr>
-                <a:t>05</a:t>
+                <a:t>04</a:t>
               </a:r>
               <a:endParaRPr lang="en-IN" sz="4000" b="1" dirty="0">
                 <a:solidFill>
@@ -24433,7 +25945,7 @@
           <p:cNvPr id="70" name="Rectangle 49">
             <a:extLst>
               <a:ext uri="{FF2B5EF4-FFF2-40B4-BE49-F238E27FC236}">
-                <a16:creationId xmlns:a16="http://schemas.microsoft.com/office/drawing/2014/main" id="{AE85D957-A897-4A0A-295B-AC9F1EA3A952}"/>
+                <a16:creationId xmlns:a16="http://schemas.microsoft.com/office/drawing/2014/main" xmlns="" id="{AE85D957-A897-4A0A-295B-AC9F1EA3A952}"/>
               </a:ext>
             </a:extLst>
           </p:cNvPr>
@@ -24568,7 +26080,7 @@
           <p:cNvPr id="71" name="Group 70">
             <a:extLst>
               <a:ext uri="{FF2B5EF4-FFF2-40B4-BE49-F238E27FC236}">
-                <a16:creationId xmlns:a16="http://schemas.microsoft.com/office/drawing/2014/main" id="{87B8E18B-D068-EAF9-18D2-5012087083BE}"/>
+                <a16:creationId xmlns:a16="http://schemas.microsoft.com/office/drawing/2014/main" xmlns="" id="{87B8E18B-D068-EAF9-18D2-5012087083BE}"/>
               </a:ext>
             </a:extLst>
           </p:cNvPr>
@@ -24588,7 +26100,7 @@
             <p:cNvPr id="74" name="TextBox 73">
               <a:extLst>
                 <a:ext uri="{FF2B5EF4-FFF2-40B4-BE49-F238E27FC236}">
-                  <a16:creationId xmlns:a16="http://schemas.microsoft.com/office/drawing/2014/main" id="{ACA85332-F6BE-804F-2B9D-120C10425078}"/>
+                  <a16:creationId xmlns:a16="http://schemas.microsoft.com/office/drawing/2014/main" xmlns="" id="{ACA85332-F6BE-804F-2B9D-120C10425078}"/>
                 </a:ext>
               </a:extLst>
             </p:cNvPr>
@@ -24645,7 +26157,7 @@
             <p:cNvPr id="73" name="TextBox 72">
               <a:extLst>
                 <a:ext uri="{FF2B5EF4-FFF2-40B4-BE49-F238E27FC236}">
-                  <a16:creationId xmlns:a16="http://schemas.microsoft.com/office/drawing/2014/main" id="{54A94332-1548-F297-840A-B4ADDDF16BDD}"/>
+                  <a16:creationId xmlns:a16="http://schemas.microsoft.com/office/drawing/2014/main" xmlns="" id="{54A94332-1548-F297-840A-B4ADDDF16BDD}"/>
                 </a:ext>
               </a:extLst>
             </p:cNvPr>
@@ -24670,12 +26182,12 @@
             <a:p>
               <a:pPr algn="ctr"/>
               <a:r>
-                <a:rPr lang="en-US" sz="4000" b="1" dirty="0">
+                <a:rPr lang="en-US" sz="4000" b="1" dirty="0" smtClean="0">
                   <a:solidFill>
                     <a:srgbClr val="00B050"/>
                   </a:solidFill>
                 </a:rPr>
-                <a:t>06</a:t>
+                <a:t>05</a:t>
               </a:r>
               <a:endParaRPr lang="en-IN" sz="4000" b="1" dirty="0">
                 <a:solidFill>
@@ -24691,7 +26203,7 @@
           <p:cNvPr id="76" name="Rectangle 75">
             <a:extLst>
               <a:ext uri="{FF2B5EF4-FFF2-40B4-BE49-F238E27FC236}">
-                <a16:creationId xmlns:a16="http://schemas.microsoft.com/office/drawing/2014/main" id="{BBD35624-6FF2-6576-CF75-9063BB102C79}"/>
+                <a16:creationId xmlns:a16="http://schemas.microsoft.com/office/drawing/2014/main" xmlns="" id="{BBD35624-6FF2-6576-CF75-9063BB102C79}"/>
               </a:ext>
             </a:extLst>
           </p:cNvPr>
@@ -24778,7 +26290,7 @@
         <p:cNvPr id="1" name="">
           <a:extLst>
             <a:ext uri="{FF2B5EF4-FFF2-40B4-BE49-F238E27FC236}">
-              <a16:creationId xmlns:a16="http://schemas.microsoft.com/office/drawing/2014/main" id="{632209F5-B6BF-FC4E-F456-4A360AA1C6E3}"/>
+              <a16:creationId xmlns:a16="http://schemas.microsoft.com/office/drawing/2014/main" xmlns="" id="{632209F5-B6BF-FC4E-F456-4A360AA1C6E3}"/>
             </a:ext>
           </a:extLst>
         </p:cNvPr>
@@ -24798,7 +26310,7 @@
           <p:cNvPr id="27" name="Group 26">
             <a:extLst>
               <a:ext uri="{FF2B5EF4-FFF2-40B4-BE49-F238E27FC236}">
-                <a16:creationId xmlns:a16="http://schemas.microsoft.com/office/drawing/2014/main" id="{C1EEFA78-D63A-6A57-52BB-78C402BED1A0}"/>
+                <a16:creationId xmlns:a16="http://schemas.microsoft.com/office/drawing/2014/main" xmlns="" id="{C1EEFA78-D63A-6A57-52BB-78C402BED1A0}"/>
               </a:ext>
             </a:extLst>
           </p:cNvPr>
@@ -24807,7 +26319,7 @@
         </p:nvGrpSpPr>
         <p:grpSpPr>
           <a:xfrm>
-            <a:off x="765820" y="2136597"/>
+            <a:off x="56067" y="1772816"/>
             <a:ext cx="2366691" cy="2455626"/>
             <a:chOff x="1783505" y="2413534"/>
             <a:chExt cx="1002890" cy="1002890"/>
@@ -24818,7 +26330,7 @@
             <p:cNvPr id="3" name="Oval 2">
               <a:extLst>
                 <a:ext uri="{FF2B5EF4-FFF2-40B4-BE49-F238E27FC236}">
-                  <a16:creationId xmlns:a16="http://schemas.microsoft.com/office/drawing/2014/main" id="{27273E46-8D3C-5A4E-7DDF-C7D0EAAA7F6A}"/>
+                  <a16:creationId xmlns:a16="http://schemas.microsoft.com/office/drawing/2014/main" xmlns="" id="{27273E46-8D3C-5A4E-7DDF-C7D0EAAA7F6A}"/>
                 </a:ext>
               </a:extLst>
             </p:cNvPr>
@@ -24872,7 +26384,7 @@
             <p:cNvPr id="28" name="Graphic 27" descr="Open book outline">
               <a:extLst>
                 <a:ext uri="{FF2B5EF4-FFF2-40B4-BE49-F238E27FC236}">
-                  <a16:creationId xmlns:a16="http://schemas.microsoft.com/office/drawing/2014/main" id="{BC9A7929-0EF0-5ACD-CB09-42A599C5227C}"/>
+                  <a16:creationId xmlns:a16="http://schemas.microsoft.com/office/drawing/2014/main" xmlns="" id="{BC9A7929-0EF0-5ACD-CB09-42A599C5227C}"/>
                 </a:ext>
               </a:extLst>
             </p:cNvPr>
@@ -24888,7 +26400,7 @@
                   <a14:useLocalDpi xmlns:a14="http://schemas.microsoft.com/office/drawing/2010/main" val="0"/>
                 </a:ext>
                 <a:ext uri="{96DAC541-7B7A-43D3-8B79-37D633B846F1}">
-                  <asvg:svgBlip xmlns:asvg="http://schemas.microsoft.com/office/drawing/2016/SVG/main" r:embed="rId4"/>
+                  <asvg:svgBlip xmlns:asvg="http://schemas.microsoft.com/office/drawing/2016/SVG/main" xmlns="" r:embed="rId4"/>
                 </a:ext>
               </a:extLst>
             </a:blip>
@@ -24912,7 +26424,7 @@
           <p:cNvPr id="19" name="Content Placeholder 6">
             <a:extLst>
               <a:ext uri="{FF2B5EF4-FFF2-40B4-BE49-F238E27FC236}">
-                <a16:creationId xmlns:a16="http://schemas.microsoft.com/office/drawing/2014/main" id="{6863FE2B-D250-2203-6BE6-9B4F84C52716}"/>
+                <a16:creationId xmlns:a16="http://schemas.microsoft.com/office/drawing/2014/main" xmlns="" id="{6863FE2B-D250-2203-6BE6-9B4F84C52716}"/>
               </a:ext>
             </a:extLst>
           </p:cNvPr>
@@ -24923,8 +26435,8 @@
         </p:nvSpPr>
         <p:spPr>
           <a:xfrm>
-            <a:off x="3358108" y="-1035496"/>
-            <a:ext cx="7056784" cy="9361040"/>
+            <a:off x="2422758" y="-1035496"/>
+            <a:ext cx="8911266" cy="9361040"/>
           </a:xfrm>
           <a:prstGeom prst="ellipse">
             <a:avLst/>
@@ -25073,31 +26585,320 @@
             <a:pPr marL="0" indent="0">
               <a:buNone/>
             </a:pPr>
-            <a:r>
-              <a:rPr lang="x-none" sz="3200" dirty="0">
-                <a:latin typeface="Aptos" panose="020B0004020202020204" pitchFamily="34" charset="0"/>
-              </a:rPr>
-              <a:t>“</a:t>
-            </a:r>
-            <a:r>
-              <a:rPr lang="en-US" sz="3200" dirty="0">
-                <a:latin typeface="Aptos" panose="020B0004020202020204" pitchFamily="34" charset="0"/>
-              </a:rPr>
-              <a:t>Without integrity, excellence and expertise lose their moral compass. Skills become tools for manipulation rather than tools for justice ”</a:t>
-            </a:r>
+            <a:endParaRPr lang="en-US" sz="1400" dirty="0" smtClean="0">
+              <a:latin typeface="Aptos" panose="020B0004020202020204"/>
+            </a:endParaRPr>
           </a:p>
           <a:p>
             <a:pPr marL="0" indent="0">
               <a:buNone/>
             </a:pPr>
             <a:r>
-              <a:rPr lang="en-US" sz="3200" dirty="0">
-                <a:latin typeface="Aptos" panose="020B0004020202020204" pitchFamily="34" charset="0"/>
-              </a:rPr>
-              <a:t>The legal practitioners Act and the Rules of Professional Conduct are the primary statute provide the legal compass</a:t>
-            </a:r>
-            <a:endParaRPr lang="x-none" sz="3200" dirty="0">
-              <a:latin typeface="Aptos" panose="020B0004020202020204" pitchFamily="34" charset="0"/>
+              <a:rPr lang="x-none" sz="1400" dirty="0" smtClean="0">
+                <a:latin typeface="Aptos" panose="020B0004020202020204"/>
+              </a:rPr>
+              <a:t>“</a:t>
+            </a:r>
+            <a:r>
+              <a:rPr lang="en-US" sz="1400" dirty="0" smtClean="0">
+                <a:latin typeface="Aptos" panose="020B0004020202020204"/>
+              </a:rPr>
+              <a:t>The </a:t>
+            </a:r>
+            <a:r>
+              <a:rPr lang="en-US" sz="1400" dirty="0">
+                <a:latin typeface="Aptos" panose="020B0004020202020204"/>
+              </a:rPr>
+              <a:t>L</a:t>
+            </a:r>
+            <a:r>
+              <a:rPr lang="en-US" sz="1400" dirty="0" smtClean="0">
+                <a:latin typeface="Aptos" panose="020B0004020202020204"/>
+              </a:rPr>
+              <a:t>egal Practitioners Act, the Legal Practitioners (Privileges)   Rules and the Rules </a:t>
+            </a:r>
+            <a:r>
+              <a:rPr lang="en-US" sz="1400" dirty="0">
+                <a:latin typeface="Aptos" panose="020B0004020202020204"/>
+              </a:rPr>
+              <a:t>of Professional Conduct </a:t>
+            </a:r>
+            <a:r>
+              <a:rPr lang="en-US" sz="1400" dirty="0" smtClean="0">
+                <a:latin typeface="Aptos" panose="020B0004020202020204"/>
+              </a:rPr>
+              <a:t>impose on every Senior Advocate of Nigeria a legal as well as moral duty to serve as custodian of excellence and mentors to the next generation. R. 1, 14, 15 &amp; 55 of RPC 2023;., Body of Benchers Regulation/NBA Constitution”.</a:t>
+            </a:r>
+          </a:p>
+          <a:p>
+            <a:pPr marL="0" marR="0" algn="just">
+              <a:lnSpc>
+                <a:spcPct val="115000"/>
+              </a:lnSpc>
+              <a:spcBef>
+                <a:spcPts val="0"/>
+              </a:spcBef>
+              <a:spcAft>
+                <a:spcPts val="1000"/>
+              </a:spcAft>
+            </a:pPr>
+            <a:r>
+              <a:rPr lang="en-US" sz="1400" b="1" kern="0" dirty="0" smtClean="0">
+                <a:latin typeface="Aptos" panose="020B0004020202020204"/>
+                <a:ea typeface="Times New Roman" panose="02020603050405020304" pitchFamily="18" charset="0"/>
+                <a:cs typeface="Times New Roman" panose="02020603050405020304" pitchFamily="18" charset="0"/>
+              </a:rPr>
+              <a:t>Rule </a:t>
+            </a:r>
+            <a:r>
+              <a:rPr lang="en-US" sz="1400" b="1" kern="0" dirty="0">
+                <a:latin typeface="Aptos" panose="020B0004020202020204"/>
+                <a:ea typeface="Times New Roman" panose="02020603050405020304" pitchFamily="18" charset="0"/>
+                <a:cs typeface="Times New Roman" panose="02020603050405020304" pitchFamily="18" charset="0"/>
+              </a:rPr>
+              <a:t>1: </a:t>
+            </a:r>
+            <a:r>
+              <a:rPr lang="en-US" sz="1400" kern="0" dirty="0">
+                <a:latin typeface="Aptos" panose="020B0004020202020204"/>
+                <a:ea typeface="Times New Roman" panose="02020603050405020304" pitchFamily="18" charset="0"/>
+                <a:cs typeface="Times New Roman" panose="02020603050405020304" pitchFamily="18" charset="0"/>
+              </a:rPr>
+              <a:t>Duty to uphold the rule of law and assist in </a:t>
+            </a:r>
+            <a:r>
+              <a:rPr lang="en-US" sz="1400" u="sng" kern="0" dirty="0">
+                <a:latin typeface="Aptos" panose="020B0004020202020204"/>
+                <a:ea typeface="Times New Roman" panose="02020603050405020304" pitchFamily="18" charset="0"/>
+                <a:cs typeface="Times New Roman" panose="02020603050405020304" pitchFamily="18" charset="0"/>
+              </a:rPr>
+              <a:t>maintaining the integrity of the profession. </a:t>
+            </a:r>
+            <a:r>
+              <a:rPr lang="en-US" sz="1400" kern="0" dirty="0">
+                <a:latin typeface="Aptos" panose="020B0004020202020204"/>
+                <a:ea typeface="Times New Roman" panose="02020603050405020304" pitchFamily="18" charset="0"/>
+                <a:cs typeface="Times New Roman" panose="02020603050405020304" pitchFamily="18" charset="0"/>
+              </a:rPr>
+              <a:t>This grounds the call to preserve the standards of the Inner </a:t>
+            </a:r>
+            <a:r>
+              <a:rPr lang="en-US" sz="1400" kern="0" dirty="0" smtClean="0">
+                <a:latin typeface="Aptos" panose="020B0004020202020204"/>
+                <a:ea typeface="Times New Roman" panose="02020603050405020304" pitchFamily="18" charset="0"/>
+                <a:cs typeface="Times New Roman" panose="02020603050405020304" pitchFamily="18" charset="0"/>
+              </a:rPr>
+              <a:t>Bar</a:t>
+            </a:r>
+            <a:r>
+              <a:rPr lang="en-US" sz="1400" kern="0" dirty="0">
+                <a:latin typeface="Aptos" panose="020B0004020202020204"/>
+                <a:ea typeface="Times New Roman" panose="02020603050405020304" pitchFamily="18" charset="0"/>
+                <a:cs typeface="Times New Roman" panose="02020603050405020304" pitchFamily="18" charset="0"/>
+              </a:rPr>
+              <a:t>.</a:t>
+            </a:r>
+            <a:endParaRPr lang="en-US" sz="1400" kern="100" dirty="0">
+              <a:latin typeface="Aptos" panose="020B0004020202020204"/>
+              <a:ea typeface="Calibri" panose="020F0502020204030204" pitchFamily="34" charset="0"/>
+              <a:cs typeface="Times New Roman" panose="02020603050405020304" pitchFamily="18" charset="0"/>
+            </a:endParaRPr>
+          </a:p>
+          <a:p>
+            <a:pPr marL="0" marR="0" algn="just">
+              <a:lnSpc>
+                <a:spcPct val="115000"/>
+              </a:lnSpc>
+              <a:spcBef>
+                <a:spcPts val="0"/>
+              </a:spcBef>
+              <a:spcAft>
+                <a:spcPts val="1000"/>
+              </a:spcAft>
+            </a:pPr>
+            <a:r>
+              <a:rPr lang="en-US" sz="1400" b="1" kern="0" dirty="0">
+                <a:latin typeface="Aptos" panose="020B0004020202020204"/>
+                <a:ea typeface="Times New Roman" panose="02020603050405020304" pitchFamily="18" charset="0"/>
+                <a:cs typeface="Times New Roman" panose="02020603050405020304" pitchFamily="18" charset="0"/>
+              </a:rPr>
+              <a:t>Rule 14: </a:t>
+            </a:r>
+            <a:r>
+              <a:rPr lang="en-US" sz="1400" kern="0" dirty="0">
+                <a:latin typeface="Aptos" panose="020B0004020202020204"/>
+                <a:ea typeface="Times New Roman" panose="02020603050405020304" pitchFamily="18" charset="0"/>
+                <a:cs typeface="Times New Roman" panose="02020603050405020304" pitchFamily="18" charset="0"/>
+              </a:rPr>
+              <a:t>Duty to the client, court, and justice system. This echoes the thrust of this presentation that SANs are officers of the court before advocates for their clients.</a:t>
+            </a:r>
+            <a:endParaRPr lang="en-US" sz="1400" kern="100" dirty="0">
+              <a:latin typeface="Aptos" panose="020B0004020202020204"/>
+              <a:ea typeface="Calibri" panose="020F0502020204030204" pitchFamily="34" charset="0"/>
+              <a:cs typeface="Times New Roman" panose="02020603050405020304" pitchFamily="18" charset="0"/>
+            </a:endParaRPr>
+          </a:p>
+          <a:p>
+            <a:pPr marL="0" marR="0" algn="just">
+              <a:lnSpc>
+                <a:spcPct val="115000"/>
+              </a:lnSpc>
+              <a:spcBef>
+                <a:spcPts val="0"/>
+              </a:spcBef>
+              <a:spcAft>
+                <a:spcPts val="1000"/>
+              </a:spcAft>
+            </a:pPr>
+            <a:r>
+              <a:rPr lang="en-US" sz="1400" b="1" kern="0" dirty="0">
+                <a:latin typeface="Aptos" panose="020B0004020202020204"/>
+                <a:ea typeface="Times New Roman" panose="02020603050405020304" pitchFamily="18" charset="0"/>
+                <a:cs typeface="Times New Roman" panose="02020603050405020304" pitchFamily="18" charset="0"/>
+              </a:rPr>
+              <a:t>Rule 15:</a:t>
+            </a:r>
+            <a:r>
+              <a:rPr lang="en-US" sz="1400" kern="0" dirty="0">
+                <a:latin typeface="Aptos" panose="020B0004020202020204"/>
+                <a:ea typeface="Times New Roman" panose="02020603050405020304" pitchFamily="18" charset="0"/>
+                <a:cs typeface="Times New Roman" panose="02020603050405020304" pitchFamily="18" charset="0"/>
+              </a:rPr>
+              <a:t> Duty of </a:t>
+            </a:r>
+            <a:r>
+              <a:rPr lang="en-US" sz="1400" kern="0" dirty="0" err="1">
+                <a:latin typeface="Aptos" panose="020B0004020202020204"/>
+                <a:ea typeface="Times New Roman" panose="02020603050405020304" pitchFamily="18" charset="0"/>
+                <a:cs typeface="Times New Roman" panose="02020603050405020304" pitchFamily="18" charset="0"/>
+              </a:rPr>
+              <a:t>candour</a:t>
+            </a:r>
+            <a:r>
+              <a:rPr lang="en-US" sz="1400" kern="0" dirty="0">
+                <a:latin typeface="Aptos" panose="020B0004020202020204"/>
+                <a:ea typeface="Times New Roman" panose="02020603050405020304" pitchFamily="18" charset="0"/>
+                <a:cs typeface="Times New Roman" panose="02020603050405020304" pitchFamily="18" charset="0"/>
+              </a:rPr>
+              <a:t>, diligence, and competence. Ties directly into knowledge transfer as SANs are meant to model and instill these qualities in younger lawyers.</a:t>
+            </a:r>
+            <a:endParaRPr lang="en-US" sz="1400" kern="100" dirty="0">
+              <a:latin typeface="Aptos" panose="020B0004020202020204"/>
+              <a:ea typeface="Calibri" panose="020F0502020204030204" pitchFamily="34" charset="0"/>
+              <a:cs typeface="Times New Roman" panose="02020603050405020304" pitchFamily="18" charset="0"/>
+            </a:endParaRPr>
+          </a:p>
+          <a:p>
+            <a:pPr marL="0" marR="0" algn="just">
+              <a:lnSpc>
+                <a:spcPct val="115000"/>
+              </a:lnSpc>
+              <a:spcBef>
+                <a:spcPts val="0"/>
+              </a:spcBef>
+              <a:spcAft>
+                <a:spcPts val="1000"/>
+              </a:spcAft>
+            </a:pPr>
+            <a:r>
+              <a:rPr lang="en-US" sz="1400" b="1" kern="0" dirty="0">
+                <a:latin typeface="Aptos" panose="020B0004020202020204"/>
+                <a:ea typeface="Times New Roman" panose="02020603050405020304" pitchFamily="18" charset="0"/>
+                <a:cs typeface="Times New Roman" panose="02020603050405020304" pitchFamily="18" charset="0"/>
+              </a:rPr>
+              <a:t>Rule 55: </a:t>
+            </a:r>
+            <a:r>
+              <a:rPr lang="en-US" sz="1400" kern="0" dirty="0">
+                <a:latin typeface="Aptos" panose="020B0004020202020204"/>
+                <a:ea typeface="Times New Roman" panose="02020603050405020304" pitchFamily="18" charset="0"/>
+                <a:cs typeface="Times New Roman" panose="02020603050405020304" pitchFamily="18" charset="0"/>
+              </a:rPr>
+              <a:t>Senior lawyers must not exploit junior lawyers, but instead guide and encourage them. This provides statutory backing for the speech’s emphasis on mentorship as a duty, not a </a:t>
+            </a:r>
+            <a:r>
+              <a:rPr lang="en-US" sz="1400" kern="0" dirty="0" err="1">
+                <a:latin typeface="Aptos" panose="020B0004020202020204"/>
+                <a:ea typeface="Times New Roman" panose="02020603050405020304" pitchFamily="18" charset="0"/>
+                <a:cs typeface="Times New Roman" panose="02020603050405020304" pitchFamily="18" charset="0"/>
+              </a:rPr>
+              <a:t>favour</a:t>
+            </a:r>
+            <a:r>
+              <a:rPr lang="en-US" sz="1400" kern="0" dirty="0" smtClean="0">
+                <a:latin typeface="Aptos" panose="020B0004020202020204"/>
+                <a:ea typeface="Times New Roman" panose="02020603050405020304" pitchFamily="18" charset="0"/>
+                <a:cs typeface="Times New Roman" panose="02020603050405020304" pitchFamily="18" charset="0"/>
+              </a:rPr>
+              <a:t>.</a:t>
+            </a:r>
+          </a:p>
+          <a:p>
+            <a:pPr marL="0" marR="0" algn="just">
+              <a:lnSpc>
+                <a:spcPct val="115000"/>
+              </a:lnSpc>
+              <a:spcBef>
+                <a:spcPts val="0"/>
+              </a:spcBef>
+              <a:spcAft>
+                <a:spcPts val="1000"/>
+              </a:spcAft>
+            </a:pPr>
+            <a:r>
+              <a:rPr lang="en-US" sz="1400" dirty="0">
+                <a:latin typeface="Aptos" panose="020B0004020202020204"/>
+                <a:ea typeface="Times New Roman" panose="02020603050405020304" pitchFamily="18" charset="0"/>
+              </a:rPr>
+              <a:t>Structured mentorship also aligns with </a:t>
+            </a:r>
+            <a:r>
+              <a:rPr lang="en-US" sz="1400" b="1" dirty="0">
+                <a:latin typeface="Aptos" panose="020B0004020202020204"/>
+                <a:ea typeface="Times New Roman" panose="02020603050405020304" pitchFamily="18" charset="0"/>
+              </a:rPr>
+              <a:t>Rule 3 of the Legal Practitioners (Privileges) Rules 1979 (as amended), </a:t>
+            </a:r>
+            <a:r>
+              <a:rPr lang="en-US" sz="1400" dirty="0">
+                <a:latin typeface="Aptos" panose="020B0004020202020204"/>
+                <a:ea typeface="Times New Roman" panose="02020603050405020304" pitchFamily="18" charset="0"/>
+              </a:rPr>
+              <a:t>which stipulates the qualifications and criteria for the conferment of the rank of </a:t>
+            </a:r>
+            <a:r>
+              <a:rPr lang="en-US" sz="1400" dirty="0" smtClean="0">
+                <a:latin typeface="Aptos" panose="020B0004020202020204"/>
+                <a:ea typeface="Times New Roman" panose="02020603050405020304" pitchFamily="18" charset="0"/>
+              </a:rPr>
+              <a:t>SAN. </a:t>
+            </a:r>
+            <a:r>
+              <a:rPr lang="en-US" sz="1400" dirty="0">
+                <a:latin typeface="Aptos" panose="020B0004020202020204"/>
+                <a:ea typeface="Times New Roman" panose="02020603050405020304" pitchFamily="18" charset="0"/>
+              </a:rPr>
+              <a:t>It emphasizes distinction in legal practice, integrity, and contribution to the development of the law and the legal profession.</a:t>
+            </a:r>
+            <a:r>
+              <a:rPr lang="en-US" sz="1400" dirty="0" smtClean="0">
+                <a:latin typeface="Aptos" panose="020B0004020202020204"/>
+                <a:ea typeface="Times New Roman" panose="02020603050405020304" pitchFamily="18" charset="0"/>
+              </a:rPr>
+              <a:t> </a:t>
+            </a:r>
+            <a:endParaRPr lang="en-US" sz="1400" kern="100" dirty="0">
+              <a:latin typeface="Aptos" panose="020B0004020202020204"/>
+              <a:ea typeface="Calibri" panose="020F0502020204030204" pitchFamily="34" charset="0"/>
+              <a:cs typeface="Times New Roman" panose="02020603050405020304" pitchFamily="18" charset="0"/>
+            </a:endParaRPr>
+          </a:p>
+          <a:p>
+            <a:pPr marL="0" indent="0">
+              <a:buNone/>
+            </a:pPr>
+            <a:endParaRPr lang="x-none" sz="1600" dirty="0">
+              <a:latin typeface="Aptos" panose="020B0004020202020204"/>
             </a:endParaRPr>
           </a:p>
         </p:txBody>
@@ -25107,7 +26908,7 @@
           <p:cNvPr id="11" name="Rectangle 10">
             <a:extLst>
               <a:ext uri="{FF2B5EF4-FFF2-40B4-BE49-F238E27FC236}">
-                <a16:creationId xmlns:a16="http://schemas.microsoft.com/office/drawing/2014/main" id="{9653CBBD-5705-1844-3E79-0D2FDD554B1B}"/>
+                <a16:creationId xmlns:a16="http://schemas.microsoft.com/office/drawing/2014/main" xmlns="" id="{9653CBBD-5705-1844-3E79-0D2FDD554B1B}"/>
               </a:ext>
             </a:extLst>
           </p:cNvPr>
@@ -25200,7 +27001,7 @@
           <p:cNvPr id="10" name="Title 9">
             <a:extLst>
               <a:ext uri="{FF2B5EF4-FFF2-40B4-BE49-F238E27FC236}">
-                <a16:creationId xmlns:a16="http://schemas.microsoft.com/office/drawing/2014/main" id="{4EB7BA3F-919D-7BBF-8C31-DAD5CBC47646}"/>
+                <a16:creationId xmlns:a16="http://schemas.microsoft.com/office/drawing/2014/main" xmlns="" id="{4EB7BA3F-919D-7BBF-8C31-DAD5CBC47646}"/>
               </a:ext>
             </a:extLst>
           </p:cNvPr>
@@ -25230,7 +27031,7 @@
               </a:spcBef>
             </a:pPr>
             <a:r>
-              <a:rPr lang="en-US" dirty="0">
+              <a:rPr lang="en-US" b="1" dirty="0">
                 <a:solidFill>
                   <a:prstClr val="black"/>
                 </a:solidFill>
@@ -25246,7 +27047,7 @@
           <p:cNvPr id="19" name="Content Placeholder 2">
             <a:extLst>
               <a:ext uri="{FF2B5EF4-FFF2-40B4-BE49-F238E27FC236}">
-                <a16:creationId xmlns:a16="http://schemas.microsoft.com/office/drawing/2014/main" id="{98349F09-71B1-87BB-EA53-81192F0663CA}"/>
+                <a16:creationId xmlns:a16="http://schemas.microsoft.com/office/drawing/2014/main" xmlns="" id="{98349F09-71B1-87BB-EA53-81192F0663CA}"/>
               </a:ext>
             </a:extLst>
           </p:cNvPr>
@@ -25417,14 +27218,11 @@
                 <a:spcPts val="800"/>
               </a:spcAft>
             </a:pPr>
-            <a:r>
-              <a:rPr lang="en-US" sz="2400" kern="100" dirty="0">
-                <a:latin typeface="Aptos" panose="020B0004020202020204" pitchFamily="34" charset="0"/>
-                <a:ea typeface="Calibri" panose="020F0502020204030204" pitchFamily="34" charset="0"/>
-                <a:cs typeface="Times New Roman" panose="02020603050405020304" pitchFamily="18" charset="0"/>
-              </a:rPr>
-              <a:t>Mentoring has been defined as "a developmental partnership in which a more experienced person supports the growth of another by offering guidance, knowledge, and encouragement." It is a dynamic process and not "one-size-fits-all,“.</a:t>
-            </a:r>
+            <a:endParaRPr lang="en-US" sz="2400" kern="100" dirty="0" smtClean="0">
+              <a:latin typeface="Aptos" panose="020B0004020202020204" pitchFamily="34" charset="0"/>
+              <a:ea typeface="Calibri" panose="020F0502020204030204" pitchFamily="34" charset="0"/>
+              <a:cs typeface="Times New Roman" panose="02020603050405020304" pitchFamily="18" charset="0"/>
+            </a:endParaRPr>
           </a:p>
           <a:p>
             <a:pPr marL="0" marR="0" algn="just">
@@ -25438,22 +27236,11 @@
                 <a:spcPts val="800"/>
               </a:spcAft>
             </a:pPr>
-            <a:r>
-              <a:rPr lang="en-US" sz="2400" b="1" kern="100" dirty="0">
-                <a:latin typeface="Aptos" panose="020B0004020202020204" pitchFamily="34" charset="0"/>
-                <a:ea typeface="Calibri" panose="020F0502020204030204" pitchFamily="34" charset="0"/>
-                <a:cs typeface="Times New Roman" panose="02020603050405020304" pitchFamily="18" charset="0"/>
-              </a:rPr>
-              <a:t>Mentees:</a:t>
-            </a:r>
-            <a:r>
-              <a:rPr lang="en-US" sz="2400" kern="100" dirty="0">
-                <a:latin typeface="Aptos" panose="020B0004020202020204" pitchFamily="34" charset="0"/>
-                <a:ea typeface="Calibri" panose="020F0502020204030204" pitchFamily="34" charset="0"/>
-                <a:cs typeface="Times New Roman" panose="02020603050405020304" pitchFamily="18" charset="0"/>
-              </a:rPr>
-              <a:t> Enhanced skill acquisition, confidence, access to networks, and clarity of purpose.</a:t>
-            </a:r>
+            <a:endParaRPr lang="en-US" sz="1100" kern="100" dirty="0">
+              <a:latin typeface="Aptos" panose="020B0004020202020204" pitchFamily="34" charset="0"/>
+              <a:ea typeface="Calibri" panose="020F0502020204030204" pitchFamily="34" charset="0"/>
+              <a:cs typeface="Times New Roman" panose="02020603050405020304" pitchFamily="18" charset="0"/>
+            </a:endParaRPr>
           </a:p>
           <a:p>
             <a:pPr marL="0" marR="0" algn="just">
@@ -25468,12 +27255,12 @@
               </a:spcAft>
             </a:pPr>
             <a:r>
-              <a:rPr lang="en-US" sz="2400" b="1" kern="100" dirty="0">
+              <a:rPr lang="en-US" sz="2400" kern="100" dirty="0" smtClean="0">
                 <a:latin typeface="Aptos" panose="020B0004020202020204" pitchFamily="34" charset="0"/>
                 <a:ea typeface="Calibri" panose="020F0502020204030204" pitchFamily="34" charset="0"/>
                 <a:cs typeface="Times New Roman" panose="02020603050405020304" pitchFamily="18" charset="0"/>
               </a:rPr>
-              <a:t>Mentors (SANs):</a:t>
+              <a:t>Mentoring </a:t>
             </a:r>
             <a:r>
               <a:rPr lang="en-US" sz="2400" kern="100" dirty="0">
@@ -25481,7 +27268,135 @@
                 <a:ea typeface="Calibri" panose="020F0502020204030204" pitchFamily="34" charset="0"/>
                 <a:cs typeface="Times New Roman" panose="02020603050405020304" pitchFamily="18" charset="0"/>
               </a:rPr>
-              <a:t> Leadership development, satisfaction of legacy building, and exposure to new perspectives (e.g., through reverse mentoring).</a:t>
+              <a:t>has been defined as "a developmental partnership in which a more experienced person supports the growth of another by offering guidance, knowledge, and encouragement." It is a dynamic process and not "one-size-fits-all</a:t>
+            </a:r>
+            <a:r>
+              <a:rPr lang="en-US" sz="2400" kern="100" dirty="0" smtClean="0">
+                <a:latin typeface="Aptos" panose="020B0004020202020204" pitchFamily="34" charset="0"/>
+                <a:ea typeface="Calibri" panose="020F0502020204030204" pitchFamily="34" charset="0"/>
+                <a:cs typeface="Times New Roman" panose="02020603050405020304" pitchFamily="18" charset="0"/>
+              </a:rPr>
+              <a:t>,“.</a:t>
+            </a:r>
+          </a:p>
+          <a:p>
+            <a:pPr marL="0" marR="0" indent="0" algn="just">
+              <a:lnSpc>
+                <a:spcPct val="107000"/>
+              </a:lnSpc>
+              <a:spcBef>
+                <a:spcPts val="0"/>
+              </a:spcBef>
+              <a:spcAft>
+                <a:spcPts val="800"/>
+              </a:spcAft>
+              <a:buNone/>
+            </a:pPr>
+            <a:endParaRPr lang="en-US" sz="600" kern="100" dirty="0">
+              <a:latin typeface="Aptos" panose="020B0004020202020204" pitchFamily="34" charset="0"/>
+              <a:ea typeface="Calibri" panose="020F0502020204030204" pitchFamily="34" charset="0"/>
+              <a:cs typeface="Times New Roman" panose="02020603050405020304" pitchFamily="18" charset="0"/>
+            </a:endParaRPr>
+          </a:p>
+          <a:p>
+            <a:pPr marL="0" marR="0" algn="just">
+              <a:lnSpc>
+                <a:spcPct val="107000"/>
+              </a:lnSpc>
+              <a:spcBef>
+                <a:spcPts val="0"/>
+              </a:spcBef>
+              <a:spcAft>
+                <a:spcPts val="800"/>
+              </a:spcAft>
+            </a:pPr>
+            <a:r>
+              <a:rPr lang="en-US" sz="2400" b="1" kern="100" dirty="0">
+                <a:latin typeface="Aptos" panose="020B0004020202020204" pitchFamily="34" charset="0"/>
+                <a:ea typeface="Calibri" panose="020F0502020204030204" pitchFamily="34" charset="0"/>
+                <a:cs typeface="Times New Roman" panose="02020603050405020304" pitchFamily="18" charset="0"/>
+              </a:rPr>
+              <a:t>Mentees:</a:t>
+            </a:r>
+            <a:r>
+              <a:rPr lang="en-US" sz="2400" kern="100" dirty="0">
+                <a:latin typeface="Aptos" panose="020B0004020202020204" pitchFamily="34" charset="0"/>
+                <a:ea typeface="Calibri" panose="020F0502020204030204" pitchFamily="34" charset="0"/>
+                <a:cs typeface="Times New Roman" panose="02020603050405020304" pitchFamily="18" charset="0"/>
+              </a:rPr>
+              <a:t> Enhanced skill acquisition, confidence, access to networks, and clarity of purpose</a:t>
+            </a:r>
+            <a:r>
+              <a:rPr lang="en-US" sz="2400" kern="100" dirty="0" smtClean="0">
+                <a:latin typeface="Aptos" panose="020B0004020202020204" pitchFamily="34" charset="0"/>
+                <a:ea typeface="Calibri" panose="020F0502020204030204" pitchFamily="34" charset="0"/>
+                <a:cs typeface="Times New Roman" panose="02020603050405020304" pitchFamily="18" charset="0"/>
+              </a:rPr>
+              <a:t>.</a:t>
+            </a:r>
+          </a:p>
+          <a:p>
+            <a:pPr marL="0" marR="0" indent="0" algn="just">
+              <a:lnSpc>
+                <a:spcPct val="107000"/>
+              </a:lnSpc>
+              <a:spcBef>
+                <a:spcPts val="0"/>
+              </a:spcBef>
+              <a:spcAft>
+                <a:spcPts val="800"/>
+              </a:spcAft>
+              <a:buNone/>
+            </a:pPr>
+            <a:endParaRPr lang="en-US" sz="900" kern="100" dirty="0">
+              <a:latin typeface="Aptos" panose="020B0004020202020204" pitchFamily="34" charset="0"/>
+              <a:ea typeface="Calibri" panose="020F0502020204030204" pitchFamily="34" charset="0"/>
+              <a:cs typeface="Times New Roman" panose="02020603050405020304" pitchFamily="18" charset="0"/>
+            </a:endParaRPr>
+          </a:p>
+          <a:p>
+            <a:pPr marL="0" marR="0" algn="just">
+              <a:lnSpc>
+                <a:spcPct val="107000"/>
+              </a:lnSpc>
+              <a:spcBef>
+                <a:spcPts val="0"/>
+              </a:spcBef>
+              <a:spcAft>
+                <a:spcPts val="800"/>
+              </a:spcAft>
+            </a:pPr>
+            <a:r>
+              <a:rPr lang="en-US" sz="2400" b="1" kern="100" dirty="0">
+                <a:latin typeface="Aptos" panose="020B0004020202020204" pitchFamily="34" charset="0"/>
+                <a:ea typeface="Calibri" panose="020F0502020204030204" pitchFamily="34" charset="0"/>
+                <a:cs typeface="Times New Roman" panose="02020603050405020304" pitchFamily="18" charset="0"/>
+              </a:rPr>
+              <a:t>Mentors (SANs):</a:t>
+            </a:r>
+            <a:r>
+              <a:rPr lang="en-US" sz="2400" kern="100" dirty="0">
+                <a:latin typeface="Aptos" panose="020B0004020202020204" pitchFamily="34" charset="0"/>
+                <a:ea typeface="Calibri" panose="020F0502020204030204" pitchFamily="34" charset="0"/>
+                <a:cs typeface="Times New Roman" panose="02020603050405020304" pitchFamily="18" charset="0"/>
+              </a:rPr>
+              <a:t> Leadership development, </a:t>
+            </a:r>
+            <a:r>
+              <a:rPr lang="en-US" sz="2400" kern="100" dirty="0" smtClean="0">
+                <a:latin typeface="Aptos" panose="020B0004020202020204" pitchFamily="34" charset="0"/>
+                <a:ea typeface="Calibri" panose="020F0502020204030204" pitchFamily="34" charset="0"/>
+                <a:cs typeface="Times New Roman" panose="02020603050405020304" pitchFamily="18" charset="0"/>
+              </a:rPr>
+              <a:t>opportunity to build legacy, </a:t>
+            </a:r>
+            <a:r>
+              <a:rPr lang="en-US" sz="2400" kern="100" dirty="0">
+                <a:latin typeface="Aptos" panose="020B0004020202020204" pitchFamily="34" charset="0"/>
+                <a:ea typeface="Calibri" panose="020F0502020204030204" pitchFamily="34" charset="0"/>
+                <a:cs typeface="Times New Roman" panose="02020603050405020304" pitchFamily="18" charset="0"/>
+              </a:rPr>
+              <a:t>and exposure to new perspectives (e.g., through reverse mentoring).</a:t>
             </a:r>
           </a:p>
         </p:txBody>
@@ -25491,7 +27406,7 @@
           <p:cNvPr id="2" name="Chevron 3">
             <a:extLst>
               <a:ext uri="{FF2B5EF4-FFF2-40B4-BE49-F238E27FC236}">
-                <a16:creationId xmlns:a16="http://schemas.microsoft.com/office/drawing/2014/main" id="{EDF2DA72-FE96-FD05-597F-1941F8E486BC}"/>
+                <a16:creationId xmlns:a16="http://schemas.microsoft.com/office/drawing/2014/main" xmlns="" id="{EDF2DA72-FE96-FD05-597F-1941F8E486BC}"/>
               </a:ext>
             </a:extLst>
           </p:cNvPr>
@@ -25597,7 +27512,7 @@
           <p:cNvPr id="3" name="Chevron 4">
             <a:extLst>
               <a:ext uri="{FF2B5EF4-FFF2-40B4-BE49-F238E27FC236}">
-                <a16:creationId xmlns:a16="http://schemas.microsoft.com/office/drawing/2014/main" id="{9F528863-A44D-FA7B-66C9-D4BD48EF9164}"/>
+                <a16:creationId xmlns:a16="http://schemas.microsoft.com/office/drawing/2014/main" xmlns="" id="{9F528863-A44D-FA7B-66C9-D4BD48EF9164}"/>
               </a:ext>
             </a:extLst>
           </p:cNvPr>
@@ -25703,7 +27618,7 @@
           <p:cNvPr id="4" name="Chevron 5">
             <a:extLst>
               <a:ext uri="{FF2B5EF4-FFF2-40B4-BE49-F238E27FC236}">
-                <a16:creationId xmlns:a16="http://schemas.microsoft.com/office/drawing/2014/main" id="{AA1E505E-8CE9-A604-C766-33EFAF717F7C}"/>
+                <a16:creationId xmlns:a16="http://schemas.microsoft.com/office/drawing/2014/main" xmlns="" id="{AA1E505E-8CE9-A604-C766-33EFAF717F7C}"/>
               </a:ext>
             </a:extLst>
           </p:cNvPr>
@@ -25787,7 +27702,7 @@
           <p:cNvPr id="5" name="Rectangle 4">
             <a:extLst>
               <a:ext uri="{FF2B5EF4-FFF2-40B4-BE49-F238E27FC236}">
-                <a16:creationId xmlns:a16="http://schemas.microsoft.com/office/drawing/2014/main" id="{73071ED6-23D2-443F-C03D-C4DCBC412E6B}"/>
+                <a16:creationId xmlns:a16="http://schemas.microsoft.com/office/drawing/2014/main" xmlns="" id="{73071ED6-23D2-443F-C03D-C4DCBC412E6B}"/>
               </a:ext>
             </a:extLst>
           </p:cNvPr>
